--- a/presentation/MLR-App-Presentation.pptx
+++ b/presentation/MLR-App-Presentation.pptx
@@ -519,7 +519,7 @@
           <a:lstStyle/>
           <a:p>
             <a:r>
-              <a:t>This is your private run-of-show. The audience never sees it — they watch the live app on screen. Each slide tells you what to open and what to say. Go in order; don't skip ahead.</a:t>
+              <a:t>PRESENTER: this doubles as your run-of-show. Each slide's FIND IT line is what to open in the app; the bold line is your key message; bullets are your talking points. Go in order; don't skip ahead. Open with: “We built something for the whole family — one app that's our home base for the lake all year, and especially for Family Fest.”</a:t>
             </a:r>
           </a:p>
         </p:txBody>
@@ -1219,7 +1219,7 @@
           <a:lstStyle/>
           <a:p>
             <a:r>
-              <a:t>Slow down. Don't open the app until you've said the opening line. Promise them the 'how to get it' payoff at the end so nobody rushes you.</a:t>
+              <a:t>Slow down. Don't open the app until you've given the opening line and this agenda. Promise the 'how to get it' payoff at the end so nobody rushes you. Goal: everyone adds it + signs in before they leave.</a:t>
             </a:r>
           </a:p>
         </p:txBody>
@@ -1359,7 +1359,7 @@
           <a:lstStyle/>
           <a:p>
             <a:r>
-              <a:t>This single sentence is what keeps the room from derailing. Say it clearly and maybe repeat it. Then start the tour.</a:t>
+              <a:t>Say this clearly — it parks the #1 interrupting question (“how do I get it?”) until the end so you can get through the tour cleanly. Repeat the 'just watch, we'll set you up at the end' line if people start fumbling with their phones.</a:t>
             </a:r>
           </a:p>
         </p:txBody>
@@ -4959,7 +4959,7 @@
                 </a:solidFill>
                 <a:latin typeface="Calibri"/>
               </a:rPr>
-              <a:t>PRESENTER'S GUIDE  ·  your eyes only</a:t>
+              <a:t>A guided tour  ·  follow along</a:t>
             </a:r>
           </a:p>
         </p:txBody>
@@ -5308,7 +5308,7 @@
         <p:spPr>
           <a:xfrm>
             <a:off x="667512" y="1298448"/>
-            <a:ext cx="1554480" cy="603504"/>
+            <a:ext cx="1463040" cy="603504"/>
           </a:xfrm>
           <a:prstGeom prst="rect">
             <a:avLst/>
@@ -5339,7 +5339,7 @@
                 </a:solidFill>
                 <a:latin typeface="Calibri"/>
               </a:rPr>
-              <a:t>▶  ON SCREEN</a:t>
+              <a:t>📍  FIND IT</a:t>
             </a:r>
           </a:p>
         </p:txBody>
@@ -5352,8 +5352,8 @@
         </p:nvSpPr>
         <p:spPr>
           <a:xfrm>
-            <a:off x="2286000" y="1298448"/>
-            <a:ext cx="9281160" cy="603504"/>
+            <a:off x="2194560" y="1298448"/>
+            <a:ext cx="9372600" cy="603504"/>
           </a:xfrm>
           <a:prstGeom prst="rect">
             <a:avLst/>
@@ -5384,7 +5384,7 @@
                 </a:solidFill>
                 <a:latin typeface="Calibri"/>
               </a:rPr>
-              <a:t>From Home, tap the People tile. Open one person's card.</a:t>
+              <a:t>Home  →  People</a:t>
             </a:r>
           </a:p>
         </p:txBody>
@@ -5398,7 +5398,7 @@
         <p:spPr>
           <a:xfrm>
             <a:off x="502920" y="2029968"/>
-            <a:ext cx="11201400" cy="749808"/>
+            <a:ext cx="11201400" cy="786384"/>
           </a:xfrm>
           <a:prstGeom prst="roundRect">
             <a:avLst>
@@ -5446,7 +5446,7 @@
         <p:spPr>
           <a:xfrm>
             <a:off x="502920" y="2029968"/>
-            <a:ext cx="73152" cy="749808"/>
+            <a:ext cx="91440" cy="786384"/>
           </a:xfrm>
           <a:prstGeom prst="rect">
             <a:avLst/>
@@ -5489,8 +5489,8 @@
         </p:nvSpPr>
         <p:spPr>
           <a:xfrm>
-            <a:off x="704088" y="2075688"/>
-            <a:ext cx="1280160" cy="292608"/>
+            <a:off x="813816" y="2029968"/>
+            <a:ext cx="10698480" cy="786384"/>
           </a:xfrm>
           <a:prstGeom prst="rect">
             <a:avLst/>
@@ -5498,7 +5498,7 @@
           <a:noFill/>
         </p:spPr>
         <p:txBody>
-          <a:bodyPr wrap="square" anchor="t" lIns="25400" rIns="25400" tIns="12700" bIns="12700">
+          <a:bodyPr wrap="square" anchor="ctr" lIns="25400" rIns="25400" tIns="12700" bIns="12700">
             <a:spAutoFit/>
           </a:bodyPr>
           <a:lstStyle/>
@@ -5515,13 +5515,13 @@
               </a:spcAft>
             </a:pPr>
             <a:r>
-              <a:rPr sz="1200" b="1" i="0">
-                <a:solidFill>
-                  <a:srgbClr val="C2410C"/>
-                </a:solidFill>
-                <a:latin typeface="Calibri"/>
-              </a:rPr>
-              <a:t>🗣  SAY</a:t>
+              <a:rPr sz="1800" b="1" i="0">
+                <a:solidFill>
+                  <a:srgbClr val="14241C"/>
+                </a:solidFill>
+                <a:latin typeface="Calibri"/>
+              </a:rPr>
+              <a:t>The whole family directory — text, call, or pay anyone in two taps.</a:t>
             </a:r>
           </a:p>
         </p:txBody>
@@ -5534,8 +5534,8 @@
         </p:nvSpPr>
         <p:spPr>
           <a:xfrm>
-            <a:off x="704088" y="2304288"/>
-            <a:ext cx="10789920" cy="475488"/>
+            <a:off x="594360" y="3035808"/>
+            <a:ext cx="11018520" cy="2468880"/>
           </a:xfrm>
           <a:prstGeom prst="rect">
             <a:avLst/>
@@ -5544,6 +5544,237 @@
         </p:spPr>
         <p:txBody>
           <a:bodyPr wrap="square" anchor="t" lIns="25400" rIns="25400" tIns="12700" bIns="12700">
+            <a:spAutoFit/>
+          </a:bodyPr>
+          <a:lstStyle/>
+          <a:p>
+            <a:pPr algn="l">
+              <a:lnSpc>
+                <a:spcPct val="100000"/>
+              </a:lnSpc>
+              <a:spcBef>
+                <a:spcPts val="0"/>
+              </a:spcBef>
+              <a:spcAft>
+                <a:spcPts val="1000"/>
+              </a:spcAft>
+            </a:pPr>
+            <a:r>
+              <a:rPr sz="1600" b="1" i="0">
+                <a:solidFill>
+                  <a:srgbClr val="15503A"/>
+                </a:solidFill>
+                <a:latin typeface="Calibri"/>
+              </a:rPr>
+              <a:t>•  </a:t>
+            </a:r>
+            <a:r>
+              <a:rPr sz="1600" b="1" i="0">
+                <a:solidFill>
+                  <a:srgbClr val="14241C"/>
+                </a:solidFill>
+                <a:latin typeface="Calibri"/>
+              </a:rPr>
+              <a:t>Searchable list</a:t>
+            </a:r>
+            <a:r>
+              <a:rPr sz="1600" b="0" i="0">
+                <a:solidFill>
+                  <a:srgbClr val="14241C"/>
+                </a:solidFill>
+                <a:latin typeface="Calibri"/>
+              </a:rPr>
+              <a:t> — everyone with an account, by name</a:t>
+            </a:r>
+          </a:p>
+          <a:p>
+            <a:pPr algn="l">
+              <a:lnSpc>
+                <a:spcPct val="100000"/>
+              </a:lnSpc>
+              <a:spcBef>
+                <a:spcPts val="0"/>
+              </a:spcBef>
+              <a:spcAft>
+                <a:spcPts val="1000"/>
+              </a:spcAft>
+            </a:pPr>
+            <a:r>
+              <a:rPr sz="1600" b="1" i="0">
+                <a:solidFill>
+                  <a:srgbClr val="15503A"/>
+                </a:solidFill>
+                <a:latin typeface="Calibri"/>
+              </a:rPr>
+              <a:t>•  </a:t>
+            </a:r>
+            <a:r>
+              <a:rPr sz="1600" b="1" i="0">
+                <a:solidFill>
+                  <a:srgbClr val="14241C"/>
+                </a:solidFill>
+                <a:latin typeface="Calibri"/>
+              </a:rPr>
+              <a:t>Quick buttons</a:t>
+            </a:r>
+            <a:r>
+              <a:rPr sz="1600" b="0" i="0">
+                <a:solidFill>
+                  <a:srgbClr val="14241C"/>
+                </a:solidFill>
+                <a:latin typeface="Calibri"/>
+              </a:rPr>
+              <a:t> — Text · Call · Pay right on each person</a:t>
+            </a:r>
+          </a:p>
+          <a:p>
+            <a:pPr algn="l">
+              <a:lnSpc>
+                <a:spcPct val="100000"/>
+              </a:lnSpc>
+              <a:spcBef>
+                <a:spcPts val="0"/>
+              </a:spcBef>
+              <a:spcAft>
+                <a:spcPts val="1000"/>
+              </a:spcAft>
+            </a:pPr>
+            <a:r>
+              <a:rPr sz="1600" b="1" i="0">
+                <a:solidFill>
+                  <a:srgbClr val="15503A"/>
+                </a:solidFill>
+                <a:latin typeface="Calibri"/>
+              </a:rPr>
+              <a:t>•  </a:t>
+            </a:r>
+            <a:r>
+              <a:rPr sz="1600" b="1" i="0">
+                <a:solidFill>
+                  <a:srgbClr val="14241C"/>
+                </a:solidFill>
+                <a:latin typeface="Calibri"/>
+              </a:rPr>
+              <a:t>Tap through</a:t>
+            </a:r>
+            <a:r>
+              <a:rPr sz="1600" b="0" i="0">
+                <a:solidFill>
+                  <a:srgbClr val="14241C"/>
+                </a:solidFill>
+                <a:latin typeface="Calibri"/>
+              </a:rPr>
+              <a:t> — their full profile + how they prefer to be paid</a:t>
+            </a:r>
+          </a:p>
+          <a:p>
+            <a:pPr algn="l">
+              <a:lnSpc>
+                <a:spcPct val="100000"/>
+              </a:lnSpc>
+              <a:spcBef>
+                <a:spcPts val="0"/>
+              </a:spcBef>
+              <a:spcAft>
+                <a:spcPts val="1000"/>
+              </a:spcAft>
+            </a:pPr>
+            <a:r>
+              <a:rPr sz="1600" b="1" i="0">
+                <a:solidFill>
+                  <a:srgbClr val="15503A"/>
+                </a:solidFill>
+                <a:latin typeface="Calibri"/>
+              </a:rPr>
+              <a:t>•  </a:t>
+            </a:r>
+            <a:r>
+              <a:rPr sz="1600" b="1" i="0">
+                <a:solidFill>
+                  <a:srgbClr val="14241C"/>
+                </a:solidFill>
+                <a:latin typeface="Calibri"/>
+              </a:rPr>
+              <a:t>Email a group</a:t>
+            </a:r>
+            <a:r>
+              <a:rPr sz="1600" b="0" i="0">
+                <a:solidFill>
+                  <a:srgbClr val="14241C"/>
+                </a:solidFill>
+                <a:latin typeface="Calibri"/>
+              </a:rPr>
+              <a:t> — send a note to a whole set of people at once</a:t>
+            </a:r>
+          </a:p>
+        </p:txBody>
+      </p:sp>
+      <p:sp>
+        <p:nvSpPr>
+          <p:cNvPr id="15" name="Rounded Rectangle 14"/>
+          <p:cNvSpPr/>
+          <p:nvPr/>
+        </p:nvSpPr>
+        <p:spPr>
+          <a:xfrm>
+            <a:off x="502920" y="5486400"/>
+            <a:ext cx="11201400" cy="566928"/>
+          </a:xfrm>
+          <a:prstGeom prst="roundRect">
+            <a:avLst>
+              <a:gd name="adj" fmla="val 6000"/>
+            </a:avLst>
+          </a:prstGeom>
+          <a:solidFill>
+            <a:srgbClr val="F3EEF0"/>
+          </a:solidFill>
+          <a:ln w="12700">
+            <a:solidFill>
+              <a:srgbClr val="E5E4DA"/>
+            </a:solidFill>
+          </a:ln>
+          <a:effectLst/>
+        </p:spPr>
+        <p:style>
+          <a:lnRef idx="1">
+            <a:schemeClr val="accent1"/>
+          </a:lnRef>
+          <a:fillRef idx="3">
+            <a:schemeClr val="accent1"/>
+          </a:fillRef>
+          <a:effectRef idx="2">
+            <a:schemeClr val="accent1"/>
+          </a:effectRef>
+          <a:fontRef idx="minor">
+            <a:schemeClr val="lt1"/>
+          </a:fontRef>
+        </p:style>
+        <p:txBody>
+          <a:bodyPr rtlCol="0" anchor="ctr"/>
+          <a:lstStyle/>
+          <a:p>
+            <a:pPr algn="ctr"/>
+          </a:p>
+        </p:txBody>
+      </p:sp>
+      <p:sp>
+        <p:nvSpPr>
+          <p:cNvPr id="16" name="TextBox 15"/>
+          <p:cNvSpPr txBox="1"/>
+          <p:nvPr/>
+        </p:nvSpPr>
+        <p:spPr>
+          <a:xfrm>
+            <a:off x="667512" y="5486400"/>
+            <a:ext cx="1828800" cy="566928"/>
+          </a:xfrm>
+          <a:prstGeom prst="rect">
+            <a:avLst/>
+          </a:prstGeom>
+          <a:noFill/>
+        </p:spPr>
+        <p:txBody>
+          <a:bodyPr wrap="square" anchor="ctr" lIns="25400" rIns="25400" tIns="12700" bIns="12700">
             <a:spAutoFit/>
           </a:bodyPr>
           <a:lstStyle/>
@@ -5560,27 +5791,27 @@
               </a:spcAft>
             </a:pPr>
             <a:r>
-              <a:rPr sz="1600" b="0" i="1">
-                <a:solidFill>
-                  <a:srgbClr val="14241C"/>
-                </a:solidFill>
-                <a:latin typeface="Calibri"/>
-              </a:rPr>
-              <a:t>“The whole family directory — text, call, or pay anyone in two taps.”</a:t>
-            </a:r>
-          </a:p>
-        </p:txBody>
-      </p:sp>
-      <p:sp>
-        <p:nvSpPr>
-          <p:cNvPr id="15" name="TextBox 14"/>
+              <a:rPr sz="1200" b="1" i="0">
+                <a:solidFill>
+                  <a:srgbClr val="8B2E2E"/>
+                </a:solidFill>
+                <a:latin typeface="Calibri"/>
+              </a:rPr>
+              <a:t>💡 GOOD TO KNOW</a:t>
+            </a:r>
+          </a:p>
+        </p:txBody>
+      </p:sp>
+      <p:sp>
+        <p:nvSpPr>
+          <p:cNvPr id="17" name="TextBox 16"/>
           <p:cNvSpPr txBox="1"/>
           <p:nvPr/>
         </p:nvSpPr>
         <p:spPr>
           <a:xfrm>
-            <a:off x="502920" y="2944368"/>
-            <a:ext cx="11201400" cy="310896"/>
+            <a:off x="2560320" y="5486400"/>
+            <a:ext cx="9006840" cy="566928"/>
           </a:xfrm>
           <a:prstGeom prst="rect">
             <a:avLst/>
@@ -5588,7 +5819,7 @@
           <a:noFill/>
         </p:spPr>
         <p:txBody>
-          <a:bodyPr wrap="square" anchor="t" lIns="25400" rIns="25400" tIns="12700" bIns="12700">
+          <a:bodyPr wrap="square" anchor="ctr" lIns="25400" rIns="25400" tIns="12700" bIns="12700">
             <a:spAutoFit/>
           </a:bodyPr>
           <a:lstStyle/>
@@ -5605,333 +5836,12 @@
               </a:spcAft>
             </a:pPr>
             <a:r>
-              <a:rPr sz="1200" b="1" i="0">
-                <a:solidFill>
-                  <a:srgbClr val="6B7068"/>
-                </a:solidFill>
-                <a:latin typeface="Calibri"/>
-              </a:rPr>
-              <a:t>TALKING POINTS</a:t>
-            </a:r>
-          </a:p>
-        </p:txBody>
-      </p:sp>
-      <p:sp>
-        <p:nvSpPr>
-          <p:cNvPr id="16" name="TextBox 15"/>
-          <p:cNvSpPr txBox="1"/>
-          <p:nvPr/>
-        </p:nvSpPr>
-        <p:spPr>
-          <a:xfrm>
-            <a:off x="594360" y="3273552"/>
-            <a:ext cx="11018520" cy="2331720"/>
-          </a:xfrm>
-          <a:prstGeom prst="rect">
-            <a:avLst/>
-          </a:prstGeom>
-          <a:noFill/>
-        </p:spPr>
-        <p:txBody>
-          <a:bodyPr wrap="square" anchor="t" lIns="25400" rIns="25400" tIns="12700" bIns="12700">
-            <a:spAutoFit/>
-          </a:bodyPr>
-          <a:lstStyle/>
-          <a:p>
-            <a:pPr algn="l">
-              <a:lnSpc>
-                <a:spcPct val="100000"/>
-              </a:lnSpc>
-              <a:spcBef>
-                <a:spcPts val="0"/>
-              </a:spcBef>
-              <a:spcAft>
-                <a:spcPts val="900"/>
-              </a:spcAft>
-            </a:pPr>
-            <a:r>
-              <a:rPr sz="1600" b="1" i="0">
-                <a:solidFill>
-                  <a:srgbClr val="15503A"/>
-                </a:solidFill>
-                <a:latin typeface="Calibri"/>
-              </a:rPr>
-              <a:t>•  </a:t>
-            </a:r>
-            <a:r>
-              <a:rPr sz="1600" b="1" i="0">
+              <a:rPr sz="1300" b="0" i="0">
                 <a:solidFill>
                   <a:srgbClr val="14241C"/>
                 </a:solidFill>
                 <a:latin typeface="Calibri"/>
               </a:rPr>
-              <a:t>Searchable list</a:t>
-            </a:r>
-            <a:r>
-              <a:rPr sz="1600" b="0" i="0">
-                <a:solidFill>
-                  <a:srgbClr val="14241C"/>
-                </a:solidFill>
-                <a:latin typeface="Calibri"/>
-              </a:rPr>
-              <a:t> — everyone with an account, by name</a:t>
-            </a:r>
-          </a:p>
-          <a:p>
-            <a:pPr algn="l">
-              <a:lnSpc>
-                <a:spcPct val="100000"/>
-              </a:lnSpc>
-              <a:spcBef>
-                <a:spcPts val="0"/>
-              </a:spcBef>
-              <a:spcAft>
-                <a:spcPts val="900"/>
-              </a:spcAft>
-            </a:pPr>
-            <a:r>
-              <a:rPr sz="1600" b="1" i="0">
-                <a:solidFill>
-                  <a:srgbClr val="15503A"/>
-                </a:solidFill>
-                <a:latin typeface="Calibri"/>
-              </a:rPr>
-              <a:t>•  </a:t>
-            </a:r>
-            <a:r>
-              <a:rPr sz="1600" b="1" i="0">
-                <a:solidFill>
-                  <a:srgbClr val="14241C"/>
-                </a:solidFill>
-                <a:latin typeface="Calibri"/>
-              </a:rPr>
-              <a:t>Quick buttons</a:t>
-            </a:r>
-            <a:r>
-              <a:rPr sz="1600" b="0" i="0">
-                <a:solidFill>
-                  <a:srgbClr val="14241C"/>
-                </a:solidFill>
-                <a:latin typeface="Calibri"/>
-              </a:rPr>
-              <a:t> — Text · Call · Pay right on each person</a:t>
-            </a:r>
-          </a:p>
-          <a:p>
-            <a:pPr algn="l">
-              <a:lnSpc>
-                <a:spcPct val="100000"/>
-              </a:lnSpc>
-              <a:spcBef>
-                <a:spcPts val="0"/>
-              </a:spcBef>
-              <a:spcAft>
-                <a:spcPts val="900"/>
-              </a:spcAft>
-            </a:pPr>
-            <a:r>
-              <a:rPr sz="1600" b="1" i="0">
-                <a:solidFill>
-                  <a:srgbClr val="15503A"/>
-                </a:solidFill>
-                <a:latin typeface="Calibri"/>
-              </a:rPr>
-              <a:t>•  </a:t>
-            </a:r>
-            <a:r>
-              <a:rPr sz="1600" b="1" i="0">
-                <a:solidFill>
-                  <a:srgbClr val="14241C"/>
-                </a:solidFill>
-                <a:latin typeface="Calibri"/>
-              </a:rPr>
-              <a:t>Tap through</a:t>
-            </a:r>
-            <a:r>
-              <a:rPr sz="1600" b="0" i="0">
-                <a:solidFill>
-                  <a:srgbClr val="14241C"/>
-                </a:solidFill>
-                <a:latin typeface="Calibri"/>
-              </a:rPr>
-              <a:t> — their full profile + how they prefer to be paid</a:t>
-            </a:r>
-          </a:p>
-          <a:p>
-            <a:pPr algn="l">
-              <a:lnSpc>
-                <a:spcPct val="100000"/>
-              </a:lnSpc>
-              <a:spcBef>
-                <a:spcPts val="0"/>
-              </a:spcBef>
-              <a:spcAft>
-                <a:spcPts val="900"/>
-              </a:spcAft>
-            </a:pPr>
-            <a:r>
-              <a:rPr sz="1600" b="1" i="0">
-                <a:solidFill>
-                  <a:srgbClr val="15503A"/>
-                </a:solidFill>
-                <a:latin typeface="Calibri"/>
-              </a:rPr>
-              <a:t>•  </a:t>
-            </a:r>
-            <a:r>
-              <a:rPr sz="1600" b="1" i="0">
-                <a:solidFill>
-                  <a:srgbClr val="14241C"/>
-                </a:solidFill>
-                <a:latin typeface="Calibri"/>
-              </a:rPr>
-              <a:t>Email a group</a:t>
-            </a:r>
-            <a:r>
-              <a:rPr sz="1600" b="0" i="0">
-                <a:solidFill>
-                  <a:srgbClr val="14241C"/>
-                </a:solidFill>
-                <a:latin typeface="Calibri"/>
-              </a:rPr>
-              <a:t> — send a note to a whole set of people at once</a:t>
-            </a:r>
-          </a:p>
-        </p:txBody>
-      </p:sp>
-      <p:sp>
-        <p:nvSpPr>
-          <p:cNvPr id="17" name="Rounded Rectangle 16"/>
-          <p:cNvSpPr/>
-          <p:nvPr/>
-        </p:nvSpPr>
-        <p:spPr>
-          <a:xfrm>
-            <a:off x="502920" y="5486400"/>
-            <a:ext cx="11201400" cy="566928"/>
-          </a:xfrm>
-          <a:prstGeom prst="roundRect">
-            <a:avLst>
-              <a:gd name="adj" fmla="val 6000"/>
-            </a:avLst>
-          </a:prstGeom>
-          <a:solidFill>
-            <a:srgbClr val="F3EEF0"/>
-          </a:solidFill>
-          <a:ln w="12700">
-            <a:solidFill>
-              <a:srgbClr val="E5E4DA"/>
-            </a:solidFill>
-          </a:ln>
-          <a:effectLst/>
-        </p:spPr>
-        <p:style>
-          <a:lnRef idx="1">
-            <a:schemeClr val="accent1"/>
-          </a:lnRef>
-          <a:fillRef idx="3">
-            <a:schemeClr val="accent1"/>
-          </a:fillRef>
-          <a:effectRef idx="2">
-            <a:schemeClr val="accent1"/>
-          </a:effectRef>
-          <a:fontRef idx="minor">
-            <a:schemeClr val="lt1"/>
-          </a:fontRef>
-        </p:style>
-        <p:txBody>
-          <a:bodyPr rtlCol="0" anchor="ctr"/>
-          <a:lstStyle/>
-          <a:p>
-            <a:pPr algn="ctr"/>
-          </a:p>
-        </p:txBody>
-      </p:sp>
-      <p:sp>
-        <p:nvSpPr>
-          <p:cNvPr id="18" name="TextBox 17"/>
-          <p:cNvSpPr txBox="1"/>
-          <p:nvPr/>
-        </p:nvSpPr>
-        <p:spPr>
-          <a:xfrm>
-            <a:off x="667512" y="5486400"/>
-            <a:ext cx="1463040" cy="566928"/>
-          </a:xfrm>
-          <a:prstGeom prst="rect">
-            <a:avLst/>
-          </a:prstGeom>
-          <a:noFill/>
-        </p:spPr>
-        <p:txBody>
-          <a:bodyPr wrap="square" anchor="ctr" lIns="25400" rIns="25400" tIns="12700" bIns="12700">
-            <a:spAutoFit/>
-          </a:bodyPr>
-          <a:lstStyle/>
-          <a:p>
-            <a:pPr algn="l">
-              <a:lnSpc>
-                <a:spcPct val="100000"/>
-              </a:lnSpc>
-              <a:spcBef>
-                <a:spcPts val="0"/>
-              </a:spcBef>
-              <a:spcAft>
-                <a:spcPts val="400"/>
-              </a:spcAft>
-            </a:pPr>
-            <a:r>
-              <a:rPr sz="1200" b="1" i="0">
-                <a:solidFill>
-                  <a:srgbClr val="8B2E2E"/>
-                </a:solidFill>
-                <a:latin typeface="Calibri"/>
-              </a:rPr>
-              <a:t>❓ IF ASKED</a:t>
-            </a:r>
-          </a:p>
-        </p:txBody>
-      </p:sp>
-      <p:sp>
-        <p:nvSpPr>
-          <p:cNvPr id="19" name="TextBox 18"/>
-          <p:cNvSpPr txBox="1"/>
-          <p:nvPr/>
-        </p:nvSpPr>
-        <p:spPr>
-          <a:xfrm>
-            <a:off x="2103120" y="5486400"/>
-            <a:ext cx="9464040" cy="566928"/>
-          </a:xfrm>
-          <a:prstGeom prst="rect">
-            <a:avLst/>
-          </a:prstGeom>
-          <a:noFill/>
-        </p:spPr>
-        <p:txBody>
-          <a:bodyPr wrap="square" anchor="ctr" lIns="25400" rIns="25400" tIns="12700" bIns="12700">
-            <a:spAutoFit/>
-          </a:bodyPr>
-          <a:lstStyle/>
-          <a:p>
-            <a:pPr algn="l">
-              <a:lnSpc>
-                <a:spcPct val="100000"/>
-              </a:lnSpc>
-              <a:spcBef>
-                <a:spcPts val="0"/>
-              </a:spcBef>
-              <a:spcAft>
-                <a:spcPts val="400"/>
-              </a:spcAft>
-            </a:pPr>
-            <a:r>
-              <a:rPr sz="1300" b="0" i="0">
-                <a:solidFill>
-                  <a:srgbClr val="14241C"/>
-                </a:solidFill>
-                <a:latin typeface="Calibri"/>
-              </a:rPr>
               <a:t>“Full contact info only shows once you're signed in — guests see first names only.”</a:t>
             </a:r>
           </a:p>
@@ -5939,7 +5849,7 @@
       </p:sp>
       <p:sp>
         <p:nvSpPr>
-          <p:cNvPr id="20" name="Rounded Rectangle 19"/>
+          <p:cNvPr id="18" name="Rounded Rectangle 17"/>
           <p:cNvSpPr/>
           <p:nvPr/>
         </p:nvSpPr>
@@ -5985,7 +5895,7 @@
       </p:sp>
       <p:sp>
         <p:nvSpPr>
-          <p:cNvPr id="21" name="Rounded Rectangle 20"/>
+          <p:cNvPr id="19" name="Rounded Rectangle 18"/>
           <p:cNvSpPr/>
           <p:nvPr/>
         </p:nvSpPr>
@@ -6031,7 +5941,7 @@
       </p:sp>
       <p:sp>
         <p:nvSpPr>
-          <p:cNvPr id="22" name="TextBox 21"/>
+          <p:cNvPr id="20" name="TextBox 19"/>
           <p:cNvSpPr txBox="1"/>
           <p:nvPr/>
         </p:nvSpPr>
@@ -6427,7 +6337,7 @@
         <p:spPr>
           <a:xfrm>
             <a:off x="667512" y="1298448"/>
-            <a:ext cx="1554480" cy="603504"/>
+            <a:ext cx="1463040" cy="603504"/>
           </a:xfrm>
           <a:prstGeom prst="rect">
             <a:avLst/>
@@ -6458,7 +6368,7 @@
                 </a:solidFill>
                 <a:latin typeface="Calibri"/>
               </a:rPr>
-              <a:t>▶  ON SCREEN</a:t>
+              <a:t>📍  FIND IT</a:t>
             </a:r>
           </a:p>
         </p:txBody>
@@ -6471,8 +6381,8 @@
         </p:nvSpPr>
         <p:spPr>
           <a:xfrm>
-            <a:off x="2286000" y="1298448"/>
-            <a:ext cx="9281160" cy="603504"/>
+            <a:off x="2194560" y="1298448"/>
+            <a:ext cx="9372600" cy="603504"/>
           </a:xfrm>
           <a:prstGeom prst="rect">
             <a:avLst/>
@@ -6503,7 +6413,7 @@
                 </a:solidFill>
                 <a:latin typeface="Calibri"/>
               </a:rPr>
-              <a:t>Show the Get-involved tile on Home, then a committee with its chat room.</a:t>
+              <a:t>Home  →  Get involved  →  a committee</a:t>
             </a:r>
           </a:p>
         </p:txBody>
@@ -6517,7 +6427,7 @@
         <p:spPr>
           <a:xfrm>
             <a:off x="502920" y="2029968"/>
-            <a:ext cx="11201400" cy="749808"/>
+            <a:ext cx="11201400" cy="786384"/>
           </a:xfrm>
           <a:prstGeom prst="roundRect">
             <a:avLst>
@@ -6565,7 +6475,7 @@
         <p:spPr>
           <a:xfrm>
             <a:off x="502920" y="2029968"/>
-            <a:ext cx="73152" cy="749808"/>
+            <a:ext cx="91440" cy="786384"/>
           </a:xfrm>
           <a:prstGeom prst="rect">
             <a:avLst/>
@@ -6608,8 +6518,8 @@
         </p:nvSpPr>
         <p:spPr>
           <a:xfrm>
-            <a:off x="704088" y="2075688"/>
-            <a:ext cx="1280160" cy="292608"/>
+            <a:off x="813816" y="2029968"/>
+            <a:ext cx="10698480" cy="786384"/>
           </a:xfrm>
           <a:prstGeom prst="rect">
             <a:avLst/>
@@ -6617,7 +6527,7 @@
           <a:noFill/>
         </p:spPr>
         <p:txBody>
-          <a:bodyPr wrap="square" anchor="t" lIns="25400" rIns="25400" tIns="12700" bIns="12700">
+          <a:bodyPr wrap="square" anchor="ctr" lIns="25400" rIns="25400" tIns="12700" bIns="12700">
             <a:spAutoFit/>
           </a:bodyPr>
           <a:lstStyle/>
@@ -6634,13 +6544,13 @@
               </a:spcAft>
             </a:pPr>
             <a:r>
-              <a:rPr sz="1200" b="1" i="0">
-                <a:solidFill>
-                  <a:srgbClr val="C2410C"/>
-                </a:solidFill>
-                <a:latin typeface="Calibri"/>
-              </a:rPr>
-              <a:t>🗣  SAY</a:t>
+              <a:rPr sz="1800" b="1" i="0">
+                <a:solidFill>
+                  <a:srgbClr val="14241C"/>
+                </a:solidFill>
+                <a:latin typeface="Calibri"/>
+              </a:rPr>
+              <a:t>Family Fest is run by volunteers — five teams, and each has its own group chat.</a:t>
             </a:r>
           </a:p>
         </p:txBody>
@@ -6653,8 +6563,8 @@
         </p:nvSpPr>
         <p:spPr>
           <a:xfrm>
-            <a:off x="704088" y="2304288"/>
-            <a:ext cx="10789920" cy="475488"/>
+            <a:off x="594360" y="3035808"/>
+            <a:ext cx="11018520" cy="2468880"/>
           </a:xfrm>
           <a:prstGeom prst="rect">
             <a:avLst/>
@@ -6663,6 +6573,277 @@
         </p:spPr>
         <p:txBody>
           <a:bodyPr wrap="square" anchor="t" lIns="25400" rIns="25400" tIns="12700" bIns="12700">
+            <a:spAutoFit/>
+          </a:bodyPr>
+          <a:lstStyle/>
+          <a:p>
+            <a:pPr algn="l">
+              <a:lnSpc>
+                <a:spcPct val="100000"/>
+              </a:lnSpc>
+              <a:spcBef>
+                <a:spcPts val="0"/>
+              </a:spcBef>
+              <a:spcAft>
+                <a:spcPts val="1000"/>
+              </a:spcAft>
+            </a:pPr>
+            <a:r>
+              <a:rPr sz="1600" b="1" i="0">
+                <a:solidFill>
+                  <a:srgbClr val="15503A"/>
+                </a:solidFill>
+                <a:latin typeface="Calibri"/>
+              </a:rPr>
+              <a:t>•  </a:t>
+            </a:r>
+            <a:r>
+              <a:rPr sz="1600" b="1" i="0">
+                <a:solidFill>
+                  <a:srgbClr val="14241C"/>
+                </a:solidFill>
+                <a:latin typeface="Calibri"/>
+              </a:rPr>
+              <a:t>Meals</a:t>
+            </a:r>
+            <a:r>
+              <a:rPr sz="1600" b="0" i="0">
+                <a:solidFill>
+                  <a:srgbClr val="14241C"/>
+                </a:solidFill>
+                <a:latin typeface="Calibri"/>
+              </a:rPr>
+              <a:t> — lead: Lauren Zerfas</a:t>
+            </a:r>
+          </a:p>
+          <a:p>
+            <a:pPr algn="l">
+              <a:lnSpc>
+                <a:spcPct val="100000"/>
+              </a:lnSpc>
+              <a:spcBef>
+                <a:spcPts val="0"/>
+              </a:spcBef>
+              <a:spcAft>
+                <a:spcPts val="1000"/>
+              </a:spcAft>
+            </a:pPr>
+            <a:r>
+              <a:rPr sz="1600" b="1" i="0">
+                <a:solidFill>
+                  <a:srgbClr val="15503A"/>
+                </a:solidFill>
+                <a:latin typeface="Calibri"/>
+              </a:rPr>
+              <a:t>•  </a:t>
+            </a:r>
+            <a:r>
+              <a:rPr sz="1600" b="1" i="0">
+                <a:solidFill>
+                  <a:srgbClr val="14241C"/>
+                </a:solidFill>
+                <a:latin typeface="Calibri"/>
+              </a:rPr>
+              <a:t>Entertainment &amp; Games</a:t>
+            </a:r>
+            <a:r>
+              <a:rPr sz="1600" b="0" i="0">
+                <a:solidFill>
+                  <a:srgbClr val="14241C"/>
+                </a:solidFill>
+                <a:latin typeface="Calibri"/>
+              </a:rPr>
+              <a:t> — lead: Keith Thibodeau</a:t>
+            </a:r>
+          </a:p>
+          <a:p>
+            <a:pPr algn="l">
+              <a:lnSpc>
+                <a:spcPct val="100000"/>
+              </a:lnSpc>
+              <a:spcBef>
+                <a:spcPts val="0"/>
+              </a:spcBef>
+              <a:spcAft>
+                <a:spcPts val="1000"/>
+              </a:spcAft>
+            </a:pPr>
+            <a:r>
+              <a:rPr sz="1600" b="1" i="0">
+                <a:solidFill>
+                  <a:srgbClr val="15503A"/>
+                </a:solidFill>
+                <a:latin typeface="Calibri"/>
+              </a:rPr>
+              <a:t>•  </a:t>
+            </a:r>
+            <a:r>
+              <a:rPr sz="1600" b="1" i="0">
+                <a:solidFill>
+                  <a:srgbClr val="14241C"/>
+                </a:solidFill>
+                <a:latin typeface="Calibri"/>
+              </a:rPr>
+              <a:t>Art &amp; Decorating</a:t>
+            </a:r>
+            <a:r>
+              <a:rPr sz="1600" b="0" i="0">
+                <a:solidFill>
+                  <a:srgbClr val="14241C"/>
+                </a:solidFill>
+                <a:latin typeface="Calibri"/>
+              </a:rPr>
+              <a:t> — lead: Jenny Snively</a:t>
+            </a:r>
+          </a:p>
+          <a:p>
+            <a:pPr algn="l">
+              <a:lnSpc>
+                <a:spcPct val="100000"/>
+              </a:lnSpc>
+              <a:spcBef>
+                <a:spcPts val="0"/>
+              </a:spcBef>
+              <a:spcAft>
+                <a:spcPts val="1000"/>
+              </a:spcAft>
+            </a:pPr>
+            <a:r>
+              <a:rPr sz="1600" b="1" i="0">
+                <a:solidFill>
+                  <a:srgbClr val="15503A"/>
+                </a:solidFill>
+                <a:latin typeface="Calibri"/>
+              </a:rPr>
+              <a:t>•  </a:t>
+            </a:r>
+            <a:r>
+              <a:rPr sz="1600" b="1" i="0">
+                <a:solidFill>
+                  <a:srgbClr val="14241C"/>
+                </a:solidFill>
+                <a:latin typeface="Calibri"/>
+              </a:rPr>
+              <a:t>Merch &amp; Fundraising / Logistics</a:t>
+            </a:r>
+            <a:r>
+              <a:rPr sz="1600" b="0" i="0">
+                <a:solidFill>
+                  <a:srgbClr val="14241C"/>
+                </a:solidFill>
+                <a:latin typeface="Calibri"/>
+              </a:rPr>
+              <a:t> — leads: Rick Gorge / Cathy Hofer</a:t>
+            </a:r>
+          </a:p>
+          <a:p>
+            <a:pPr algn="l">
+              <a:lnSpc>
+                <a:spcPct val="100000"/>
+              </a:lnSpc>
+              <a:spcBef>
+                <a:spcPts val="0"/>
+              </a:spcBef>
+              <a:spcAft>
+                <a:spcPts val="1000"/>
+              </a:spcAft>
+            </a:pPr>
+            <a:r>
+              <a:rPr sz="1600" b="1" i="0">
+                <a:solidFill>
+                  <a:srgbClr val="15503A"/>
+                </a:solidFill>
+                <a:latin typeface="Calibri"/>
+              </a:rPr>
+              <a:t>•  </a:t>
+            </a:r>
+            <a:r>
+              <a:rPr sz="1600" b="1" i="0">
+                <a:solidFill>
+                  <a:srgbClr val="14241C"/>
+                </a:solidFill>
+                <a:latin typeface="Calibri"/>
+              </a:rPr>
+              <a:t>Private chat per team</a:t>
+            </a:r>
+            <a:r>
+              <a:rPr sz="1600" b="0" i="0">
+                <a:solidFill>
+                  <a:srgbClr val="14241C"/>
+                </a:solidFill>
+                <a:latin typeface="Calibri"/>
+              </a:rPr>
+              <a:t> — real-time, only your committee sees it</a:t>
+            </a:r>
+          </a:p>
+        </p:txBody>
+      </p:sp>
+      <p:sp>
+        <p:nvSpPr>
+          <p:cNvPr id="15" name="Rounded Rectangle 14"/>
+          <p:cNvSpPr/>
+          <p:nvPr/>
+        </p:nvSpPr>
+        <p:spPr>
+          <a:xfrm>
+            <a:off x="502920" y="5486400"/>
+            <a:ext cx="11201400" cy="566928"/>
+          </a:xfrm>
+          <a:prstGeom prst="roundRect">
+            <a:avLst>
+              <a:gd name="adj" fmla="val 6000"/>
+            </a:avLst>
+          </a:prstGeom>
+          <a:solidFill>
+            <a:srgbClr val="F3EEF0"/>
+          </a:solidFill>
+          <a:ln w="12700">
+            <a:solidFill>
+              <a:srgbClr val="E5E4DA"/>
+            </a:solidFill>
+          </a:ln>
+          <a:effectLst/>
+        </p:spPr>
+        <p:style>
+          <a:lnRef idx="1">
+            <a:schemeClr val="accent1"/>
+          </a:lnRef>
+          <a:fillRef idx="3">
+            <a:schemeClr val="accent1"/>
+          </a:fillRef>
+          <a:effectRef idx="2">
+            <a:schemeClr val="accent1"/>
+          </a:effectRef>
+          <a:fontRef idx="minor">
+            <a:schemeClr val="lt1"/>
+          </a:fontRef>
+        </p:style>
+        <p:txBody>
+          <a:bodyPr rtlCol="0" anchor="ctr"/>
+          <a:lstStyle/>
+          <a:p>
+            <a:pPr algn="ctr"/>
+          </a:p>
+        </p:txBody>
+      </p:sp>
+      <p:sp>
+        <p:nvSpPr>
+          <p:cNvPr id="16" name="TextBox 15"/>
+          <p:cNvSpPr txBox="1"/>
+          <p:nvPr/>
+        </p:nvSpPr>
+        <p:spPr>
+          <a:xfrm>
+            <a:off x="667512" y="5486400"/>
+            <a:ext cx="1828800" cy="566928"/>
+          </a:xfrm>
+          <a:prstGeom prst="rect">
+            <a:avLst/>
+          </a:prstGeom>
+          <a:noFill/>
+        </p:spPr>
+        <p:txBody>
+          <a:bodyPr wrap="square" anchor="ctr" lIns="25400" rIns="25400" tIns="12700" bIns="12700">
             <a:spAutoFit/>
           </a:bodyPr>
           <a:lstStyle/>
@@ -6679,27 +6860,27 @@
               </a:spcAft>
             </a:pPr>
             <a:r>
-              <a:rPr sz="1600" b="0" i="1">
-                <a:solidFill>
-                  <a:srgbClr val="14241C"/>
-                </a:solidFill>
-                <a:latin typeface="Calibri"/>
-              </a:rPr>
-              <a:t>“Family Fest is run by volunteers — five teams, and each has its own group chat.”</a:t>
-            </a:r>
-          </a:p>
-        </p:txBody>
-      </p:sp>
-      <p:sp>
-        <p:nvSpPr>
-          <p:cNvPr id="15" name="TextBox 14"/>
+              <a:rPr sz="1200" b="1" i="0">
+                <a:solidFill>
+                  <a:srgbClr val="8B2E2E"/>
+                </a:solidFill>
+                <a:latin typeface="Calibri"/>
+              </a:rPr>
+              <a:t>💡 GOOD TO KNOW</a:t>
+            </a:r>
+          </a:p>
+        </p:txBody>
+      </p:sp>
+      <p:sp>
+        <p:nvSpPr>
+          <p:cNvPr id="17" name="TextBox 16"/>
           <p:cNvSpPr txBox="1"/>
           <p:nvPr/>
         </p:nvSpPr>
         <p:spPr>
           <a:xfrm>
-            <a:off x="502920" y="2944368"/>
-            <a:ext cx="11201400" cy="310896"/>
+            <a:off x="2560320" y="5486400"/>
+            <a:ext cx="9006840" cy="566928"/>
           </a:xfrm>
           <a:prstGeom prst="rect">
             <a:avLst/>
@@ -6707,7 +6888,7 @@
           <a:noFill/>
         </p:spPr>
         <p:txBody>
-          <a:bodyPr wrap="square" anchor="t" lIns="25400" rIns="25400" tIns="12700" bIns="12700">
+          <a:bodyPr wrap="square" anchor="ctr" lIns="25400" rIns="25400" tIns="12700" bIns="12700">
             <a:spAutoFit/>
           </a:bodyPr>
           <a:lstStyle/>
@@ -6724,373 +6905,12 @@
               </a:spcAft>
             </a:pPr>
             <a:r>
-              <a:rPr sz="1200" b="1" i="0">
-                <a:solidFill>
-                  <a:srgbClr val="6B7068"/>
-                </a:solidFill>
-                <a:latin typeface="Calibri"/>
-              </a:rPr>
-              <a:t>TALKING POINTS</a:t>
-            </a:r>
-          </a:p>
-        </p:txBody>
-      </p:sp>
-      <p:sp>
-        <p:nvSpPr>
-          <p:cNvPr id="16" name="TextBox 15"/>
-          <p:cNvSpPr txBox="1"/>
-          <p:nvPr/>
-        </p:nvSpPr>
-        <p:spPr>
-          <a:xfrm>
-            <a:off x="594360" y="3273552"/>
-            <a:ext cx="11018520" cy="2331720"/>
-          </a:xfrm>
-          <a:prstGeom prst="rect">
-            <a:avLst/>
-          </a:prstGeom>
-          <a:noFill/>
-        </p:spPr>
-        <p:txBody>
-          <a:bodyPr wrap="square" anchor="t" lIns="25400" rIns="25400" tIns="12700" bIns="12700">
-            <a:spAutoFit/>
-          </a:bodyPr>
-          <a:lstStyle/>
-          <a:p>
-            <a:pPr algn="l">
-              <a:lnSpc>
-                <a:spcPct val="100000"/>
-              </a:lnSpc>
-              <a:spcBef>
-                <a:spcPts val="0"/>
-              </a:spcBef>
-              <a:spcAft>
-                <a:spcPts val="900"/>
-              </a:spcAft>
-            </a:pPr>
-            <a:r>
-              <a:rPr sz="1600" b="1" i="0">
-                <a:solidFill>
-                  <a:srgbClr val="15503A"/>
-                </a:solidFill>
-                <a:latin typeface="Calibri"/>
-              </a:rPr>
-              <a:t>•  </a:t>
-            </a:r>
-            <a:r>
-              <a:rPr sz="1600" b="1" i="0">
+              <a:rPr sz="1300" b="0" i="0">
                 <a:solidFill>
                   <a:srgbClr val="14241C"/>
                 </a:solidFill>
                 <a:latin typeface="Calibri"/>
               </a:rPr>
-              <a:t>Meals</a:t>
-            </a:r>
-            <a:r>
-              <a:rPr sz="1600" b="0" i="0">
-                <a:solidFill>
-                  <a:srgbClr val="14241C"/>
-                </a:solidFill>
-                <a:latin typeface="Calibri"/>
-              </a:rPr>
-              <a:t> — lead: Lauren Zerfas</a:t>
-            </a:r>
-          </a:p>
-          <a:p>
-            <a:pPr algn="l">
-              <a:lnSpc>
-                <a:spcPct val="100000"/>
-              </a:lnSpc>
-              <a:spcBef>
-                <a:spcPts val="0"/>
-              </a:spcBef>
-              <a:spcAft>
-                <a:spcPts val="900"/>
-              </a:spcAft>
-            </a:pPr>
-            <a:r>
-              <a:rPr sz="1600" b="1" i="0">
-                <a:solidFill>
-                  <a:srgbClr val="15503A"/>
-                </a:solidFill>
-                <a:latin typeface="Calibri"/>
-              </a:rPr>
-              <a:t>•  </a:t>
-            </a:r>
-            <a:r>
-              <a:rPr sz="1600" b="1" i="0">
-                <a:solidFill>
-                  <a:srgbClr val="14241C"/>
-                </a:solidFill>
-                <a:latin typeface="Calibri"/>
-              </a:rPr>
-              <a:t>Entertainment &amp; Games</a:t>
-            </a:r>
-            <a:r>
-              <a:rPr sz="1600" b="0" i="0">
-                <a:solidFill>
-                  <a:srgbClr val="14241C"/>
-                </a:solidFill>
-                <a:latin typeface="Calibri"/>
-              </a:rPr>
-              <a:t> — lead: Keith Thibodeau</a:t>
-            </a:r>
-          </a:p>
-          <a:p>
-            <a:pPr algn="l">
-              <a:lnSpc>
-                <a:spcPct val="100000"/>
-              </a:lnSpc>
-              <a:spcBef>
-                <a:spcPts val="0"/>
-              </a:spcBef>
-              <a:spcAft>
-                <a:spcPts val="900"/>
-              </a:spcAft>
-            </a:pPr>
-            <a:r>
-              <a:rPr sz="1600" b="1" i="0">
-                <a:solidFill>
-                  <a:srgbClr val="15503A"/>
-                </a:solidFill>
-                <a:latin typeface="Calibri"/>
-              </a:rPr>
-              <a:t>•  </a:t>
-            </a:r>
-            <a:r>
-              <a:rPr sz="1600" b="1" i="0">
-                <a:solidFill>
-                  <a:srgbClr val="14241C"/>
-                </a:solidFill>
-                <a:latin typeface="Calibri"/>
-              </a:rPr>
-              <a:t>Art &amp; Decorating</a:t>
-            </a:r>
-            <a:r>
-              <a:rPr sz="1600" b="0" i="0">
-                <a:solidFill>
-                  <a:srgbClr val="14241C"/>
-                </a:solidFill>
-                <a:latin typeface="Calibri"/>
-              </a:rPr>
-              <a:t> — lead: Jenny Snively</a:t>
-            </a:r>
-          </a:p>
-          <a:p>
-            <a:pPr algn="l">
-              <a:lnSpc>
-                <a:spcPct val="100000"/>
-              </a:lnSpc>
-              <a:spcBef>
-                <a:spcPts val="0"/>
-              </a:spcBef>
-              <a:spcAft>
-                <a:spcPts val="900"/>
-              </a:spcAft>
-            </a:pPr>
-            <a:r>
-              <a:rPr sz="1600" b="1" i="0">
-                <a:solidFill>
-                  <a:srgbClr val="15503A"/>
-                </a:solidFill>
-                <a:latin typeface="Calibri"/>
-              </a:rPr>
-              <a:t>•  </a:t>
-            </a:r>
-            <a:r>
-              <a:rPr sz="1600" b="1" i="0">
-                <a:solidFill>
-                  <a:srgbClr val="14241C"/>
-                </a:solidFill>
-                <a:latin typeface="Calibri"/>
-              </a:rPr>
-              <a:t>Merch &amp; Fundraising / Logistics</a:t>
-            </a:r>
-            <a:r>
-              <a:rPr sz="1600" b="0" i="0">
-                <a:solidFill>
-                  <a:srgbClr val="14241C"/>
-                </a:solidFill>
-                <a:latin typeface="Calibri"/>
-              </a:rPr>
-              <a:t> — leads: Rick Gorge / Cathy Hofer</a:t>
-            </a:r>
-          </a:p>
-          <a:p>
-            <a:pPr algn="l">
-              <a:lnSpc>
-                <a:spcPct val="100000"/>
-              </a:lnSpc>
-              <a:spcBef>
-                <a:spcPts val="0"/>
-              </a:spcBef>
-              <a:spcAft>
-                <a:spcPts val="900"/>
-              </a:spcAft>
-            </a:pPr>
-            <a:r>
-              <a:rPr sz="1600" b="1" i="0">
-                <a:solidFill>
-                  <a:srgbClr val="15503A"/>
-                </a:solidFill>
-                <a:latin typeface="Calibri"/>
-              </a:rPr>
-              <a:t>•  </a:t>
-            </a:r>
-            <a:r>
-              <a:rPr sz="1600" b="1" i="0">
-                <a:solidFill>
-                  <a:srgbClr val="14241C"/>
-                </a:solidFill>
-                <a:latin typeface="Calibri"/>
-              </a:rPr>
-              <a:t>Private chat per team</a:t>
-            </a:r>
-            <a:r>
-              <a:rPr sz="1600" b="0" i="0">
-                <a:solidFill>
-                  <a:srgbClr val="14241C"/>
-                </a:solidFill>
-                <a:latin typeface="Calibri"/>
-              </a:rPr>
-              <a:t> — real-time, only your committee sees it</a:t>
-            </a:r>
-          </a:p>
-        </p:txBody>
-      </p:sp>
-      <p:sp>
-        <p:nvSpPr>
-          <p:cNvPr id="17" name="Rounded Rectangle 16"/>
-          <p:cNvSpPr/>
-          <p:nvPr/>
-        </p:nvSpPr>
-        <p:spPr>
-          <a:xfrm>
-            <a:off x="502920" y="5486400"/>
-            <a:ext cx="11201400" cy="566928"/>
-          </a:xfrm>
-          <a:prstGeom prst="roundRect">
-            <a:avLst>
-              <a:gd name="adj" fmla="val 6000"/>
-            </a:avLst>
-          </a:prstGeom>
-          <a:solidFill>
-            <a:srgbClr val="F3EEF0"/>
-          </a:solidFill>
-          <a:ln w="12700">
-            <a:solidFill>
-              <a:srgbClr val="E5E4DA"/>
-            </a:solidFill>
-          </a:ln>
-          <a:effectLst/>
-        </p:spPr>
-        <p:style>
-          <a:lnRef idx="1">
-            <a:schemeClr val="accent1"/>
-          </a:lnRef>
-          <a:fillRef idx="3">
-            <a:schemeClr val="accent1"/>
-          </a:fillRef>
-          <a:effectRef idx="2">
-            <a:schemeClr val="accent1"/>
-          </a:effectRef>
-          <a:fontRef idx="minor">
-            <a:schemeClr val="lt1"/>
-          </a:fontRef>
-        </p:style>
-        <p:txBody>
-          <a:bodyPr rtlCol="0" anchor="ctr"/>
-          <a:lstStyle/>
-          <a:p>
-            <a:pPr algn="ctr"/>
-          </a:p>
-        </p:txBody>
-      </p:sp>
-      <p:sp>
-        <p:nvSpPr>
-          <p:cNvPr id="18" name="TextBox 17"/>
-          <p:cNvSpPr txBox="1"/>
-          <p:nvPr/>
-        </p:nvSpPr>
-        <p:spPr>
-          <a:xfrm>
-            <a:off x="667512" y="5486400"/>
-            <a:ext cx="1463040" cy="566928"/>
-          </a:xfrm>
-          <a:prstGeom prst="rect">
-            <a:avLst/>
-          </a:prstGeom>
-          <a:noFill/>
-        </p:spPr>
-        <p:txBody>
-          <a:bodyPr wrap="square" anchor="ctr" lIns="25400" rIns="25400" tIns="12700" bIns="12700">
-            <a:spAutoFit/>
-          </a:bodyPr>
-          <a:lstStyle/>
-          <a:p>
-            <a:pPr algn="l">
-              <a:lnSpc>
-                <a:spcPct val="100000"/>
-              </a:lnSpc>
-              <a:spcBef>
-                <a:spcPts val="0"/>
-              </a:spcBef>
-              <a:spcAft>
-                <a:spcPts val="400"/>
-              </a:spcAft>
-            </a:pPr>
-            <a:r>
-              <a:rPr sz="1200" b="1" i="0">
-                <a:solidFill>
-                  <a:srgbClr val="8B2E2E"/>
-                </a:solidFill>
-                <a:latin typeface="Calibri"/>
-              </a:rPr>
-              <a:t>❓ IF ASKED</a:t>
-            </a:r>
-          </a:p>
-        </p:txBody>
-      </p:sp>
-      <p:sp>
-        <p:nvSpPr>
-          <p:cNvPr id="19" name="TextBox 18"/>
-          <p:cNvSpPr txBox="1"/>
-          <p:nvPr/>
-        </p:nvSpPr>
-        <p:spPr>
-          <a:xfrm>
-            <a:off x="2103120" y="5486400"/>
-            <a:ext cx="9464040" cy="566928"/>
-          </a:xfrm>
-          <a:prstGeom prst="rect">
-            <a:avLst/>
-          </a:prstGeom>
-          <a:noFill/>
-        </p:spPr>
-        <p:txBody>
-          <a:bodyPr wrap="square" anchor="ctr" lIns="25400" rIns="25400" tIns="12700" bIns="12700">
-            <a:spAutoFit/>
-          </a:bodyPr>
-          <a:lstStyle/>
-          <a:p>
-            <a:pPr algn="l">
-              <a:lnSpc>
-                <a:spcPct val="100000"/>
-              </a:lnSpc>
-              <a:spcBef>
-                <a:spcPts val="0"/>
-              </a:spcBef>
-              <a:spcAft>
-                <a:spcPts val="400"/>
-              </a:spcAft>
-            </a:pPr>
-            <a:r>
-              <a:rPr sz="1300" b="0" i="0">
-                <a:solidFill>
-                  <a:srgbClr val="14241C"/>
-                </a:solidFill>
-                <a:latin typeface="Calibri"/>
-              </a:rPr>
               <a:t>“Want to help? Join a committee right here and you're in the chat.”</a:t>
             </a:r>
           </a:p>
@@ -7098,7 +6918,7 @@
       </p:sp>
       <p:sp>
         <p:nvSpPr>
-          <p:cNvPr id="20" name="Rounded Rectangle 19"/>
+          <p:cNvPr id="18" name="Rounded Rectangle 17"/>
           <p:cNvSpPr/>
           <p:nvPr/>
         </p:nvSpPr>
@@ -7144,7 +6964,7 @@
       </p:sp>
       <p:sp>
         <p:nvSpPr>
-          <p:cNvPr id="21" name="Rounded Rectangle 20"/>
+          <p:cNvPr id="19" name="Rounded Rectangle 18"/>
           <p:cNvSpPr/>
           <p:nvPr/>
         </p:nvSpPr>
@@ -7190,7 +7010,7 @@
       </p:sp>
       <p:sp>
         <p:nvSpPr>
-          <p:cNvPr id="22" name="TextBox 21"/>
+          <p:cNvPr id="20" name="TextBox 19"/>
           <p:cNvSpPr txBox="1"/>
           <p:nvPr/>
         </p:nvSpPr>
@@ -7586,7 +7406,7 @@
         <p:spPr>
           <a:xfrm>
             <a:off x="667512" y="1298448"/>
-            <a:ext cx="1554480" cy="603504"/>
+            <a:ext cx="1463040" cy="603504"/>
           </a:xfrm>
           <a:prstGeom prst="rect">
             <a:avLst/>
@@ -7617,7 +7437,7 @@
                 </a:solidFill>
                 <a:latin typeface="Calibri"/>
               </a:rPr>
-              <a:t>▶  ON SCREEN</a:t>
+              <a:t>📍  FIND IT</a:t>
             </a:r>
           </a:p>
         </p:txBody>
@@ -7630,8 +7450,8 @@
         </p:nvSpPr>
         <p:spPr>
           <a:xfrm>
-            <a:off x="2286000" y="1298448"/>
-            <a:ext cx="9281160" cy="603504"/>
+            <a:off x="2194560" y="1298448"/>
+            <a:ext cx="9372600" cy="603504"/>
           </a:xfrm>
           <a:prstGeom prst="rect">
             <a:avLst/>
@@ -7662,7 +7482,7 @@
                 </a:solidFill>
                 <a:latin typeface="Calibri"/>
               </a:rPr>
-              <a:t>From Home, open the Ask for Help card. Show the request form.</a:t>
+              <a:t>Home  →  Ask for Help</a:t>
             </a:r>
           </a:p>
         </p:txBody>
@@ -7676,7 +7496,7 @@
         <p:spPr>
           <a:xfrm>
             <a:off x="502920" y="2029968"/>
-            <a:ext cx="11201400" cy="749808"/>
+            <a:ext cx="11201400" cy="786384"/>
           </a:xfrm>
           <a:prstGeom prst="roundRect">
             <a:avLst>
@@ -7724,7 +7544,7 @@
         <p:spPr>
           <a:xfrm>
             <a:off x="502920" y="2029968"/>
-            <a:ext cx="73152" cy="749808"/>
+            <a:ext cx="91440" cy="786384"/>
           </a:xfrm>
           <a:prstGeom prst="rect">
             <a:avLst/>
@@ -7767,8 +7587,8 @@
         </p:nvSpPr>
         <p:spPr>
           <a:xfrm>
-            <a:off x="704088" y="2075688"/>
-            <a:ext cx="1280160" cy="292608"/>
+            <a:off x="813816" y="2029968"/>
+            <a:ext cx="10698480" cy="786384"/>
           </a:xfrm>
           <a:prstGeom prst="rect">
             <a:avLst/>
@@ -7776,7 +7596,7 @@
           <a:noFill/>
         </p:spPr>
         <p:txBody>
-          <a:bodyPr wrap="square" anchor="t" lIns="25400" rIns="25400" tIns="12700" bIns="12700">
+          <a:bodyPr wrap="square" anchor="ctr" lIns="25400" rIns="25400" tIns="12700" bIns="12700">
             <a:spAutoFit/>
           </a:bodyPr>
           <a:lstStyle/>
@@ -7793,13 +7613,13 @@
               </a:spcAft>
             </a:pPr>
             <a:r>
-              <a:rPr sz="1200" b="1" i="0">
-                <a:solidFill>
-                  <a:srgbClr val="C2410C"/>
-                </a:solidFill>
-                <a:latin typeface="Calibri"/>
-              </a:rPr>
-              <a:t>🗣  SAY</a:t>
+              <a:rPr sz="1800" b="1" i="0">
+                <a:solidFill>
+                  <a:srgbClr val="14241C"/>
+                </a:solidFill>
+                <a:latin typeface="Calibri"/>
+              </a:rPr>
+              <a:t>At the lake and need a hand? Post it, and people nearby get a ping.</a:t>
             </a:r>
           </a:p>
         </p:txBody>
@@ -7812,8 +7632,8 @@
         </p:nvSpPr>
         <p:spPr>
           <a:xfrm>
-            <a:off x="704088" y="2304288"/>
-            <a:ext cx="10789920" cy="475488"/>
+            <a:off x="594360" y="3035808"/>
+            <a:ext cx="11018520" cy="2468880"/>
           </a:xfrm>
           <a:prstGeom prst="rect">
             <a:avLst/>
@@ -7822,6 +7642,237 @@
         </p:spPr>
         <p:txBody>
           <a:bodyPr wrap="square" anchor="t" lIns="25400" rIns="25400" tIns="12700" bIns="12700">
+            <a:spAutoFit/>
+          </a:bodyPr>
+          <a:lstStyle/>
+          <a:p>
+            <a:pPr algn="l">
+              <a:lnSpc>
+                <a:spcPct val="100000"/>
+              </a:lnSpc>
+              <a:spcBef>
+                <a:spcPts val="0"/>
+              </a:spcBef>
+              <a:spcAft>
+                <a:spcPts val="1000"/>
+              </a:spcAft>
+            </a:pPr>
+            <a:r>
+              <a:rPr sz="1600" b="1" i="0">
+                <a:solidFill>
+                  <a:srgbClr val="15503A"/>
+                </a:solidFill>
+                <a:latin typeface="Calibri"/>
+              </a:rPr>
+              <a:t>•  </a:t>
+            </a:r>
+            <a:r>
+              <a:rPr sz="1600" b="1" i="0">
+                <a:solidFill>
+                  <a:srgbClr val="14241C"/>
+                </a:solidFill>
+                <a:latin typeface="Calibri"/>
+              </a:rPr>
+              <a:t>Post a need</a:t>
+            </a:r>
+            <a:r>
+              <a:rPr sz="1600" b="0" i="0">
+                <a:solidFill>
+                  <a:srgbClr val="14241C"/>
+                </a:solidFill>
+                <a:latin typeface="Calibri"/>
+              </a:rPr>
+              <a:t> — moving tables, a ride, supplies, an extra set of hands</a:t>
+            </a:r>
+          </a:p>
+          <a:p>
+            <a:pPr algn="l">
+              <a:lnSpc>
+                <a:spcPct val="100000"/>
+              </a:lnSpc>
+              <a:spcBef>
+                <a:spcPts val="0"/>
+              </a:spcBef>
+              <a:spcAft>
+                <a:spcPts val="1000"/>
+              </a:spcAft>
+            </a:pPr>
+            <a:r>
+              <a:rPr sz="1600" b="1" i="0">
+                <a:solidFill>
+                  <a:srgbClr val="15503A"/>
+                </a:solidFill>
+                <a:latin typeface="Calibri"/>
+              </a:rPr>
+              <a:t>•  </a:t>
+            </a:r>
+            <a:r>
+              <a:rPr sz="1600" b="1" i="0">
+                <a:solidFill>
+                  <a:srgbClr val="14241C"/>
+                </a:solidFill>
+                <a:latin typeface="Calibri"/>
+              </a:rPr>
+              <a:t>Helpers respond</a:t>
+            </a:r>
+            <a:r>
+              <a:rPr sz="1600" b="0" i="0">
+                <a:solidFill>
+                  <a:srgbClr val="14241C"/>
+                </a:solidFill>
+                <a:latin typeface="Calibri"/>
+              </a:rPr>
+              <a:t> — one tap: “On my way”</a:t>
+            </a:r>
+          </a:p>
+          <a:p>
+            <a:pPr algn="l">
+              <a:lnSpc>
+                <a:spcPct val="100000"/>
+              </a:lnSpc>
+              <a:spcBef>
+                <a:spcPts val="0"/>
+              </a:spcBef>
+              <a:spcAft>
+                <a:spcPts val="1000"/>
+              </a:spcAft>
+            </a:pPr>
+            <a:r>
+              <a:rPr sz="1600" b="1" i="0">
+                <a:solidFill>
+                  <a:srgbClr val="15503A"/>
+                </a:solidFill>
+                <a:latin typeface="Calibri"/>
+              </a:rPr>
+              <a:t>•  </a:t>
+            </a:r>
+            <a:r>
+              <a:rPr sz="1600" b="1" i="0">
+                <a:solidFill>
+                  <a:srgbClr val="14241C"/>
+                </a:solidFill>
+                <a:latin typeface="Calibri"/>
+              </a:rPr>
+              <a:t>What to bring</a:t>
+            </a:r>
+            <a:r>
+              <a:rPr sz="1600" b="0" i="0">
+                <a:solidFill>
+                  <a:srgbClr val="14241C"/>
+                </a:solidFill>
+                <a:latin typeface="Calibri"/>
+              </a:rPr>
+              <a:t> — list items; helpers claim what they'll grab</a:t>
+            </a:r>
+          </a:p>
+          <a:p>
+            <a:pPr algn="l">
+              <a:lnSpc>
+                <a:spcPct val="100000"/>
+              </a:lnSpc>
+              <a:spcBef>
+                <a:spcPts val="0"/>
+              </a:spcBef>
+              <a:spcAft>
+                <a:spcPts val="1000"/>
+              </a:spcAft>
+            </a:pPr>
+            <a:r>
+              <a:rPr sz="1600" b="1" i="0">
+                <a:solidFill>
+                  <a:srgbClr val="15503A"/>
+                </a:solidFill>
+                <a:latin typeface="Calibri"/>
+              </a:rPr>
+              <a:t>•  </a:t>
+            </a:r>
+            <a:r>
+              <a:rPr sz="1600" b="1" i="0">
+                <a:solidFill>
+                  <a:srgbClr val="14241C"/>
+                </a:solidFill>
+                <a:latin typeface="Calibri"/>
+              </a:rPr>
+              <a:t>Urgent option</a:t>
+            </a:r>
+            <a:r>
+              <a:rPr sz="1600" b="0" i="0">
+                <a:solidFill>
+                  <a:srgbClr val="14241C"/>
+                </a:solidFill>
+                <a:latin typeface="Calibri"/>
+              </a:rPr>
+              <a:t> — 🚨 alerts everyone, for real emergencies</a:t>
+            </a:r>
+          </a:p>
+        </p:txBody>
+      </p:sp>
+      <p:sp>
+        <p:nvSpPr>
+          <p:cNvPr id="15" name="Rounded Rectangle 14"/>
+          <p:cNvSpPr/>
+          <p:nvPr/>
+        </p:nvSpPr>
+        <p:spPr>
+          <a:xfrm>
+            <a:off x="502920" y="5486400"/>
+            <a:ext cx="11201400" cy="566928"/>
+          </a:xfrm>
+          <a:prstGeom prst="roundRect">
+            <a:avLst>
+              <a:gd name="adj" fmla="val 6000"/>
+            </a:avLst>
+          </a:prstGeom>
+          <a:solidFill>
+            <a:srgbClr val="F3EEF0"/>
+          </a:solidFill>
+          <a:ln w="12700">
+            <a:solidFill>
+              <a:srgbClr val="E5E4DA"/>
+            </a:solidFill>
+          </a:ln>
+          <a:effectLst/>
+        </p:spPr>
+        <p:style>
+          <a:lnRef idx="1">
+            <a:schemeClr val="accent1"/>
+          </a:lnRef>
+          <a:fillRef idx="3">
+            <a:schemeClr val="accent1"/>
+          </a:fillRef>
+          <a:effectRef idx="2">
+            <a:schemeClr val="accent1"/>
+          </a:effectRef>
+          <a:fontRef idx="minor">
+            <a:schemeClr val="lt1"/>
+          </a:fontRef>
+        </p:style>
+        <p:txBody>
+          <a:bodyPr rtlCol="0" anchor="ctr"/>
+          <a:lstStyle/>
+          <a:p>
+            <a:pPr algn="ctr"/>
+          </a:p>
+        </p:txBody>
+      </p:sp>
+      <p:sp>
+        <p:nvSpPr>
+          <p:cNvPr id="16" name="TextBox 15"/>
+          <p:cNvSpPr txBox="1"/>
+          <p:nvPr/>
+        </p:nvSpPr>
+        <p:spPr>
+          <a:xfrm>
+            <a:off x="667512" y="5486400"/>
+            <a:ext cx="1828800" cy="566928"/>
+          </a:xfrm>
+          <a:prstGeom prst="rect">
+            <a:avLst/>
+          </a:prstGeom>
+          <a:noFill/>
+        </p:spPr>
+        <p:txBody>
+          <a:bodyPr wrap="square" anchor="ctr" lIns="25400" rIns="25400" tIns="12700" bIns="12700">
             <a:spAutoFit/>
           </a:bodyPr>
           <a:lstStyle/>
@@ -7838,27 +7889,27 @@
               </a:spcAft>
             </a:pPr>
             <a:r>
-              <a:rPr sz="1600" b="0" i="1">
-                <a:solidFill>
-                  <a:srgbClr val="14241C"/>
-                </a:solidFill>
-                <a:latin typeface="Calibri"/>
-              </a:rPr>
-              <a:t>“At the lake and need a hand? Post it, and people nearby get a ping.”</a:t>
-            </a:r>
-          </a:p>
-        </p:txBody>
-      </p:sp>
-      <p:sp>
-        <p:nvSpPr>
-          <p:cNvPr id="15" name="TextBox 14"/>
+              <a:rPr sz="1200" b="1" i="0">
+                <a:solidFill>
+                  <a:srgbClr val="8B2E2E"/>
+                </a:solidFill>
+                <a:latin typeface="Calibri"/>
+              </a:rPr>
+              <a:t>💡 GOOD TO KNOW</a:t>
+            </a:r>
+          </a:p>
+        </p:txBody>
+      </p:sp>
+      <p:sp>
+        <p:nvSpPr>
+          <p:cNvPr id="17" name="TextBox 16"/>
           <p:cNvSpPr txBox="1"/>
           <p:nvPr/>
         </p:nvSpPr>
         <p:spPr>
           <a:xfrm>
-            <a:off x="502920" y="2944368"/>
-            <a:ext cx="11201400" cy="310896"/>
+            <a:off x="2560320" y="5486400"/>
+            <a:ext cx="9006840" cy="566928"/>
           </a:xfrm>
           <a:prstGeom prst="rect">
             <a:avLst/>
@@ -7866,7 +7917,7 @@
           <a:noFill/>
         </p:spPr>
         <p:txBody>
-          <a:bodyPr wrap="square" anchor="t" lIns="25400" rIns="25400" tIns="12700" bIns="12700">
+          <a:bodyPr wrap="square" anchor="ctr" lIns="25400" rIns="25400" tIns="12700" bIns="12700">
             <a:spAutoFit/>
           </a:bodyPr>
           <a:lstStyle/>
@@ -7883,333 +7934,12 @@
               </a:spcAft>
             </a:pPr>
             <a:r>
-              <a:rPr sz="1200" b="1" i="0">
-                <a:solidFill>
-                  <a:srgbClr val="6B7068"/>
-                </a:solidFill>
-                <a:latin typeface="Calibri"/>
-              </a:rPr>
-              <a:t>TALKING POINTS</a:t>
-            </a:r>
-          </a:p>
-        </p:txBody>
-      </p:sp>
-      <p:sp>
-        <p:nvSpPr>
-          <p:cNvPr id="16" name="TextBox 15"/>
-          <p:cNvSpPr txBox="1"/>
-          <p:nvPr/>
-        </p:nvSpPr>
-        <p:spPr>
-          <a:xfrm>
-            <a:off x="594360" y="3273552"/>
-            <a:ext cx="11018520" cy="2331720"/>
-          </a:xfrm>
-          <a:prstGeom prst="rect">
-            <a:avLst/>
-          </a:prstGeom>
-          <a:noFill/>
-        </p:spPr>
-        <p:txBody>
-          <a:bodyPr wrap="square" anchor="t" lIns="25400" rIns="25400" tIns="12700" bIns="12700">
-            <a:spAutoFit/>
-          </a:bodyPr>
-          <a:lstStyle/>
-          <a:p>
-            <a:pPr algn="l">
-              <a:lnSpc>
-                <a:spcPct val="100000"/>
-              </a:lnSpc>
-              <a:spcBef>
-                <a:spcPts val="0"/>
-              </a:spcBef>
-              <a:spcAft>
-                <a:spcPts val="900"/>
-              </a:spcAft>
-            </a:pPr>
-            <a:r>
-              <a:rPr sz="1600" b="1" i="0">
-                <a:solidFill>
-                  <a:srgbClr val="15503A"/>
-                </a:solidFill>
-                <a:latin typeface="Calibri"/>
-              </a:rPr>
-              <a:t>•  </a:t>
-            </a:r>
-            <a:r>
-              <a:rPr sz="1600" b="1" i="0">
+              <a:rPr sz="1300" b="0" i="0">
                 <a:solidFill>
                   <a:srgbClr val="14241C"/>
                 </a:solidFill>
                 <a:latin typeface="Calibri"/>
               </a:rPr>
-              <a:t>Post a need</a:t>
-            </a:r>
-            <a:r>
-              <a:rPr sz="1600" b="0" i="0">
-                <a:solidFill>
-                  <a:srgbClr val="14241C"/>
-                </a:solidFill>
-                <a:latin typeface="Calibri"/>
-              </a:rPr>
-              <a:t> — moving tables, a ride, supplies, an extra set of hands</a:t>
-            </a:r>
-          </a:p>
-          <a:p>
-            <a:pPr algn="l">
-              <a:lnSpc>
-                <a:spcPct val="100000"/>
-              </a:lnSpc>
-              <a:spcBef>
-                <a:spcPts val="0"/>
-              </a:spcBef>
-              <a:spcAft>
-                <a:spcPts val="900"/>
-              </a:spcAft>
-            </a:pPr>
-            <a:r>
-              <a:rPr sz="1600" b="1" i="0">
-                <a:solidFill>
-                  <a:srgbClr val="15503A"/>
-                </a:solidFill>
-                <a:latin typeface="Calibri"/>
-              </a:rPr>
-              <a:t>•  </a:t>
-            </a:r>
-            <a:r>
-              <a:rPr sz="1600" b="1" i="0">
-                <a:solidFill>
-                  <a:srgbClr val="14241C"/>
-                </a:solidFill>
-                <a:latin typeface="Calibri"/>
-              </a:rPr>
-              <a:t>Helpers respond</a:t>
-            </a:r>
-            <a:r>
-              <a:rPr sz="1600" b="0" i="0">
-                <a:solidFill>
-                  <a:srgbClr val="14241C"/>
-                </a:solidFill>
-                <a:latin typeface="Calibri"/>
-              </a:rPr>
-              <a:t> — one tap: “On my way”</a:t>
-            </a:r>
-          </a:p>
-          <a:p>
-            <a:pPr algn="l">
-              <a:lnSpc>
-                <a:spcPct val="100000"/>
-              </a:lnSpc>
-              <a:spcBef>
-                <a:spcPts val="0"/>
-              </a:spcBef>
-              <a:spcAft>
-                <a:spcPts val="900"/>
-              </a:spcAft>
-            </a:pPr>
-            <a:r>
-              <a:rPr sz="1600" b="1" i="0">
-                <a:solidFill>
-                  <a:srgbClr val="15503A"/>
-                </a:solidFill>
-                <a:latin typeface="Calibri"/>
-              </a:rPr>
-              <a:t>•  </a:t>
-            </a:r>
-            <a:r>
-              <a:rPr sz="1600" b="1" i="0">
-                <a:solidFill>
-                  <a:srgbClr val="14241C"/>
-                </a:solidFill>
-                <a:latin typeface="Calibri"/>
-              </a:rPr>
-              <a:t>What to bring</a:t>
-            </a:r>
-            <a:r>
-              <a:rPr sz="1600" b="0" i="0">
-                <a:solidFill>
-                  <a:srgbClr val="14241C"/>
-                </a:solidFill>
-                <a:latin typeface="Calibri"/>
-              </a:rPr>
-              <a:t> — list items; helpers claim what they'll grab</a:t>
-            </a:r>
-          </a:p>
-          <a:p>
-            <a:pPr algn="l">
-              <a:lnSpc>
-                <a:spcPct val="100000"/>
-              </a:lnSpc>
-              <a:spcBef>
-                <a:spcPts val="0"/>
-              </a:spcBef>
-              <a:spcAft>
-                <a:spcPts val="900"/>
-              </a:spcAft>
-            </a:pPr>
-            <a:r>
-              <a:rPr sz="1600" b="1" i="0">
-                <a:solidFill>
-                  <a:srgbClr val="15503A"/>
-                </a:solidFill>
-                <a:latin typeface="Calibri"/>
-              </a:rPr>
-              <a:t>•  </a:t>
-            </a:r>
-            <a:r>
-              <a:rPr sz="1600" b="1" i="0">
-                <a:solidFill>
-                  <a:srgbClr val="14241C"/>
-                </a:solidFill>
-                <a:latin typeface="Calibri"/>
-              </a:rPr>
-              <a:t>Urgent option</a:t>
-            </a:r>
-            <a:r>
-              <a:rPr sz="1600" b="0" i="0">
-                <a:solidFill>
-                  <a:srgbClr val="14241C"/>
-                </a:solidFill>
-                <a:latin typeface="Calibri"/>
-              </a:rPr>
-              <a:t> — 🚨 alerts everyone, for real emergencies</a:t>
-            </a:r>
-          </a:p>
-        </p:txBody>
-      </p:sp>
-      <p:sp>
-        <p:nvSpPr>
-          <p:cNvPr id="17" name="Rounded Rectangle 16"/>
-          <p:cNvSpPr/>
-          <p:nvPr/>
-        </p:nvSpPr>
-        <p:spPr>
-          <a:xfrm>
-            <a:off x="502920" y="5486400"/>
-            <a:ext cx="11201400" cy="566928"/>
-          </a:xfrm>
-          <a:prstGeom prst="roundRect">
-            <a:avLst>
-              <a:gd name="adj" fmla="val 6000"/>
-            </a:avLst>
-          </a:prstGeom>
-          <a:solidFill>
-            <a:srgbClr val="F3EEF0"/>
-          </a:solidFill>
-          <a:ln w="12700">
-            <a:solidFill>
-              <a:srgbClr val="E5E4DA"/>
-            </a:solidFill>
-          </a:ln>
-          <a:effectLst/>
-        </p:spPr>
-        <p:style>
-          <a:lnRef idx="1">
-            <a:schemeClr val="accent1"/>
-          </a:lnRef>
-          <a:fillRef idx="3">
-            <a:schemeClr val="accent1"/>
-          </a:fillRef>
-          <a:effectRef idx="2">
-            <a:schemeClr val="accent1"/>
-          </a:effectRef>
-          <a:fontRef idx="minor">
-            <a:schemeClr val="lt1"/>
-          </a:fontRef>
-        </p:style>
-        <p:txBody>
-          <a:bodyPr rtlCol="0" anchor="ctr"/>
-          <a:lstStyle/>
-          <a:p>
-            <a:pPr algn="ctr"/>
-          </a:p>
-        </p:txBody>
-      </p:sp>
-      <p:sp>
-        <p:nvSpPr>
-          <p:cNvPr id="18" name="TextBox 17"/>
-          <p:cNvSpPr txBox="1"/>
-          <p:nvPr/>
-        </p:nvSpPr>
-        <p:spPr>
-          <a:xfrm>
-            <a:off x="667512" y="5486400"/>
-            <a:ext cx="1463040" cy="566928"/>
-          </a:xfrm>
-          <a:prstGeom prst="rect">
-            <a:avLst/>
-          </a:prstGeom>
-          <a:noFill/>
-        </p:spPr>
-        <p:txBody>
-          <a:bodyPr wrap="square" anchor="ctr" lIns="25400" rIns="25400" tIns="12700" bIns="12700">
-            <a:spAutoFit/>
-          </a:bodyPr>
-          <a:lstStyle/>
-          <a:p>
-            <a:pPr algn="l">
-              <a:lnSpc>
-                <a:spcPct val="100000"/>
-              </a:lnSpc>
-              <a:spcBef>
-                <a:spcPts val="0"/>
-              </a:spcBef>
-              <a:spcAft>
-                <a:spcPts val="400"/>
-              </a:spcAft>
-            </a:pPr>
-            <a:r>
-              <a:rPr sz="1200" b="1" i="0">
-                <a:solidFill>
-                  <a:srgbClr val="8B2E2E"/>
-                </a:solidFill>
-                <a:latin typeface="Calibri"/>
-              </a:rPr>
-              <a:t>❓ IF ASKED</a:t>
-            </a:r>
-          </a:p>
-        </p:txBody>
-      </p:sp>
-      <p:sp>
-        <p:nvSpPr>
-          <p:cNvPr id="19" name="TextBox 18"/>
-          <p:cNvSpPr txBox="1"/>
-          <p:nvPr/>
-        </p:nvSpPr>
-        <p:spPr>
-          <a:xfrm>
-            <a:off x="2103120" y="5486400"/>
-            <a:ext cx="9464040" cy="566928"/>
-          </a:xfrm>
-          <a:prstGeom prst="rect">
-            <a:avLst/>
-          </a:prstGeom>
-          <a:noFill/>
-        </p:spPr>
-        <p:txBody>
-          <a:bodyPr wrap="square" anchor="ctr" lIns="25400" rIns="25400" tIns="12700" bIns="12700">
-            <a:spAutoFit/>
-          </a:bodyPr>
-          <a:lstStyle/>
-          <a:p>
-            <a:pPr algn="l">
-              <a:lnSpc>
-                <a:spcPct val="100000"/>
-              </a:lnSpc>
-              <a:spcBef>
-                <a:spcPts val="0"/>
-              </a:spcBef>
-              <a:spcAft>
-                <a:spcPts val="400"/>
-              </a:spcAft>
-            </a:pPr>
-            <a:r>
-              <a:rPr sz="1300" b="0" i="0">
-                <a:solidFill>
-                  <a:srgbClr val="14241C"/>
-                </a:solidFill>
-                <a:latin typeface="Calibri"/>
-              </a:rPr>
               <a:t>“It's in beta right now — we're testing it during Fest week.”</a:t>
             </a:r>
           </a:p>
@@ -8217,7 +7947,7 @@
       </p:sp>
       <p:sp>
         <p:nvSpPr>
-          <p:cNvPr id="20" name="Rounded Rectangle 19"/>
+          <p:cNvPr id="18" name="Rounded Rectangle 17"/>
           <p:cNvSpPr/>
           <p:nvPr/>
         </p:nvSpPr>
@@ -8263,7 +7993,7 @@
       </p:sp>
       <p:sp>
         <p:nvSpPr>
-          <p:cNvPr id="21" name="Rounded Rectangle 20"/>
+          <p:cNvPr id="19" name="Rounded Rectangle 18"/>
           <p:cNvSpPr/>
           <p:nvPr/>
         </p:nvSpPr>
@@ -8309,7 +8039,7 @@
       </p:sp>
       <p:sp>
         <p:nvSpPr>
-          <p:cNvPr id="22" name="TextBox 21"/>
+          <p:cNvPr id="20" name="TextBox 19"/>
           <p:cNvSpPr txBox="1"/>
           <p:nvPr/>
         </p:nvSpPr>
@@ -8705,7 +8435,7 @@
         <p:spPr>
           <a:xfrm>
             <a:off x="667512" y="1298448"/>
-            <a:ext cx="1554480" cy="603504"/>
+            <a:ext cx="1463040" cy="603504"/>
           </a:xfrm>
           <a:prstGeom prst="rect">
             <a:avLst/>
@@ -8736,7 +8466,7 @@
                 </a:solidFill>
                 <a:latin typeface="Calibri"/>
               </a:rPr>
-              <a:t>▶  ON SCREEN</a:t>
+              <a:t>📍  FIND IT</a:t>
             </a:r>
           </a:p>
         </p:txBody>
@@ -8749,8 +8479,8 @@
         </p:nvSpPr>
         <p:spPr>
           <a:xfrm>
-            <a:off x="2286000" y="1298448"/>
-            <a:ext cx="9281160" cy="603504"/>
+            <a:off x="2194560" y="1298448"/>
+            <a:ext cx="9372600" cy="603504"/>
           </a:xfrm>
           <a:prstGeom prst="rect">
             <a:avLst/>
@@ -8781,7 +8511,7 @@
                 </a:solidFill>
                 <a:latin typeface="Calibri"/>
               </a:rPr>
-              <a:t>Family Fest tab → Pay. Show the Venmo / Zelle handles.</a:t>
+              <a:t>Family Fest tab  →  Pay</a:t>
             </a:r>
           </a:p>
         </p:txBody>
@@ -8795,7 +8525,7 @@
         <p:spPr>
           <a:xfrm>
             <a:off x="502920" y="2029968"/>
-            <a:ext cx="11201400" cy="749808"/>
+            <a:ext cx="11201400" cy="786384"/>
           </a:xfrm>
           <a:prstGeom prst="roundRect">
             <a:avLst>
@@ -8843,7 +8573,7 @@
         <p:spPr>
           <a:xfrm>
             <a:off x="502920" y="2029968"/>
-            <a:ext cx="73152" cy="749808"/>
+            <a:ext cx="91440" cy="786384"/>
           </a:xfrm>
           <a:prstGeom prst="rect">
             <a:avLst/>
@@ -8886,8 +8616,8 @@
         </p:nvSpPr>
         <p:spPr>
           <a:xfrm>
-            <a:off x="704088" y="2075688"/>
-            <a:ext cx="1280160" cy="292608"/>
+            <a:off x="813816" y="2029968"/>
+            <a:ext cx="10698480" cy="786384"/>
           </a:xfrm>
           <a:prstGeom prst="rect">
             <a:avLst/>
@@ -8895,7 +8625,7 @@
           <a:noFill/>
         </p:spPr>
         <p:txBody>
-          <a:bodyPr wrap="square" anchor="t" lIns="25400" rIns="25400" tIns="12700" bIns="12700">
+          <a:bodyPr wrap="square" anchor="ctr" lIns="25400" rIns="25400" tIns="12700" bIns="12700">
             <a:spAutoFit/>
           </a:bodyPr>
           <a:lstStyle/>
@@ -8912,13 +8642,13 @@
               </a:spcAft>
             </a:pPr>
             <a:r>
-              <a:rPr sz="1200" b="1" i="0">
-                <a:solidFill>
-                  <a:srgbClr val="C2410C"/>
-                </a:solidFill>
-                <a:latin typeface="Calibri"/>
-              </a:rPr>
-              <a:t>🗣  SAY</a:t>
+              <a:rPr sz="1800" b="1" i="0">
+                <a:solidFill>
+                  <a:srgbClr val="14241C"/>
+                </a:solidFill>
+                <a:latin typeface="Calibri"/>
+              </a:rPr>
+              <a:t>Dues are $100 an adult — pay right from here with Venmo or Zelle.</a:t>
             </a:r>
           </a:p>
         </p:txBody>
@@ -8931,8 +8661,8 @@
         </p:nvSpPr>
         <p:spPr>
           <a:xfrm>
-            <a:off x="704088" y="2304288"/>
-            <a:ext cx="10789920" cy="475488"/>
+            <a:off x="594360" y="3035808"/>
+            <a:ext cx="11018520" cy="2468880"/>
           </a:xfrm>
           <a:prstGeom prst="rect">
             <a:avLst/>
@@ -8941,6 +8671,237 @@
         </p:spPr>
         <p:txBody>
           <a:bodyPr wrap="square" anchor="t" lIns="25400" rIns="25400" tIns="12700" bIns="12700">
+            <a:spAutoFit/>
+          </a:bodyPr>
+          <a:lstStyle/>
+          <a:p>
+            <a:pPr algn="l">
+              <a:lnSpc>
+                <a:spcPct val="100000"/>
+              </a:lnSpc>
+              <a:spcBef>
+                <a:spcPts val="0"/>
+              </a:spcBef>
+              <a:spcAft>
+                <a:spcPts val="1000"/>
+              </a:spcAft>
+            </a:pPr>
+            <a:r>
+              <a:rPr sz="1600" b="1" i="0">
+                <a:solidFill>
+                  <a:srgbClr val="15503A"/>
+                </a:solidFill>
+                <a:latin typeface="Calibri"/>
+              </a:rPr>
+              <a:t>•  </a:t>
+            </a:r>
+            <a:r>
+              <a:rPr sz="1600" b="1" i="0">
+                <a:solidFill>
+                  <a:srgbClr val="14241C"/>
+                </a:solidFill>
+                <a:latin typeface="Calibri"/>
+              </a:rPr>
+              <a:t>See who &amp; how</a:t>
+            </a:r>
+            <a:r>
+              <a:rPr sz="1600" b="0" i="0">
+                <a:solidFill>
+                  <a:srgbClr val="14241C"/>
+                </a:solidFill>
+                <a:latin typeface="Calibri"/>
+              </a:rPr>
+              <a:t> — Cathy Hofer collects; Venmo preferred, Zelle works too</a:t>
+            </a:r>
+          </a:p>
+          <a:p>
+            <a:pPr algn="l">
+              <a:lnSpc>
+                <a:spcPct val="100000"/>
+              </a:lnSpc>
+              <a:spcBef>
+                <a:spcPts val="0"/>
+              </a:spcBef>
+              <a:spcAft>
+                <a:spcPts val="1000"/>
+              </a:spcAft>
+            </a:pPr>
+            <a:r>
+              <a:rPr sz="1600" b="1" i="0">
+                <a:solidFill>
+                  <a:srgbClr val="15503A"/>
+                </a:solidFill>
+                <a:latin typeface="Calibri"/>
+              </a:rPr>
+              <a:t>•  </a:t>
+            </a:r>
+            <a:r>
+              <a:rPr sz="1600" b="1" i="0">
+                <a:solidFill>
+                  <a:srgbClr val="14241C"/>
+                </a:solidFill>
+                <a:latin typeface="Calibri"/>
+              </a:rPr>
+              <a:t>One tap opens</a:t>
+            </a:r>
+            <a:r>
+              <a:rPr sz="1600" b="0" i="0">
+                <a:solidFill>
+                  <a:srgbClr val="14241C"/>
+                </a:solidFill>
+                <a:latin typeface="Calibri"/>
+              </a:rPr>
+              <a:t> — your Venmo/Zelle app with the handle ready</a:t>
+            </a:r>
+          </a:p>
+          <a:p>
+            <a:pPr algn="l">
+              <a:lnSpc>
+                <a:spcPct val="100000"/>
+              </a:lnSpc>
+              <a:spcBef>
+                <a:spcPts val="0"/>
+              </a:spcBef>
+              <a:spcAft>
+                <a:spcPts val="1000"/>
+              </a:spcAft>
+            </a:pPr>
+            <a:r>
+              <a:rPr sz="1600" b="1" i="0">
+                <a:solidFill>
+                  <a:srgbClr val="15503A"/>
+                </a:solidFill>
+                <a:latin typeface="Calibri"/>
+              </a:rPr>
+              <a:t>•  </a:t>
+            </a:r>
+            <a:r>
+              <a:rPr sz="1600" b="1" i="0">
+                <a:solidFill>
+                  <a:srgbClr val="14241C"/>
+                </a:solidFill>
+                <a:latin typeface="Calibri"/>
+              </a:rPr>
+              <a:t>Nothing stored</a:t>
+            </a:r>
+            <a:r>
+              <a:rPr sz="1600" b="0" i="0">
+                <a:solidFill>
+                  <a:srgbClr val="14241C"/>
+                </a:solidFill>
+                <a:latin typeface="Calibri"/>
+              </a:rPr>
+              <a:t> — the app never holds your card or bank info</a:t>
+            </a:r>
+          </a:p>
+          <a:p>
+            <a:pPr algn="l">
+              <a:lnSpc>
+                <a:spcPct val="100000"/>
+              </a:lnSpc>
+              <a:spcBef>
+                <a:spcPts val="0"/>
+              </a:spcBef>
+              <a:spcAft>
+                <a:spcPts val="1000"/>
+              </a:spcAft>
+            </a:pPr>
+            <a:r>
+              <a:rPr sz="1600" b="1" i="0">
+                <a:solidFill>
+                  <a:srgbClr val="15503A"/>
+                </a:solidFill>
+                <a:latin typeface="Calibri"/>
+              </a:rPr>
+              <a:t>•  </a:t>
+            </a:r>
+            <a:r>
+              <a:rPr sz="1600" b="1" i="0">
+                <a:solidFill>
+                  <a:srgbClr val="14241C"/>
+                </a:solidFill>
+                <a:latin typeface="Calibri"/>
+              </a:rPr>
+              <a:t>$100 / adult</a:t>
+            </a:r>
+            <a:r>
+              <a:rPr sz="1600" b="0" i="0">
+                <a:solidFill>
+                  <a:srgbClr val="14241C"/>
+                </a:solidFill>
+                <a:latin typeface="Calibri"/>
+              </a:rPr>
+              <a:t> — kids' pricing being finalized</a:t>
+            </a:r>
+          </a:p>
+        </p:txBody>
+      </p:sp>
+      <p:sp>
+        <p:nvSpPr>
+          <p:cNvPr id="15" name="Rounded Rectangle 14"/>
+          <p:cNvSpPr/>
+          <p:nvPr/>
+        </p:nvSpPr>
+        <p:spPr>
+          <a:xfrm>
+            <a:off x="502920" y="5486400"/>
+            <a:ext cx="11201400" cy="566928"/>
+          </a:xfrm>
+          <a:prstGeom prst="roundRect">
+            <a:avLst>
+              <a:gd name="adj" fmla="val 6000"/>
+            </a:avLst>
+          </a:prstGeom>
+          <a:solidFill>
+            <a:srgbClr val="F3EEF0"/>
+          </a:solidFill>
+          <a:ln w="12700">
+            <a:solidFill>
+              <a:srgbClr val="E5E4DA"/>
+            </a:solidFill>
+          </a:ln>
+          <a:effectLst/>
+        </p:spPr>
+        <p:style>
+          <a:lnRef idx="1">
+            <a:schemeClr val="accent1"/>
+          </a:lnRef>
+          <a:fillRef idx="3">
+            <a:schemeClr val="accent1"/>
+          </a:fillRef>
+          <a:effectRef idx="2">
+            <a:schemeClr val="accent1"/>
+          </a:effectRef>
+          <a:fontRef idx="minor">
+            <a:schemeClr val="lt1"/>
+          </a:fontRef>
+        </p:style>
+        <p:txBody>
+          <a:bodyPr rtlCol="0" anchor="ctr"/>
+          <a:lstStyle/>
+          <a:p>
+            <a:pPr algn="ctr"/>
+          </a:p>
+        </p:txBody>
+      </p:sp>
+      <p:sp>
+        <p:nvSpPr>
+          <p:cNvPr id="16" name="TextBox 15"/>
+          <p:cNvSpPr txBox="1"/>
+          <p:nvPr/>
+        </p:nvSpPr>
+        <p:spPr>
+          <a:xfrm>
+            <a:off x="667512" y="5486400"/>
+            <a:ext cx="1828800" cy="566928"/>
+          </a:xfrm>
+          <a:prstGeom prst="rect">
+            <a:avLst/>
+          </a:prstGeom>
+          <a:noFill/>
+        </p:spPr>
+        <p:txBody>
+          <a:bodyPr wrap="square" anchor="ctr" lIns="25400" rIns="25400" tIns="12700" bIns="12700">
             <a:spAutoFit/>
           </a:bodyPr>
           <a:lstStyle/>
@@ -8957,27 +8918,27 @@
               </a:spcAft>
             </a:pPr>
             <a:r>
-              <a:rPr sz="1600" b="0" i="1">
-                <a:solidFill>
-                  <a:srgbClr val="14241C"/>
-                </a:solidFill>
-                <a:latin typeface="Calibri"/>
-              </a:rPr>
-              <a:t>“Dues are $100 an adult — pay right from here with Venmo or Zelle.”</a:t>
-            </a:r>
-          </a:p>
-        </p:txBody>
-      </p:sp>
-      <p:sp>
-        <p:nvSpPr>
-          <p:cNvPr id="15" name="TextBox 14"/>
+              <a:rPr sz="1200" b="1" i="0">
+                <a:solidFill>
+                  <a:srgbClr val="8B2E2E"/>
+                </a:solidFill>
+                <a:latin typeface="Calibri"/>
+              </a:rPr>
+              <a:t>💡 GOOD TO KNOW</a:t>
+            </a:r>
+          </a:p>
+        </p:txBody>
+      </p:sp>
+      <p:sp>
+        <p:nvSpPr>
+          <p:cNvPr id="17" name="TextBox 16"/>
           <p:cNvSpPr txBox="1"/>
           <p:nvPr/>
         </p:nvSpPr>
         <p:spPr>
           <a:xfrm>
-            <a:off x="502920" y="2944368"/>
-            <a:ext cx="11201400" cy="310896"/>
+            <a:off x="2560320" y="5486400"/>
+            <a:ext cx="9006840" cy="566928"/>
           </a:xfrm>
           <a:prstGeom prst="rect">
             <a:avLst/>
@@ -8985,7 +8946,7 @@
           <a:noFill/>
         </p:spPr>
         <p:txBody>
-          <a:bodyPr wrap="square" anchor="t" lIns="25400" rIns="25400" tIns="12700" bIns="12700">
+          <a:bodyPr wrap="square" anchor="ctr" lIns="25400" rIns="25400" tIns="12700" bIns="12700">
             <a:spAutoFit/>
           </a:bodyPr>
           <a:lstStyle/>
@@ -9002,333 +8963,12 @@
               </a:spcAft>
             </a:pPr>
             <a:r>
-              <a:rPr sz="1200" b="1" i="0">
-                <a:solidFill>
-                  <a:srgbClr val="6B7068"/>
-                </a:solidFill>
-                <a:latin typeface="Calibri"/>
-              </a:rPr>
-              <a:t>TALKING POINTS</a:t>
-            </a:r>
-          </a:p>
-        </p:txBody>
-      </p:sp>
-      <p:sp>
-        <p:nvSpPr>
-          <p:cNvPr id="16" name="TextBox 15"/>
-          <p:cNvSpPr txBox="1"/>
-          <p:nvPr/>
-        </p:nvSpPr>
-        <p:spPr>
-          <a:xfrm>
-            <a:off x="594360" y="3273552"/>
-            <a:ext cx="11018520" cy="2331720"/>
-          </a:xfrm>
-          <a:prstGeom prst="rect">
-            <a:avLst/>
-          </a:prstGeom>
-          <a:noFill/>
-        </p:spPr>
-        <p:txBody>
-          <a:bodyPr wrap="square" anchor="t" lIns="25400" rIns="25400" tIns="12700" bIns="12700">
-            <a:spAutoFit/>
-          </a:bodyPr>
-          <a:lstStyle/>
-          <a:p>
-            <a:pPr algn="l">
-              <a:lnSpc>
-                <a:spcPct val="100000"/>
-              </a:lnSpc>
-              <a:spcBef>
-                <a:spcPts val="0"/>
-              </a:spcBef>
-              <a:spcAft>
-                <a:spcPts val="900"/>
-              </a:spcAft>
-            </a:pPr>
-            <a:r>
-              <a:rPr sz="1600" b="1" i="0">
-                <a:solidFill>
-                  <a:srgbClr val="15503A"/>
-                </a:solidFill>
-                <a:latin typeface="Calibri"/>
-              </a:rPr>
-              <a:t>•  </a:t>
-            </a:r>
-            <a:r>
-              <a:rPr sz="1600" b="1" i="0">
+              <a:rPr sz="1300" b="0" i="0">
                 <a:solidFill>
                   <a:srgbClr val="14241C"/>
                 </a:solidFill>
                 <a:latin typeface="Calibri"/>
               </a:rPr>
-              <a:t>See who &amp; how</a:t>
-            </a:r>
-            <a:r>
-              <a:rPr sz="1600" b="0" i="0">
-                <a:solidFill>
-                  <a:srgbClr val="14241C"/>
-                </a:solidFill>
-                <a:latin typeface="Calibri"/>
-              </a:rPr>
-              <a:t> — Cathy Hofer collects; Venmo preferred, Zelle works too</a:t>
-            </a:r>
-          </a:p>
-          <a:p>
-            <a:pPr algn="l">
-              <a:lnSpc>
-                <a:spcPct val="100000"/>
-              </a:lnSpc>
-              <a:spcBef>
-                <a:spcPts val="0"/>
-              </a:spcBef>
-              <a:spcAft>
-                <a:spcPts val="900"/>
-              </a:spcAft>
-            </a:pPr>
-            <a:r>
-              <a:rPr sz="1600" b="1" i="0">
-                <a:solidFill>
-                  <a:srgbClr val="15503A"/>
-                </a:solidFill>
-                <a:latin typeface="Calibri"/>
-              </a:rPr>
-              <a:t>•  </a:t>
-            </a:r>
-            <a:r>
-              <a:rPr sz="1600" b="1" i="0">
-                <a:solidFill>
-                  <a:srgbClr val="14241C"/>
-                </a:solidFill>
-                <a:latin typeface="Calibri"/>
-              </a:rPr>
-              <a:t>One tap opens</a:t>
-            </a:r>
-            <a:r>
-              <a:rPr sz="1600" b="0" i="0">
-                <a:solidFill>
-                  <a:srgbClr val="14241C"/>
-                </a:solidFill>
-                <a:latin typeface="Calibri"/>
-              </a:rPr>
-              <a:t> — your Venmo/Zelle app with the handle ready</a:t>
-            </a:r>
-          </a:p>
-          <a:p>
-            <a:pPr algn="l">
-              <a:lnSpc>
-                <a:spcPct val="100000"/>
-              </a:lnSpc>
-              <a:spcBef>
-                <a:spcPts val="0"/>
-              </a:spcBef>
-              <a:spcAft>
-                <a:spcPts val="900"/>
-              </a:spcAft>
-            </a:pPr>
-            <a:r>
-              <a:rPr sz="1600" b="1" i="0">
-                <a:solidFill>
-                  <a:srgbClr val="15503A"/>
-                </a:solidFill>
-                <a:latin typeface="Calibri"/>
-              </a:rPr>
-              <a:t>•  </a:t>
-            </a:r>
-            <a:r>
-              <a:rPr sz="1600" b="1" i="0">
-                <a:solidFill>
-                  <a:srgbClr val="14241C"/>
-                </a:solidFill>
-                <a:latin typeface="Calibri"/>
-              </a:rPr>
-              <a:t>Nothing stored</a:t>
-            </a:r>
-            <a:r>
-              <a:rPr sz="1600" b="0" i="0">
-                <a:solidFill>
-                  <a:srgbClr val="14241C"/>
-                </a:solidFill>
-                <a:latin typeface="Calibri"/>
-              </a:rPr>
-              <a:t> — the app never holds your card or bank info</a:t>
-            </a:r>
-          </a:p>
-          <a:p>
-            <a:pPr algn="l">
-              <a:lnSpc>
-                <a:spcPct val="100000"/>
-              </a:lnSpc>
-              <a:spcBef>
-                <a:spcPts val="0"/>
-              </a:spcBef>
-              <a:spcAft>
-                <a:spcPts val="900"/>
-              </a:spcAft>
-            </a:pPr>
-            <a:r>
-              <a:rPr sz="1600" b="1" i="0">
-                <a:solidFill>
-                  <a:srgbClr val="15503A"/>
-                </a:solidFill>
-                <a:latin typeface="Calibri"/>
-              </a:rPr>
-              <a:t>•  </a:t>
-            </a:r>
-            <a:r>
-              <a:rPr sz="1600" b="1" i="0">
-                <a:solidFill>
-                  <a:srgbClr val="14241C"/>
-                </a:solidFill>
-                <a:latin typeface="Calibri"/>
-              </a:rPr>
-              <a:t>$100 / adult</a:t>
-            </a:r>
-            <a:r>
-              <a:rPr sz="1600" b="0" i="0">
-                <a:solidFill>
-                  <a:srgbClr val="14241C"/>
-                </a:solidFill>
-                <a:latin typeface="Calibri"/>
-              </a:rPr>
-              <a:t> — kids' pricing being finalized</a:t>
-            </a:r>
-          </a:p>
-        </p:txBody>
-      </p:sp>
-      <p:sp>
-        <p:nvSpPr>
-          <p:cNvPr id="17" name="Rounded Rectangle 16"/>
-          <p:cNvSpPr/>
-          <p:nvPr/>
-        </p:nvSpPr>
-        <p:spPr>
-          <a:xfrm>
-            <a:off x="502920" y="5486400"/>
-            <a:ext cx="11201400" cy="566928"/>
-          </a:xfrm>
-          <a:prstGeom prst="roundRect">
-            <a:avLst>
-              <a:gd name="adj" fmla="val 6000"/>
-            </a:avLst>
-          </a:prstGeom>
-          <a:solidFill>
-            <a:srgbClr val="F3EEF0"/>
-          </a:solidFill>
-          <a:ln w="12700">
-            <a:solidFill>
-              <a:srgbClr val="E5E4DA"/>
-            </a:solidFill>
-          </a:ln>
-          <a:effectLst/>
-        </p:spPr>
-        <p:style>
-          <a:lnRef idx="1">
-            <a:schemeClr val="accent1"/>
-          </a:lnRef>
-          <a:fillRef idx="3">
-            <a:schemeClr val="accent1"/>
-          </a:fillRef>
-          <a:effectRef idx="2">
-            <a:schemeClr val="accent1"/>
-          </a:effectRef>
-          <a:fontRef idx="minor">
-            <a:schemeClr val="lt1"/>
-          </a:fontRef>
-        </p:style>
-        <p:txBody>
-          <a:bodyPr rtlCol="0" anchor="ctr"/>
-          <a:lstStyle/>
-          <a:p>
-            <a:pPr algn="ctr"/>
-          </a:p>
-        </p:txBody>
-      </p:sp>
-      <p:sp>
-        <p:nvSpPr>
-          <p:cNvPr id="18" name="TextBox 17"/>
-          <p:cNvSpPr txBox="1"/>
-          <p:nvPr/>
-        </p:nvSpPr>
-        <p:spPr>
-          <a:xfrm>
-            <a:off x="667512" y="5486400"/>
-            <a:ext cx="1463040" cy="566928"/>
-          </a:xfrm>
-          <a:prstGeom prst="rect">
-            <a:avLst/>
-          </a:prstGeom>
-          <a:noFill/>
-        </p:spPr>
-        <p:txBody>
-          <a:bodyPr wrap="square" anchor="ctr" lIns="25400" rIns="25400" tIns="12700" bIns="12700">
-            <a:spAutoFit/>
-          </a:bodyPr>
-          <a:lstStyle/>
-          <a:p>
-            <a:pPr algn="l">
-              <a:lnSpc>
-                <a:spcPct val="100000"/>
-              </a:lnSpc>
-              <a:spcBef>
-                <a:spcPts val="0"/>
-              </a:spcBef>
-              <a:spcAft>
-                <a:spcPts val="400"/>
-              </a:spcAft>
-            </a:pPr>
-            <a:r>
-              <a:rPr sz="1200" b="1" i="0">
-                <a:solidFill>
-                  <a:srgbClr val="8B2E2E"/>
-                </a:solidFill>
-                <a:latin typeface="Calibri"/>
-              </a:rPr>
-              <a:t>❓ IF ASKED</a:t>
-            </a:r>
-          </a:p>
-        </p:txBody>
-      </p:sp>
-      <p:sp>
-        <p:nvSpPr>
-          <p:cNvPr id="19" name="TextBox 18"/>
-          <p:cNvSpPr txBox="1"/>
-          <p:nvPr/>
-        </p:nvSpPr>
-        <p:spPr>
-          <a:xfrm>
-            <a:off x="2103120" y="5486400"/>
-            <a:ext cx="9464040" cy="566928"/>
-          </a:xfrm>
-          <a:prstGeom prst="rect">
-            <a:avLst/>
-          </a:prstGeom>
-          <a:noFill/>
-        </p:spPr>
-        <p:txBody>
-          <a:bodyPr wrap="square" anchor="ctr" lIns="25400" rIns="25400" tIns="12700" bIns="12700">
-            <a:spAutoFit/>
-          </a:bodyPr>
-          <a:lstStyle/>
-          <a:p>
-            <a:pPr algn="l">
-              <a:lnSpc>
-                <a:spcPct val="100000"/>
-              </a:lnSpc>
-              <a:spcBef>
-                <a:spcPts val="0"/>
-              </a:spcBef>
-              <a:spcAft>
-                <a:spcPts val="400"/>
-              </a:spcAft>
-            </a:pPr>
-            <a:r>
-              <a:rPr sz="1300" b="0" i="0">
-                <a:solidFill>
-                  <a:srgbClr val="14241C"/>
-                </a:solidFill>
-                <a:latin typeface="Calibri"/>
-              </a:rPr>
               <a:t>“The app just hands you off to Venmo — your money stays in your own apps.”</a:t>
             </a:r>
           </a:p>
@@ -9336,7 +8976,7 @@
       </p:sp>
       <p:sp>
         <p:nvSpPr>
-          <p:cNvPr id="20" name="Rounded Rectangle 19"/>
+          <p:cNvPr id="18" name="Rounded Rectangle 17"/>
           <p:cNvSpPr/>
           <p:nvPr/>
         </p:nvSpPr>
@@ -9382,7 +9022,7 @@
       </p:sp>
       <p:sp>
         <p:nvSpPr>
-          <p:cNvPr id="21" name="Rounded Rectangle 20"/>
+          <p:cNvPr id="19" name="Rounded Rectangle 18"/>
           <p:cNvSpPr/>
           <p:nvPr/>
         </p:nvSpPr>
@@ -9428,7 +9068,7 @@
       </p:sp>
       <p:sp>
         <p:nvSpPr>
-          <p:cNvPr id="22" name="TextBox 21"/>
+          <p:cNvPr id="20" name="TextBox 19"/>
           <p:cNvSpPr txBox="1"/>
           <p:nvPr/>
         </p:nvSpPr>
@@ -9824,7 +9464,7 @@
         <p:spPr>
           <a:xfrm>
             <a:off x="667512" y="1298448"/>
-            <a:ext cx="1554480" cy="603504"/>
+            <a:ext cx="1463040" cy="603504"/>
           </a:xfrm>
           <a:prstGeom prst="rect">
             <a:avLst/>
@@ -9855,7 +9495,7 @@
                 </a:solidFill>
                 <a:latin typeface="Calibri"/>
               </a:rPr>
-              <a:t>▶  ON SCREEN</a:t>
+              <a:t>📍  FIND IT</a:t>
             </a:r>
           </a:p>
         </p:txBody>
@@ -9868,8 +9508,8 @@
         </p:nvSpPr>
         <p:spPr>
           <a:xfrm>
-            <a:off x="2286000" y="1298448"/>
-            <a:ext cx="9281160" cy="603504"/>
+            <a:off x="2194560" y="1298448"/>
+            <a:ext cx="9372600" cy="603504"/>
           </a:xfrm>
           <a:prstGeom prst="rect">
             <a:avLst/>
@@ -9900,7 +9540,7 @@
                 </a:solidFill>
                 <a:latin typeface="Calibri"/>
               </a:rPr>
-              <a:t>Open the Activity tab (🔔). Then Profile → Notifications to show the switches.</a:t>
+              <a:t>Activity tab (bell)  ·  Profile  →  Notifications</a:t>
             </a:r>
           </a:p>
         </p:txBody>
@@ -9914,7 +9554,7 @@
         <p:spPr>
           <a:xfrm>
             <a:off x="502920" y="2029968"/>
-            <a:ext cx="11201400" cy="749808"/>
+            <a:ext cx="11201400" cy="786384"/>
           </a:xfrm>
           <a:prstGeom prst="roundRect">
             <a:avLst>
@@ -9962,7 +9602,7 @@
         <p:spPr>
           <a:xfrm>
             <a:off x="502920" y="2029968"/>
-            <a:ext cx="73152" cy="749808"/>
+            <a:ext cx="91440" cy="786384"/>
           </a:xfrm>
           <a:prstGeom prst="rect">
             <a:avLst/>
@@ -10005,8 +9645,8 @@
         </p:nvSpPr>
         <p:spPr>
           <a:xfrm>
-            <a:off x="704088" y="2075688"/>
-            <a:ext cx="1280160" cy="292608"/>
+            <a:off x="813816" y="2029968"/>
+            <a:ext cx="10698480" cy="786384"/>
           </a:xfrm>
           <a:prstGeom prst="rect">
             <a:avLst/>
@@ -10014,7 +9654,7 @@
           <a:noFill/>
         </p:spPr>
         <p:txBody>
-          <a:bodyPr wrap="square" anchor="t" lIns="25400" rIns="25400" tIns="12700" bIns="12700">
+          <a:bodyPr wrap="square" anchor="ctr" lIns="25400" rIns="25400" tIns="12700" bIns="12700">
             <a:spAutoFit/>
           </a:bodyPr>
           <a:lstStyle/>
@@ -10031,13 +9671,13 @@
               </a:spcAft>
             </a:pPr>
             <a:r>
-              <a:rPr sz="1200" b="1" i="0">
-                <a:solidFill>
-                  <a:srgbClr val="C2410C"/>
-                </a:solidFill>
-                <a:latin typeface="Calibri"/>
-              </a:rPr>
-              <a:t>🗣  SAY</a:t>
+              <a:rPr sz="1800" b="1" i="0">
+                <a:solidFill>
+                  <a:srgbClr val="14241C"/>
+                </a:solidFill>
+                <a:latin typeface="Calibri"/>
+              </a:rPr>
+              <a:t>The bell tab is everything that happened involving you — and you control what pings your phone.</a:t>
             </a:r>
           </a:p>
         </p:txBody>
@@ -10050,8 +9690,8 @@
         </p:nvSpPr>
         <p:spPr>
           <a:xfrm>
-            <a:off x="704088" y="2304288"/>
-            <a:ext cx="10789920" cy="475488"/>
+            <a:off x="594360" y="3035808"/>
+            <a:ext cx="11018520" cy="2468880"/>
           </a:xfrm>
           <a:prstGeom prst="rect">
             <a:avLst/>
@@ -10060,6 +9700,237 @@
         </p:spPr>
         <p:txBody>
           <a:bodyPr wrap="square" anchor="t" lIns="25400" rIns="25400" tIns="12700" bIns="12700">
+            <a:spAutoFit/>
+          </a:bodyPr>
+          <a:lstStyle/>
+          <a:p>
+            <a:pPr algn="l">
+              <a:lnSpc>
+                <a:spcPct val="100000"/>
+              </a:lnSpc>
+              <a:spcBef>
+                <a:spcPts val="0"/>
+              </a:spcBef>
+              <a:spcAft>
+                <a:spcPts val="1000"/>
+              </a:spcAft>
+            </a:pPr>
+            <a:r>
+              <a:rPr sz="1600" b="1" i="0">
+                <a:solidFill>
+                  <a:srgbClr val="15503A"/>
+                </a:solidFill>
+                <a:latin typeface="Calibri"/>
+              </a:rPr>
+              <a:t>•  </a:t>
+            </a:r>
+            <a:r>
+              <a:rPr sz="1600" b="1" i="0">
+                <a:solidFill>
+                  <a:srgbClr val="14241C"/>
+                </a:solidFill>
+                <a:latin typeface="Calibri"/>
+              </a:rPr>
+              <a:t>Activity feed</a:t>
+            </a:r>
+            <a:r>
+              <a:rPr sz="1600" b="0" i="0">
+                <a:solidFill>
+                  <a:srgbClr val="14241C"/>
+                </a:solidFill>
+                <a:latin typeface="Calibri"/>
+              </a:rPr>
+              <a:t> — comments, @mentions, reactions, approvals, alerts</a:t>
+            </a:r>
+          </a:p>
+          <a:p>
+            <a:pPr algn="l">
+              <a:lnSpc>
+                <a:spcPct val="100000"/>
+              </a:lnSpc>
+              <a:spcBef>
+                <a:spcPts val="0"/>
+              </a:spcBef>
+              <a:spcAft>
+                <a:spcPts val="1000"/>
+              </a:spcAft>
+            </a:pPr>
+            <a:r>
+              <a:rPr sz="1600" b="1" i="0">
+                <a:solidFill>
+                  <a:srgbClr val="15503A"/>
+                </a:solidFill>
+                <a:latin typeface="Calibri"/>
+              </a:rPr>
+              <a:t>•  </a:t>
+            </a:r>
+            <a:r>
+              <a:rPr sz="1600" b="1" i="0">
+                <a:solidFill>
+                  <a:srgbClr val="14241C"/>
+                </a:solidFill>
+                <a:latin typeface="Calibri"/>
+              </a:rPr>
+              <a:t>Red badge</a:t>
+            </a:r>
+            <a:r>
+              <a:rPr sz="1600" b="0" i="0">
+                <a:solidFill>
+                  <a:srgbClr val="14241C"/>
+                </a:solidFill>
+                <a:latin typeface="Calibri"/>
+              </a:rPr>
+              <a:t> — shows when something's new</a:t>
+            </a:r>
+          </a:p>
+          <a:p>
+            <a:pPr algn="l">
+              <a:lnSpc>
+                <a:spcPct val="100000"/>
+              </a:lnSpc>
+              <a:spcBef>
+                <a:spcPts val="0"/>
+              </a:spcBef>
+              <a:spcAft>
+                <a:spcPts val="1000"/>
+              </a:spcAft>
+            </a:pPr>
+            <a:r>
+              <a:rPr sz="1600" b="1" i="0">
+                <a:solidFill>
+                  <a:srgbClr val="15503A"/>
+                </a:solidFill>
+                <a:latin typeface="Calibri"/>
+              </a:rPr>
+              <a:t>•  </a:t>
+            </a:r>
+            <a:r>
+              <a:rPr sz="1600" b="1" i="0">
+                <a:solidFill>
+                  <a:srgbClr val="14241C"/>
+                </a:solidFill>
+                <a:latin typeface="Calibri"/>
+              </a:rPr>
+              <a:t>Push to your phone</a:t>
+            </a:r>
+            <a:r>
+              <a:rPr sz="1600" b="0" i="0">
+                <a:solidFill>
+                  <a:srgbClr val="14241C"/>
+                </a:solidFill>
+                <a:latin typeface="Calibri"/>
+              </a:rPr>
+              <a:t> — turn on alerts you care about, mute the rest</a:t>
+            </a:r>
+          </a:p>
+          <a:p>
+            <a:pPr algn="l">
+              <a:lnSpc>
+                <a:spcPct val="100000"/>
+              </a:lnSpc>
+              <a:spcBef>
+                <a:spcPts val="0"/>
+              </a:spcBef>
+              <a:spcAft>
+                <a:spcPts val="1000"/>
+              </a:spcAft>
+            </a:pPr>
+            <a:r>
+              <a:rPr sz="1600" b="1" i="0">
+                <a:solidFill>
+                  <a:srgbClr val="15503A"/>
+                </a:solidFill>
+                <a:latin typeface="Calibri"/>
+              </a:rPr>
+              <a:t>•  </a:t>
+            </a:r>
+            <a:r>
+              <a:rPr sz="1600" b="1" i="0">
+                <a:solidFill>
+                  <a:srgbClr val="14241C"/>
+                </a:solidFill>
+                <a:latin typeface="Calibri"/>
+              </a:rPr>
+              <a:t>Admin announcements</a:t>
+            </a:r>
+            <a:r>
+              <a:rPr sz="1600" b="0" i="0">
+                <a:solidFill>
+                  <a:srgbClr val="14241C"/>
+                </a:solidFill>
+                <a:latin typeface="Calibri"/>
+              </a:rPr>
+              <a:t> — important notices reach everyone</a:t>
+            </a:r>
+          </a:p>
+        </p:txBody>
+      </p:sp>
+      <p:sp>
+        <p:nvSpPr>
+          <p:cNvPr id="15" name="Rounded Rectangle 14"/>
+          <p:cNvSpPr/>
+          <p:nvPr/>
+        </p:nvSpPr>
+        <p:spPr>
+          <a:xfrm>
+            <a:off x="502920" y="5486400"/>
+            <a:ext cx="11201400" cy="566928"/>
+          </a:xfrm>
+          <a:prstGeom prst="roundRect">
+            <a:avLst>
+              <a:gd name="adj" fmla="val 6000"/>
+            </a:avLst>
+          </a:prstGeom>
+          <a:solidFill>
+            <a:srgbClr val="F3EEF0"/>
+          </a:solidFill>
+          <a:ln w="12700">
+            <a:solidFill>
+              <a:srgbClr val="E5E4DA"/>
+            </a:solidFill>
+          </a:ln>
+          <a:effectLst/>
+        </p:spPr>
+        <p:style>
+          <a:lnRef idx="1">
+            <a:schemeClr val="accent1"/>
+          </a:lnRef>
+          <a:fillRef idx="3">
+            <a:schemeClr val="accent1"/>
+          </a:fillRef>
+          <a:effectRef idx="2">
+            <a:schemeClr val="accent1"/>
+          </a:effectRef>
+          <a:fontRef idx="minor">
+            <a:schemeClr val="lt1"/>
+          </a:fontRef>
+        </p:style>
+        <p:txBody>
+          <a:bodyPr rtlCol="0" anchor="ctr"/>
+          <a:lstStyle/>
+          <a:p>
+            <a:pPr algn="ctr"/>
+          </a:p>
+        </p:txBody>
+      </p:sp>
+      <p:sp>
+        <p:nvSpPr>
+          <p:cNvPr id="16" name="TextBox 15"/>
+          <p:cNvSpPr txBox="1"/>
+          <p:nvPr/>
+        </p:nvSpPr>
+        <p:spPr>
+          <a:xfrm>
+            <a:off x="667512" y="5486400"/>
+            <a:ext cx="1828800" cy="566928"/>
+          </a:xfrm>
+          <a:prstGeom prst="rect">
+            <a:avLst/>
+          </a:prstGeom>
+          <a:noFill/>
+        </p:spPr>
+        <p:txBody>
+          <a:bodyPr wrap="square" anchor="ctr" lIns="25400" rIns="25400" tIns="12700" bIns="12700">
             <a:spAutoFit/>
           </a:bodyPr>
           <a:lstStyle/>
@@ -10076,27 +9947,27 @@
               </a:spcAft>
             </a:pPr>
             <a:r>
-              <a:rPr sz="1600" b="0" i="1">
-                <a:solidFill>
-                  <a:srgbClr val="14241C"/>
-                </a:solidFill>
-                <a:latin typeface="Calibri"/>
-              </a:rPr>
-              <a:t>“The bell tab is everything that happened involving you — and you control what pings your phone.”</a:t>
-            </a:r>
-          </a:p>
-        </p:txBody>
-      </p:sp>
-      <p:sp>
-        <p:nvSpPr>
-          <p:cNvPr id="15" name="TextBox 14"/>
+              <a:rPr sz="1200" b="1" i="0">
+                <a:solidFill>
+                  <a:srgbClr val="8B2E2E"/>
+                </a:solidFill>
+                <a:latin typeface="Calibri"/>
+              </a:rPr>
+              <a:t>💡 GOOD TO KNOW</a:t>
+            </a:r>
+          </a:p>
+        </p:txBody>
+      </p:sp>
+      <p:sp>
+        <p:nvSpPr>
+          <p:cNvPr id="17" name="TextBox 16"/>
           <p:cNvSpPr txBox="1"/>
           <p:nvPr/>
         </p:nvSpPr>
         <p:spPr>
           <a:xfrm>
-            <a:off x="502920" y="2944368"/>
-            <a:ext cx="11201400" cy="310896"/>
+            <a:off x="2560320" y="5486400"/>
+            <a:ext cx="9006840" cy="566928"/>
           </a:xfrm>
           <a:prstGeom prst="rect">
             <a:avLst/>
@@ -10104,7 +9975,7 @@
           <a:noFill/>
         </p:spPr>
         <p:txBody>
-          <a:bodyPr wrap="square" anchor="t" lIns="25400" rIns="25400" tIns="12700" bIns="12700">
+          <a:bodyPr wrap="square" anchor="ctr" lIns="25400" rIns="25400" tIns="12700" bIns="12700">
             <a:spAutoFit/>
           </a:bodyPr>
           <a:lstStyle/>
@@ -10121,333 +9992,12 @@
               </a:spcAft>
             </a:pPr>
             <a:r>
-              <a:rPr sz="1200" b="1" i="0">
-                <a:solidFill>
-                  <a:srgbClr val="6B7068"/>
-                </a:solidFill>
-                <a:latin typeface="Calibri"/>
-              </a:rPr>
-              <a:t>TALKING POINTS</a:t>
-            </a:r>
-          </a:p>
-        </p:txBody>
-      </p:sp>
-      <p:sp>
-        <p:nvSpPr>
-          <p:cNvPr id="16" name="TextBox 15"/>
-          <p:cNvSpPr txBox="1"/>
-          <p:nvPr/>
-        </p:nvSpPr>
-        <p:spPr>
-          <a:xfrm>
-            <a:off x="594360" y="3273552"/>
-            <a:ext cx="11018520" cy="2331720"/>
-          </a:xfrm>
-          <a:prstGeom prst="rect">
-            <a:avLst/>
-          </a:prstGeom>
-          <a:noFill/>
-        </p:spPr>
-        <p:txBody>
-          <a:bodyPr wrap="square" anchor="t" lIns="25400" rIns="25400" tIns="12700" bIns="12700">
-            <a:spAutoFit/>
-          </a:bodyPr>
-          <a:lstStyle/>
-          <a:p>
-            <a:pPr algn="l">
-              <a:lnSpc>
-                <a:spcPct val="100000"/>
-              </a:lnSpc>
-              <a:spcBef>
-                <a:spcPts val="0"/>
-              </a:spcBef>
-              <a:spcAft>
-                <a:spcPts val="900"/>
-              </a:spcAft>
-            </a:pPr>
-            <a:r>
-              <a:rPr sz="1600" b="1" i="0">
-                <a:solidFill>
-                  <a:srgbClr val="15503A"/>
-                </a:solidFill>
-                <a:latin typeface="Calibri"/>
-              </a:rPr>
-              <a:t>•  </a:t>
-            </a:r>
-            <a:r>
-              <a:rPr sz="1600" b="1" i="0">
+              <a:rPr sz="1300" b="0" i="0">
                 <a:solidFill>
                   <a:srgbClr val="14241C"/>
                 </a:solidFill>
                 <a:latin typeface="Calibri"/>
               </a:rPr>
-              <a:t>Activity feed</a:t>
-            </a:r>
-            <a:r>
-              <a:rPr sz="1600" b="0" i="0">
-                <a:solidFill>
-                  <a:srgbClr val="14241C"/>
-                </a:solidFill>
-                <a:latin typeface="Calibri"/>
-              </a:rPr>
-              <a:t> — comments, @mentions, reactions, approvals, alerts</a:t>
-            </a:r>
-          </a:p>
-          <a:p>
-            <a:pPr algn="l">
-              <a:lnSpc>
-                <a:spcPct val="100000"/>
-              </a:lnSpc>
-              <a:spcBef>
-                <a:spcPts val="0"/>
-              </a:spcBef>
-              <a:spcAft>
-                <a:spcPts val="900"/>
-              </a:spcAft>
-            </a:pPr>
-            <a:r>
-              <a:rPr sz="1600" b="1" i="0">
-                <a:solidFill>
-                  <a:srgbClr val="15503A"/>
-                </a:solidFill>
-                <a:latin typeface="Calibri"/>
-              </a:rPr>
-              <a:t>•  </a:t>
-            </a:r>
-            <a:r>
-              <a:rPr sz="1600" b="1" i="0">
-                <a:solidFill>
-                  <a:srgbClr val="14241C"/>
-                </a:solidFill>
-                <a:latin typeface="Calibri"/>
-              </a:rPr>
-              <a:t>Red badge</a:t>
-            </a:r>
-            <a:r>
-              <a:rPr sz="1600" b="0" i="0">
-                <a:solidFill>
-                  <a:srgbClr val="14241C"/>
-                </a:solidFill>
-                <a:latin typeface="Calibri"/>
-              </a:rPr>
-              <a:t> — shows when something's new</a:t>
-            </a:r>
-          </a:p>
-          <a:p>
-            <a:pPr algn="l">
-              <a:lnSpc>
-                <a:spcPct val="100000"/>
-              </a:lnSpc>
-              <a:spcBef>
-                <a:spcPts val="0"/>
-              </a:spcBef>
-              <a:spcAft>
-                <a:spcPts val="900"/>
-              </a:spcAft>
-            </a:pPr>
-            <a:r>
-              <a:rPr sz="1600" b="1" i="0">
-                <a:solidFill>
-                  <a:srgbClr val="15503A"/>
-                </a:solidFill>
-                <a:latin typeface="Calibri"/>
-              </a:rPr>
-              <a:t>•  </a:t>
-            </a:r>
-            <a:r>
-              <a:rPr sz="1600" b="1" i="0">
-                <a:solidFill>
-                  <a:srgbClr val="14241C"/>
-                </a:solidFill>
-                <a:latin typeface="Calibri"/>
-              </a:rPr>
-              <a:t>Push to your phone</a:t>
-            </a:r>
-            <a:r>
-              <a:rPr sz="1600" b="0" i="0">
-                <a:solidFill>
-                  <a:srgbClr val="14241C"/>
-                </a:solidFill>
-                <a:latin typeface="Calibri"/>
-              </a:rPr>
-              <a:t> — turn on alerts you care about, mute the rest</a:t>
-            </a:r>
-          </a:p>
-          <a:p>
-            <a:pPr algn="l">
-              <a:lnSpc>
-                <a:spcPct val="100000"/>
-              </a:lnSpc>
-              <a:spcBef>
-                <a:spcPts val="0"/>
-              </a:spcBef>
-              <a:spcAft>
-                <a:spcPts val="900"/>
-              </a:spcAft>
-            </a:pPr>
-            <a:r>
-              <a:rPr sz="1600" b="1" i="0">
-                <a:solidFill>
-                  <a:srgbClr val="15503A"/>
-                </a:solidFill>
-                <a:latin typeface="Calibri"/>
-              </a:rPr>
-              <a:t>•  </a:t>
-            </a:r>
-            <a:r>
-              <a:rPr sz="1600" b="1" i="0">
-                <a:solidFill>
-                  <a:srgbClr val="14241C"/>
-                </a:solidFill>
-                <a:latin typeface="Calibri"/>
-              </a:rPr>
-              <a:t>Admin announcements</a:t>
-            </a:r>
-            <a:r>
-              <a:rPr sz="1600" b="0" i="0">
-                <a:solidFill>
-                  <a:srgbClr val="14241C"/>
-                </a:solidFill>
-                <a:latin typeface="Calibri"/>
-              </a:rPr>
-              <a:t> — important notices reach everyone</a:t>
-            </a:r>
-          </a:p>
-        </p:txBody>
-      </p:sp>
-      <p:sp>
-        <p:nvSpPr>
-          <p:cNvPr id="17" name="Rounded Rectangle 16"/>
-          <p:cNvSpPr/>
-          <p:nvPr/>
-        </p:nvSpPr>
-        <p:spPr>
-          <a:xfrm>
-            <a:off x="502920" y="5486400"/>
-            <a:ext cx="11201400" cy="566928"/>
-          </a:xfrm>
-          <a:prstGeom prst="roundRect">
-            <a:avLst>
-              <a:gd name="adj" fmla="val 6000"/>
-            </a:avLst>
-          </a:prstGeom>
-          <a:solidFill>
-            <a:srgbClr val="F3EEF0"/>
-          </a:solidFill>
-          <a:ln w="12700">
-            <a:solidFill>
-              <a:srgbClr val="E5E4DA"/>
-            </a:solidFill>
-          </a:ln>
-          <a:effectLst/>
-        </p:spPr>
-        <p:style>
-          <a:lnRef idx="1">
-            <a:schemeClr val="accent1"/>
-          </a:lnRef>
-          <a:fillRef idx="3">
-            <a:schemeClr val="accent1"/>
-          </a:fillRef>
-          <a:effectRef idx="2">
-            <a:schemeClr val="accent1"/>
-          </a:effectRef>
-          <a:fontRef idx="minor">
-            <a:schemeClr val="lt1"/>
-          </a:fontRef>
-        </p:style>
-        <p:txBody>
-          <a:bodyPr rtlCol="0" anchor="ctr"/>
-          <a:lstStyle/>
-          <a:p>
-            <a:pPr algn="ctr"/>
-          </a:p>
-        </p:txBody>
-      </p:sp>
-      <p:sp>
-        <p:nvSpPr>
-          <p:cNvPr id="18" name="TextBox 17"/>
-          <p:cNvSpPr txBox="1"/>
-          <p:nvPr/>
-        </p:nvSpPr>
-        <p:spPr>
-          <a:xfrm>
-            <a:off x="667512" y="5486400"/>
-            <a:ext cx="1463040" cy="566928"/>
-          </a:xfrm>
-          <a:prstGeom prst="rect">
-            <a:avLst/>
-          </a:prstGeom>
-          <a:noFill/>
-        </p:spPr>
-        <p:txBody>
-          <a:bodyPr wrap="square" anchor="ctr" lIns="25400" rIns="25400" tIns="12700" bIns="12700">
-            <a:spAutoFit/>
-          </a:bodyPr>
-          <a:lstStyle/>
-          <a:p>
-            <a:pPr algn="l">
-              <a:lnSpc>
-                <a:spcPct val="100000"/>
-              </a:lnSpc>
-              <a:spcBef>
-                <a:spcPts val="0"/>
-              </a:spcBef>
-              <a:spcAft>
-                <a:spcPts val="400"/>
-              </a:spcAft>
-            </a:pPr>
-            <a:r>
-              <a:rPr sz="1200" b="1" i="0">
-                <a:solidFill>
-                  <a:srgbClr val="8B2E2E"/>
-                </a:solidFill>
-                <a:latin typeface="Calibri"/>
-              </a:rPr>
-              <a:t>❓ IF ASKED</a:t>
-            </a:r>
-          </a:p>
-        </p:txBody>
-      </p:sp>
-      <p:sp>
-        <p:nvSpPr>
-          <p:cNvPr id="19" name="TextBox 18"/>
-          <p:cNvSpPr txBox="1"/>
-          <p:nvPr/>
-        </p:nvSpPr>
-        <p:spPr>
-          <a:xfrm>
-            <a:off x="2103120" y="5486400"/>
-            <a:ext cx="9464040" cy="566928"/>
-          </a:xfrm>
-          <a:prstGeom prst="rect">
-            <a:avLst/>
-          </a:prstGeom>
-          <a:noFill/>
-        </p:spPr>
-        <p:txBody>
-          <a:bodyPr wrap="square" anchor="ctr" lIns="25400" rIns="25400" tIns="12700" bIns="12700">
-            <a:spAutoFit/>
-          </a:bodyPr>
-          <a:lstStyle/>
-          <a:p>
-            <a:pPr algn="l">
-              <a:lnSpc>
-                <a:spcPct val="100000"/>
-              </a:lnSpc>
-              <a:spcBef>
-                <a:spcPts val="0"/>
-              </a:spcBef>
-              <a:spcAft>
-                <a:spcPts val="400"/>
-              </a:spcAft>
-            </a:pPr>
-            <a:r>
-              <a:rPr sz="1300" b="0" i="0">
-                <a:solidFill>
-                  <a:srgbClr val="14241C"/>
-                </a:solidFill>
-                <a:latin typeface="Calibri"/>
-              </a:rPr>
               <a:t>“You pick exactly what notifies you — you won't get spammed.”</a:t>
             </a:r>
           </a:p>
@@ -10455,7 +10005,7 @@
       </p:sp>
       <p:sp>
         <p:nvSpPr>
-          <p:cNvPr id="20" name="Rounded Rectangle 19"/>
+          <p:cNvPr id="18" name="Rounded Rectangle 17"/>
           <p:cNvSpPr/>
           <p:nvPr/>
         </p:nvSpPr>
@@ -10501,7 +10051,7 @@
       </p:sp>
       <p:sp>
         <p:nvSpPr>
-          <p:cNvPr id="21" name="Rounded Rectangle 20"/>
+          <p:cNvPr id="19" name="Rounded Rectangle 18"/>
           <p:cNvSpPr/>
           <p:nvPr/>
         </p:nvSpPr>
@@ -10547,7 +10097,7 @@
       </p:sp>
       <p:sp>
         <p:nvSpPr>
-          <p:cNvPr id="22" name="TextBox 21"/>
+          <p:cNvPr id="20" name="TextBox 19"/>
           <p:cNvSpPr txBox="1"/>
           <p:nvPr/>
         </p:nvSpPr>
@@ -10943,7 +10493,7 @@
         <p:spPr>
           <a:xfrm>
             <a:off x="667512" y="1298448"/>
-            <a:ext cx="1554480" cy="603504"/>
+            <a:ext cx="1463040" cy="603504"/>
           </a:xfrm>
           <a:prstGeom prst="rect">
             <a:avLst/>
@@ -10974,7 +10524,7 @@
                 </a:solidFill>
                 <a:latin typeface="Calibri"/>
               </a:rPr>
-              <a:t>▶  ON SCREEN</a:t>
+              <a:t>📍  FIND IT</a:t>
             </a:r>
           </a:p>
         </p:txBody>
@@ -10987,8 +10537,8 @@
         </p:nvSpPr>
         <p:spPr>
           <a:xfrm>
-            <a:off x="2286000" y="1298448"/>
-            <a:ext cx="9281160" cy="603504"/>
+            <a:off x="2194560" y="1298448"/>
+            <a:ext cx="9372600" cy="603504"/>
           </a:xfrm>
           <a:prstGeom prst="rect">
             <a:avLst/>
@@ -11019,7 +10569,7 @@
                 </a:solidFill>
                 <a:latin typeface="Calibri"/>
               </a:rPr>
-              <a:t>THIS is the do-it-together moment. Profile → add name &amp; email; then Add to Home Screen.</a:t>
+              <a:t>Profile  →  add name &amp; email  ·  then Add to Home Screen</a:t>
             </a:r>
           </a:p>
         </p:txBody>
@@ -11033,7 +10583,7 @@
         <p:spPr>
           <a:xfrm>
             <a:off x="502920" y="2029968"/>
-            <a:ext cx="11201400" cy="749808"/>
+            <a:ext cx="11201400" cy="786384"/>
           </a:xfrm>
           <a:prstGeom prst="roundRect">
             <a:avLst>
@@ -11081,7 +10631,7 @@
         <p:spPr>
           <a:xfrm>
             <a:off x="502920" y="2029968"/>
-            <a:ext cx="73152" cy="749808"/>
+            <a:ext cx="91440" cy="786384"/>
           </a:xfrm>
           <a:prstGeom prst="rect">
             <a:avLst/>
@@ -11124,8 +10674,8 @@
         </p:nvSpPr>
         <p:spPr>
           <a:xfrm>
-            <a:off x="704088" y="2075688"/>
-            <a:ext cx="1280160" cy="292608"/>
+            <a:off x="813816" y="2029968"/>
+            <a:ext cx="10698480" cy="786384"/>
           </a:xfrm>
           <a:prstGeom prst="rect">
             <a:avLst/>
@@ -11133,7 +10683,7 @@
           <a:noFill/>
         </p:spPr>
         <p:txBody>
-          <a:bodyPr wrap="square" anchor="t" lIns="25400" rIns="25400" tIns="12700" bIns="12700">
+          <a:bodyPr wrap="square" anchor="ctr" lIns="25400" rIns="25400" tIns="12700" bIns="12700">
             <a:spAutoFit/>
           </a:bodyPr>
           <a:lstStyle/>
@@ -11150,13 +10700,13 @@
               </a:spcAft>
             </a:pPr>
             <a:r>
-              <a:rPr sz="1200" b="1" i="0">
-                <a:solidFill>
-                  <a:srgbClr val="C2410C"/>
-                </a:solidFill>
-                <a:latin typeface="Calibri"/>
-              </a:rPr>
-              <a:t>🗣  SAY</a:t>
+              <a:rPr sz="1800" b="1" i="0">
+                <a:solidFill>
+                  <a:srgbClr val="14241C"/>
+                </a:solidFill>
+                <a:latin typeface="Calibri"/>
+              </a:rPr>
+              <a:t>Okay — now let's all get it. It takes about a minute and there's no password.</a:t>
             </a:r>
           </a:p>
         </p:txBody>
@@ -11169,8 +10719,8 @@
         </p:nvSpPr>
         <p:spPr>
           <a:xfrm>
-            <a:off x="704088" y="2304288"/>
-            <a:ext cx="10789920" cy="475488"/>
+            <a:off x="594360" y="3035808"/>
+            <a:ext cx="11018520" cy="2468880"/>
           </a:xfrm>
           <a:prstGeom prst="rect">
             <a:avLst/>
@@ -11179,6 +10729,237 @@
         </p:spPr>
         <p:txBody>
           <a:bodyPr wrap="square" anchor="t" lIns="25400" rIns="25400" tIns="12700" bIns="12700">
+            <a:spAutoFit/>
+          </a:bodyPr>
+          <a:lstStyle/>
+          <a:p>
+            <a:pPr algn="l">
+              <a:lnSpc>
+                <a:spcPct val="100000"/>
+              </a:lnSpc>
+              <a:spcBef>
+                <a:spcPts val="0"/>
+              </a:spcBef>
+              <a:spcAft>
+                <a:spcPts val="1000"/>
+              </a:spcAft>
+            </a:pPr>
+            <a:r>
+              <a:rPr sz="1600" b="1" i="0">
+                <a:solidFill>
+                  <a:srgbClr val="15503A"/>
+                </a:solidFill>
+                <a:latin typeface="Calibri"/>
+              </a:rPr>
+              <a:t>•  </a:t>
+            </a:r>
+            <a:r>
+              <a:rPr sz="1600" b="1" i="0">
+                <a:solidFill>
+                  <a:srgbClr val="14241C"/>
+                </a:solidFill>
+                <a:latin typeface="Calibri"/>
+              </a:rPr>
+              <a:t>Open the link</a:t>
+            </a:r>
+            <a:r>
+              <a:rPr sz="1600" b="0" i="0">
+                <a:solidFill>
+                  <a:srgbClr val="14241C"/>
+                </a:solidFill>
+                <a:latin typeface="Calibri"/>
+              </a:rPr>
+              <a:t> — (share the URL / QR you have ready)</a:t>
+            </a:r>
+          </a:p>
+          <a:p>
+            <a:pPr algn="l">
+              <a:lnSpc>
+                <a:spcPct val="100000"/>
+              </a:lnSpc>
+              <a:spcBef>
+                <a:spcPts val="0"/>
+              </a:spcBef>
+              <a:spcAft>
+                <a:spcPts val="1000"/>
+              </a:spcAft>
+            </a:pPr>
+            <a:r>
+              <a:rPr sz="1600" b="1" i="0">
+                <a:solidFill>
+                  <a:srgbClr val="15503A"/>
+                </a:solidFill>
+                <a:latin typeface="Calibri"/>
+              </a:rPr>
+              <a:t>•  </a:t>
+            </a:r>
+            <a:r>
+              <a:rPr sz="1600" b="1" i="0">
+                <a:solidFill>
+                  <a:srgbClr val="14241C"/>
+                </a:solidFill>
+                <a:latin typeface="Calibri"/>
+              </a:rPr>
+              <a:t>Add to Home Screen</a:t>
+            </a:r>
+            <a:r>
+              <a:rPr sz="1600" b="0" i="0">
+                <a:solidFill>
+                  <a:srgbClr val="14241C"/>
+                </a:solidFill>
+                <a:latin typeface="Calibri"/>
+              </a:rPr>
+              <a:t> — makes it a tap-to-open icon like a real app</a:t>
+            </a:r>
+          </a:p>
+          <a:p>
+            <a:pPr algn="l">
+              <a:lnSpc>
+                <a:spcPct val="100000"/>
+              </a:lnSpc>
+              <a:spcBef>
+                <a:spcPts val="0"/>
+              </a:spcBef>
+              <a:spcAft>
+                <a:spcPts val="1000"/>
+              </a:spcAft>
+            </a:pPr>
+            <a:r>
+              <a:rPr sz="1600" b="1" i="0">
+                <a:solidFill>
+                  <a:srgbClr val="15503A"/>
+                </a:solidFill>
+                <a:latin typeface="Calibri"/>
+              </a:rPr>
+              <a:t>•  </a:t>
+            </a:r>
+            <a:r>
+              <a:rPr sz="1600" b="1" i="0">
+                <a:solidFill>
+                  <a:srgbClr val="14241C"/>
+                </a:solidFill>
+                <a:latin typeface="Calibri"/>
+              </a:rPr>
+              <a:t>Enter name + email</a:t>
+            </a:r>
+            <a:r>
+              <a:rPr sz="1600" b="0" i="0">
+                <a:solidFill>
+                  <a:srgbClr val="14241C"/>
+                </a:solidFill>
+                <a:latin typeface="Calibri"/>
+              </a:rPr>
+              <a:t> — we email you a 6-digit code — no password ever</a:t>
+            </a:r>
+          </a:p>
+          <a:p>
+            <a:pPr algn="l">
+              <a:lnSpc>
+                <a:spcPct val="100000"/>
+              </a:lnSpc>
+              <a:spcBef>
+                <a:spcPts val="0"/>
+              </a:spcBef>
+              <a:spcAft>
+                <a:spcPts val="1000"/>
+              </a:spcAft>
+            </a:pPr>
+            <a:r>
+              <a:rPr sz="1600" b="1" i="0">
+                <a:solidFill>
+                  <a:srgbClr val="15503A"/>
+                </a:solidFill>
+                <a:latin typeface="Calibri"/>
+              </a:rPr>
+              <a:t>•  </a:t>
+            </a:r>
+            <a:r>
+              <a:rPr sz="1600" b="1" i="0">
+                <a:solidFill>
+                  <a:srgbClr val="14241C"/>
+                </a:solidFill>
+                <a:latin typeface="Calibri"/>
+              </a:rPr>
+              <a:t>Type the code back</a:t>
+            </a:r>
+            <a:r>
+              <a:rPr sz="1600" b="0" i="0">
+                <a:solidFill>
+                  <a:srgbClr val="14241C"/>
+                </a:solidFill>
+                <a:latin typeface="Calibri"/>
+              </a:rPr>
+              <a:t> — that's it — you stay signed in on your phone</a:t>
+            </a:r>
+          </a:p>
+        </p:txBody>
+      </p:sp>
+      <p:sp>
+        <p:nvSpPr>
+          <p:cNvPr id="15" name="Rounded Rectangle 14"/>
+          <p:cNvSpPr/>
+          <p:nvPr/>
+        </p:nvSpPr>
+        <p:spPr>
+          <a:xfrm>
+            <a:off x="502920" y="5486400"/>
+            <a:ext cx="11201400" cy="566928"/>
+          </a:xfrm>
+          <a:prstGeom prst="roundRect">
+            <a:avLst>
+              <a:gd name="adj" fmla="val 6000"/>
+            </a:avLst>
+          </a:prstGeom>
+          <a:solidFill>
+            <a:srgbClr val="F3EEF0"/>
+          </a:solidFill>
+          <a:ln w="12700">
+            <a:solidFill>
+              <a:srgbClr val="E5E4DA"/>
+            </a:solidFill>
+          </a:ln>
+          <a:effectLst/>
+        </p:spPr>
+        <p:style>
+          <a:lnRef idx="1">
+            <a:schemeClr val="accent1"/>
+          </a:lnRef>
+          <a:fillRef idx="3">
+            <a:schemeClr val="accent1"/>
+          </a:fillRef>
+          <a:effectRef idx="2">
+            <a:schemeClr val="accent1"/>
+          </a:effectRef>
+          <a:fontRef idx="minor">
+            <a:schemeClr val="lt1"/>
+          </a:fontRef>
+        </p:style>
+        <p:txBody>
+          <a:bodyPr rtlCol="0" anchor="ctr"/>
+          <a:lstStyle/>
+          <a:p>
+            <a:pPr algn="ctr"/>
+          </a:p>
+        </p:txBody>
+      </p:sp>
+      <p:sp>
+        <p:nvSpPr>
+          <p:cNvPr id="16" name="TextBox 15"/>
+          <p:cNvSpPr txBox="1"/>
+          <p:nvPr/>
+        </p:nvSpPr>
+        <p:spPr>
+          <a:xfrm>
+            <a:off x="667512" y="5486400"/>
+            <a:ext cx="1828800" cy="566928"/>
+          </a:xfrm>
+          <a:prstGeom prst="rect">
+            <a:avLst/>
+          </a:prstGeom>
+          <a:noFill/>
+        </p:spPr>
+        <p:txBody>
+          <a:bodyPr wrap="square" anchor="ctr" lIns="25400" rIns="25400" tIns="12700" bIns="12700">
             <a:spAutoFit/>
           </a:bodyPr>
           <a:lstStyle/>
@@ -11195,27 +10976,27 @@
               </a:spcAft>
             </a:pPr>
             <a:r>
-              <a:rPr sz="1600" b="0" i="1">
-                <a:solidFill>
-                  <a:srgbClr val="14241C"/>
-                </a:solidFill>
-                <a:latin typeface="Calibri"/>
-              </a:rPr>
-              <a:t>“Okay — now let's all get it. It takes about a minute and there's no password.”</a:t>
-            </a:r>
-          </a:p>
-        </p:txBody>
-      </p:sp>
-      <p:sp>
-        <p:nvSpPr>
-          <p:cNvPr id="15" name="TextBox 14"/>
+              <a:rPr sz="1200" b="1" i="0">
+                <a:solidFill>
+                  <a:srgbClr val="8B2E2E"/>
+                </a:solidFill>
+                <a:latin typeface="Calibri"/>
+              </a:rPr>
+              <a:t>💡 GOOD TO KNOW</a:t>
+            </a:r>
+          </a:p>
+        </p:txBody>
+      </p:sp>
+      <p:sp>
+        <p:nvSpPr>
+          <p:cNvPr id="17" name="TextBox 16"/>
           <p:cNvSpPr txBox="1"/>
           <p:nvPr/>
         </p:nvSpPr>
         <p:spPr>
           <a:xfrm>
-            <a:off x="502920" y="2944368"/>
-            <a:ext cx="11201400" cy="310896"/>
+            <a:off x="2560320" y="5486400"/>
+            <a:ext cx="9006840" cy="566928"/>
           </a:xfrm>
           <a:prstGeom prst="rect">
             <a:avLst/>
@@ -11223,7 +11004,7 @@
           <a:noFill/>
         </p:spPr>
         <p:txBody>
-          <a:bodyPr wrap="square" anchor="t" lIns="25400" rIns="25400" tIns="12700" bIns="12700">
+          <a:bodyPr wrap="square" anchor="ctr" lIns="25400" rIns="25400" tIns="12700" bIns="12700">
             <a:spAutoFit/>
           </a:bodyPr>
           <a:lstStyle/>
@@ -11240,333 +11021,12 @@
               </a:spcAft>
             </a:pPr>
             <a:r>
-              <a:rPr sz="1200" b="1" i="0">
-                <a:solidFill>
-                  <a:srgbClr val="6B7068"/>
-                </a:solidFill>
-                <a:latin typeface="Calibri"/>
-              </a:rPr>
-              <a:t>TALKING POINTS</a:t>
-            </a:r>
-          </a:p>
-        </p:txBody>
-      </p:sp>
-      <p:sp>
-        <p:nvSpPr>
-          <p:cNvPr id="16" name="TextBox 15"/>
-          <p:cNvSpPr txBox="1"/>
-          <p:nvPr/>
-        </p:nvSpPr>
-        <p:spPr>
-          <a:xfrm>
-            <a:off x="594360" y="3273552"/>
-            <a:ext cx="11018520" cy="2331720"/>
-          </a:xfrm>
-          <a:prstGeom prst="rect">
-            <a:avLst/>
-          </a:prstGeom>
-          <a:noFill/>
-        </p:spPr>
-        <p:txBody>
-          <a:bodyPr wrap="square" anchor="t" lIns="25400" rIns="25400" tIns="12700" bIns="12700">
-            <a:spAutoFit/>
-          </a:bodyPr>
-          <a:lstStyle/>
-          <a:p>
-            <a:pPr algn="l">
-              <a:lnSpc>
-                <a:spcPct val="100000"/>
-              </a:lnSpc>
-              <a:spcBef>
-                <a:spcPts val="0"/>
-              </a:spcBef>
-              <a:spcAft>
-                <a:spcPts val="900"/>
-              </a:spcAft>
-            </a:pPr>
-            <a:r>
-              <a:rPr sz="1600" b="1" i="0">
-                <a:solidFill>
-                  <a:srgbClr val="15503A"/>
-                </a:solidFill>
-                <a:latin typeface="Calibri"/>
-              </a:rPr>
-              <a:t>•  </a:t>
-            </a:r>
-            <a:r>
-              <a:rPr sz="1600" b="1" i="0">
+              <a:rPr sz="1300" b="0" i="0">
                 <a:solidFill>
                   <a:srgbClr val="14241C"/>
                 </a:solidFill>
                 <a:latin typeface="Calibri"/>
               </a:rPr>
-              <a:t>Open the link</a:t>
-            </a:r>
-            <a:r>
-              <a:rPr sz="1600" b="0" i="0">
-                <a:solidFill>
-                  <a:srgbClr val="14241C"/>
-                </a:solidFill>
-                <a:latin typeface="Calibri"/>
-              </a:rPr>
-              <a:t> — (share the URL / QR you have ready)</a:t>
-            </a:r>
-          </a:p>
-          <a:p>
-            <a:pPr algn="l">
-              <a:lnSpc>
-                <a:spcPct val="100000"/>
-              </a:lnSpc>
-              <a:spcBef>
-                <a:spcPts val="0"/>
-              </a:spcBef>
-              <a:spcAft>
-                <a:spcPts val="900"/>
-              </a:spcAft>
-            </a:pPr>
-            <a:r>
-              <a:rPr sz="1600" b="1" i="0">
-                <a:solidFill>
-                  <a:srgbClr val="15503A"/>
-                </a:solidFill>
-                <a:latin typeface="Calibri"/>
-              </a:rPr>
-              <a:t>•  </a:t>
-            </a:r>
-            <a:r>
-              <a:rPr sz="1600" b="1" i="0">
-                <a:solidFill>
-                  <a:srgbClr val="14241C"/>
-                </a:solidFill>
-                <a:latin typeface="Calibri"/>
-              </a:rPr>
-              <a:t>Add to Home Screen</a:t>
-            </a:r>
-            <a:r>
-              <a:rPr sz="1600" b="0" i="0">
-                <a:solidFill>
-                  <a:srgbClr val="14241C"/>
-                </a:solidFill>
-                <a:latin typeface="Calibri"/>
-              </a:rPr>
-              <a:t> — makes it a tap-to-open icon like a real app</a:t>
-            </a:r>
-          </a:p>
-          <a:p>
-            <a:pPr algn="l">
-              <a:lnSpc>
-                <a:spcPct val="100000"/>
-              </a:lnSpc>
-              <a:spcBef>
-                <a:spcPts val="0"/>
-              </a:spcBef>
-              <a:spcAft>
-                <a:spcPts val="900"/>
-              </a:spcAft>
-            </a:pPr>
-            <a:r>
-              <a:rPr sz="1600" b="1" i="0">
-                <a:solidFill>
-                  <a:srgbClr val="15503A"/>
-                </a:solidFill>
-                <a:latin typeface="Calibri"/>
-              </a:rPr>
-              <a:t>•  </a:t>
-            </a:r>
-            <a:r>
-              <a:rPr sz="1600" b="1" i="0">
-                <a:solidFill>
-                  <a:srgbClr val="14241C"/>
-                </a:solidFill>
-                <a:latin typeface="Calibri"/>
-              </a:rPr>
-              <a:t>Enter name + email</a:t>
-            </a:r>
-            <a:r>
-              <a:rPr sz="1600" b="0" i="0">
-                <a:solidFill>
-                  <a:srgbClr val="14241C"/>
-                </a:solidFill>
-                <a:latin typeface="Calibri"/>
-              </a:rPr>
-              <a:t> — we email you a 6-digit code — no password ever</a:t>
-            </a:r>
-          </a:p>
-          <a:p>
-            <a:pPr algn="l">
-              <a:lnSpc>
-                <a:spcPct val="100000"/>
-              </a:lnSpc>
-              <a:spcBef>
-                <a:spcPts val="0"/>
-              </a:spcBef>
-              <a:spcAft>
-                <a:spcPts val="900"/>
-              </a:spcAft>
-            </a:pPr>
-            <a:r>
-              <a:rPr sz="1600" b="1" i="0">
-                <a:solidFill>
-                  <a:srgbClr val="15503A"/>
-                </a:solidFill>
-                <a:latin typeface="Calibri"/>
-              </a:rPr>
-              <a:t>•  </a:t>
-            </a:r>
-            <a:r>
-              <a:rPr sz="1600" b="1" i="0">
-                <a:solidFill>
-                  <a:srgbClr val="14241C"/>
-                </a:solidFill>
-                <a:latin typeface="Calibri"/>
-              </a:rPr>
-              <a:t>Type the code back</a:t>
-            </a:r>
-            <a:r>
-              <a:rPr sz="1600" b="0" i="0">
-                <a:solidFill>
-                  <a:srgbClr val="14241C"/>
-                </a:solidFill>
-                <a:latin typeface="Calibri"/>
-              </a:rPr>
-              <a:t> — that's it — you stay signed in on your phone</a:t>
-            </a:r>
-          </a:p>
-        </p:txBody>
-      </p:sp>
-      <p:sp>
-        <p:nvSpPr>
-          <p:cNvPr id="17" name="Rounded Rectangle 16"/>
-          <p:cNvSpPr/>
-          <p:nvPr/>
-        </p:nvSpPr>
-        <p:spPr>
-          <a:xfrm>
-            <a:off x="502920" y="5486400"/>
-            <a:ext cx="11201400" cy="566928"/>
-          </a:xfrm>
-          <a:prstGeom prst="roundRect">
-            <a:avLst>
-              <a:gd name="adj" fmla="val 6000"/>
-            </a:avLst>
-          </a:prstGeom>
-          <a:solidFill>
-            <a:srgbClr val="F3EEF0"/>
-          </a:solidFill>
-          <a:ln w="12700">
-            <a:solidFill>
-              <a:srgbClr val="E5E4DA"/>
-            </a:solidFill>
-          </a:ln>
-          <a:effectLst/>
-        </p:spPr>
-        <p:style>
-          <a:lnRef idx="1">
-            <a:schemeClr val="accent1"/>
-          </a:lnRef>
-          <a:fillRef idx="3">
-            <a:schemeClr val="accent1"/>
-          </a:fillRef>
-          <a:effectRef idx="2">
-            <a:schemeClr val="accent1"/>
-          </a:effectRef>
-          <a:fontRef idx="minor">
-            <a:schemeClr val="lt1"/>
-          </a:fontRef>
-        </p:style>
-        <p:txBody>
-          <a:bodyPr rtlCol="0" anchor="ctr"/>
-          <a:lstStyle/>
-          <a:p>
-            <a:pPr algn="ctr"/>
-          </a:p>
-        </p:txBody>
-      </p:sp>
-      <p:sp>
-        <p:nvSpPr>
-          <p:cNvPr id="18" name="TextBox 17"/>
-          <p:cNvSpPr txBox="1"/>
-          <p:nvPr/>
-        </p:nvSpPr>
-        <p:spPr>
-          <a:xfrm>
-            <a:off x="667512" y="5486400"/>
-            <a:ext cx="1463040" cy="566928"/>
-          </a:xfrm>
-          <a:prstGeom prst="rect">
-            <a:avLst/>
-          </a:prstGeom>
-          <a:noFill/>
-        </p:spPr>
-        <p:txBody>
-          <a:bodyPr wrap="square" anchor="ctr" lIns="25400" rIns="25400" tIns="12700" bIns="12700">
-            <a:spAutoFit/>
-          </a:bodyPr>
-          <a:lstStyle/>
-          <a:p>
-            <a:pPr algn="l">
-              <a:lnSpc>
-                <a:spcPct val="100000"/>
-              </a:lnSpc>
-              <a:spcBef>
-                <a:spcPts val="0"/>
-              </a:spcBef>
-              <a:spcAft>
-                <a:spcPts val="400"/>
-              </a:spcAft>
-            </a:pPr>
-            <a:r>
-              <a:rPr sz="1200" b="1" i="0">
-                <a:solidFill>
-                  <a:srgbClr val="8B2E2E"/>
-                </a:solidFill>
-                <a:latin typeface="Calibri"/>
-              </a:rPr>
-              <a:t>❓ IF ASKED</a:t>
-            </a:r>
-          </a:p>
-        </p:txBody>
-      </p:sp>
-      <p:sp>
-        <p:nvSpPr>
-          <p:cNvPr id="19" name="TextBox 18"/>
-          <p:cNvSpPr txBox="1"/>
-          <p:nvPr/>
-        </p:nvSpPr>
-        <p:spPr>
-          <a:xfrm>
-            <a:off x="2103120" y="5486400"/>
-            <a:ext cx="9464040" cy="566928"/>
-          </a:xfrm>
-          <a:prstGeom prst="rect">
-            <a:avLst/>
-          </a:prstGeom>
-          <a:noFill/>
-        </p:spPr>
-        <p:txBody>
-          <a:bodyPr wrap="square" anchor="ctr" lIns="25400" rIns="25400" tIns="12700" bIns="12700">
-            <a:spAutoFit/>
-          </a:bodyPr>
-          <a:lstStyle/>
-          <a:p>
-            <a:pPr algn="l">
-              <a:lnSpc>
-                <a:spcPct val="100000"/>
-              </a:lnSpc>
-              <a:spcBef>
-                <a:spcPts val="0"/>
-              </a:spcBef>
-              <a:spcAft>
-                <a:spcPts val="400"/>
-              </a:spcAft>
-            </a:pPr>
-            <a:r>
-              <a:rPr sz="1300" b="0" i="0">
-                <a:solidFill>
-                  <a:srgbClr val="14241C"/>
-                </a:solidFill>
-                <a:latin typeface="Calibri"/>
-              </a:rPr>
               <a:t>“Didn't get the code? Check spam, or tap Resend. There's a Help page too.”</a:t>
             </a:r>
           </a:p>
@@ -11574,7 +11034,7 @@
       </p:sp>
       <p:sp>
         <p:nvSpPr>
-          <p:cNvPr id="20" name="Rounded Rectangle 19"/>
+          <p:cNvPr id="18" name="Rounded Rectangle 17"/>
           <p:cNvSpPr/>
           <p:nvPr/>
         </p:nvSpPr>
@@ -11620,7 +11080,7 @@
       </p:sp>
       <p:sp>
         <p:nvSpPr>
-          <p:cNvPr id="21" name="Rounded Rectangle 20"/>
+          <p:cNvPr id="19" name="Rounded Rectangle 18"/>
           <p:cNvSpPr/>
           <p:nvPr/>
         </p:nvSpPr>
@@ -11666,7 +11126,7 @@
       </p:sp>
       <p:sp>
         <p:nvSpPr>
-          <p:cNvPr id="22" name="TextBox 21"/>
+          <p:cNvPr id="20" name="TextBox 19"/>
           <p:cNvSpPr txBox="1"/>
           <p:nvPr/>
         </p:nvSpPr>
@@ -12062,7 +11522,7 @@
         <p:spPr>
           <a:xfrm>
             <a:off x="667512" y="1298448"/>
-            <a:ext cx="1554480" cy="603504"/>
+            <a:ext cx="1463040" cy="603504"/>
           </a:xfrm>
           <a:prstGeom prst="rect">
             <a:avLst/>
@@ -12093,7 +11553,7 @@
                 </a:solidFill>
                 <a:latin typeface="Calibri"/>
               </a:rPr>
-              <a:t>▶  ON SCREEN</a:t>
+              <a:t>📍  FIND IT</a:t>
             </a:r>
           </a:p>
         </p:txBody>
@@ -12106,8 +11566,8 @@
         </p:nvSpPr>
         <p:spPr>
           <a:xfrm>
-            <a:off x="2286000" y="1298448"/>
-            <a:ext cx="9281160" cy="603504"/>
+            <a:off x="2194560" y="1298448"/>
+            <a:ext cx="9372600" cy="603504"/>
           </a:xfrm>
           <a:prstGeom prst="rect">
             <a:avLst/>
@@ -12138,7 +11598,7 @@
                 </a:solidFill>
                 <a:latin typeface="Calibri"/>
               </a:rPr>
-              <a:t>Profile → Text size; mention the Help page. Reassure on privacy.</a:t>
+              <a:t>Profile  →  Text size  ·  Help page</a:t>
             </a:r>
           </a:p>
         </p:txBody>
@@ -12152,7 +11612,7 @@
         <p:spPr>
           <a:xfrm>
             <a:off x="502920" y="2029968"/>
-            <a:ext cx="11201400" cy="749808"/>
+            <a:ext cx="11201400" cy="786384"/>
           </a:xfrm>
           <a:prstGeom prst="roundRect">
             <a:avLst>
@@ -12200,7 +11660,7 @@
         <p:spPr>
           <a:xfrm>
             <a:off x="502920" y="2029968"/>
-            <a:ext cx="73152" cy="749808"/>
+            <a:ext cx="91440" cy="786384"/>
           </a:xfrm>
           <a:prstGeom prst="rect">
             <a:avLst/>
@@ -12243,8 +11703,8 @@
         </p:nvSpPr>
         <p:spPr>
           <a:xfrm>
-            <a:off x="704088" y="2075688"/>
-            <a:ext cx="1280160" cy="292608"/>
+            <a:off x="813816" y="2029968"/>
+            <a:ext cx="10698480" cy="786384"/>
           </a:xfrm>
           <a:prstGeom prst="rect">
             <a:avLst/>
@@ -12252,7 +11712,7 @@
           <a:noFill/>
         </p:spPr>
         <p:txBody>
-          <a:bodyPr wrap="square" anchor="t" lIns="25400" rIns="25400" tIns="12700" bIns="12700">
+          <a:bodyPr wrap="square" anchor="ctr" lIns="25400" rIns="25400" tIns="12700" bIns="12700">
             <a:spAutoFit/>
           </a:bodyPr>
           <a:lstStyle/>
@@ -12269,13 +11729,13 @@
               </a:spcAft>
             </a:pPr>
             <a:r>
-              <a:rPr sz="1200" b="1" i="0">
-                <a:solidFill>
-                  <a:srgbClr val="C2410C"/>
-                </a:solidFill>
-                <a:latin typeface="Calibri"/>
-              </a:rPr>
-              <a:t>🗣  SAY</a:t>
+              <a:rPr sz="1800" b="1" i="0">
+                <a:solidFill>
+                  <a:srgbClr val="14241C"/>
+                </a:solidFill>
+                <a:latin typeface="Calibri"/>
+              </a:rPr>
+              <a:t>It's just us — family only — and we made it easy for every age to use.</a:t>
             </a:r>
           </a:p>
         </p:txBody>
@@ -12288,8 +11748,8 @@
         </p:nvSpPr>
         <p:spPr>
           <a:xfrm>
-            <a:off x="704088" y="2304288"/>
-            <a:ext cx="10789920" cy="475488"/>
+            <a:off x="594360" y="3035808"/>
+            <a:ext cx="11018520" cy="2468880"/>
           </a:xfrm>
           <a:prstGeom prst="rect">
             <a:avLst/>
@@ -12298,6 +11758,237 @@
         </p:spPr>
         <p:txBody>
           <a:bodyPr wrap="square" anchor="t" lIns="25400" rIns="25400" tIns="12700" bIns="12700">
+            <a:spAutoFit/>
+          </a:bodyPr>
+          <a:lstStyle/>
+          <a:p>
+            <a:pPr algn="l">
+              <a:lnSpc>
+                <a:spcPct val="100000"/>
+              </a:lnSpc>
+              <a:spcBef>
+                <a:spcPts val="0"/>
+              </a:spcBef>
+              <a:spcAft>
+                <a:spcPts val="1000"/>
+              </a:spcAft>
+            </a:pPr>
+            <a:r>
+              <a:rPr sz="1600" b="1" i="0">
+                <a:solidFill>
+                  <a:srgbClr val="15503A"/>
+                </a:solidFill>
+                <a:latin typeface="Calibri"/>
+              </a:rPr>
+              <a:t>•  </a:t>
+            </a:r>
+            <a:r>
+              <a:rPr sz="1600" b="1" i="0">
+                <a:solidFill>
+                  <a:srgbClr val="14241C"/>
+                </a:solidFill>
+                <a:latin typeface="Calibri"/>
+              </a:rPr>
+              <a:t>Family only</a:t>
+            </a:r>
+            <a:r>
+              <a:rPr sz="1600" b="0" i="0">
+                <a:solidFill>
+                  <a:srgbClr val="14241C"/>
+                </a:solidFill>
+                <a:latin typeface="Calibri"/>
+              </a:rPr>
+              <a:t> — not public; sensitive info hidden until you sign in</a:t>
+            </a:r>
+          </a:p>
+          <a:p>
+            <a:pPr algn="l">
+              <a:lnSpc>
+                <a:spcPct val="100000"/>
+              </a:lnSpc>
+              <a:spcBef>
+                <a:spcPts val="0"/>
+              </a:spcBef>
+              <a:spcAft>
+                <a:spcPts val="1000"/>
+              </a:spcAft>
+            </a:pPr>
+            <a:r>
+              <a:rPr sz="1600" b="1" i="0">
+                <a:solidFill>
+                  <a:srgbClr val="15503A"/>
+                </a:solidFill>
+                <a:latin typeface="Calibri"/>
+              </a:rPr>
+              <a:t>•  </a:t>
+            </a:r>
+            <a:r>
+              <a:rPr sz="1600" b="1" i="0">
+                <a:solidFill>
+                  <a:srgbClr val="14241C"/>
+                </a:solidFill>
+                <a:latin typeface="Calibri"/>
+              </a:rPr>
+              <a:t>Bigger text</a:t>
+            </a:r>
+            <a:r>
+              <a:rPr sz="1600" b="0" i="0">
+                <a:solidFill>
+                  <a:srgbClr val="14241C"/>
+                </a:solidFill>
+                <a:latin typeface="Calibri"/>
+              </a:rPr>
+              <a:t> — Profile → Text size: Normal / Large / Largest</a:t>
+            </a:r>
+          </a:p>
+          <a:p>
+            <a:pPr algn="l">
+              <a:lnSpc>
+                <a:spcPct val="100000"/>
+              </a:lnSpc>
+              <a:spcBef>
+                <a:spcPts val="0"/>
+              </a:spcBef>
+              <a:spcAft>
+                <a:spcPts val="1000"/>
+              </a:spcAft>
+            </a:pPr>
+            <a:r>
+              <a:rPr sz="1600" b="1" i="0">
+                <a:solidFill>
+                  <a:srgbClr val="15503A"/>
+                </a:solidFill>
+                <a:latin typeface="Calibri"/>
+              </a:rPr>
+              <a:t>•  </a:t>
+            </a:r>
+            <a:r>
+              <a:rPr sz="1600" b="1" i="0">
+                <a:solidFill>
+                  <a:srgbClr val="14241C"/>
+                </a:solidFill>
+                <a:latin typeface="Calibri"/>
+              </a:rPr>
+              <a:t>Help page</a:t>
+            </a:r>
+            <a:r>
+              <a:rPr sz="1600" b="0" i="0">
+                <a:solidFill>
+                  <a:srgbClr val="14241C"/>
+                </a:solidFill>
+                <a:latin typeface="Calibri"/>
+              </a:rPr>
+              <a:t> — plain-language how-tos for anyone stuck</a:t>
+            </a:r>
+          </a:p>
+          <a:p>
+            <a:pPr algn="l">
+              <a:lnSpc>
+                <a:spcPct val="100000"/>
+              </a:lnSpc>
+              <a:spcBef>
+                <a:spcPts val="0"/>
+              </a:spcBef>
+              <a:spcAft>
+                <a:spcPts val="1000"/>
+              </a:spcAft>
+            </a:pPr>
+            <a:r>
+              <a:rPr sz="1600" b="1" i="0">
+                <a:solidFill>
+                  <a:srgbClr val="15503A"/>
+                </a:solidFill>
+                <a:latin typeface="Calibri"/>
+              </a:rPr>
+              <a:t>•  </a:t>
+            </a:r>
+            <a:r>
+              <a:rPr sz="1600" b="1" i="0">
+                <a:solidFill>
+                  <a:srgbClr val="14241C"/>
+                </a:solidFill>
+                <a:latin typeface="Calibri"/>
+              </a:rPr>
+              <a:t>A real person</a:t>
+            </a:r>
+            <a:r>
+              <a:rPr sz="1600" b="0" i="0">
+                <a:solidFill>
+                  <a:srgbClr val="14241C"/>
+                </a:solidFill>
+                <a:latin typeface="Calibri"/>
+              </a:rPr>
+              <a:t> — text or call me (Brian) anytime — it's on the Help page</a:t>
+            </a:r>
+          </a:p>
+        </p:txBody>
+      </p:sp>
+      <p:sp>
+        <p:nvSpPr>
+          <p:cNvPr id="15" name="Rounded Rectangle 14"/>
+          <p:cNvSpPr/>
+          <p:nvPr/>
+        </p:nvSpPr>
+        <p:spPr>
+          <a:xfrm>
+            <a:off x="502920" y="5486400"/>
+            <a:ext cx="11201400" cy="566928"/>
+          </a:xfrm>
+          <a:prstGeom prst="roundRect">
+            <a:avLst>
+              <a:gd name="adj" fmla="val 6000"/>
+            </a:avLst>
+          </a:prstGeom>
+          <a:solidFill>
+            <a:srgbClr val="F3EEF0"/>
+          </a:solidFill>
+          <a:ln w="12700">
+            <a:solidFill>
+              <a:srgbClr val="E5E4DA"/>
+            </a:solidFill>
+          </a:ln>
+          <a:effectLst/>
+        </p:spPr>
+        <p:style>
+          <a:lnRef idx="1">
+            <a:schemeClr val="accent1"/>
+          </a:lnRef>
+          <a:fillRef idx="3">
+            <a:schemeClr val="accent1"/>
+          </a:fillRef>
+          <a:effectRef idx="2">
+            <a:schemeClr val="accent1"/>
+          </a:effectRef>
+          <a:fontRef idx="minor">
+            <a:schemeClr val="lt1"/>
+          </a:fontRef>
+        </p:style>
+        <p:txBody>
+          <a:bodyPr rtlCol="0" anchor="ctr"/>
+          <a:lstStyle/>
+          <a:p>
+            <a:pPr algn="ctr"/>
+          </a:p>
+        </p:txBody>
+      </p:sp>
+      <p:sp>
+        <p:nvSpPr>
+          <p:cNvPr id="16" name="TextBox 15"/>
+          <p:cNvSpPr txBox="1"/>
+          <p:nvPr/>
+        </p:nvSpPr>
+        <p:spPr>
+          <a:xfrm>
+            <a:off x="667512" y="5486400"/>
+            <a:ext cx="1828800" cy="566928"/>
+          </a:xfrm>
+          <a:prstGeom prst="rect">
+            <a:avLst/>
+          </a:prstGeom>
+          <a:noFill/>
+        </p:spPr>
+        <p:txBody>
+          <a:bodyPr wrap="square" anchor="ctr" lIns="25400" rIns="25400" tIns="12700" bIns="12700">
             <a:spAutoFit/>
           </a:bodyPr>
           <a:lstStyle/>
@@ -12314,27 +12005,27 @@
               </a:spcAft>
             </a:pPr>
             <a:r>
-              <a:rPr sz="1600" b="0" i="1">
-                <a:solidFill>
-                  <a:srgbClr val="14241C"/>
-                </a:solidFill>
-                <a:latin typeface="Calibri"/>
-              </a:rPr>
-              <a:t>“It's just us — family only — and we made it easy for every age to use.”</a:t>
-            </a:r>
-          </a:p>
-        </p:txBody>
-      </p:sp>
-      <p:sp>
-        <p:nvSpPr>
-          <p:cNvPr id="15" name="TextBox 14"/>
+              <a:rPr sz="1200" b="1" i="0">
+                <a:solidFill>
+                  <a:srgbClr val="8B2E2E"/>
+                </a:solidFill>
+                <a:latin typeface="Calibri"/>
+              </a:rPr>
+              <a:t>💡 GOOD TO KNOW</a:t>
+            </a:r>
+          </a:p>
+        </p:txBody>
+      </p:sp>
+      <p:sp>
+        <p:nvSpPr>
+          <p:cNvPr id="17" name="TextBox 16"/>
           <p:cNvSpPr txBox="1"/>
           <p:nvPr/>
         </p:nvSpPr>
         <p:spPr>
           <a:xfrm>
-            <a:off x="502920" y="2944368"/>
-            <a:ext cx="11201400" cy="310896"/>
+            <a:off x="2560320" y="5486400"/>
+            <a:ext cx="9006840" cy="566928"/>
           </a:xfrm>
           <a:prstGeom prst="rect">
             <a:avLst/>
@@ -12342,7 +12033,7 @@
           <a:noFill/>
         </p:spPr>
         <p:txBody>
-          <a:bodyPr wrap="square" anchor="t" lIns="25400" rIns="25400" tIns="12700" bIns="12700">
+          <a:bodyPr wrap="square" anchor="ctr" lIns="25400" rIns="25400" tIns="12700" bIns="12700">
             <a:spAutoFit/>
           </a:bodyPr>
           <a:lstStyle/>
@@ -12359,333 +12050,12 @@
               </a:spcAft>
             </a:pPr>
             <a:r>
-              <a:rPr sz="1200" b="1" i="0">
-                <a:solidFill>
-                  <a:srgbClr val="6B7068"/>
-                </a:solidFill>
-                <a:latin typeface="Calibri"/>
-              </a:rPr>
-              <a:t>TALKING POINTS</a:t>
-            </a:r>
-          </a:p>
-        </p:txBody>
-      </p:sp>
-      <p:sp>
-        <p:nvSpPr>
-          <p:cNvPr id="16" name="TextBox 15"/>
-          <p:cNvSpPr txBox="1"/>
-          <p:nvPr/>
-        </p:nvSpPr>
-        <p:spPr>
-          <a:xfrm>
-            <a:off x="594360" y="3273552"/>
-            <a:ext cx="11018520" cy="2331720"/>
-          </a:xfrm>
-          <a:prstGeom prst="rect">
-            <a:avLst/>
-          </a:prstGeom>
-          <a:noFill/>
-        </p:spPr>
-        <p:txBody>
-          <a:bodyPr wrap="square" anchor="t" lIns="25400" rIns="25400" tIns="12700" bIns="12700">
-            <a:spAutoFit/>
-          </a:bodyPr>
-          <a:lstStyle/>
-          <a:p>
-            <a:pPr algn="l">
-              <a:lnSpc>
-                <a:spcPct val="100000"/>
-              </a:lnSpc>
-              <a:spcBef>
-                <a:spcPts val="0"/>
-              </a:spcBef>
-              <a:spcAft>
-                <a:spcPts val="900"/>
-              </a:spcAft>
-            </a:pPr>
-            <a:r>
-              <a:rPr sz="1600" b="1" i="0">
-                <a:solidFill>
-                  <a:srgbClr val="15503A"/>
-                </a:solidFill>
-                <a:latin typeface="Calibri"/>
-              </a:rPr>
-              <a:t>•  </a:t>
-            </a:r>
-            <a:r>
-              <a:rPr sz="1600" b="1" i="0">
+              <a:rPr sz="1300" b="0" i="0">
                 <a:solidFill>
                   <a:srgbClr val="14241C"/>
                 </a:solidFill>
                 <a:latin typeface="Calibri"/>
               </a:rPr>
-              <a:t>Family only</a:t>
-            </a:r>
-            <a:r>
-              <a:rPr sz="1600" b="0" i="0">
-                <a:solidFill>
-                  <a:srgbClr val="14241C"/>
-                </a:solidFill>
-                <a:latin typeface="Calibri"/>
-              </a:rPr>
-              <a:t> — not public; sensitive info hidden until you sign in</a:t>
-            </a:r>
-          </a:p>
-          <a:p>
-            <a:pPr algn="l">
-              <a:lnSpc>
-                <a:spcPct val="100000"/>
-              </a:lnSpc>
-              <a:spcBef>
-                <a:spcPts val="0"/>
-              </a:spcBef>
-              <a:spcAft>
-                <a:spcPts val="900"/>
-              </a:spcAft>
-            </a:pPr>
-            <a:r>
-              <a:rPr sz="1600" b="1" i="0">
-                <a:solidFill>
-                  <a:srgbClr val="15503A"/>
-                </a:solidFill>
-                <a:latin typeface="Calibri"/>
-              </a:rPr>
-              <a:t>•  </a:t>
-            </a:r>
-            <a:r>
-              <a:rPr sz="1600" b="1" i="0">
-                <a:solidFill>
-                  <a:srgbClr val="14241C"/>
-                </a:solidFill>
-                <a:latin typeface="Calibri"/>
-              </a:rPr>
-              <a:t>Bigger text</a:t>
-            </a:r>
-            <a:r>
-              <a:rPr sz="1600" b="0" i="0">
-                <a:solidFill>
-                  <a:srgbClr val="14241C"/>
-                </a:solidFill>
-                <a:latin typeface="Calibri"/>
-              </a:rPr>
-              <a:t> — Profile → Text size: Normal / Large / Largest</a:t>
-            </a:r>
-          </a:p>
-          <a:p>
-            <a:pPr algn="l">
-              <a:lnSpc>
-                <a:spcPct val="100000"/>
-              </a:lnSpc>
-              <a:spcBef>
-                <a:spcPts val="0"/>
-              </a:spcBef>
-              <a:spcAft>
-                <a:spcPts val="900"/>
-              </a:spcAft>
-            </a:pPr>
-            <a:r>
-              <a:rPr sz="1600" b="1" i="0">
-                <a:solidFill>
-                  <a:srgbClr val="15503A"/>
-                </a:solidFill>
-                <a:latin typeface="Calibri"/>
-              </a:rPr>
-              <a:t>•  </a:t>
-            </a:r>
-            <a:r>
-              <a:rPr sz="1600" b="1" i="0">
-                <a:solidFill>
-                  <a:srgbClr val="14241C"/>
-                </a:solidFill>
-                <a:latin typeface="Calibri"/>
-              </a:rPr>
-              <a:t>Help page</a:t>
-            </a:r>
-            <a:r>
-              <a:rPr sz="1600" b="0" i="0">
-                <a:solidFill>
-                  <a:srgbClr val="14241C"/>
-                </a:solidFill>
-                <a:latin typeface="Calibri"/>
-              </a:rPr>
-              <a:t> — plain-language how-tos for anyone stuck</a:t>
-            </a:r>
-          </a:p>
-          <a:p>
-            <a:pPr algn="l">
-              <a:lnSpc>
-                <a:spcPct val="100000"/>
-              </a:lnSpc>
-              <a:spcBef>
-                <a:spcPts val="0"/>
-              </a:spcBef>
-              <a:spcAft>
-                <a:spcPts val="900"/>
-              </a:spcAft>
-            </a:pPr>
-            <a:r>
-              <a:rPr sz="1600" b="1" i="0">
-                <a:solidFill>
-                  <a:srgbClr val="15503A"/>
-                </a:solidFill>
-                <a:latin typeface="Calibri"/>
-              </a:rPr>
-              <a:t>•  </a:t>
-            </a:r>
-            <a:r>
-              <a:rPr sz="1600" b="1" i="0">
-                <a:solidFill>
-                  <a:srgbClr val="14241C"/>
-                </a:solidFill>
-                <a:latin typeface="Calibri"/>
-              </a:rPr>
-              <a:t>A real person</a:t>
-            </a:r>
-            <a:r>
-              <a:rPr sz="1600" b="0" i="0">
-                <a:solidFill>
-                  <a:srgbClr val="14241C"/>
-                </a:solidFill>
-                <a:latin typeface="Calibri"/>
-              </a:rPr>
-              <a:t> — text or call me (Brian) anytime — it's on the Help page</a:t>
-            </a:r>
-          </a:p>
-        </p:txBody>
-      </p:sp>
-      <p:sp>
-        <p:nvSpPr>
-          <p:cNvPr id="17" name="Rounded Rectangle 16"/>
-          <p:cNvSpPr/>
-          <p:nvPr/>
-        </p:nvSpPr>
-        <p:spPr>
-          <a:xfrm>
-            <a:off x="502920" y="5486400"/>
-            <a:ext cx="11201400" cy="566928"/>
-          </a:xfrm>
-          <a:prstGeom prst="roundRect">
-            <a:avLst>
-              <a:gd name="adj" fmla="val 6000"/>
-            </a:avLst>
-          </a:prstGeom>
-          <a:solidFill>
-            <a:srgbClr val="F3EEF0"/>
-          </a:solidFill>
-          <a:ln w="12700">
-            <a:solidFill>
-              <a:srgbClr val="E5E4DA"/>
-            </a:solidFill>
-          </a:ln>
-          <a:effectLst/>
-        </p:spPr>
-        <p:style>
-          <a:lnRef idx="1">
-            <a:schemeClr val="accent1"/>
-          </a:lnRef>
-          <a:fillRef idx="3">
-            <a:schemeClr val="accent1"/>
-          </a:fillRef>
-          <a:effectRef idx="2">
-            <a:schemeClr val="accent1"/>
-          </a:effectRef>
-          <a:fontRef idx="minor">
-            <a:schemeClr val="lt1"/>
-          </a:fontRef>
-        </p:style>
-        <p:txBody>
-          <a:bodyPr rtlCol="0" anchor="ctr"/>
-          <a:lstStyle/>
-          <a:p>
-            <a:pPr algn="ctr"/>
-          </a:p>
-        </p:txBody>
-      </p:sp>
-      <p:sp>
-        <p:nvSpPr>
-          <p:cNvPr id="18" name="TextBox 17"/>
-          <p:cNvSpPr txBox="1"/>
-          <p:nvPr/>
-        </p:nvSpPr>
-        <p:spPr>
-          <a:xfrm>
-            <a:off x="667512" y="5486400"/>
-            <a:ext cx="1463040" cy="566928"/>
-          </a:xfrm>
-          <a:prstGeom prst="rect">
-            <a:avLst/>
-          </a:prstGeom>
-          <a:noFill/>
-        </p:spPr>
-        <p:txBody>
-          <a:bodyPr wrap="square" anchor="ctr" lIns="25400" rIns="25400" tIns="12700" bIns="12700">
-            <a:spAutoFit/>
-          </a:bodyPr>
-          <a:lstStyle/>
-          <a:p>
-            <a:pPr algn="l">
-              <a:lnSpc>
-                <a:spcPct val="100000"/>
-              </a:lnSpc>
-              <a:spcBef>
-                <a:spcPts val="0"/>
-              </a:spcBef>
-              <a:spcAft>
-                <a:spcPts val="400"/>
-              </a:spcAft>
-            </a:pPr>
-            <a:r>
-              <a:rPr sz="1200" b="1" i="0">
-                <a:solidFill>
-                  <a:srgbClr val="8B2E2E"/>
-                </a:solidFill>
-                <a:latin typeface="Calibri"/>
-              </a:rPr>
-              <a:t>❓ IF ASKED</a:t>
-            </a:r>
-          </a:p>
-        </p:txBody>
-      </p:sp>
-      <p:sp>
-        <p:nvSpPr>
-          <p:cNvPr id="19" name="TextBox 18"/>
-          <p:cNvSpPr txBox="1"/>
-          <p:nvPr/>
-        </p:nvSpPr>
-        <p:spPr>
-          <a:xfrm>
-            <a:off x="2103120" y="5486400"/>
-            <a:ext cx="9464040" cy="566928"/>
-          </a:xfrm>
-          <a:prstGeom prst="rect">
-            <a:avLst/>
-          </a:prstGeom>
-          <a:noFill/>
-        </p:spPr>
-        <p:txBody>
-          <a:bodyPr wrap="square" anchor="ctr" lIns="25400" rIns="25400" tIns="12700" bIns="12700">
-            <a:spAutoFit/>
-          </a:bodyPr>
-          <a:lstStyle/>
-          <a:p>
-            <a:pPr algn="l">
-              <a:lnSpc>
-                <a:spcPct val="100000"/>
-              </a:lnSpc>
-              <a:spcBef>
-                <a:spcPts val="0"/>
-              </a:spcBef>
-              <a:spcAft>
-                <a:spcPts val="400"/>
-              </a:spcAft>
-            </a:pPr>
-            <a:r>
-              <a:rPr sz="1300" b="0" i="0">
-                <a:solidFill>
-                  <a:srgbClr val="14241C"/>
-                </a:solidFill>
-                <a:latin typeface="Calibri"/>
-              </a:rPr>
               <a:t>“No strangers, no ads, no selling anything. It's our family's app.”</a:t>
             </a:r>
           </a:p>
@@ -12693,7 +12063,7 @@
       </p:sp>
       <p:sp>
         <p:nvSpPr>
-          <p:cNvPr id="20" name="Rounded Rectangle 19"/>
+          <p:cNvPr id="18" name="Rounded Rectangle 17"/>
           <p:cNvSpPr/>
           <p:nvPr/>
         </p:nvSpPr>
@@ -12739,7 +12109,7 @@
       </p:sp>
       <p:sp>
         <p:nvSpPr>
-          <p:cNvPr id="21" name="Rounded Rectangle 20"/>
+          <p:cNvPr id="19" name="Rounded Rectangle 18"/>
           <p:cNvSpPr/>
           <p:nvPr/>
         </p:nvSpPr>
@@ -12785,7 +12155,7 @@
       </p:sp>
       <p:sp>
         <p:nvSpPr>
-          <p:cNvPr id="22" name="TextBox 21"/>
+          <p:cNvPr id="20" name="TextBox 19"/>
           <p:cNvSpPr txBox="1"/>
           <p:nvPr/>
         </p:nvSpPr>
@@ -15020,7 +14390,7 @@
                 </a:solidFill>
                 <a:latin typeface="Calibri"/>
               </a:rPr>
-              <a:t>OPENING</a:t>
+              <a:t>WELCOME</a:t>
             </a:r>
           </a:p>
         </p:txBody>
@@ -15110,7 +14480,7 @@
                 </a:solidFill>
                 <a:latin typeface="Calibri"/>
               </a:rPr>
-              <a:t>Your first 60 seconds</a:t>
+              <a:t>What we'll look at</a:t>
             </a:r>
           </a:p>
         </p:txBody>
@@ -15197,13 +14567,13 @@
               </a:spcAft>
             </a:pPr>
             <a:r>
-              <a:rPr sz="1700" b="0" i="1">
+              <a:rPr sz="1800" b="1" i="0">
                 <a:solidFill>
                   <a:srgbClr val="14241C"/>
                 </a:solidFill>
                 <a:latin typeface="Calibri"/>
               </a:rPr>
-              <a:t>Start here before you touch the app. Set the room, then open it.</a:t>
+              <a:t>A few minutes, in plain English. Here's the tour:</a:t>
             </a:r>
           </a:p>
           <a:p>
@@ -15219,13 +14589,31 @@
               </a:spcAft>
             </a:pPr>
             <a:r>
-              <a:rPr sz="1800" b="1" i="0">
+              <a:rPr sz="1600" b="1" i="0">
                 <a:solidFill>
                   <a:srgbClr val="15503A"/>
                 </a:solidFill>
                 <a:latin typeface="Calibri"/>
               </a:rPr>
-              <a:t>“We built something for the whole family — one app that's our home base for the lake all year, and especially for Family Fest. Most of you have never seen it. I'm going to walk through it for a few minutes — just watch — and I'll show you how to get it on your phone at the end.”</a:t>
+              <a:t>•  </a:t>
+            </a:r>
+            <a:r>
+              <a:rPr sz="1600" b="1" i="0">
+                <a:solidFill>
+                  <a:srgbClr val="14241C"/>
+                </a:solidFill>
+                <a:latin typeface="Calibri"/>
+              </a:rPr>
+              <a:t>Home &amp; the five tabs</a:t>
+            </a:r>
+            <a:r>
+              <a:rPr sz="1600" b="0" i="0">
+                <a:solidFill>
+                  <a:srgbClr val="14241C"/>
+                </a:solidFill>
+                <a:latin typeface="Calibri"/>
+              </a:rPr>
+              <a:t>  — how you get around</a:t>
             </a:r>
           </a:p>
           <a:p>
@@ -15241,13 +14629,133 @@
               </a:spcAft>
             </a:pPr>
             <a:r>
-              <a:rPr sz="1500" b="0" i="0">
+              <a:rPr sz="1600" b="1" i="0">
+                <a:solidFill>
+                  <a:srgbClr val="15503A"/>
+                </a:solidFill>
+                <a:latin typeface="Calibri"/>
+              </a:rPr>
+              <a:t>•  </a:t>
+            </a:r>
+            <a:r>
+              <a:rPr sz="1600" b="1" i="0">
+                <a:solidFill>
+                  <a:srgbClr val="14241C"/>
+                </a:solidFill>
+                <a:latin typeface="Calibri"/>
+              </a:rPr>
+              <a:t>Family Fest</a:t>
+            </a:r>
+            <a:r>
+              <a:rPr sz="1600" b="0" i="0">
+                <a:solidFill>
+                  <a:srgbClr val="14241C"/>
+                </a:solidFill>
+                <a:latin typeface="Calibri"/>
+              </a:rPr>
+              <a:t>  — the big week: schedule, RSVP, dinners, dues</a:t>
+            </a:r>
+          </a:p>
+          <a:p>
+            <a:pPr algn="l">
+              <a:lnSpc>
+                <a:spcPct val="105000"/>
+              </a:lnSpc>
+              <a:spcBef>
+                <a:spcPts val="0"/>
+              </a:spcBef>
+              <a:spcAft>
+                <a:spcPts val="1000"/>
+              </a:spcAft>
+            </a:pPr>
+            <a:r>
+              <a:rPr sz="1600" b="1" i="0">
+                <a:solidFill>
+                  <a:srgbClr val="15503A"/>
+                </a:solidFill>
+                <a:latin typeface="Calibri"/>
+              </a:rPr>
+              <a:t>•  </a:t>
+            </a:r>
+            <a:r>
+              <a:rPr sz="1600" b="1" i="0">
+                <a:solidFill>
+                  <a:srgbClr val="14241C"/>
+                </a:solidFill>
+                <a:latin typeface="Calibri"/>
+              </a:rPr>
+              <a:t>Staying connected</a:t>
+            </a:r>
+            <a:r>
+              <a:rPr sz="1600" b="0" i="0">
+                <a:solidFill>
+                  <a:srgbClr val="14241C"/>
+                </a:solidFill>
+                <a:latin typeface="Calibri"/>
+              </a:rPr>
+              <a:t>  — photos, finding &amp; paying people, asking for help</a:t>
+            </a:r>
+          </a:p>
+          <a:p>
+            <a:pPr algn="l">
+              <a:lnSpc>
+                <a:spcPct val="105000"/>
+              </a:lnSpc>
+              <a:spcBef>
+                <a:spcPts val="0"/>
+              </a:spcBef>
+              <a:spcAft>
+                <a:spcPts val="1000"/>
+              </a:spcAft>
+            </a:pPr>
+            <a:r>
+              <a:rPr sz="1600" b="1" i="0">
+                <a:solidFill>
+                  <a:srgbClr val="15503A"/>
+                </a:solidFill>
+                <a:latin typeface="Calibri"/>
+              </a:rPr>
+              <a:t>•  </a:t>
+            </a:r>
+            <a:r>
+              <a:rPr sz="1600" b="1" i="0">
+                <a:solidFill>
+                  <a:srgbClr val="14241C"/>
+                </a:solidFill>
+                <a:latin typeface="Calibri"/>
+              </a:rPr>
+              <a:t>How to get it on your phone</a:t>
+            </a:r>
+            <a:r>
+              <a:rPr sz="1600" b="0" i="0">
+                <a:solidFill>
+                  <a:srgbClr val="14241C"/>
+                </a:solidFill>
+                <a:latin typeface="Calibri"/>
+              </a:rPr>
+              <a:t>  — at the very end, together</a:t>
+            </a:r>
+          </a:p>
+          <a:p>
+            <a:pPr algn="l">
+              <a:lnSpc>
+                <a:spcPct val="105000"/>
+              </a:lnSpc>
+              <a:spcBef>
+                <a:spcPts val="0"/>
+              </a:spcBef>
+              <a:spcAft>
+                <a:spcPts val="1000"/>
+              </a:spcAft>
+            </a:pPr>
+            <a:r>
+              <a:rPr sz="1500" b="0" i="1">
                 <a:solidFill>
                   <a:srgbClr val="6B7068"/>
                 </a:solidFill>
                 <a:latin typeface="Calibri"/>
               </a:rPr>
-              <a:t>Goal of this talk:  get everyone excited, show how easy it is, and have them add it + sign in before they leave today.</a:t>
+              <a:t>You don't have to do anything yet — just follow along.</a:t>
             </a:r>
           </a:p>
         </p:txBody>
@@ -16299,7 +15807,7 @@
                 </a:solidFill>
                 <a:latin typeface="Calibri"/>
               </a:rPr>
-              <a:t>GROUND RULE  (say this out loud)</a:t>
+              <a:t>HOW TO FOLLOW ALONG</a:t>
             </a:r>
           </a:p>
         </p:txBody>
@@ -16389,7 +15897,7 @@
                 </a:solidFill>
                 <a:latin typeface="Calibri"/>
               </a:rPr>
-              <a:t>“Just watch — you don't need an account yet”</a:t>
+              <a:t>You don't need an account to look</a:t>
             </a:r>
           </a:p>
         </p:txBody>
@@ -16476,13 +15984,22 @@
               </a:spcAft>
             </a:pPr>
             <a:r>
-              <a:rPr sz="1600" b="0" i="1">
-                <a:solidFill>
-                  <a:srgbClr val="6B7068"/>
-                </a:solidFill>
-                <a:latin typeface="Calibri"/>
-              </a:rPr>
-              <a:t>Tell them up front so they don't interrupt with sign-up questions:</a:t>
+              <a:rPr sz="1900" b="1" i="0">
+                <a:solidFill>
+                  <a:srgbClr val="C2410C"/>
+                </a:solidFill>
+                <a:latin typeface="Calibri"/>
+              </a:rPr>
+              <a:t>Good news:  </a:t>
+            </a:r>
+            <a:r>
+              <a:rPr sz="1900" b="0" i="0">
+                <a:solidFill>
+                  <a:srgbClr val="14241C"/>
+                </a:solidFill>
+                <a:latin typeface="Calibri"/>
+              </a:rPr>
+              <a:t>you can open and browse the whole app without signing in.</a:t>
             </a:r>
           </a:p>
           <a:p>
@@ -16500,11 +16017,20 @@
             <a:r>
               <a:rPr sz="1900" b="1" i="0">
                 <a:solidFill>
-                  <a:srgbClr val="15503A"/>
-                </a:solidFill>
-                <a:latin typeface="Calibri"/>
-              </a:rPr>
-              <a:t>“You can open and browse the whole app without signing in. So just watch me go through it — don't worry about getting it yourself yet. At the very end I'll show you exactly how to add it and sign in, and we can do it together.”</a:t>
+                  <a:srgbClr val="14241C"/>
+                </a:solidFill>
+                <a:latin typeface="Calibri"/>
+              </a:rPr>
+              <a:t>So just watch for now</a:t>
+            </a:r>
+            <a:r>
+              <a:rPr sz="1900" b="0" i="0">
+                <a:solidFill>
+                  <a:srgbClr val="14241C"/>
+                </a:solidFill>
+                <a:latin typeface="Calibri"/>
+              </a:rPr>
+              <a:t>  — no need to grab your phone yet.</a:t>
             </a:r>
           </a:p>
           <a:p>
@@ -16520,22 +16046,13 @@
               </a:spcAft>
             </a:pPr>
             <a:r>
-              <a:rPr sz="1500" b="1" i="0">
-                <a:solidFill>
-                  <a:srgbClr val="C2410C"/>
-                </a:solidFill>
-                <a:latin typeface="Calibri"/>
-              </a:rPr>
-              <a:t>Why this matters:  </a:t>
-            </a:r>
-            <a:r>
-              <a:rPr sz="1500" b="0" i="0">
-                <a:solidFill>
-                  <a:srgbClr val="14241C"/>
-                </a:solidFill>
-                <a:latin typeface="Calibri"/>
-              </a:rPr>
-              <a:t>it parks the #1 interrupting question (“how do I get it?”) until the end, so you can get through the tour cleanly.</a:t>
+              <a:rPr sz="1600" b="0" i="1">
+                <a:solidFill>
+                  <a:srgbClr val="6B7068"/>
+                </a:solidFill>
+                <a:latin typeface="Calibri"/>
+              </a:rPr>
+              <a:t>At the very end I'll show you how to add it to your phone and sign in — and we'll do it together.</a:t>
             </a:r>
           </a:p>
         </p:txBody>
@@ -17030,7 +16547,7 @@
         <p:spPr>
           <a:xfrm>
             <a:off x="667512" y="1298448"/>
-            <a:ext cx="1554480" cy="603504"/>
+            <a:ext cx="1463040" cy="603504"/>
           </a:xfrm>
           <a:prstGeom prst="rect">
             <a:avLst/>
@@ -17061,7 +16578,7 @@
                 </a:solidFill>
                 <a:latin typeface="Calibri"/>
               </a:rPr>
-              <a:t>▶  ON SCREEN</a:t>
+              <a:t>📍  FIND IT</a:t>
             </a:r>
           </a:p>
         </p:txBody>
@@ -17074,8 +16591,8 @@
         </p:nvSpPr>
         <p:spPr>
           <a:xfrm>
-            <a:off x="2286000" y="1298448"/>
-            <a:ext cx="9281160" cy="603504"/>
+            <a:off x="2194560" y="1298448"/>
+            <a:ext cx="9372600" cy="603504"/>
           </a:xfrm>
           <a:prstGeom prst="rect">
             <a:avLst/>
@@ -17106,7 +16623,7 @@
                 </a:solidFill>
                 <a:latin typeface="Calibri"/>
               </a:rPr>
-              <a:t>Point to the bar across the bottom: Home · Feed · Family Fest · Activity · Profile</a:t>
+              <a:t>The bar across the bottom of every screen</a:t>
             </a:r>
           </a:p>
         </p:txBody>
@@ -17120,7 +16637,7 @@
         <p:spPr>
           <a:xfrm>
             <a:off x="502920" y="2029968"/>
-            <a:ext cx="11201400" cy="749808"/>
+            <a:ext cx="11201400" cy="786384"/>
           </a:xfrm>
           <a:prstGeom prst="roundRect">
             <a:avLst>
@@ -17168,7 +16685,7 @@
         <p:spPr>
           <a:xfrm>
             <a:off x="502920" y="2029968"/>
-            <a:ext cx="73152" cy="749808"/>
+            <a:ext cx="91440" cy="786384"/>
           </a:xfrm>
           <a:prstGeom prst="rect">
             <a:avLst/>
@@ -17211,8 +16728,8 @@
         </p:nvSpPr>
         <p:spPr>
           <a:xfrm>
-            <a:off x="704088" y="2075688"/>
-            <a:ext cx="1280160" cy="292608"/>
+            <a:off x="813816" y="2029968"/>
+            <a:ext cx="10698480" cy="786384"/>
           </a:xfrm>
           <a:prstGeom prst="rect">
             <a:avLst/>
@@ -17220,7 +16737,7 @@
           <a:noFill/>
         </p:spPr>
         <p:txBody>
-          <a:bodyPr wrap="square" anchor="t" lIns="25400" rIns="25400" tIns="12700" bIns="12700">
+          <a:bodyPr wrap="square" anchor="ctr" lIns="25400" rIns="25400" tIns="12700" bIns="12700">
             <a:spAutoFit/>
           </a:bodyPr>
           <a:lstStyle/>
@@ -17237,13 +16754,13 @@
               </a:spcAft>
             </a:pPr>
             <a:r>
-              <a:rPr sz="1200" b="1" i="0">
-                <a:solidFill>
-                  <a:srgbClr val="C2410C"/>
-                </a:solidFill>
-                <a:latin typeface="Calibri"/>
-              </a:rPr>
-              <a:t>🗣  SAY</a:t>
+              <a:rPr sz="1800" b="1" i="0">
+                <a:solidFill>
+                  <a:srgbClr val="14241C"/>
+                </a:solidFill>
+                <a:latin typeface="Calibri"/>
+              </a:rPr>
+              <a:t>Everything lives behind these five buttons at the bottom — that's the whole app.</a:t>
             </a:r>
           </a:p>
         </p:txBody>
@@ -17256,8 +16773,8 @@
         </p:nvSpPr>
         <p:spPr>
           <a:xfrm>
-            <a:off x="704088" y="2304288"/>
-            <a:ext cx="10789920" cy="475488"/>
+            <a:off x="594360" y="3035808"/>
+            <a:ext cx="11018520" cy="2468880"/>
           </a:xfrm>
           <a:prstGeom prst="rect">
             <a:avLst/>
@@ -17266,6 +16783,277 @@
         </p:spPr>
         <p:txBody>
           <a:bodyPr wrap="square" anchor="t" lIns="25400" rIns="25400" tIns="12700" bIns="12700">
+            <a:spAutoFit/>
+          </a:bodyPr>
+          <a:lstStyle/>
+          <a:p>
+            <a:pPr algn="l">
+              <a:lnSpc>
+                <a:spcPct val="100000"/>
+              </a:lnSpc>
+              <a:spcBef>
+                <a:spcPts val="0"/>
+              </a:spcBef>
+              <a:spcAft>
+                <a:spcPts val="1000"/>
+              </a:spcAft>
+            </a:pPr>
+            <a:r>
+              <a:rPr sz="1600" b="1" i="0">
+                <a:solidFill>
+                  <a:srgbClr val="15503A"/>
+                </a:solidFill>
+                <a:latin typeface="Calibri"/>
+              </a:rPr>
+              <a:t>•  </a:t>
+            </a:r>
+            <a:r>
+              <a:rPr sz="1600" b="1" i="0">
+                <a:solidFill>
+                  <a:srgbClr val="14241C"/>
+                </a:solidFill>
+                <a:latin typeface="Calibri"/>
+              </a:rPr>
+              <a:t>🏠 Home</a:t>
+            </a:r>
+            <a:r>
+              <a:rPr sz="1600" b="0" i="0">
+                <a:solidFill>
+                  <a:srgbClr val="14241C"/>
+                </a:solidFill>
+                <a:latin typeface="Calibri"/>
+              </a:rPr>
+              <a:t> — what's happening now + shortcuts to everything</a:t>
+            </a:r>
+          </a:p>
+          <a:p>
+            <a:pPr algn="l">
+              <a:lnSpc>
+                <a:spcPct val="100000"/>
+              </a:lnSpc>
+              <a:spcBef>
+                <a:spcPts val="0"/>
+              </a:spcBef>
+              <a:spcAft>
+                <a:spcPts val="1000"/>
+              </a:spcAft>
+            </a:pPr>
+            <a:r>
+              <a:rPr sz="1600" b="1" i="0">
+                <a:solidFill>
+                  <a:srgbClr val="15503A"/>
+                </a:solidFill>
+                <a:latin typeface="Calibri"/>
+              </a:rPr>
+              <a:t>•  </a:t>
+            </a:r>
+            <a:r>
+              <a:rPr sz="1600" b="1" i="0">
+                <a:solidFill>
+                  <a:srgbClr val="14241C"/>
+                </a:solidFill>
+                <a:latin typeface="Calibri"/>
+              </a:rPr>
+              <a:t>📣 Feed</a:t>
+            </a:r>
+            <a:r>
+              <a:rPr sz="1600" b="0" i="0">
+                <a:solidFill>
+                  <a:srgbClr val="14241C"/>
+                </a:solidFill>
+                <a:latin typeface="Calibri"/>
+              </a:rPr>
+              <a:t> — family photos &amp; posts, and committee chat</a:t>
+            </a:r>
+          </a:p>
+          <a:p>
+            <a:pPr algn="l">
+              <a:lnSpc>
+                <a:spcPct val="100000"/>
+              </a:lnSpc>
+              <a:spcBef>
+                <a:spcPts val="0"/>
+              </a:spcBef>
+              <a:spcAft>
+                <a:spcPts val="1000"/>
+              </a:spcAft>
+            </a:pPr>
+            <a:r>
+              <a:rPr sz="1600" b="1" i="0">
+                <a:solidFill>
+                  <a:srgbClr val="15503A"/>
+                </a:solidFill>
+                <a:latin typeface="Calibri"/>
+              </a:rPr>
+              <a:t>•  </a:t>
+            </a:r>
+            <a:r>
+              <a:rPr sz="1600" b="1" i="0">
+                <a:solidFill>
+                  <a:srgbClr val="14241C"/>
+                </a:solidFill>
+                <a:latin typeface="Calibri"/>
+              </a:rPr>
+              <a:t>🎉 Family Fest</a:t>
+            </a:r>
+            <a:r>
+              <a:rPr sz="1600" b="0" i="0">
+                <a:solidFill>
+                  <a:srgbClr val="14241C"/>
+                </a:solidFill>
+                <a:latin typeface="Calibri"/>
+              </a:rPr>
+              <a:t> — the full week — schedule, RSVP, dues, shirts</a:t>
+            </a:r>
+          </a:p>
+          <a:p>
+            <a:pPr algn="l">
+              <a:lnSpc>
+                <a:spcPct val="100000"/>
+              </a:lnSpc>
+              <a:spcBef>
+                <a:spcPts val="0"/>
+              </a:spcBef>
+              <a:spcAft>
+                <a:spcPts val="1000"/>
+              </a:spcAft>
+            </a:pPr>
+            <a:r>
+              <a:rPr sz="1600" b="1" i="0">
+                <a:solidFill>
+                  <a:srgbClr val="15503A"/>
+                </a:solidFill>
+                <a:latin typeface="Calibri"/>
+              </a:rPr>
+              <a:t>•  </a:t>
+            </a:r>
+            <a:r>
+              <a:rPr sz="1600" b="1" i="0">
+                <a:solidFill>
+                  <a:srgbClr val="14241C"/>
+                </a:solidFill>
+                <a:latin typeface="Calibri"/>
+              </a:rPr>
+              <a:t>🔔 Activity</a:t>
+            </a:r>
+            <a:r>
+              <a:rPr sz="1600" b="0" i="0">
+                <a:solidFill>
+                  <a:srgbClr val="14241C"/>
+                </a:solidFill>
+                <a:latin typeface="Calibri"/>
+              </a:rPr>
+              <a:t> — your notifications — comments, mentions, alerts</a:t>
+            </a:r>
+          </a:p>
+          <a:p>
+            <a:pPr algn="l">
+              <a:lnSpc>
+                <a:spcPct val="100000"/>
+              </a:lnSpc>
+              <a:spcBef>
+                <a:spcPts val="0"/>
+              </a:spcBef>
+              <a:spcAft>
+                <a:spcPts val="1000"/>
+              </a:spcAft>
+            </a:pPr>
+            <a:r>
+              <a:rPr sz="1600" b="1" i="0">
+                <a:solidFill>
+                  <a:srgbClr val="15503A"/>
+                </a:solidFill>
+                <a:latin typeface="Calibri"/>
+              </a:rPr>
+              <a:t>•  </a:t>
+            </a:r>
+            <a:r>
+              <a:rPr sz="1600" b="1" i="0">
+                <a:solidFill>
+                  <a:srgbClr val="14241C"/>
+                </a:solidFill>
+                <a:latin typeface="Calibri"/>
+              </a:rPr>
+              <a:t>👤 Profile</a:t>
+            </a:r>
+            <a:r>
+              <a:rPr sz="1600" b="0" i="0">
+                <a:solidFill>
+                  <a:srgbClr val="14241C"/>
+                </a:solidFill>
+                <a:latin typeface="Calibri"/>
+              </a:rPr>
+              <a:t> — your name, settings, sign-in, text size</a:t>
+            </a:r>
+          </a:p>
+        </p:txBody>
+      </p:sp>
+      <p:sp>
+        <p:nvSpPr>
+          <p:cNvPr id="15" name="Rounded Rectangle 14"/>
+          <p:cNvSpPr/>
+          <p:nvPr/>
+        </p:nvSpPr>
+        <p:spPr>
+          <a:xfrm>
+            <a:off x="502920" y="5486400"/>
+            <a:ext cx="11201400" cy="566928"/>
+          </a:xfrm>
+          <a:prstGeom prst="roundRect">
+            <a:avLst>
+              <a:gd name="adj" fmla="val 6000"/>
+            </a:avLst>
+          </a:prstGeom>
+          <a:solidFill>
+            <a:srgbClr val="F3EEF0"/>
+          </a:solidFill>
+          <a:ln w="12700">
+            <a:solidFill>
+              <a:srgbClr val="E5E4DA"/>
+            </a:solidFill>
+          </a:ln>
+          <a:effectLst/>
+        </p:spPr>
+        <p:style>
+          <a:lnRef idx="1">
+            <a:schemeClr val="accent1"/>
+          </a:lnRef>
+          <a:fillRef idx="3">
+            <a:schemeClr val="accent1"/>
+          </a:fillRef>
+          <a:effectRef idx="2">
+            <a:schemeClr val="accent1"/>
+          </a:effectRef>
+          <a:fontRef idx="minor">
+            <a:schemeClr val="lt1"/>
+          </a:fontRef>
+        </p:style>
+        <p:txBody>
+          <a:bodyPr rtlCol="0" anchor="ctr"/>
+          <a:lstStyle/>
+          <a:p>
+            <a:pPr algn="ctr"/>
+          </a:p>
+        </p:txBody>
+      </p:sp>
+      <p:sp>
+        <p:nvSpPr>
+          <p:cNvPr id="16" name="TextBox 15"/>
+          <p:cNvSpPr txBox="1"/>
+          <p:nvPr/>
+        </p:nvSpPr>
+        <p:spPr>
+          <a:xfrm>
+            <a:off x="667512" y="5486400"/>
+            <a:ext cx="1828800" cy="566928"/>
+          </a:xfrm>
+          <a:prstGeom prst="rect">
+            <a:avLst/>
+          </a:prstGeom>
+          <a:noFill/>
+        </p:spPr>
+        <p:txBody>
+          <a:bodyPr wrap="square" anchor="ctr" lIns="25400" rIns="25400" tIns="12700" bIns="12700">
             <a:spAutoFit/>
           </a:bodyPr>
           <a:lstStyle/>
@@ -17282,27 +17070,27 @@
               </a:spcAft>
             </a:pPr>
             <a:r>
-              <a:rPr sz="1600" b="0" i="1">
-                <a:solidFill>
-                  <a:srgbClr val="14241C"/>
-                </a:solidFill>
-                <a:latin typeface="Calibri"/>
-              </a:rPr>
-              <a:t>“Everything lives behind these five buttons at the bottom — that's the whole app.”</a:t>
-            </a:r>
-          </a:p>
-        </p:txBody>
-      </p:sp>
-      <p:sp>
-        <p:nvSpPr>
-          <p:cNvPr id="15" name="TextBox 14"/>
+              <a:rPr sz="1200" b="1" i="0">
+                <a:solidFill>
+                  <a:srgbClr val="8B2E2E"/>
+                </a:solidFill>
+                <a:latin typeface="Calibri"/>
+              </a:rPr>
+              <a:t>💡 GOOD TO KNOW</a:t>
+            </a:r>
+          </a:p>
+        </p:txBody>
+      </p:sp>
+      <p:sp>
+        <p:nvSpPr>
+          <p:cNvPr id="17" name="TextBox 16"/>
           <p:cNvSpPr txBox="1"/>
           <p:nvPr/>
         </p:nvSpPr>
         <p:spPr>
           <a:xfrm>
-            <a:off x="502920" y="2944368"/>
-            <a:ext cx="11201400" cy="310896"/>
+            <a:off x="2560320" y="5486400"/>
+            <a:ext cx="9006840" cy="566928"/>
           </a:xfrm>
           <a:prstGeom prst="rect">
             <a:avLst/>
@@ -17310,7 +17098,7 @@
           <a:noFill/>
         </p:spPr>
         <p:txBody>
-          <a:bodyPr wrap="square" anchor="t" lIns="25400" rIns="25400" tIns="12700" bIns="12700">
+          <a:bodyPr wrap="square" anchor="ctr" lIns="25400" rIns="25400" tIns="12700" bIns="12700">
             <a:spAutoFit/>
           </a:bodyPr>
           <a:lstStyle/>
@@ -17327,373 +17115,12 @@
               </a:spcAft>
             </a:pPr>
             <a:r>
-              <a:rPr sz="1200" b="1" i="0">
-                <a:solidFill>
-                  <a:srgbClr val="6B7068"/>
-                </a:solidFill>
-                <a:latin typeface="Calibri"/>
-              </a:rPr>
-              <a:t>TALKING POINTS</a:t>
-            </a:r>
-          </a:p>
-        </p:txBody>
-      </p:sp>
-      <p:sp>
-        <p:nvSpPr>
-          <p:cNvPr id="16" name="TextBox 15"/>
-          <p:cNvSpPr txBox="1"/>
-          <p:nvPr/>
-        </p:nvSpPr>
-        <p:spPr>
-          <a:xfrm>
-            <a:off x="594360" y="3273552"/>
-            <a:ext cx="11018520" cy="2331720"/>
-          </a:xfrm>
-          <a:prstGeom prst="rect">
-            <a:avLst/>
-          </a:prstGeom>
-          <a:noFill/>
-        </p:spPr>
-        <p:txBody>
-          <a:bodyPr wrap="square" anchor="t" lIns="25400" rIns="25400" tIns="12700" bIns="12700">
-            <a:spAutoFit/>
-          </a:bodyPr>
-          <a:lstStyle/>
-          <a:p>
-            <a:pPr algn="l">
-              <a:lnSpc>
-                <a:spcPct val="100000"/>
-              </a:lnSpc>
-              <a:spcBef>
-                <a:spcPts val="0"/>
-              </a:spcBef>
-              <a:spcAft>
-                <a:spcPts val="900"/>
-              </a:spcAft>
-            </a:pPr>
-            <a:r>
-              <a:rPr sz="1600" b="1" i="0">
-                <a:solidFill>
-                  <a:srgbClr val="15503A"/>
-                </a:solidFill>
-                <a:latin typeface="Calibri"/>
-              </a:rPr>
-              <a:t>•  </a:t>
-            </a:r>
-            <a:r>
-              <a:rPr sz="1600" b="1" i="0">
+              <a:rPr sz="1300" b="0" i="0">
                 <a:solidFill>
                   <a:srgbClr val="14241C"/>
                 </a:solidFill>
                 <a:latin typeface="Calibri"/>
               </a:rPr>
-              <a:t>🏠 Home</a:t>
-            </a:r>
-            <a:r>
-              <a:rPr sz="1600" b="0" i="0">
-                <a:solidFill>
-                  <a:srgbClr val="14241C"/>
-                </a:solidFill>
-                <a:latin typeface="Calibri"/>
-              </a:rPr>
-              <a:t> — what's happening now + shortcuts to everything</a:t>
-            </a:r>
-          </a:p>
-          <a:p>
-            <a:pPr algn="l">
-              <a:lnSpc>
-                <a:spcPct val="100000"/>
-              </a:lnSpc>
-              <a:spcBef>
-                <a:spcPts val="0"/>
-              </a:spcBef>
-              <a:spcAft>
-                <a:spcPts val="900"/>
-              </a:spcAft>
-            </a:pPr>
-            <a:r>
-              <a:rPr sz="1600" b="1" i="0">
-                <a:solidFill>
-                  <a:srgbClr val="15503A"/>
-                </a:solidFill>
-                <a:latin typeface="Calibri"/>
-              </a:rPr>
-              <a:t>•  </a:t>
-            </a:r>
-            <a:r>
-              <a:rPr sz="1600" b="1" i="0">
-                <a:solidFill>
-                  <a:srgbClr val="14241C"/>
-                </a:solidFill>
-                <a:latin typeface="Calibri"/>
-              </a:rPr>
-              <a:t>📣 Feed</a:t>
-            </a:r>
-            <a:r>
-              <a:rPr sz="1600" b="0" i="0">
-                <a:solidFill>
-                  <a:srgbClr val="14241C"/>
-                </a:solidFill>
-                <a:latin typeface="Calibri"/>
-              </a:rPr>
-              <a:t> — family photos &amp; posts, and committee chat</a:t>
-            </a:r>
-          </a:p>
-          <a:p>
-            <a:pPr algn="l">
-              <a:lnSpc>
-                <a:spcPct val="100000"/>
-              </a:lnSpc>
-              <a:spcBef>
-                <a:spcPts val="0"/>
-              </a:spcBef>
-              <a:spcAft>
-                <a:spcPts val="900"/>
-              </a:spcAft>
-            </a:pPr>
-            <a:r>
-              <a:rPr sz="1600" b="1" i="0">
-                <a:solidFill>
-                  <a:srgbClr val="15503A"/>
-                </a:solidFill>
-                <a:latin typeface="Calibri"/>
-              </a:rPr>
-              <a:t>•  </a:t>
-            </a:r>
-            <a:r>
-              <a:rPr sz="1600" b="1" i="0">
-                <a:solidFill>
-                  <a:srgbClr val="14241C"/>
-                </a:solidFill>
-                <a:latin typeface="Calibri"/>
-              </a:rPr>
-              <a:t>🎉 Family Fest</a:t>
-            </a:r>
-            <a:r>
-              <a:rPr sz="1600" b="0" i="0">
-                <a:solidFill>
-                  <a:srgbClr val="14241C"/>
-                </a:solidFill>
-                <a:latin typeface="Calibri"/>
-              </a:rPr>
-              <a:t> — the full week — schedule, RSVP, dues, shirts</a:t>
-            </a:r>
-          </a:p>
-          <a:p>
-            <a:pPr algn="l">
-              <a:lnSpc>
-                <a:spcPct val="100000"/>
-              </a:lnSpc>
-              <a:spcBef>
-                <a:spcPts val="0"/>
-              </a:spcBef>
-              <a:spcAft>
-                <a:spcPts val="900"/>
-              </a:spcAft>
-            </a:pPr>
-            <a:r>
-              <a:rPr sz="1600" b="1" i="0">
-                <a:solidFill>
-                  <a:srgbClr val="15503A"/>
-                </a:solidFill>
-                <a:latin typeface="Calibri"/>
-              </a:rPr>
-              <a:t>•  </a:t>
-            </a:r>
-            <a:r>
-              <a:rPr sz="1600" b="1" i="0">
-                <a:solidFill>
-                  <a:srgbClr val="14241C"/>
-                </a:solidFill>
-                <a:latin typeface="Calibri"/>
-              </a:rPr>
-              <a:t>🔔 Activity</a:t>
-            </a:r>
-            <a:r>
-              <a:rPr sz="1600" b="0" i="0">
-                <a:solidFill>
-                  <a:srgbClr val="14241C"/>
-                </a:solidFill>
-                <a:latin typeface="Calibri"/>
-              </a:rPr>
-              <a:t> — your notifications — comments, mentions, alerts</a:t>
-            </a:r>
-          </a:p>
-          <a:p>
-            <a:pPr algn="l">
-              <a:lnSpc>
-                <a:spcPct val="100000"/>
-              </a:lnSpc>
-              <a:spcBef>
-                <a:spcPts val="0"/>
-              </a:spcBef>
-              <a:spcAft>
-                <a:spcPts val="900"/>
-              </a:spcAft>
-            </a:pPr>
-            <a:r>
-              <a:rPr sz="1600" b="1" i="0">
-                <a:solidFill>
-                  <a:srgbClr val="15503A"/>
-                </a:solidFill>
-                <a:latin typeface="Calibri"/>
-              </a:rPr>
-              <a:t>•  </a:t>
-            </a:r>
-            <a:r>
-              <a:rPr sz="1600" b="1" i="0">
-                <a:solidFill>
-                  <a:srgbClr val="14241C"/>
-                </a:solidFill>
-                <a:latin typeface="Calibri"/>
-              </a:rPr>
-              <a:t>👤 Profile</a:t>
-            </a:r>
-            <a:r>
-              <a:rPr sz="1600" b="0" i="0">
-                <a:solidFill>
-                  <a:srgbClr val="14241C"/>
-                </a:solidFill>
-                <a:latin typeface="Calibri"/>
-              </a:rPr>
-              <a:t> — your name, settings, sign-in, text size</a:t>
-            </a:r>
-          </a:p>
-        </p:txBody>
-      </p:sp>
-      <p:sp>
-        <p:nvSpPr>
-          <p:cNvPr id="17" name="Rounded Rectangle 16"/>
-          <p:cNvSpPr/>
-          <p:nvPr/>
-        </p:nvSpPr>
-        <p:spPr>
-          <a:xfrm>
-            <a:off x="502920" y="5486400"/>
-            <a:ext cx="11201400" cy="566928"/>
-          </a:xfrm>
-          <a:prstGeom prst="roundRect">
-            <a:avLst>
-              <a:gd name="adj" fmla="val 6000"/>
-            </a:avLst>
-          </a:prstGeom>
-          <a:solidFill>
-            <a:srgbClr val="F3EEF0"/>
-          </a:solidFill>
-          <a:ln w="12700">
-            <a:solidFill>
-              <a:srgbClr val="E5E4DA"/>
-            </a:solidFill>
-          </a:ln>
-          <a:effectLst/>
-        </p:spPr>
-        <p:style>
-          <a:lnRef idx="1">
-            <a:schemeClr val="accent1"/>
-          </a:lnRef>
-          <a:fillRef idx="3">
-            <a:schemeClr val="accent1"/>
-          </a:fillRef>
-          <a:effectRef idx="2">
-            <a:schemeClr val="accent1"/>
-          </a:effectRef>
-          <a:fontRef idx="minor">
-            <a:schemeClr val="lt1"/>
-          </a:fontRef>
-        </p:style>
-        <p:txBody>
-          <a:bodyPr rtlCol="0" anchor="ctr"/>
-          <a:lstStyle/>
-          <a:p>
-            <a:pPr algn="ctr"/>
-          </a:p>
-        </p:txBody>
-      </p:sp>
-      <p:sp>
-        <p:nvSpPr>
-          <p:cNvPr id="18" name="TextBox 17"/>
-          <p:cNvSpPr txBox="1"/>
-          <p:nvPr/>
-        </p:nvSpPr>
-        <p:spPr>
-          <a:xfrm>
-            <a:off x="667512" y="5486400"/>
-            <a:ext cx="1463040" cy="566928"/>
-          </a:xfrm>
-          <a:prstGeom prst="rect">
-            <a:avLst/>
-          </a:prstGeom>
-          <a:noFill/>
-        </p:spPr>
-        <p:txBody>
-          <a:bodyPr wrap="square" anchor="ctr" lIns="25400" rIns="25400" tIns="12700" bIns="12700">
-            <a:spAutoFit/>
-          </a:bodyPr>
-          <a:lstStyle/>
-          <a:p>
-            <a:pPr algn="l">
-              <a:lnSpc>
-                <a:spcPct val="100000"/>
-              </a:lnSpc>
-              <a:spcBef>
-                <a:spcPts val="0"/>
-              </a:spcBef>
-              <a:spcAft>
-                <a:spcPts val="400"/>
-              </a:spcAft>
-            </a:pPr>
-            <a:r>
-              <a:rPr sz="1200" b="1" i="0">
-                <a:solidFill>
-                  <a:srgbClr val="8B2E2E"/>
-                </a:solidFill>
-                <a:latin typeface="Calibri"/>
-              </a:rPr>
-              <a:t>❓ IF ASKED</a:t>
-            </a:r>
-          </a:p>
-        </p:txBody>
-      </p:sp>
-      <p:sp>
-        <p:nvSpPr>
-          <p:cNvPr id="19" name="TextBox 18"/>
-          <p:cNvSpPr txBox="1"/>
-          <p:nvPr/>
-        </p:nvSpPr>
-        <p:spPr>
-          <a:xfrm>
-            <a:off x="2103120" y="5486400"/>
-            <a:ext cx="9464040" cy="566928"/>
-          </a:xfrm>
-          <a:prstGeom prst="rect">
-            <a:avLst/>
-          </a:prstGeom>
-          <a:noFill/>
-        </p:spPr>
-        <p:txBody>
-          <a:bodyPr wrap="square" anchor="ctr" lIns="25400" rIns="25400" tIns="12700" bIns="12700">
-            <a:spAutoFit/>
-          </a:bodyPr>
-          <a:lstStyle/>
-          <a:p>
-            <a:pPr algn="l">
-              <a:lnSpc>
-                <a:spcPct val="100000"/>
-              </a:lnSpc>
-              <a:spcBef>
-                <a:spcPts val="0"/>
-              </a:spcBef>
-              <a:spcAft>
-                <a:spcPts val="400"/>
-              </a:spcAft>
-            </a:pPr>
-            <a:r>
-              <a:rPr sz="1300" b="0" i="0">
-                <a:solidFill>
-                  <a:srgbClr val="14241C"/>
-                </a:solidFill>
-                <a:latin typeface="Calibri"/>
-              </a:rPr>
               <a:t>“People, Events, Pay, Local Places live on the Home screen — I'll show those too.”</a:t>
             </a:r>
           </a:p>
@@ -17701,7 +17128,7 @@
       </p:sp>
       <p:sp>
         <p:nvSpPr>
-          <p:cNvPr id="20" name="Rounded Rectangle 19"/>
+          <p:cNvPr id="18" name="Rounded Rectangle 17"/>
           <p:cNvSpPr/>
           <p:nvPr/>
         </p:nvSpPr>
@@ -17747,7 +17174,7 @@
       </p:sp>
       <p:sp>
         <p:nvSpPr>
-          <p:cNvPr id="21" name="Rounded Rectangle 20"/>
+          <p:cNvPr id="19" name="Rounded Rectangle 18"/>
           <p:cNvSpPr/>
           <p:nvPr/>
         </p:nvSpPr>
@@ -17793,7 +17220,7 @@
       </p:sp>
       <p:sp>
         <p:nvSpPr>
-          <p:cNvPr id="22" name="TextBox 21"/>
+          <p:cNvPr id="20" name="TextBox 19"/>
           <p:cNvSpPr txBox="1"/>
           <p:nvPr/>
         </p:nvSpPr>
@@ -18189,7 +17616,7 @@
         <p:spPr>
           <a:xfrm>
             <a:off x="667512" y="1298448"/>
-            <a:ext cx="1554480" cy="603504"/>
+            <a:ext cx="1463040" cy="603504"/>
           </a:xfrm>
           <a:prstGeom prst="rect">
             <a:avLst/>
@@ -18220,7 +17647,7 @@
                 </a:solidFill>
                 <a:latin typeface="Calibri"/>
               </a:rPr>
-              <a:t>▶  ON SCREEN</a:t>
+              <a:t>📍  FIND IT</a:t>
             </a:r>
           </a:p>
         </p:txBody>
@@ -18233,8 +17660,8 @@
         </p:nvSpPr>
         <p:spPr>
           <a:xfrm>
-            <a:off x="2286000" y="1298448"/>
-            <a:ext cx="9281160" cy="603504"/>
+            <a:off x="2194560" y="1298448"/>
+            <a:ext cx="9372600" cy="603504"/>
           </a:xfrm>
           <a:prstGeom prst="rect">
             <a:avLst/>
@@ -18265,7 +17692,7 @@
                 </a:solidFill>
                 <a:latin typeface="Calibri"/>
               </a:rPr>
-              <a:t>Open the Home tab. Scroll slowly top to bottom.</a:t>
+              <a:t>Home tab  (the cabin logo at the bottom-left)</a:t>
             </a:r>
           </a:p>
         </p:txBody>
@@ -18279,7 +17706,7 @@
         <p:spPr>
           <a:xfrm>
             <a:off x="502920" y="2029968"/>
-            <a:ext cx="11201400" cy="749808"/>
+            <a:ext cx="11201400" cy="786384"/>
           </a:xfrm>
           <a:prstGeom prst="roundRect">
             <a:avLst>
@@ -18327,7 +17754,7 @@
         <p:spPr>
           <a:xfrm>
             <a:off x="502920" y="2029968"/>
-            <a:ext cx="73152" cy="749808"/>
+            <a:ext cx="91440" cy="786384"/>
           </a:xfrm>
           <a:prstGeom prst="rect">
             <a:avLst/>
@@ -18370,8 +17797,8 @@
         </p:nvSpPr>
         <p:spPr>
           <a:xfrm>
-            <a:off x="704088" y="2075688"/>
-            <a:ext cx="1280160" cy="292608"/>
+            <a:off x="813816" y="2029968"/>
+            <a:ext cx="10698480" cy="786384"/>
           </a:xfrm>
           <a:prstGeom prst="rect">
             <a:avLst/>
@@ -18379,7 +17806,7 @@
           <a:noFill/>
         </p:spPr>
         <p:txBody>
-          <a:bodyPr wrap="square" anchor="t" lIns="25400" rIns="25400" tIns="12700" bIns="12700">
+          <a:bodyPr wrap="square" anchor="ctr" lIns="25400" rIns="25400" tIns="12700" bIns="12700">
             <a:spAutoFit/>
           </a:bodyPr>
           <a:lstStyle/>
@@ -18396,13 +17823,13 @@
               </a:spcAft>
             </a:pPr>
             <a:r>
-              <a:rPr sz="1200" b="1" i="0">
-                <a:solidFill>
-                  <a:srgbClr val="C2410C"/>
-                </a:solidFill>
-                <a:latin typeface="Calibri"/>
-              </a:rPr>
-              <a:t>🗣  SAY</a:t>
+              <a:rPr sz="1800" b="1" i="0">
+                <a:solidFill>
+                  <a:srgbClr val="14241C"/>
+                </a:solidFill>
+                <a:latin typeface="Calibri"/>
+              </a:rPr>
+              <a:t>Home always shows what matters right now — you'll usually start here.</a:t>
             </a:r>
           </a:p>
         </p:txBody>
@@ -18415,8 +17842,8 @@
         </p:nvSpPr>
         <p:spPr>
           <a:xfrm>
-            <a:off x="704088" y="2304288"/>
-            <a:ext cx="10789920" cy="475488"/>
+            <a:off x="594360" y="3035808"/>
+            <a:ext cx="11018520" cy="2468880"/>
           </a:xfrm>
           <a:prstGeom prst="rect">
             <a:avLst/>
@@ -18425,6 +17852,277 @@
         </p:spPr>
         <p:txBody>
           <a:bodyPr wrap="square" anchor="t" lIns="25400" rIns="25400" tIns="12700" bIns="12700">
+            <a:spAutoFit/>
+          </a:bodyPr>
+          <a:lstStyle/>
+          <a:p>
+            <a:pPr algn="l">
+              <a:lnSpc>
+                <a:spcPct val="100000"/>
+              </a:lnSpc>
+              <a:spcBef>
+                <a:spcPts val="0"/>
+              </a:spcBef>
+              <a:spcAft>
+                <a:spcPts val="1000"/>
+              </a:spcAft>
+            </a:pPr>
+            <a:r>
+              <a:rPr sz="1600" b="1" i="0">
+                <a:solidFill>
+                  <a:srgbClr val="15503A"/>
+                </a:solidFill>
+                <a:latin typeface="Calibri"/>
+              </a:rPr>
+              <a:t>•  </a:t>
+            </a:r>
+            <a:r>
+              <a:rPr sz="1600" b="1" i="0">
+                <a:solidFill>
+                  <a:srgbClr val="14241C"/>
+                </a:solidFill>
+                <a:latin typeface="Calibri"/>
+              </a:rPr>
+              <a:t>The logo up top</a:t>
+            </a:r>
+            <a:r>
+              <a:rPr sz="1600" b="0" i="0">
+                <a:solidFill>
+                  <a:srgbClr val="14241C"/>
+                </a:solidFill>
+                <a:latin typeface="Calibri"/>
+              </a:rPr>
+              <a:t> — tap it anytime to come back home</a:t>
+            </a:r>
+          </a:p>
+          <a:p>
+            <a:pPr algn="l">
+              <a:lnSpc>
+                <a:spcPct val="100000"/>
+              </a:lnSpc>
+              <a:spcBef>
+                <a:spcPts val="0"/>
+              </a:spcBef>
+              <a:spcAft>
+                <a:spcPts val="1000"/>
+              </a:spcAft>
+            </a:pPr>
+            <a:r>
+              <a:rPr sz="1600" b="1" i="0">
+                <a:solidFill>
+                  <a:srgbClr val="15503A"/>
+                </a:solidFill>
+                <a:latin typeface="Calibri"/>
+              </a:rPr>
+              <a:t>•  </a:t>
+            </a:r>
+            <a:r>
+              <a:rPr sz="1600" b="1" i="0">
+                <a:solidFill>
+                  <a:srgbClr val="14241C"/>
+                </a:solidFill>
+                <a:latin typeface="Calibri"/>
+              </a:rPr>
+              <a:t>Family Fest spotlight</a:t>
+            </a:r>
+            <a:r>
+              <a:rPr sz="1600" b="0" i="0">
+                <a:solidFill>
+                  <a:srgbClr val="14241C"/>
+                </a:solidFill>
+                <a:latin typeface="Calibri"/>
+              </a:rPr>
+              <a:t> — a live countdown to July 27 right now</a:t>
+            </a:r>
+          </a:p>
+          <a:p>
+            <a:pPr algn="l">
+              <a:lnSpc>
+                <a:spcPct val="100000"/>
+              </a:lnSpc>
+              <a:spcBef>
+                <a:spcPts val="0"/>
+              </a:spcBef>
+              <a:spcAft>
+                <a:spcPts val="1000"/>
+              </a:spcAft>
+            </a:pPr>
+            <a:r>
+              <a:rPr sz="1600" b="1" i="0">
+                <a:solidFill>
+                  <a:srgbClr val="15503A"/>
+                </a:solidFill>
+                <a:latin typeface="Calibri"/>
+              </a:rPr>
+              <a:t>•  </a:t>
+            </a:r>
+            <a:r>
+              <a:rPr sz="1600" b="1" i="0">
+                <a:solidFill>
+                  <a:srgbClr val="14241C"/>
+                </a:solidFill>
+                <a:latin typeface="Calibri"/>
+              </a:rPr>
+              <a:t>What's happening cards</a:t>
+            </a:r>
+            <a:r>
+              <a:rPr sz="1600" b="0" i="0">
+                <a:solidFill>
+                  <a:srgbClr val="14241C"/>
+                </a:solidFill>
+                <a:latin typeface="Calibri"/>
+              </a:rPr>
+              <a:t> — swipe-away call-outs like the t-shirt vote</a:t>
+            </a:r>
+          </a:p>
+          <a:p>
+            <a:pPr algn="l">
+              <a:lnSpc>
+                <a:spcPct val="100000"/>
+              </a:lnSpc>
+              <a:spcBef>
+                <a:spcPts val="0"/>
+              </a:spcBef>
+              <a:spcAft>
+                <a:spcPts val="1000"/>
+              </a:spcAft>
+            </a:pPr>
+            <a:r>
+              <a:rPr sz="1600" b="1" i="0">
+                <a:solidFill>
+                  <a:srgbClr val="15503A"/>
+                </a:solidFill>
+                <a:latin typeface="Calibri"/>
+              </a:rPr>
+              <a:t>•  </a:t>
+            </a:r>
+            <a:r>
+              <a:rPr sz="1600" b="1" i="0">
+                <a:solidFill>
+                  <a:srgbClr val="14241C"/>
+                </a:solidFill>
+                <a:latin typeface="Calibri"/>
+              </a:rPr>
+              <a:t>Next event + RSVP</a:t>
+            </a:r>
+            <a:r>
+              <a:rPr sz="1600" b="0" i="0">
+                <a:solidFill>
+                  <a:srgbClr val="14241C"/>
+                </a:solidFill>
+                <a:latin typeface="Calibri"/>
+              </a:rPr>
+              <a:t> — the closest gathering, one tap to say you're in</a:t>
+            </a:r>
+          </a:p>
+          <a:p>
+            <a:pPr algn="l">
+              <a:lnSpc>
+                <a:spcPct val="100000"/>
+              </a:lnSpc>
+              <a:spcBef>
+                <a:spcPts val="0"/>
+              </a:spcBef>
+              <a:spcAft>
+                <a:spcPts val="1000"/>
+              </a:spcAft>
+            </a:pPr>
+            <a:r>
+              <a:rPr sz="1600" b="1" i="0">
+                <a:solidFill>
+                  <a:srgbClr val="15503A"/>
+                </a:solidFill>
+                <a:latin typeface="Calibri"/>
+              </a:rPr>
+              <a:t>•  </a:t>
+            </a:r>
+            <a:r>
+              <a:rPr sz="1600" b="1" i="0">
+                <a:solidFill>
+                  <a:srgbClr val="14241C"/>
+                </a:solidFill>
+                <a:latin typeface="Calibri"/>
+              </a:rPr>
+              <a:t>Tiles</a:t>
+            </a:r>
+            <a:r>
+              <a:rPr sz="1600" b="0" i="0">
+                <a:solidFill>
+                  <a:srgbClr val="14241C"/>
+                </a:solidFill>
+                <a:latin typeface="Calibri"/>
+              </a:rPr>
+              <a:t> — Get involved, Ask for Help, People, cabins, local places</a:t>
+            </a:r>
+          </a:p>
+        </p:txBody>
+      </p:sp>
+      <p:sp>
+        <p:nvSpPr>
+          <p:cNvPr id="15" name="Rounded Rectangle 14"/>
+          <p:cNvSpPr/>
+          <p:nvPr/>
+        </p:nvSpPr>
+        <p:spPr>
+          <a:xfrm>
+            <a:off x="502920" y="5486400"/>
+            <a:ext cx="11201400" cy="566928"/>
+          </a:xfrm>
+          <a:prstGeom prst="roundRect">
+            <a:avLst>
+              <a:gd name="adj" fmla="val 6000"/>
+            </a:avLst>
+          </a:prstGeom>
+          <a:solidFill>
+            <a:srgbClr val="F3EEF0"/>
+          </a:solidFill>
+          <a:ln w="12700">
+            <a:solidFill>
+              <a:srgbClr val="E5E4DA"/>
+            </a:solidFill>
+          </a:ln>
+          <a:effectLst/>
+        </p:spPr>
+        <p:style>
+          <a:lnRef idx="1">
+            <a:schemeClr val="accent1"/>
+          </a:lnRef>
+          <a:fillRef idx="3">
+            <a:schemeClr val="accent1"/>
+          </a:fillRef>
+          <a:effectRef idx="2">
+            <a:schemeClr val="accent1"/>
+          </a:effectRef>
+          <a:fontRef idx="minor">
+            <a:schemeClr val="lt1"/>
+          </a:fontRef>
+        </p:style>
+        <p:txBody>
+          <a:bodyPr rtlCol="0" anchor="ctr"/>
+          <a:lstStyle/>
+          <a:p>
+            <a:pPr algn="ctr"/>
+          </a:p>
+        </p:txBody>
+      </p:sp>
+      <p:sp>
+        <p:nvSpPr>
+          <p:cNvPr id="16" name="TextBox 15"/>
+          <p:cNvSpPr txBox="1"/>
+          <p:nvPr/>
+        </p:nvSpPr>
+        <p:spPr>
+          <a:xfrm>
+            <a:off x="667512" y="5486400"/>
+            <a:ext cx="1828800" cy="566928"/>
+          </a:xfrm>
+          <a:prstGeom prst="rect">
+            <a:avLst/>
+          </a:prstGeom>
+          <a:noFill/>
+        </p:spPr>
+        <p:txBody>
+          <a:bodyPr wrap="square" anchor="ctr" lIns="25400" rIns="25400" tIns="12700" bIns="12700">
             <a:spAutoFit/>
           </a:bodyPr>
           <a:lstStyle/>
@@ -18441,27 +18139,27 @@
               </a:spcAft>
             </a:pPr>
             <a:r>
-              <a:rPr sz="1600" b="0" i="1">
-                <a:solidFill>
-                  <a:srgbClr val="14241C"/>
-                </a:solidFill>
-                <a:latin typeface="Calibri"/>
-              </a:rPr>
-              <a:t>“Home always shows what matters right now — you'll usually start here.”</a:t>
-            </a:r>
-          </a:p>
-        </p:txBody>
-      </p:sp>
-      <p:sp>
-        <p:nvSpPr>
-          <p:cNvPr id="15" name="TextBox 14"/>
+              <a:rPr sz="1200" b="1" i="0">
+                <a:solidFill>
+                  <a:srgbClr val="8B2E2E"/>
+                </a:solidFill>
+                <a:latin typeface="Calibri"/>
+              </a:rPr>
+              <a:t>💡 GOOD TO KNOW</a:t>
+            </a:r>
+          </a:p>
+        </p:txBody>
+      </p:sp>
+      <p:sp>
+        <p:nvSpPr>
+          <p:cNvPr id="17" name="TextBox 16"/>
           <p:cNvSpPr txBox="1"/>
           <p:nvPr/>
         </p:nvSpPr>
         <p:spPr>
           <a:xfrm>
-            <a:off x="502920" y="2944368"/>
-            <a:ext cx="11201400" cy="310896"/>
+            <a:off x="2560320" y="5486400"/>
+            <a:ext cx="9006840" cy="566928"/>
           </a:xfrm>
           <a:prstGeom prst="rect">
             <a:avLst/>
@@ -18469,7 +18167,7 @@
           <a:noFill/>
         </p:spPr>
         <p:txBody>
-          <a:bodyPr wrap="square" anchor="t" lIns="25400" rIns="25400" tIns="12700" bIns="12700">
+          <a:bodyPr wrap="square" anchor="ctr" lIns="25400" rIns="25400" tIns="12700" bIns="12700">
             <a:spAutoFit/>
           </a:bodyPr>
           <a:lstStyle/>
@@ -18486,373 +18184,12 @@
               </a:spcAft>
             </a:pPr>
             <a:r>
-              <a:rPr sz="1200" b="1" i="0">
-                <a:solidFill>
-                  <a:srgbClr val="6B7068"/>
-                </a:solidFill>
-                <a:latin typeface="Calibri"/>
-              </a:rPr>
-              <a:t>TALKING POINTS</a:t>
-            </a:r>
-          </a:p>
-        </p:txBody>
-      </p:sp>
-      <p:sp>
-        <p:nvSpPr>
-          <p:cNvPr id="16" name="TextBox 15"/>
-          <p:cNvSpPr txBox="1"/>
-          <p:nvPr/>
-        </p:nvSpPr>
-        <p:spPr>
-          <a:xfrm>
-            <a:off x="594360" y="3273552"/>
-            <a:ext cx="11018520" cy="2331720"/>
-          </a:xfrm>
-          <a:prstGeom prst="rect">
-            <a:avLst/>
-          </a:prstGeom>
-          <a:noFill/>
-        </p:spPr>
-        <p:txBody>
-          <a:bodyPr wrap="square" anchor="t" lIns="25400" rIns="25400" tIns="12700" bIns="12700">
-            <a:spAutoFit/>
-          </a:bodyPr>
-          <a:lstStyle/>
-          <a:p>
-            <a:pPr algn="l">
-              <a:lnSpc>
-                <a:spcPct val="100000"/>
-              </a:lnSpc>
-              <a:spcBef>
-                <a:spcPts val="0"/>
-              </a:spcBef>
-              <a:spcAft>
-                <a:spcPts val="900"/>
-              </a:spcAft>
-            </a:pPr>
-            <a:r>
-              <a:rPr sz="1600" b="1" i="0">
-                <a:solidFill>
-                  <a:srgbClr val="15503A"/>
-                </a:solidFill>
-                <a:latin typeface="Calibri"/>
-              </a:rPr>
-              <a:t>•  </a:t>
-            </a:r>
-            <a:r>
-              <a:rPr sz="1600" b="1" i="0">
+              <a:rPr sz="1300" b="0" i="0">
                 <a:solidFill>
                   <a:srgbClr val="14241C"/>
                 </a:solidFill>
                 <a:latin typeface="Calibri"/>
               </a:rPr>
-              <a:t>The logo up top</a:t>
-            </a:r>
-            <a:r>
-              <a:rPr sz="1600" b="0" i="0">
-                <a:solidFill>
-                  <a:srgbClr val="14241C"/>
-                </a:solidFill>
-                <a:latin typeface="Calibri"/>
-              </a:rPr>
-              <a:t> — tap it anytime to come back home</a:t>
-            </a:r>
-          </a:p>
-          <a:p>
-            <a:pPr algn="l">
-              <a:lnSpc>
-                <a:spcPct val="100000"/>
-              </a:lnSpc>
-              <a:spcBef>
-                <a:spcPts val="0"/>
-              </a:spcBef>
-              <a:spcAft>
-                <a:spcPts val="900"/>
-              </a:spcAft>
-            </a:pPr>
-            <a:r>
-              <a:rPr sz="1600" b="1" i="0">
-                <a:solidFill>
-                  <a:srgbClr val="15503A"/>
-                </a:solidFill>
-                <a:latin typeface="Calibri"/>
-              </a:rPr>
-              <a:t>•  </a:t>
-            </a:r>
-            <a:r>
-              <a:rPr sz="1600" b="1" i="0">
-                <a:solidFill>
-                  <a:srgbClr val="14241C"/>
-                </a:solidFill>
-                <a:latin typeface="Calibri"/>
-              </a:rPr>
-              <a:t>Family Fest spotlight</a:t>
-            </a:r>
-            <a:r>
-              <a:rPr sz="1600" b="0" i="0">
-                <a:solidFill>
-                  <a:srgbClr val="14241C"/>
-                </a:solidFill>
-                <a:latin typeface="Calibri"/>
-              </a:rPr>
-              <a:t> — a live countdown to July 27 right now</a:t>
-            </a:r>
-          </a:p>
-          <a:p>
-            <a:pPr algn="l">
-              <a:lnSpc>
-                <a:spcPct val="100000"/>
-              </a:lnSpc>
-              <a:spcBef>
-                <a:spcPts val="0"/>
-              </a:spcBef>
-              <a:spcAft>
-                <a:spcPts val="900"/>
-              </a:spcAft>
-            </a:pPr>
-            <a:r>
-              <a:rPr sz="1600" b="1" i="0">
-                <a:solidFill>
-                  <a:srgbClr val="15503A"/>
-                </a:solidFill>
-                <a:latin typeface="Calibri"/>
-              </a:rPr>
-              <a:t>•  </a:t>
-            </a:r>
-            <a:r>
-              <a:rPr sz="1600" b="1" i="0">
-                <a:solidFill>
-                  <a:srgbClr val="14241C"/>
-                </a:solidFill>
-                <a:latin typeface="Calibri"/>
-              </a:rPr>
-              <a:t>What's happening cards</a:t>
-            </a:r>
-            <a:r>
-              <a:rPr sz="1600" b="0" i="0">
-                <a:solidFill>
-                  <a:srgbClr val="14241C"/>
-                </a:solidFill>
-                <a:latin typeface="Calibri"/>
-              </a:rPr>
-              <a:t> — swipe-away call-outs like the t-shirt vote</a:t>
-            </a:r>
-          </a:p>
-          <a:p>
-            <a:pPr algn="l">
-              <a:lnSpc>
-                <a:spcPct val="100000"/>
-              </a:lnSpc>
-              <a:spcBef>
-                <a:spcPts val="0"/>
-              </a:spcBef>
-              <a:spcAft>
-                <a:spcPts val="900"/>
-              </a:spcAft>
-            </a:pPr>
-            <a:r>
-              <a:rPr sz="1600" b="1" i="0">
-                <a:solidFill>
-                  <a:srgbClr val="15503A"/>
-                </a:solidFill>
-                <a:latin typeface="Calibri"/>
-              </a:rPr>
-              <a:t>•  </a:t>
-            </a:r>
-            <a:r>
-              <a:rPr sz="1600" b="1" i="0">
-                <a:solidFill>
-                  <a:srgbClr val="14241C"/>
-                </a:solidFill>
-                <a:latin typeface="Calibri"/>
-              </a:rPr>
-              <a:t>Next event + RSVP</a:t>
-            </a:r>
-            <a:r>
-              <a:rPr sz="1600" b="0" i="0">
-                <a:solidFill>
-                  <a:srgbClr val="14241C"/>
-                </a:solidFill>
-                <a:latin typeface="Calibri"/>
-              </a:rPr>
-              <a:t> — the closest gathering, one tap to say you're in</a:t>
-            </a:r>
-          </a:p>
-          <a:p>
-            <a:pPr algn="l">
-              <a:lnSpc>
-                <a:spcPct val="100000"/>
-              </a:lnSpc>
-              <a:spcBef>
-                <a:spcPts val="0"/>
-              </a:spcBef>
-              <a:spcAft>
-                <a:spcPts val="900"/>
-              </a:spcAft>
-            </a:pPr>
-            <a:r>
-              <a:rPr sz="1600" b="1" i="0">
-                <a:solidFill>
-                  <a:srgbClr val="15503A"/>
-                </a:solidFill>
-                <a:latin typeface="Calibri"/>
-              </a:rPr>
-              <a:t>•  </a:t>
-            </a:r>
-            <a:r>
-              <a:rPr sz="1600" b="1" i="0">
-                <a:solidFill>
-                  <a:srgbClr val="14241C"/>
-                </a:solidFill>
-                <a:latin typeface="Calibri"/>
-              </a:rPr>
-              <a:t>Tiles</a:t>
-            </a:r>
-            <a:r>
-              <a:rPr sz="1600" b="0" i="0">
-                <a:solidFill>
-                  <a:srgbClr val="14241C"/>
-                </a:solidFill>
-                <a:latin typeface="Calibri"/>
-              </a:rPr>
-              <a:t> — Get involved, Ask for Help, People, cabins, local places</a:t>
-            </a:r>
-          </a:p>
-        </p:txBody>
-      </p:sp>
-      <p:sp>
-        <p:nvSpPr>
-          <p:cNvPr id="17" name="Rounded Rectangle 16"/>
-          <p:cNvSpPr/>
-          <p:nvPr/>
-        </p:nvSpPr>
-        <p:spPr>
-          <a:xfrm>
-            <a:off x="502920" y="5486400"/>
-            <a:ext cx="11201400" cy="566928"/>
-          </a:xfrm>
-          <a:prstGeom prst="roundRect">
-            <a:avLst>
-              <a:gd name="adj" fmla="val 6000"/>
-            </a:avLst>
-          </a:prstGeom>
-          <a:solidFill>
-            <a:srgbClr val="F3EEF0"/>
-          </a:solidFill>
-          <a:ln w="12700">
-            <a:solidFill>
-              <a:srgbClr val="E5E4DA"/>
-            </a:solidFill>
-          </a:ln>
-          <a:effectLst/>
-        </p:spPr>
-        <p:style>
-          <a:lnRef idx="1">
-            <a:schemeClr val="accent1"/>
-          </a:lnRef>
-          <a:fillRef idx="3">
-            <a:schemeClr val="accent1"/>
-          </a:fillRef>
-          <a:effectRef idx="2">
-            <a:schemeClr val="accent1"/>
-          </a:effectRef>
-          <a:fontRef idx="minor">
-            <a:schemeClr val="lt1"/>
-          </a:fontRef>
-        </p:style>
-        <p:txBody>
-          <a:bodyPr rtlCol="0" anchor="ctr"/>
-          <a:lstStyle/>
-          <a:p>
-            <a:pPr algn="ctr"/>
-          </a:p>
-        </p:txBody>
-      </p:sp>
-      <p:sp>
-        <p:nvSpPr>
-          <p:cNvPr id="18" name="TextBox 17"/>
-          <p:cNvSpPr txBox="1"/>
-          <p:nvPr/>
-        </p:nvSpPr>
-        <p:spPr>
-          <a:xfrm>
-            <a:off x="667512" y="5486400"/>
-            <a:ext cx="1463040" cy="566928"/>
-          </a:xfrm>
-          <a:prstGeom prst="rect">
-            <a:avLst/>
-          </a:prstGeom>
-          <a:noFill/>
-        </p:spPr>
-        <p:txBody>
-          <a:bodyPr wrap="square" anchor="ctr" lIns="25400" rIns="25400" tIns="12700" bIns="12700">
-            <a:spAutoFit/>
-          </a:bodyPr>
-          <a:lstStyle/>
-          <a:p>
-            <a:pPr algn="l">
-              <a:lnSpc>
-                <a:spcPct val="100000"/>
-              </a:lnSpc>
-              <a:spcBef>
-                <a:spcPts val="0"/>
-              </a:spcBef>
-              <a:spcAft>
-                <a:spcPts val="400"/>
-              </a:spcAft>
-            </a:pPr>
-            <a:r>
-              <a:rPr sz="1200" b="1" i="0">
-                <a:solidFill>
-                  <a:srgbClr val="8B2E2E"/>
-                </a:solidFill>
-                <a:latin typeface="Calibri"/>
-              </a:rPr>
-              <a:t>❓ IF ASKED</a:t>
-            </a:r>
-          </a:p>
-        </p:txBody>
-      </p:sp>
-      <p:sp>
-        <p:nvSpPr>
-          <p:cNvPr id="19" name="TextBox 18"/>
-          <p:cNvSpPr txBox="1"/>
-          <p:nvPr/>
-        </p:nvSpPr>
-        <p:spPr>
-          <a:xfrm>
-            <a:off x="2103120" y="5486400"/>
-            <a:ext cx="9464040" cy="566928"/>
-          </a:xfrm>
-          <a:prstGeom prst="rect">
-            <a:avLst/>
-          </a:prstGeom>
-          <a:noFill/>
-        </p:spPr>
-        <p:txBody>
-          <a:bodyPr wrap="square" anchor="ctr" lIns="25400" rIns="25400" tIns="12700" bIns="12700">
-            <a:spAutoFit/>
-          </a:bodyPr>
-          <a:lstStyle/>
-          <a:p>
-            <a:pPr algn="l">
-              <a:lnSpc>
-                <a:spcPct val="100000"/>
-              </a:lnSpc>
-              <a:spcBef>
-                <a:spcPts val="0"/>
-              </a:spcBef>
-              <a:spcAft>
-                <a:spcPts val="400"/>
-              </a:spcAft>
-            </a:pPr>
-            <a:r>
-              <a:rPr sz="1300" b="0" i="0">
-                <a:solidFill>
-                  <a:srgbClr val="14241C"/>
-                </a:solidFill>
-                <a:latin typeface="Calibri"/>
-              </a:rPr>
               <a:t>“We're ~4 weeks out, so it's in 'planning' mode — during Fest week it flips to a day-by-day view.”</a:t>
             </a:r>
           </a:p>
@@ -18860,7 +18197,7 @@
       </p:sp>
       <p:sp>
         <p:nvSpPr>
-          <p:cNvPr id="20" name="Rounded Rectangle 19"/>
+          <p:cNvPr id="18" name="Rounded Rectangle 17"/>
           <p:cNvSpPr/>
           <p:nvPr/>
         </p:nvSpPr>
@@ -18906,7 +18243,7 @@
       </p:sp>
       <p:sp>
         <p:nvSpPr>
-          <p:cNvPr id="21" name="Rounded Rectangle 20"/>
+          <p:cNvPr id="19" name="Rounded Rectangle 18"/>
           <p:cNvSpPr/>
           <p:nvPr/>
         </p:nvSpPr>
@@ -18952,7 +18289,7 @@
       </p:sp>
       <p:sp>
         <p:nvSpPr>
-          <p:cNvPr id="22" name="TextBox 21"/>
+          <p:cNvPr id="20" name="TextBox 19"/>
           <p:cNvSpPr txBox="1"/>
           <p:nvPr/>
         </p:nvSpPr>
@@ -19348,7 +18685,7 @@
         <p:spPr>
           <a:xfrm>
             <a:off x="667512" y="1298448"/>
-            <a:ext cx="1554480" cy="603504"/>
+            <a:ext cx="1463040" cy="603504"/>
           </a:xfrm>
           <a:prstGeom prst="rect">
             <a:avLst/>
@@ -19379,7 +18716,7 @@
                 </a:solidFill>
                 <a:latin typeface="Calibri"/>
               </a:rPr>
-              <a:t>▶  ON SCREEN</a:t>
+              <a:t>📍  FIND IT</a:t>
             </a:r>
           </a:p>
         </p:txBody>
@@ -19392,8 +18729,8 @@
         </p:nvSpPr>
         <p:spPr>
           <a:xfrm>
-            <a:off x="2286000" y="1298448"/>
-            <a:ext cx="9281160" cy="603504"/>
+            <a:off x="2194560" y="1298448"/>
+            <a:ext cx="9372600" cy="603504"/>
           </a:xfrm>
           <a:prstGeom prst="rect">
             <a:avLst/>
@@ -19424,7 +18761,7 @@
                 </a:solidFill>
                 <a:latin typeface="Calibri"/>
               </a:rPr>
-              <a:t>Tap the Family Fest tab. Show the poster, then the schedule sub-nav.</a:t>
+              <a:t>Family Fest tab  →  Schedule</a:t>
             </a:r>
           </a:p>
         </p:txBody>
@@ -19438,7 +18775,7 @@
         <p:spPr>
           <a:xfrm>
             <a:off x="502920" y="2029968"/>
-            <a:ext cx="11201400" cy="749808"/>
+            <a:ext cx="11201400" cy="786384"/>
           </a:xfrm>
           <a:prstGeom prst="roundRect">
             <a:avLst>
@@ -19486,7 +18823,7 @@
         <p:spPr>
           <a:xfrm>
             <a:off x="502920" y="2029968"/>
-            <a:ext cx="73152" cy="749808"/>
+            <a:ext cx="91440" cy="786384"/>
           </a:xfrm>
           <a:prstGeom prst="rect">
             <a:avLst/>
@@ -19529,8 +18866,8 @@
         </p:nvSpPr>
         <p:spPr>
           <a:xfrm>
-            <a:off x="704088" y="2075688"/>
-            <a:ext cx="1280160" cy="292608"/>
+            <a:off x="813816" y="2029968"/>
+            <a:ext cx="10698480" cy="786384"/>
           </a:xfrm>
           <a:prstGeom prst="rect">
             <a:avLst/>
@@ -19538,7 +18875,7 @@
           <a:noFill/>
         </p:spPr>
         <p:txBody>
-          <a:bodyPr wrap="square" anchor="t" lIns="25400" rIns="25400" tIns="12700" bIns="12700">
+          <a:bodyPr wrap="square" anchor="ctr" lIns="25400" rIns="25400" tIns="12700" bIns="12700">
             <a:spAutoFit/>
           </a:bodyPr>
           <a:lstStyle/>
@@ -19555,13 +18892,13 @@
               </a:spcAft>
             </a:pPr>
             <a:r>
-              <a:rPr sz="1200" b="1" i="0">
-                <a:solidFill>
-                  <a:srgbClr val="C2410C"/>
-                </a:solidFill>
-                <a:latin typeface="Calibri"/>
-              </a:rPr>
-              <a:t>🗣  SAY</a:t>
+              <a:rPr sz="1800" b="1" i="0">
+                <a:solidFill>
+                  <a:srgbClr val="14241C"/>
+                </a:solidFill>
+                <a:latin typeface="Calibri"/>
+              </a:rPr>
+              <a:t>This is the heart of it — Family Fest is July 27 to 31, the whole clan at the lake.</a:t>
             </a:r>
           </a:p>
         </p:txBody>
@@ -19574,8 +18911,8 @@
         </p:nvSpPr>
         <p:spPr>
           <a:xfrm>
-            <a:off x="704088" y="2304288"/>
-            <a:ext cx="10789920" cy="475488"/>
+            <a:off x="594360" y="3035808"/>
+            <a:ext cx="11018520" cy="2468880"/>
           </a:xfrm>
           <a:prstGeom prst="rect">
             <a:avLst/>
@@ -19584,6 +18921,277 @@
         </p:spPr>
         <p:txBody>
           <a:bodyPr wrap="square" anchor="t" lIns="25400" rIns="25400" tIns="12700" bIns="12700">
+            <a:spAutoFit/>
+          </a:bodyPr>
+          <a:lstStyle/>
+          <a:p>
+            <a:pPr algn="l">
+              <a:lnSpc>
+                <a:spcPct val="100000"/>
+              </a:lnSpc>
+              <a:spcBef>
+                <a:spcPts val="0"/>
+              </a:spcBef>
+              <a:spcAft>
+                <a:spcPts val="1000"/>
+              </a:spcAft>
+            </a:pPr>
+            <a:r>
+              <a:rPr sz="1600" b="1" i="0">
+                <a:solidFill>
+                  <a:srgbClr val="15503A"/>
+                </a:solidFill>
+                <a:latin typeface="Calibri"/>
+              </a:rPr>
+              <a:t>•  </a:t>
+            </a:r>
+            <a:r>
+              <a:rPr sz="1600" b="1" i="0">
+                <a:solidFill>
+                  <a:srgbClr val="14241C"/>
+                </a:solidFill>
+                <a:latin typeface="Calibri"/>
+              </a:rPr>
+              <a:t>July 27–31, 2026</a:t>
+            </a:r>
+            <a:r>
+              <a:rPr sz="1600" b="0" i="0">
+                <a:solidFill>
+                  <a:srgbClr val="14241C"/>
+                </a:solidFill>
+                <a:latin typeface="Calibri"/>
+              </a:rPr>
+              <a:t> — “Ye Olde Family Feste” theme this year</a:t>
+            </a:r>
+          </a:p>
+          <a:p>
+            <a:pPr algn="l">
+              <a:lnSpc>
+                <a:spcPct val="100000"/>
+              </a:lnSpc>
+              <a:spcBef>
+                <a:spcPts val="0"/>
+              </a:spcBef>
+              <a:spcAft>
+                <a:spcPts val="1000"/>
+              </a:spcAft>
+            </a:pPr>
+            <a:r>
+              <a:rPr sz="1600" b="1" i="0">
+                <a:solidFill>
+                  <a:srgbClr val="15503A"/>
+                </a:solidFill>
+                <a:latin typeface="Calibri"/>
+              </a:rPr>
+              <a:t>•  </a:t>
+            </a:r>
+            <a:r>
+              <a:rPr sz="1600" b="1" i="0">
+                <a:solidFill>
+                  <a:srgbClr val="14241C"/>
+                </a:solidFill>
+                <a:latin typeface="Calibri"/>
+              </a:rPr>
+              <a:t>Signature nights</a:t>
+            </a:r>
+            <a:r>
+              <a:rPr sz="1600" b="0" i="0">
+                <a:solidFill>
+                  <a:srgbClr val="14241C"/>
+                </a:solidFill>
+                <a:latin typeface="Calibri"/>
+              </a:rPr>
+              <a:t> — Mon bonfire, Wed musky tournament, Thu talent show, Fri fireworks</a:t>
+            </a:r>
+          </a:p>
+          <a:p>
+            <a:pPr algn="l">
+              <a:lnSpc>
+                <a:spcPct val="100000"/>
+              </a:lnSpc>
+              <a:spcBef>
+                <a:spcPts val="0"/>
+              </a:spcBef>
+              <a:spcAft>
+                <a:spcPts val="1000"/>
+              </a:spcAft>
+            </a:pPr>
+            <a:r>
+              <a:rPr sz="1600" b="1" i="0">
+                <a:solidFill>
+                  <a:srgbClr val="15503A"/>
+                </a:solidFill>
+                <a:latin typeface="Calibri"/>
+              </a:rPr>
+              <a:t>•  </a:t>
+            </a:r>
+            <a:r>
+              <a:rPr sz="1600" b="1" i="0">
+                <a:solidFill>
+                  <a:srgbClr val="14241C"/>
+                </a:solidFill>
+                <a:latin typeface="Calibri"/>
+              </a:rPr>
+              <a:t>Dinners each night</a:t>
+            </a:r>
+            <a:r>
+              <a:rPr sz="1600" b="0" i="0">
+                <a:solidFill>
+                  <a:srgbClr val="14241C"/>
+                </a:solidFill>
+                <a:latin typeface="Calibri"/>
+              </a:rPr>
+              <a:t> — chefs: Jessica, Natalie &amp; Karen, Lauren, Rob &amp; Joe</a:t>
+            </a:r>
+          </a:p>
+          <a:p>
+            <a:pPr algn="l">
+              <a:lnSpc>
+                <a:spcPct val="100000"/>
+              </a:lnSpc>
+              <a:spcBef>
+                <a:spcPts val="0"/>
+              </a:spcBef>
+              <a:spcAft>
+                <a:spcPts val="1000"/>
+              </a:spcAft>
+            </a:pPr>
+            <a:r>
+              <a:rPr sz="1600" b="1" i="0">
+                <a:solidFill>
+                  <a:srgbClr val="15503A"/>
+                </a:solidFill>
+                <a:latin typeface="Calibri"/>
+              </a:rPr>
+              <a:t>•  </a:t>
+            </a:r>
+            <a:r>
+              <a:rPr sz="1600" b="1" i="0">
+                <a:solidFill>
+                  <a:srgbClr val="14241C"/>
+                </a:solidFill>
+                <a:latin typeface="Calibri"/>
+              </a:rPr>
+              <a:t>All-week fun</a:t>
+            </a:r>
+            <a:r>
+              <a:rPr sz="1600" b="0" i="0">
+                <a:solidFill>
+                  <a:srgbClr val="14241C"/>
+                </a:solidFill>
+                <a:latin typeface="Calibri"/>
+              </a:rPr>
+              <a:t> — scavenger hunt, lake day, golf outing, games up top</a:t>
+            </a:r>
+          </a:p>
+          <a:p>
+            <a:pPr algn="l">
+              <a:lnSpc>
+                <a:spcPct val="100000"/>
+              </a:lnSpc>
+              <a:spcBef>
+                <a:spcPts val="0"/>
+              </a:spcBef>
+              <a:spcAft>
+                <a:spcPts val="1000"/>
+              </a:spcAft>
+            </a:pPr>
+            <a:r>
+              <a:rPr sz="1600" b="1" i="0">
+                <a:solidFill>
+                  <a:srgbClr val="15503A"/>
+                </a:solidFill>
+                <a:latin typeface="Calibri"/>
+              </a:rPr>
+              <a:t>•  </a:t>
+            </a:r>
+            <a:r>
+              <a:rPr sz="1600" b="1" i="0">
+                <a:solidFill>
+                  <a:srgbClr val="14241C"/>
+                </a:solidFill>
+                <a:latin typeface="Calibri"/>
+              </a:rPr>
+              <a:t>Sub-nav up top</a:t>
+            </a:r>
+            <a:r>
+              <a:rPr sz="1600" b="0" i="0">
+                <a:solidFill>
+                  <a:srgbClr val="14241C"/>
+                </a:solidFill>
+                <a:latin typeface="Calibri"/>
+              </a:rPr>
+              <a:t> — Schedule · Dinners · Crew · Photos · Pay · Shirts</a:t>
+            </a:r>
+          </a:p>
+        </p:txBody>
+      </p:sp>
+      <p:sp>
+        <p:nvSpPr>
+          <p:cNvPr id="15" name="Rounded Rectangle 14"/>
+          <p:cNvSpPr/>
+          <p:nvPr/>
+        </p:nvSpPr>
+        <p:spPr>
+          <a:xfrm>
+            <a:off x="502920" y="5486400"/>
+            <a:ext cx="11201400" cy="566928"/>
+          </a:xfrm>
+          <a:prstGeom prst="roundRect">
+            <a:avLst>
+              <a:gd name="adj" fmla="val 6000"/>
+            </a:avLst>
+          </a:prstGeom>
+          <a:solidFill>
+            <a:srgbClr val="F3EEF0"/>
+          </a:solidFill>
+          <a:ln w="12700">
+            <a:solidFill>
+              <a:srgbClr val="E5E4DA"/>
+            </a:solidFill>
+          </a:ln>
+          <a:effectLst/>
+        </p:spPr>
+        <p:style>
+          <a:lnRef idx="1">
+            <a:schemeClr val="accent1"/>
+          </a:lnRef>
+          <a:fillRef idx="3">
+            <a:schemeClr val="accent1"/>
+          </a:fillRef>
+          <a:effectRef idx="2">
+            <a:schemeClr val="accent1"/>
+          </a:effectRef>
+          <a:fontRef idx="minor">
+            <a:schemeClr val="lt1"/>
+          </a:fontRef>
+        </p:style>
+        <p:txBody>
+          <a:bodyPr rtlCol="0" anchor="ctr"/>
+          <a:lstStyle/>
+          <a:p>
+            <a:pPr algn="ctr"/>
+          </a:p>
+        </p:txBody>
+      </p:sp>
+      <p:sp>
+        <p:nvSpPr>
+          <p:cNvPr id="16" name="TextBox 15"/>
+          <p:cNvSpPr txBox="1"/>
+          <p:nvPr/>
+        </p:nvSpPr>
+        <p:spPr>
+          <a:xfrm>
+            <a:off x="667512" y="5486400"/>
+            <a:ext cx="1828800" cy="566928"/>
+          </a:xfrm>
+          <a:prstGeom prst="rect">
+            <a:avLst/>
+          </a:prstGeom>
+          <a:noFill/>
+        </p:spPr>
+        <p:txBody>
+          <a:bodyPr wrap="square" anchor="ctr" lIns="25400" rIns="25400" tIns="12700" bIns="12700">
             <a:spAutoFit/>
           </a:bodyPr>
           <a:lstStyle/>
@@ -19600,27 +19208,27 @@
               </a:spcAft>
             </a:pPr>
             <a:r>
-              <a:rPr sz="1600" b="0" i="1">
-                <a:solidFill>
-                  <a:srgbClr val="14241C"/>
-                </a:solidFill>
-                <a:latin typeface="Calibri"/>
-              </a:rPr>
-              <a:t>“This is the heart of it — Family Fest is July 27 to 31, the whole clan at the lake.”</a:t>
-            </a:r>
-          </a:p>
-        </p:txBody>
-      </p:sp>
-      <p:sp>
-        <p:nvSpPr>
-          <p:cNvPr id="15" name="TextBox 14"/>
+              <a:rPr sz="1200" b="1" i="0">
+                <a:solidFill>
+                  <a:srgbClr val="8B2E2E"/>
+                </a:solidFill>
+                <a:latin typeface="Calibri"/>
+              </a:rPr>
+              <a:t>💡 GOOD TO KNOW</a:t>
+            </a:r>
+          </a:p>
+        </p:txBody>
+      </p:sp>
+      <p:sp>
+        <p:nvSpPr>
+          <p:cNvPr id="17" name="TextBox 16"/>
           <p:cNvSpPr txBox="1"/>
           <p:nvPr/>
         </p:nvSpPr>
         <p:spPr>
           <a:xfrm>
-            <a:off x="502920" y="2944368"/>
-            <a:ext cx="11201400" cy="310896"/>
+            <a:off x="2560320" y="5486400"/>
+            <a:ext cx="9006840" cy="566928"/>
           </a:xfrm>
           <a:prstGeom prst="rect">
             <a:avLst/>
@@ -19628,7 +19236,7 @@
           <a:noFill/>
         </p:spPr>
         <p:txBody>
-          <a:bodyPr wrap="square" anchor="t" lIns="25400" rIns="25400" tIns="12700" bIns="12700">
+          <a:bodyPr wrap="square" anchor="ctr" lIns="25400" rIns="25400" tIns="12700" bIns="12700">
             <a:spAutoFit/>
           </a:bodyPr>
           <a:lstStyle/>
@@ -19645,373 +19253,12 @@
               </a:spcAft>
             </a:pPr>
             <a:r>
-              <a:rPr sz="1200" b="1" i="0">
-                <a:solidFill>
-                  <a:srgbClr val="6B7068"/>
-                </a:solidFill>
-                <a:latin typeface="Calibri"/>
-              </a:rPr>
-              <a:t>TALKING POINTS</a:t>
-            </a:r>
-          </a:p>
-        </p:txBody>
-      </p:sp>
-      <p:sp>
-        <p:nvSpPr>
-          <p:cNvPr id="16" name="TextBox 15"/>
-          <p:cNvSpPr txBox="1"/>
-          <p:nvPr/>
-        </p:nvSpPr>
-        <p:spPr>
-          <a:xfrm>
-            <a:off x="594360" y="3273552"/>
-            <a:ext cx="11018520" cy="2331720"/>
-          </a:xfrm>
-          <a:prstGeom prst="rect">
-            <a:avLst/>
-          </a:prstGeom>
-          <a:noFill/>
-        </p:spPr>
-        <p:txBody>
-          <a:bodyPr wrap="square" anchor="t" lIns="25400" rIns="25400" tIns="12700" bIns="12700">
-            <a:spAutoFit/>
-          </a:bodyPr>
-          <a:lstStyle/>
-          <a:p>
-            <a:pPr algn="l">
-              <a:lnSpc>
-                <a:spcPct val="100000"/>
-              </a:lnSpc>
-              <a:spcBef>
-                <a:spcPts val="0"/>
-              </a:spcBef>
-              <a:spcAft>
-                <a:spcPts val="900"/>
-              </a:spcAft>
-            </a:pPr>
-            <a:r>
-              <a:rPr sz="1600" b="1" i="0">
-                <a:solidFill>
-                  <a:srgbClr val="15503A"/>
-                </a:solidFill>
-                <a:latin typeface="Calibri"/>
-              </a:rPr>
-              <a:t>•  </a:t>
-            </a:r>
-            <a:r>
-              <a:rPr sz="1600" b="1" i="0">
+              <a:rPr sz="1300" b="0" i="0">
                 <a:solidFill>
                   <a:srgbClr val="14241C"/>
                 </a:solidFill>
                 <a:latin typeface="Calibri"/>
               </a:rPr>
-              <a:t>July 27–31, 2026</a:t>
-            </a:r>
-            <a:r>
-              <a:rPr sz="1600" b="0" i="0">
-                <a:solidFill>
-                  <a:srgbClr val="14241C"/>
-                </a:solidFill>
-                <a:latin typeface="Calibri"/>
-              </a:rPr>
-              <a:t> — “Ye Olde Family Feste” theme this year</a:t>
-            </a:r>
-          </a:p>
-          <a:p>
-            <a:pPr algn="l">
-              <a:lnSpc>
-                <a:spcPct val="100000"/>
-              </a:lnSpc>
-              <a:spcBef>
-                <a:spcPts val="0"/>
-              </a:spcBef>
-              <a:spcAft>
-                <a:spcPts val="900"/>
-              </a:spcAft>
-            </a:pPr>
-            <a:r>
-              <a:rPr sz="1600" b="1" i="0">
-                <a:solidFill>
-                  <a:srgbClr val="15503A"/>
-                </a:solidFill>
-                <a:latin typeface="Calibri"/>
-              </a:rPr>
-              <a:t>•  </a:t>
-            </a:r>
-            <a:r>
-              <a:rPr sz="1600" b="1" i="0">
-                <a:solidFill>
-                  <a:srgbClr val="14241C"/>
-                </a:solidFill>
-                <a:latin typeface="Calibri"/>
-              </a:rPr>
-              <a:t>Signature nights</a:t>
-            </a:r>
-            <a:r>
-              <a:rPr sz="1600" b="0" i="0">
-                <a:solidFill>
-                  <a:srgbClr val="14241C"/>
-                </a:solidFill>
-                <a:latin typeface="Calibri"/>
-              </a:rPr>
-              <a:t> — Mon bonfire, Wed musky tournament, Thu talent show, Fri fireworks</a:t>
-            </a:r>
-          </a:p>
-          <a:p>
-            <a:pPr algn="l">
-              <a:lnSpc>
-                <a:spcPct val="100000"/>
-              </a:lnSpc>
-              <a:spcBef>
-                <a:spcPts val="0"/>
-              </a:spcBef>
-              <a:spcAft>
-                <a:spcPts val="900"/>
-              </a:spcAft>
-            </a:pPr>
-            <a:r>
-              <a:rPr sz="1600" b="1" i="0">
-                <a:solidFill>
-                  <a:srgbClr val="15503A"/>
-                </a:solidFill>
-                <a:latin typeface="Calibri"/>
-              </a:rPr>
-              <a:t>•  </a:t>
-            </a:r>
-            <a:r>
-              <a:rPr sz="1600" b="1" i="0">
-                <a:solidFill>
-                  <a:srgbClr val="14241C"/>
-                </a:solidFill>
-                <a:latin typeface="Calibri"/>
-              </a:rPr>
-              <a:t>Dinners each night</a:t>
-            </a:r>
-            <a:r>
-              <a:rPr sz="1600" b="0" i="0">
-                <a:solidFill>
-                  <a:srgbClr val="14241C"/>
-                </a:solidFill>
-                <a:latin typeface="Calibri"/>
-              </a:rPr>
-              <a:t> — chefs: Jessica, Natalie &amp; Karen, Lauren, Rob &amp; Joe</a:t>
-            </a:r>
-          </a:p>
-          <a:p>
-            <a:pPr algn="l">
-              <a:lnSpc>
-                <a:spcPct val="100000"/>
-              </a:lnSpc>
-              <a:spcBef>
-                <a:spcPts val="0"/>
-              </a:spcBef>
-              <a:spcAft>
-                <a:spcPts val="900"/>
-              </a:spcAft>
-            </a:pPr>
-            <a:r>
-              <a:rPr sz="1600" b="1" i="0">
-                <a:solidFill>
-                  <a:srgbClr val="15503A"/>
-                </a:solidFill>
-                <a:latin typeface="Calibri"/>
-              </a:rPr>
-              <a:t>•  </a:t>
-            </a:r>
-            <a:r>
-              <a:rPr sz="1600" b="1" i="0">
-                <a:solidFill>
-                  <a:srgbClr val="14241C"/>
-                </a:solidFill>
-                <a:latin typeface="Calibri"/>
-              </a:rPr>
-              <a:t>All-week fun</a:t>
-            </a:r>
-            <a:r>
-              <a:rPr sz="1600" b="0" i="0">
-                <a:solidFill>
-                  <a:srgbClr val="14241C"/>
-                </a:solidFill>
-                <a:latin typeface="Calibri"/>
-              </a:rPr>
-              <a:t> — scavenger hunt, lake day, golf outing, games up top</a:t>
-            </a:r>
-          </a:p>
-          <a:p>
-            <a:pPr algn="l">
-              <a:lnSpc>
-                <a:spcPct val="100000"/>
-              </a:lnSpc>
-              <a:spcBef>
-                <a:spcPts val="0"/>
-              </a:spcBef>
-              <a:spcAft>
-                <a:spcPts val="900"/>
-              </a:spcAft>
-            </a:pPr>
-            <a:r>
-              <a:rPr sz="1600" b="1" i="0">
-                <a:solidFill>
-                  <a:srgbClr val="15503A"/>
-                </a:solidFill>
-                <a:latin typeface="Calibri"/>
-              </a:rPr>
-              <a:t>•  </a:t>
-            </a:r>
-            <a:r>
-              <a:rPr sz="1600" b="1" i="0">
-                <a:solidFill>
-                  <a:srgbClr val="14241C"/>
-                </a:solidFill>
-                <a:latin typeface="Calibri"/>
-              </a:rPr>
-              <a:t>Sub-nav up top</a:t>
-            </a:r>
-            <a:r>
-              <a:rPr sz="1600" b="0" i="0">
-                <a:solidFill>
-                  <a:srgbClr val="14241C"/>
-                </a:solidFill>
-                <a:latin typeface="Calibri"/>
-              </a:rPr>
-              <a:t> — Schedule · Dinners · Crew · Photos · Pay · Shirts</a:t>
-            </a:r>
-          </a:p>
-        </p:txBody>
-      </p:sp>
-      <p:sp>
-        <p:nvSpPr>
-          <p:cNvPr id="17" name="Rounded Rectangle 16"/>
-          <p:cNvSpPr/>
-          <p:nvPr/>
-        </p:nvSpPr>
-        <p:spPr>
-          <a:xfrm>
-            <a:off x="502920" y="5486400"/>
-            <a:ext cx="11201400" cy="566928"/>
-          </a:xfrm>
-          <a:prstGeom prst="roundRect">
-            <a:avLst>
-              <a:gd name="adj" fmla="val 6000"/>
-            </a:avLst>
-          </a:prstGeom>
-          <a:solidFill>
-            <a:srgbClr val="F3EEF0"/>
-          </a:solidFill>
-          <a:ln w="12700">
-            <a:solidFill>
-              <a:srgbClr val="E5E4DA"/>
-            </a:solidFill>
-          </a:ln>
-          <a:effectLst/>
-        </p:spPr>
-        <p:style>
-          <a:lnRef idx="1">
-            <a:schemeClr val="accent1"/>
-          </a:lnRef>
-          <a:fillRef idx="3">
-            <a:schemeClr val="accent1"/>
-          </a:fillRef>
-          <a:effectRef idx="2">
-            <a:schemeClr val="accent1"/>
-          </a:effectRef>
-          <a:fontRef idx="minor">
-            <a:schemeClr val="lt1"/>
-          </a:fontRef>
-        </p:style>
-        <p:txBody>
-          <a:bodyPr rtlCol="0" anchor="ctr"/>
-          <a:lstStyle/>
-          <a:p>
-            <a:pPr algn="ctr"/>
-          </a:p>
-        </p:txBody>
-      </p:sp>
-      <p:sp>
-        <p:nvSpPr>
-          <p:cNvPr id="18" name="TextBox 17"/>
-          <p:cNvSpPr txBox="1"/>
-          <p:nvPr/>
-        </p:nvSpPr>
-        <p:spPr>
-          <a:xfrm>
-            <a:off x="667512" y="5486400"/>
-            <a:ext cx="1463040" cy="566928"/>
-          </a:xfrm>
-          <a:prstGeom prst="rect">
-            <a:avLst/>
-          </a:prstGeom>
-          <a:noFill/>
-        </p:spPr>
-        <p:txBody>
-          <a:bodyPr wrap="square" anchor="ctr" lIns="25400" rIns="25400" tIns="12700" bIns="12700">
-            <a:spAutoFit/>
-          </a:bodyPr>
-          <a:lstStyle/>
-          <a:p>
-            <a:pPr algn="l">
-              <a:lnSpc>
-                <a:spcPct val="100000"/>
-              </a:lnSpc>
-              <a:spcBef>
-                <a:spcPts val="0"/>
-              </a:spcBef>
-              <a:spcAft>
-                <a:spcPts val="400"/>
-              </a:spcAft>
-            </a:pPr>
-            <a:r>
-              <a:rPr sz="1200" b="1" i="0">
-                <a:solidFill>
-                  <a:srgbClr val="8B2E2E"/>
-                </a:solidFill>
-                <a:latin typeface="Calibri"/>
-              </a:rPr>
-              <a:t>❓ IF ASKED</a:t>
-            </a:r>
-          </a:p>
-        </p:txBody>
-      </p:sp>
-      <p:sp>
-        <p:nvSpPr>
-          <p:cNvPr id="19" name="TextBox 18"/>
-          <p:cNvSpPr txBox="1"/>
-          <p:nvPr/>
-        </p:nvSpPr>
-        <p:spPr>
-          <a:xfrm>
-            <a:off x="2103120" y="5486400"/>
-            <a:ext cx="9464040" cy="566928"/>
-          </a:xfrm>
-          <a:prstGeom prst="rect">
-            <a:avLst/>
-          </a:prstGeom>
-          <a:noFill/>
-        </p:spPr>
-        <p:txBody>
-          <a:bodyPr wrap="square" anchor="ctr" lIns="25400" rIns="25400" tIns="12700" bIns="12700">
-            <a:spAutoFit/>
-          </a:bodyPr>
-          <a:lstStyle/>
-          <a:p>
-            <a:pPr algn="l">
-              <a:lnSpc>
-                <a:spcPct val="100000"/>
-              </a:lnSpc>
-              <a:spcBef>
-                <a:spcPts val="0"/>
-              </a:spcBef>
-              <a:spcAft>
-                <a:spcPts val="400"/>
-              </a:spcAft>
-            </a:pPr>
-            <a:r>
-              <a:rPr sz="1300" b="0" i="0">
-                <a:solidFill>
-                  <a:srgbClr val="14241C"/>
-                </a:solidFill>
-                <a:latin typeface="Calibri"/>
-              </a:rPr>
               <a:t>“$100 per adult for the week; kids' price still being set.”</a:t>
             </a:r>
           </a:p>
@@ -20019,7 +19266,7 @@
       </p:sp>
       <p:sp>
         <p:nvSpPr>
-          <p:cNvPr id="20" name="Rounded Rectangle 19"/>
+          <p:cNvPr id="18" name="Rounded Rectangle 17"/>
           <p:cNvSpPr/>
           <p:nvPr/>
         </p:nvSpPr>
@@ -20065,7 +19312,7 @@
       </p:sp>
       <p:sp>
         <p:nvSpPr>
-          <p:cNvPr id="21" name="Rounded Rectangle 20"/>
+          <p:cNvPr id="19" name="Rounded Rectangle 18"/>
           <p:cNvSpPr/>
           <p:nvPr/>
         </p:nvSpPr>
@@ -20111,7 +19358,7 @@
       </p:sp>
       <p:sp>
         <p:nvSpPr>
-          <p:cNvPr id="22" name="TextBox 21"/>
+          <p:cNvPr id="20" name="TextBox 19"/>
           <p:cNvSpPr txBox="1"/>
           <p:nvPr/>
         </p:nvSpPr>
@@ -20507,7 +19754,7 @@
         <p:spPr>
           <a:xfrm>
             <a:off x="667512" y="1298448"/>
-            <a:ext cx="1554480" cy="603504"/>
+            <a:ext cx="1463040" cy="603504"/>
           </a:xfrm>
           <a:prstGeom prst="rect">
             <a:avLst/>
@@ -20538,7 +19785,7 @@
                 </a:solidFill>
                 <a:latin typeface="Calibri"/>
               </a:rPr>
-              <a:t>▶  ON SCREEN</a:t>
+              <a:t>📍  FIND IT</a:t>
             </a:r>
           </a:p>
         </p:txBody>
@@ -20551,8 +19798,8 @@
         </p:nvSpPr>
         <p:spPr>
           <a:xfrm>
-            <a:off x="2286000" y="1298448"/>
-            <a:ext cx="9281160" cy="603504"/>
+            <a:off x="2194560" y="1298448"/>
+            <a:ext cx="9372600" cy="603504"/>
           </a:xfrm>
           <a:prstGeom prst="rect">
             <a:avLst/>
@@ -20583,7 +19830,7 @@
                 </a:solidFill>
                 <a:latin typeface="Calibri"/>
               </a:rPr>
-              <a:t>Open an event card (Events list or the Home spotlight). Show Going / Maybe / Can't make.</a:t>
+              <a:t>Events  (or the event spotlight on Home)  →  tap a card</a:t>
             </a:r>
           </a:p>
         </p:txBody>
@@ -20597,7 +19844,7 @@
         <p:spPr>
           <a:xfrm>
             <a:off x="502920" y="2029968"/>
-            <a:ext cx="11201400" cy="749808"/>
+            <a:ext cx="11201400" cy="786384"/>
           </a:xfrm>
           <a:prstGeom prst="roundRect">
             <a:avLst>
@@ -20645,7 +19892,7 @@
         <p:spPr>
           <a:xfrm>
             <a:off x="502920" y="2029968"/>
-            <a:ext cx="73152" cy="749808"/>
+            <a:ext cx="91440" cy="786384"/>
           </a:xfrm>
           <a:prstGeom prst="rect">
             <a:avLst/>
@@ -20688,8 +19935,8 @@
         </p:nvSpPr>
         <p:spPr>
           <a:xfrm>
-            <a:off x="704088" y="2075688"/>
-            <a:ext cx="1280160" cy="292608"/>
+            <a:off x="813816" y="2029968"/>
+            <a:ext cx="10698480" cy="786384"/>
           </a:xfrm>
           <a:prstGeom prst="rect">
             <a:avLst/>
@@ -20697,7 +19944,7 @@
           <a:noFill/>
         </p:spPr>
         <p:txBody>
-          <a:bodyPr wrap="square" anchor="t" lIns="25400" rIns="25400" tIns="12700" bIns="12700">
+          <a:bodyPr wrap="square" anchor="ctr" lIns="25400" rIns="25400" tIns="12700" bIns="12700">
             <a:spAutoFit/>
           </a:bodyPr>
           <a:lstStyle/>
@@ -20714,13 +19961,13 @@
               </a:spcAft>
             </a:pPr>
             <a:r>
-              <a:rPr sz="1200" b="1" i="0">
-                <a:solidFill>
-                  <a:srgbClr val="C2410C"/>
-                </a:solidFill>
-                <a:latin typeface="Calibri"/>
-              </a:rPr>
-              <a:t>🗣  SAY</a:t>
+              <a:rPr sz="1800" b="1" i="0">
+                <a:solidFill>
+                  <a:srgbClr val="14241C"/>
+                </a:solidFill>
+                <a:latin typeface="Calibri"/>
+              </a:rPr>
+              <a:t>Tap any event and tell us if you're coming — it's like Facebook events.</a:t>
             </a:r>
           </a:p>
         </p:txBody>
@@ -20733,8 +19980,8 @@
         </p:nvSpPr>
         <p:spPr>
           <a:xfrm>
-            <a:off x="704088" y="2304288"/>
-            <a:ext cx="10789920" cy="475488"/>
+            <a:off x="594360" y="3035808"/>
+            <a:ext cx="11018520" cy="2468880"/>
           </a:xfrm>
           <a:prstGeom prst="rect">
             <a:avLst/>
@@ -20743,6 +19990,237 @@
         </p:spPr>
         <p:txBody>
           <a:bodyPr wrap="square" anchor="t" lIns="25400" rIns="25400" tIns="12700" bIns="12700">
+            <a:spAutoFit/>
+          </a:bodyPr>
+          <a:lstStyle/>
+          <a:p>
+            <a:pPr algn="l">
+              <a:lnSpc>
+                <a:spcPct val="100000"/>
+              </a:lnSpc>
+              <a:spcBef>
+                <a:spcPts val="0"/>
+              </a:spcBef>
+              <a:spcAft>
+                <a:spcPts val="1000"/>
+              </a:spcAft>
+            </a:pPr>
+            <a:r>
+              <a:rPr sz="1600" b="1" i="0">
+                <a:solidFill>
+                  <a:srgbClr val="15503A"/>
+                </a:solidFill>
+                <a:latin typeface="Calibri"/>
+              </a:rPr>
+              <a:t>•  </a:t>
+            </a:r>
+            <a:r>
+              <a:rPr sz="1600" b="1" i="0">
+                <a:solidFill>
+                  <a:srgbClr val="14241C"/>
+                </a:solidFill>
+                <a:latin typeface="Calibri"/>
+              </a:rPr>
+              <a:t>Three taps</a:t>
+            </a:r>
+            <a:r>
+              <a:rPr sz="1600" b="0" i="0">
+                <a:solidFill>
+                  <a:srgbClr val="14241C"/>
+                </a:solidFill>
+                <a:latin typeface="Calibri"/>
+              </a:rPr>
+              <a:t> — Going, Maybe, or Can't make — that's it</a:t>
+            </a:r>
+          </a:p>
+          <a:p>
+            <a:pPr algn="l">
+              <a:lnSpc>
+                <a:spcPct val="100000"/>
+              </a:lnSpc>
+              <a:spcBef>
+                <a:spcPts val="0"/>
+              </a:spcBef>
+              <a:spcAft>
+                <a:spcPts val="1000"/>
+              </a:spcAft>
+            </a:pPr>
+            <a:r>
+              <a:rPr sz="1600" b="1" i="0">
+                <a:solidFill>
+                  <a:srgbClr val="15503A"/>
+                </a:solidFill>
+                <a:latin typeface="Calibri"/>
+              </a:rPr>
+              <a:t>•  </a:t>
+            </a:r>
+            <a:r>
+              <a:rPr sz="1600" b="1" i="0">
+                <a:solidFill>
+                  <a:srgbClr val="14241C"/>
+                </a:solidFill>
+                <a:latin typeface="Calibri"/>
+              </a:rPr>
+              <a:t>See who's coming</a:t>
+            </a:r>
+            <a:r>
+              <a:rPr sz="1600" b="0" i="0">
+                <a:solidFill>
+                  <a:srgbClr val="14241C"/>
+                </a:solidFill>
+                <a:latin typeface="Calibri"/>
+              </a:rPr>
+              <a:t> — the whole list of who RSVP'd</a:t>
+            </a:r>
+          </a:p>
+          <a:p>
+            <a:pPr algn="l">
+              <a:lnSpc>
+                <a:spcPct val="100000"/>
+              </a:lnSpc>
+              <a:spcBef>
+                <a:spcPts val="0"/>
+              </a:spcBef>
+              <a:spcAft>
+                <a:spcPts val="1000"/>
+              </a:spcAft>
+            </a:pPr>
+            <a:r>
+              <a:rPr sz="1600" b="1" i="0">
+                <a:solidFill>
+                  <a:srgbClr val="15503A"/>
+                </a:solidFill>
+                <a:latin typeface="Calibri"/>
+              </a:rPr>
+              <a:t>•  </a:t>
+            </a:r>
+            <a:r>
+              <a:rPr sz="1600" b="1" i="0">
+                <a:solidFill>
+                  <a:srgbClr val="14241C"/>
+                </a:solidFill>
+                <a:latin typeface="Calibri"/>
+              </a:rPr>
+              <a:t>Family Fest is per-day</a:t>
+            </a:r>
+            <a:r>
+              <a:rPr sz="1600" b="0" i="0">
+                <a:solidFill>
+                  <a:srgbClr val="14241C"/>
+                </a:solidFill>
+                <a:latin typeface="Calibri"/>
+              </a:rPr>
+              <a:t> — pick the exact days you'll be there</a:t>
+            </a:r>
+          </a:p>
+          <a:p>
+            <a:pPr algn="l">
+              <a:lnSpc>
+                <a:spcPct val="100000"/>
+              </a:lnSpc>
+              <a:spcBef>
+                <a:spcPts val="0"/>
+              </a:spcBef>
+              <a:spcAft>
+                <a:spcPts val="1000"/>
+              </a:spcAft>
+            </a:pPr>
+            <a:r>
+              <a:rPr sz="1600" b="1" i="0">
+                <a:solidFill>
+                  <a:srgbClr val="15503A"/>
+                </a:solidFill>
+                <a:latin typeface="Calibri"/>
+              </a:rPr>
+              <a:t>•  </a:t>
+            </a:r>
+            <a:r>
+              <a:rPr sz="1600" b="1" i="0">
+                <a:solidFill>
+                  <a:srgbClr val="14241C"/>
+                </a:solidFill>
+                <a:latin typeface="Calibri"/>
+              </a:rPr>
+              <a:t>Other events too</a:t>
+            </a:r>
+            <a:r>
+              <a:rPr sz="1600" b="0" i="0">
+                <a:solidFill>
+                  <a:srgbClr val="14241C"/>
+                </a:solidFill>
+                <a:latin typeface="Calibri"/>
+              </a:rPr>
+              <a:t> — e.g. Up North for the 4th, July 3–5</a:t>
+            </a:r>
+          </a:p>
+        </p:txBody>
+      </p:sp>
+      <p:sp>
+        <p:nvSpPr>
+          <p:cNvPr id="15" name="Rounded Rectangle 14"/>
+          <p:cNvSpPr/>
+          <p:nvPr/>
+        </p:nvSpPr>
+        <p:spPr>
+          <a:xfrm>
+            <a:off x="502920" y="5486400"/>
+            <a:ext cx="11201400" cy="566928"/>
+          </a:xfrm>
+          <a:prstGeom prst="roundRect">
+            <a:avLst>
+              <a:gd name="adj" fmla="val 6000"/>
+            </a:avLst>
+          </a:prstGeom>
+          <a:solidFill>
+            <a:srgbClr val="F3EEF0"/>
+          </a:solidFill>
+          <a:ln w="12700">
+            <a:solidFill>
+              <a:srgbClr val="E5E4DA"/>
+            </a:solidFill>
+          </a:ln>
+          <a:effectLst/>
+        </p:spPr>
+        <p:style>
+          <a:lnRef idx="1">
+            <a:schemeClr val="accent1"/>
+          </a:lnRef>
+          <a:fillRef idx="3">
+            <a:schemeClr val="accent1"/>
+          </a:fillRef>
+          <a:effectRef idx="2">
+            <a:schemeClr val="accent1"/>
+          </a:effectRef>
+          <a:fontRef idx="minor">
+            <a:schemeClr val="lt1"/>
+          </a:fontRef>
+        </p:style>
+        <p:txBody>
+          <a:bodyPr rtlCol="0" anchor="ctr"/>
+          <a:lstStyle/>
+          <a:p>
+            <a:pPr algn="ctr"/>
+          </a:p>
+        </p:txBody>
+      </p:sp>
+      <p:sp>
+        <p:nvSpPr>
+          <p:cNvPr id="16" name="TextBox 15"/>
+          <p:cNvSpPr txBox="1"/>
+          <p:nvPr/>
+        </p:nvSpPr>
+        <p:spPr>
+          <a:xfrm>
+            <a:off x="667512" y="5486400"/>
+            <a:ext cx="1828800" cy="566928"/>
+          </a:xfrm>
+          <a:prstGeom prst="rect">
+            <a:avLst/>
+          </a:prstGeom>
+          <a:noFill/>
+        </p:spPr>
+        <p:txBody>
+          <a:bodyPr wrap="square" anchor="ctr" lIns="25400" rIns="25400" tIns="12700" bIns="12700">
             <a:spAutoFit/>
           </a:bodyPr>
           <a:lstStyle/>
@@ -20759,27 +20237,27 @@
               </a:spcAft>
             </a:pPr>
             <a:r>
-              <a:rPr sz="1600" b="0" i="1">
-                <a:solidFill>
-                  <a:srgbClr val="14241C"/>
-                </a:solidFill>
-                <a:latin typeface="Calibri"/>
-              </a:rPr>
-              <a:t>“Tap any event and tell us if you're coming — it's like Facebook events.”</a:t>
-            </a:r>
-          </a:p>
-        </p:txBody>
-      </p:sp>
-      <p:sp>
-        <p:nvSpPr>
-          <p:cNvPr id="15" name="TextBox 14"/>
+              <a:rPr sz="1200" b="1" i="0">
+                <a:solidFill>
+                  <a:srgbClr val="8B2E2E"/>
+                </a:solidFill>
+                <a:latin typeface="Calibri"/>
+              </a:rPr>
+              <a:t>💡 GOOD TO KNOW</a:t>
+            </a:r>
+          </a:p>
+        </p:txBody>
+      </p:sp>
+      <p:sp>
+        <p:nvSpPr>
+          <p:cNvPr id="17" name="TextBox 16"/>
           <p:cNvSpPr txBox="1"/>
           <p:nvPr/>
         </p:nvSpPr>
         <p:spPr>
           <a:xfrm>
-            <a:off x="502920" y="2944368"/>
-            <a:ext cx="11201400" cy="310896"/>
+            <a:off x="2560320" y="5486400"/>
+            <a:ext cx="9006840" cy="566928"/>
           </a:xfrm>
           <a:prstGeom prst="rect">
             <a:avLst/>
@@ -20787,7 +20265,7 @@
           <a:noFill/>
         </p:spPr>
         <p:txBody>
-          <a:bodyPr wrap="square" anchor="t" lIns="25400" rIns="25400" tIns="12700" bIns="12700">
+          <a:bodyPr wrap="square" anchor="ctr" lIns="25400" rIns="25400" tIns="12700" bIns="12700">
             <a:spAutoFit/>
           </a:bodyPr>
           <a:lstStyle/>
@@ -20804,333 +20282,12 @@
               </a:spcAft>
             </a:pPr>
             <a:r>
-              <a:rPr sz="1200" b="1" i="0">
-                <a:solidFill>
-                  <a:srgbClr val="6B7068"/>
-                </a:solidFill>
-                <a:latin typeface="Calibri"/>
-              </a:rPr>
-              <a:t>TALKING POINTS</a:t>
-            </a:r>
-          </a:p>
-        </p:txBody>
-      </p:sp>
-      <p:sp>
-        <p:nvSpPr>
-          <p:cNvPr id="16" name="TextBox 15"/>
-          <p:cNvSpPr txBox="1"/>
-          <p:nvPr/>
-        </p:nvSpPr>
-        <p:spPr>
-          <a:xfrm>
-            <a:off x="594360" y="3273552"/>
-            <a:ext cx="11018520" cy="2331720"/>
-          </a:xfrm>
-          <a:prstGeom prst="rect">
-            <a:avLst/>
-          </a:prstGeom>
-          <a:noFill/>
-        </p:spPr>
-        <p:txBody>
-          <a:bodyPr wrap="square" anchor="t" lIns="25400" rIns="25400" tIns="12700" bIns="12700">
-            <a:spAutoFit/>
-          </a:bodyPr>
-          <a:lstStyle/>
-          <a:p>
-            <a:pPr algn="l">
-              <a:lnSpc>
-                <a:spcPct val="100000"/>
-              </a:lnSpc>
-              <a:spcBef>
-                <a:spcPts val="0"/>
-              </a:spcBef>
-              <a:spcAft>
-                <a:spcPts val="900"/>
-              </a:spcAft>
-            </a:pPr>
-            <a:r>
-              <a:rPr sz="1600" b="1" i="0">
-                <a:solidFill>
-                  <a:srgbClr val="15503A"/>
-                </a:solidFill>
-                <a:latin typeface="Calibri"/>
-              </a:rPr>
-              <a:t>•  </a:t>
-            </a:r>
-            <a:r>
-              <a:rPr sz="1600" b="1" i="0">
+              <a:rPr sz="1300" b="0" i="0">
                 <a:solidFill>
                   <a:srgbClr val="14241C"/>
                 </a:solidFill>
                 <a:latin typeface="Calibri"/>
               </a:rPr>
-              <a:t>Three taps</a:t>
-            </a:r>
-            <a:r>
-              <a:rPr sz="1600" b="0" i="0">
-                <a:solidFill>
-                  <a:srgbClr val="14241C"/>
-                </a:solidFill>
-                <a:latin typeface="Calibri"/>
-              </a:rPr>
-              <a:t> — Going, Maybe, or Can't make — that's it</a:t>
-            </a:r>
-          </a:p>
-          <a:p>
-            <a:pPr algn="l">
-              <a:lnSpc>
-                <a:spcPct val="100000"/>
-              </a:lnSpc>
-              <a:spcBef>
-                <a:spcPts val="0"/>
-              </a:spcBef>
-              <a:spcAft>
-                <a:spcPts val="900"/>
-              </a:spcAft>
-            </a:pPr>
-            <a:r>
-              <a:rPr sz="1600" b="1" i="0">
-                <a:solidFill>
-                  <a:srgbClr val="15503A"/>
-                </a:solidFill>
-                <a:latin typeface="Calibri"/>
-              </a:rPr>
-              <a:t>•  </a:t>
-            </a:r>
-            <a:r>
-              <a:rPr sz="1600" b="1" i="0">
-                <a:solidFill>
-                  <a:srgbClr val="14241C"/>
-                </a:solidFill>
-                <a:latin typeface="Calibri"/>
-              </a:rPr>
-              <a:t>See who's coming</a:t>
-            </a:r>
-            <a:r>
-              <a:rPr sz="1600" b="0" i="0">
-                <a:solidFill>
-                  <a:srgbClr val="14241C"/>
-                </a:solidFill>
-                <a:latin typeface="Calibri"/>
-              </a:rPr>
-              <a:t> — the whole list of who RSVP'd</a:t>
-            </a:r>
-          </a:p>
-          <a:p>
-            <a:pPr algn="l">
-              <a:lnSpc>
-                <a:spcPct val="100000"/>
-              </a:lnSpc>
-              <a:spcBef>
-                <a:spcPts val="0"/>
-              </a:spcBef>
-              <a:spcAft>
-                <a:spcPts val="900"/>
-              </a:spcAft>
-            </a:pPr>
-            <a:r>
-              <a:rPr sz="1600" b="1" i="0">
-                <a:solidFill>
-                  <a:srgbClr val="15503A"/>
-                </a:solidFill>
-                <a:latin typeface="Calibri"/>
-              </a:rPr>
-              <a:t>•  </a:t>
-            </a:r>
-            <a:r>
-              <a:rPr sz="1600" b="1" i="0">
-                <a:solidFill>
-                  <a:srgbClr val="14241C"/>
-                </a:solidFill>
-                <a:latin typeface="Calibri"/>
-              </a:rPr>
-              <a:t>Family Fest is per-day</a:t>
-            </a:r>
-            <a:r>
-              <a:rPr sz="1600" b="0" i="0">
-                <a:solidFill>
-                  <a:srgbClr val="14241C"/>
-                </a:solidFill>
-                <a:latin typeface="Calibri"/>
-              </a:rPr>
-              <a:t> — pick the exact days you'll be there</a:t>
-            </a:r>
-          </a:p>
-          <a:p>
-            <a:pPr algn="l">
-              <a:lnSpc>
-                <a:spcPct val="100000"/>
-              </a:lnSpc>
-              <a:spcBef>
-                <a:spcPts val="0"/>
-              </a:spcBef>
-              <a:spcAft>
-                <a:spcPts val="900"/>
-              </a:spcAft>
-            </a:pPr>
-            <a:r>
-              <a:rPr sz="1600" b="1" i="0">
-                <a:solidFill>
-                  <a:srgbClr val="15503A"/>
-                </a:solidFill>
-                <a:latin typeface="Calibri"/>
-              </a:rPr>
-              <a:t>•  </a:t>
-            </a:r>
-            <a:r>
-              <a:rPr sz="1600" b="1" i="0">
-                <a:solidFill>
-                  <a:srgbClr val="14241C"/>
-                </a:solidFill>
-                <a:latin typeface="Calibri"/>
-              </a:rPr>
-              <a:t>Other events too</a:t>
-            </a:r>
-            <a:r>
-              <a:rPr sz="1600" b="0" i="0">
-                <a:solidFill>
-                  <a:srgbClr val="14241C"/>
-                </a:solidFill>
-                <a:latin typeface="Calibri"/>
-              </a:rPr>
-              <a:t> — e.g. Up North for the 4th, July 3–5</a:t>
-            </a:r>
-          </a:p>
-        </p:txBody>
-      </p:sp>
-      <p:sp>
-        <p:nvSpPr>
-          <p:cNvPr id="17" name="Rounded Rectangle 16"/>
-          <p:cNvSpPr/>
-          <p:nvPr/>
-        </p:nvSpPr>
-        <p:spPr>
-          <a:xfrm>
-            <a:off x="502920" y="5486400"/>
-            <a:ext cx="11201400" cy="566928"/>
-          </a:xfrm>
-          <a:prstGeom prst="roundRect">
-            <a:avLst>
-              <a:gd name="adj" fmla="val 6000"/>
-            </a:avLst>
-          </a:prstGeom>
-          <a:solidFill>
-            <a:srgbClr val="F3EEF0"/>
-          </a:solidFill>
-          <a:ln w="12700">
-            <a:solidFill>
-              <a:srgbClr val="E5E4DA"/>
-            </a:solidFill>
-          </a:ln>
-          <a:effectLst/>
-        </p:spPr>
-        <p:style>
-          <a:lnRef idx="1">
-            <a:schemeClr val="accent1"/>
-          </a:lnRef>
-          <a:fillRef idx="3">
-            <a:schemeClr val="accent1"/>
-          </a:fillRef>
-          <a:effectRef idx="2">
-            <a:schemeClr val="accent1"/>
-          </a:effectRef>
-          <a:fontRef idx="minor">
-            <a:schemeClr val="lt1"/>
-          </a:fontRef>
-        </p:style>
-        <p:txBody>
-          <a:bodyPr rtlCol="0" anchor="ctr"/>
-          <a:lstStyle/>
-          <a:p>
-            <a:pPr algn="ctr"/>
-          </a:p>
-        </p:txBody>
-      </p:sp>
-      <p:sp>
-        <p:nvSpPr>
-          <p:cNvPr id="18" name="TextBox 17"/>
-          <p:cNvSpPr txBox="1"/>
-          <p:nvPr/>
-        </p:nvSpPr>
-        <p:spPr>
-          <a:xfrm>
-            <a:off x="667512" y="5486400"/>
-            <a:ext cx="1463040" cy="566928"/>
-          </a:xfrm>
-          <a:prstGeom prst="rect">
-            <a:avLst/>
-          </a:prstGeom>
-          <a:noFill/>
-        </p:spPr>
-        <p:txBody>
-          <a:bodyPr wrap="square" anchor="ctr" lIns="25400" rIns="25400" tIns="12700" bIns="12700">
-            <a:spAutoFit/>
-          </a:bodyPr>
-          <a:lstStyle/>
-          <a:p>
-            <a:pPr algn="l">
-              <a:lnSpc>
-                <a:spcPct val="100000"/>
-              </a:lnSpc>
-              <a:spcBef>
-                <a:spcPts val="0"/>
-              </a:spcBef>
-              <a:spcAft>
-                <a:spcPts val="400"/>
-              </a:spcAft>
-            </a:pPr>
-            <a:r>
-              <a:rPr sz="1200" b="1" i="0">
-                <a:solidFill>
-                  <a:srgbClr val="8B2E2E"/>
-                </a:solidFill>
-                <a:latin typeface="Calibri"/>
-              </a:rPr>
-              <a:t>❓ IF ASKED</a:t>
-            </a:r>
-          </a:p>
-        </p:txBody>
-      </p:sp>
-      <p:sp>
-        <p:nvSpPr>
-          <p:cNvPr id="19" name="TextBox 18"/>
-          <p:cNvSpPr txBox="1"/>
-          <p:nvPr/>
-        </p:nvSpPr>
-        <p:spPr>
-          <a:xfrm>
-            <a:off x="2103120" y="5486400"/>
-            <a:ext cx="9464040" cy="566928"/>
-          </a:xfrm>
-          <a:prstGeom prst="rect">
-            <a:avLst/>
-          </a:prstGeom>
-          <a:noFill/>
-        </p:spPr>
-        <p:txBody>
-          <a:bodyPr wrap="square" anchor="ctr" lIns="25400" rIns="25400" tIns="12700" bIns="12700">
-            <a:spAutoFit/>
-          </a:bodyPr>
-          <a:lstStyle/>
-          <a:p>
-            <a:pPr algn="l">
-              <a:lnSpc>
-                <a:spcPct val="100000"/>
-              </a:lnSpc>
-              <a:spcBef>
-                <a:spcPts val="0"/>
-              </a:spcBef>
-              <a:spcAft>
-                <a:spcPts val="400"/>
-              </a:spcAft>
-            </a:pPr>
-            <a:r>
-              <a:rPr sz="1300" b="0" i="0">
-                <a:solidFill>
-                  <a:srgbClr val="14241C"/>
-                </a:solidFill>
-                <a:latin typeface="Calibri"/>
-              </a:rPr>
               <a:t>“Change your answer anytime — just tap a different button.”</a:t>
             </a:r>
           </a:p>
@@ -21138,7 +20295,7 @@
       </p:sp>
       <p:sp>
         <p:nvSpPr>
-          <p:cNvPr id="20" name="Rounded Rectangle 19"/>
+          <p:cNvPr id="18" name="Rounded Rectangle 17"/>
           <p:cNvSpPr/>
           <p:nvPr/>
         </p:nvSpPr>
@@ -21184,7 +20341,7 @@
       </p:sp>
       <p:sp>
         <p:nvSpPr>
-          <p:cNvPr id="21" name="Rounded Rectangle 20"/>
+          <p:cNvPr id="19" name="Rounded Rectangle 18"/>
           <p:cNvSpPr/>
           <p:nvPr/>
         </p:nvSpPr>
@@ -21230,7 +20387,7 @@
       </p:sp>
       <p:sp>
         <p:nvSpPr>
-          <p:cNvPr id="22" name="TextBox 21"/>
+          <p:cNvPr id="20" name="TextBox 19"/>
           <p:cNvSpPr txBox="1"/>
           <p:nvPr/>
         </p:nvSpPr>
@@ -21626,7 +20783,7 @@
         <p:spPr>
           <a:xfrm>
             <a:off x="667512" y="1298448"/>
-            <a:ext cx="1554480" cy="603504"/>
+            <a:ext cx="1463040" cy="603504"/>
           </a:xfrm>
           <a:prstGeom prst="rect">
             <a:avLst/>
@@ -21657,7 +20814,7 @@
                 </a:solidFill>
                 <a:latin typeface="Calibri"/>
               </a:rPr>
-              <a:t>▶  ON SCREEN</a:t>
+              <a:t>📍  FIND IT</a:t>
             </a:r>
           </a:p>
         </p:txBody>
@@ -21670,8 +20827,8 @@
         </p:nvSpPr>
         <p:spPr>
           <a:xfrm>
-            <a:off x="2286000" y="1298448"/>
-            <a:ext cx="9281160" cy="603504"/>
+            <a:off x="2194560" y="1298448"/>
+            <a:ext cx="9372600" cy="603504"/>
           </a:xfrm>
           <a:prstGeom prst="rect">
             <a:avLst/>
@@ -21702,7 +20859,7 @@
                 </a:solidFill>
                 <a:latin typeface="Calibri"/>
               </a:rPr>
-              <a:t>Open the Feed tab. Scroll the sample posts; open one to show comments.</a:t>
+              <a:t>Feed tab</a:t>
             </a:r>
           </a:p>
         </p:txBody>
@@ -21716,7 +20873,7 @@
         <p:spPr>
           <a:xfrm>
             <a:off x="502920" y="2029968"/>
-            <a:ext cx="11201400" cy="749808"/>
+            <a:ext cx="11201400" cy="786384"/>
           </a:xfrm>
           <a:prstGeom prst="roundRect">
             <a:avLst>
@@ -21764,7 +20921,7 @@
         <p:spPr>
           <a:xfrm>
             <a:off x="502920" y="2029968"/>
-            <a:ext cx="73152" cy="749808"/>
+            <a:ext cx="91440" cy="786384"/>
           </a:xfrm>
           <a:prstGeom prst="rect">
             <a:avLst/>
@@ -21807,8 +20964,8 @@
         </p:nvSpPr>
         <p:spPr>
           <a:xfrm>
-            <a:off x="704088" y="2075688"/>
-            <a:ext cx="1280160" cy="292608"/>
+            <a:off x="813816" y="2029968"/>
+            <a:ext cx="10698480" cy="786384"/>
           </a:xfrm>
           <a:prstGeom prst="rect">
             <a:avLst/>
@@ -21816,7 +20973,7 @@
           <a:noFill/>
         </p:spPr>
         <p:txBody>
-          <a:bodyPr wrap="square" anchor="t" lIns="25400" rIns="25400" tIns="12700" bIns="12700">
+          <a:bodyPr wrap="square" anchor="ctr" lIns="25400" rIns="25400" tIns="12700" bIns="12700">
             <a:spAutoFit/>
           </a:bodyPr>
           <a:lstStyle/>
@@ -21833,13 +20990,13 @@
               </a:spcAft>
             </a:pPr>
             <a:r>
-              <a:rPr sz="1200" b="1" i="0">
-                <a:solidFill>
-                  <a:srgbClr val="C2410C"/>
-                </a:solidFill>
-                <a:latin typeface="Calibri"/>
-              </a:rPr>
-              <a:t>🗣  SAY</a:t>
+              <a:rPr sz="1800" b="1" i="0">
+                <a:solidFill>
+                  <a:srgbClr val="14241C"/>
+                </a:solidFill>
+                <a:latin typeface="Calibri"/>
+              </a:rPr>
+              <a:t>This is our family wall — post a photo, everyone sees it, like and comment.</a:t>
             </a:r>
           </a:p>
         </p:txBody>
@@ -21852,8 +21009,8 @@
         </p:nvSpPr>
         <p:spPr>
           <a:xfrm>
-            <a:off x="704088" y="2304288"/>
-            <a:ext cx="10789920" cy="475488"/>
+            <a:off x="594360" y="3035808"/>
+            <a:ext cx="11018520" cy="2468880"/>
           </a:xfrm>
           <a:prstGeom prst="rect">
             <a:avLst/>
@@ -21862,6 +21019,237 @@
         </p:spPr>
         <p:txBody>
           <a:bodyPr wrap="square" anchor="t" lIns="25400" rIns="25400" tIns="12700" bIns="12700">
+            <a:spAutoFit/>
+          </a:bodyPr>
+          <a:lstStyle/>
+          <a:p>
+            <a:pPr algn="l">
+              <a:lnSpc>
+                <a:spcPct val="100000"/>
+              </a:lnSpc>
+              <a:spcBef>
+                <a:spcPts val="0"/>
+              </a:spcBef>
+              <a:spcAft>
+                <a:spcPts val="1000"/>
+              </a:spcAft>
+            </a:pPr>
+            <a:r>
+              <a:rPr sz="1600" b="1" i="0">
+                <a:solidFill>
+                  <a:srgbClr val="15503A"/>
+                </a:solidFill>
+                <a:latin typeface="Calibri"/>
+              </a:rPr>
+              <a:t>•  </a:t>
+            </a:r>
+            <a:r>
+              <a:rPr sz="1600" b="1" i="0">
+                <a:solidFill>
+                  <a:srgbClr val="14241C"/>
+                </a:solidFill>
+                <a:latin typeface="Calibri"/>
+              </a:rPr>
+              <a:t>Post anything</a:t>
+            </a:r>
+            <a:r>
+              <a:rPr sz="1600" b="0" i="0">
+                <a:solidFill>
+                  <a:srgbClr val="14241C"/>
+                </a:solidFill>
+                <a:latin typeface="Calibri"/>
+              </a:rPr>
+              <a:t> — “First musky of the season,” sunset off the dock</a:t>
+            </a:r>
+          </a:p>
+          <a:p>
+            <a:pPr algn="l">
+              <a:lnSpc>
+                <a:spcPct val="100000"/>
+              </a:lnSpc>
+              <a:spcBef>
+                <a:spcPts val="0"/>
+              </a:spcBef>
+              <a:spcAft>
+                <a:spcPts val="1000"/>
+              </a:spcAft>
+            </a:pPr>
+            <a:r>
+              <a:rPr sz="1600" b="1" i="0">
+                <a:solidFill>
+                  <a:srgbClr val="15503A"/>
+                </a:solidFill>
+                <a:latin typeface="Calibri"/>
+              </a:rPr>
+              <a:t>•  </a:t>
+            </a:r>
+            <a:r>
+              <a:rPr sz="1600" b="1" i="0">
+                <a:solidFill>
+                  <a:srgbClr val="14241C"/>
+                </a:solidFill>
+                <a:latin typeface="Calibri"/>
+              </a:rPr>
+              <a:t>Like &amp; comment</a:t>
+            </a:r>
+            <a:r>
+              <a:rPr sz="1600" b="0" i="0">
+                <a:solidFill>
+                  <a:srgbClr val="14241C"/>
+                </a:solidFill>
+                <a:latin typeface="Calibri"/>
+              </a:rPr>
+              <a:t> — tag people with @name</a:t>
+            </a:r>
+          </a:p>
+          <a:p>
+            <a:pPr algn="l">
+              <a:lnSpc>
+                <a:spcPct val="100000"/>
+              </a:lnSpc>
+              <a:spcBef>
+                <a:spcPts val="0"/>
+              </a:spcBef>
+              <a:spcAft>
+                <a:spcPts val="1000"/>
+              </a:spcAft>
+            </a:pPr>
+            <a:r>
+              <a:rPr sz="1600" b="1" i="0">
+                <a:solidFill>
+                  <a:srgbClr val="15503A"/>
+                </a:solidFill>
+                <a:latin typeface="Calibri"/>
+              </a:rPr>
+              <a:t>•  </a:t>
+            </a:r>
+            <a:r>
+              <a:rPr sz="1600" b="1" i="0">
+                <a:solidFill>
+                  <a:srgbClr val="14241C"/>
+                </a:solidFill>
+                <a:latin typeface="Calibri"/>
+              </a:rPr>
+              <a:t>Private to family</a:t>
+            </a:r>
+            <a:r>
+              <a:rPr sz="1600" b="0" i="0">
+                <a:solidFill>
+                  <a:srgbClr val="14241C"/>
+                </a:solidFill>
+                <a:latin typeface="Calibri"/>
+              </a:rPr>
+              <a:t> — not public, not strangers — just us</a:t>
+            </a:r>
+          </a:p>
+          <a:p>
+            <a:pPr algn="l">
+              <a:lnSpc>
+                <a:spcPct val="100000"/>
+              </a:lnSpc>
+              <a:spcBef>
+                <a:spcPts val="0"/>
+              </a:spcBef>
+              <a:spcAft>
+                <a:spcPts val="1000"/>
+              </a:spcAft>
+            </a:pPr>
+            <a:r>
+              <a:rPr sz="1600" b="1" i="0">
+                <a:solidFill>
+                  <a:srgbClr val="15503A"/>
+                </a:solidFill>
+                <a:latin typeface="Calibri"/>
+              </a:rPr>
+              <a:t>•  </a:t>
+            </a:r>
+            <a:r>
+              <a:rPr sz="1600" b="1" i="0">
+                <a:solidFill>
+                  <a:srgbClr val="14241C"/>
+                </a:solidFill>
+                <a:latin typeface="Calibri"/>
+              </a:rPr>
+              <a:t>Real examples</a:t>
+            </a:r>
+            <a:r>
+              <a:rPr sz="1600" b="0" i="0">
+                <a:solidFill>
+                  <a:srgbClr val="14241C"/>
+                </a:solidFill>
+                <a:latin typeface="Calibri"/>
+              </a:rPr>
+              <a:t> — Grandpa's musky, Aunt Linda's countdown post</a:t>
+            </a:r>
+          </a:p>
+        </p:txBody>
+      </p:sp>
+      <p:sp>
+        <p:nvSpPr>
+          <p:cNvPr id="15" name="Rounded Rectangle 14"/>
+          <p:cNvSpPr/>
+          <p:nvPr/>
+        </p:nvSpPr>
+        <p:spPr>
+          <a:xfrm>
+            <a:off x="502920" y="5486400"/>
+            <a:ext cx="11201400" cy="566928"/>
+          </a:xfrm>
+          <a:prstGeom prst="roundRect">
+            <a:avLst>
+              <a:gd name="adj" fmla="val 6000"/>
+            </a:avLst>
+          </a:prstGeom>
+          <a:solidFill>
+            <a:srgbClr val="F3EEF0"/>
+          </a:solidFill>
+          <a:ln w="12700">
+            <a:solidFill>
+              <a:srgbClr val="E5E4DA"/>
+            </a:solidFill>
+          </a:ln>
+          <a:effectLst/>
+        </p:spPr>
+        <p:style>
+          <a:lnRef idx="1">
+            <a:schemeClr val="accent1"/>
+          </a:lnRef>
+          <a:fillRef idx="3">
+            <a:schemeClr val="accent1"/>
+          </a:fillRef>
+          <a:effectRef idx="2">
+            <a:schemeClr val="accent1"/>
+          </a:effectRef>
+          <a:fontRef idx="minor">
+            <a:schemeClr val="lt1"/>
+          </a:fontRef>
+        </p:style>
+        <p:txBody>
+          <a:bodyPr rtlCol="0" anchor="ctr"/>
+          <a:lstStyle/>
+          <a:p>
+            <a:pPr algn="ctr"/>
+          </a:p>
+        </p:txBody>
+      </p:sp>
+      <p:sp>
+        <p:nvSpPr>
+          <p:cNvPr id="16" name="TextBox 15"/>
+          <p:cNvSpPr txBox="1"/>
+          <p:nvPr/>
+        </p:nvSpPr>
+        <p:spPr>
+          <a:xfrm>
+            <a:off x="667512" y="5486400"/>
+            <a:ext cx="1828800" cy="566928"/>
+          </a:xfrm>
+          <a:prstGeom prst="rect">
+            <a:avLst/>
+          </a:prstGeom>
+          <a:noFill/>
+        </p:spPr>
+        <p:txBody>
+          <a:bodyPr wrap="square" anchor="ctr" lIns="25400" rIns="25400" tIns="12700" bIns="12700">
             <a:spAutoFit/>
           </a:bodyPr>
           <a:lstStyle/>
@@ -21878,27 +21266,27 @@
               </a:spcAft>
             </a:pPr>
             <a:r>
-              <a:rPr sz="1600" b="0" i="1">
-                <a:solidFill>
-                  <a:srgbClr val="14241C"/>
-                </a:solidFill>
-                <a:latin typeface="Calibri"/>
-              </a:rPr>
-              <a:t>“This is our family wall — post a photo, everyone sees it, like and comment.”</a:t>
-            </a:r>
-          </a:p>
-        </p:txBody>
-      </p:sp>
-      <p:sp>
-        <p:nvSpPr>
-          <p:cNvPr id="15" name="TextBox 14"/>
+              <a:rPr sz="1200" b="1" i="0">
+                <a:solidFill>
+                  <a:srgbClr val="8B2E2E"/>
+                </a:solidFill>
+                <a:latin typeface="Calibri"/>
+              </a:rPr>
+              <a:t>💡 GOOD TO KNOW</a:t>
+            </a:r>
+          </a:p>
+        </p:txBody>
+      </p:sp>
+      <p:sp>
+        <p:nvSpPr>
+          <p:cNvPr id="17" name="TextBox 16"/>
           <p:cNvSpPr txBox="1"/>
           <p:nvPr/>
         </p:nvSpPr>
         <p:spPr>
           <a:xfrm>
-            <a:off x="502920" y="2944368"/>
-            <a:ext cx="11201400" cy="310896"/>
+            <a:off x="2560320" y="5486400"/>
+            <a:ext cx="9006840" cy="566928"/>
           </a:xfrm>
           <a:prstGeom prst="rect">
             <a:avLst/>
@@ -21906,7 +21294,7 @@
           <a:noFill/>
         </p:spPr>
         <p:txBody>
-          <a:bodyPr wrap="square" anchor="t" lIns="25400" rIns="25400" tIns="12700" bIns="12700">
+          <a:bodyPr wrap="square" anchor="ctr" lIns="25400" rIns="25400" tIns="12700" bIns="12700">
             <a:spAutoFit/>
           </a:bodyPr>
           <a:lstStyle/>
@@ -21923,333 +21311,12 @@
               </a:spcAft>
             </a:pPr>
             <a:r>
-              <a:rPr sz="1200" b="1" i="0">
-                <a:solidFill>
-                  <a:srgbClr val="6B7068"/>
-                </a:solidFill>
-                <a:latin typeface="Calibri"/>
-              </a:rPr>
-              <a:t>TALKING POINTS</a:t>
-            </a:r>
-          </a:p>
-        </p:txBody>
-      </p:sp>
-      <p:sp>
-        <p:nvSpPr>
-          <p:cNvPr id="16" name="TextBox 15"/>
-          <p:cNvSpPr txBox="1"/>
-          <p:nvPr/>
-        </p:nvSpPr>
-        <p:spPr>
-          <a:xfrm>
-            <a:off x="594360" y="3273552"/>
-            <a:ext cx="11018520" cy="2331720"/>
-          </a:xfrm>
-          <a:prstGeom prst="rect">
-            <a:avLst/>
-          </a:prstGeom>
-          <a:noFill/>
-        </p:spPr>
-        <p:txBody>
-          <a:bodyPr wrap="square" anchor="t" lIns="25400" rIns="25400" tIns="12700" bIns="12700">
-            <a:spAutoFit/>
-          </a:bodyPr>
-          <a:lstStyle/>
-          <a:p>
-            <a:pPr algn="l">
-              <a:lnSpc>
-                <a:spcPct val="100000"/>
-              </a:lnSpc>
-              <a:spcBef>
-                <a:spcPts val="0"/>
-              </a:spcBef>
-              <a:spcAft>
-                <a:spcPts val="900"/>
-              </a:spcAft>
-            </a:pPr>
-            <a:r>
-              <a:rPr sz="1600" b="1" i="0">
-                <a:solidFill>
-                  <a:srgbClr val="15503A"/>
-                </a:solidFill>
-                <a:latin typeface="Calibri"/>
-              </a:rPr>
-              <a:t>•  </a:t>
-            </a:r>
-            <a:r>
-              <a:rPr sz="1600" b="1" i="0">
+              <a:rPr sz="1300" b="0" i="0">
                 <a:solidFill>
                   <a:srgbClr val="14241C"/>
                 </a:solidFill>
                 <a:latin typeface="Calibri"/>
               </a:rPr>
-              <a:t>Post anything</a:t>
-            </a:r>
-            <a:r>
-              <a:rPr sz="1600" b="0" i="0">
-                <a:solidFill>
-                  <a:srgbClr val="14241C"/>
-                </a:solidFill>
-                <a:latin typeface="Calibri"/>
-              </a:rPr>
-              <a:t> — “First musky of the season,” sunset off the dock</a:t>
-            </a:r>
-          </a:p>
-          <a:p>
-            <a:pPr algn="l">
-              <a:lnSpc>
-                <a:spcPct val="100000"/>
-              </a:lnSpc>
-              <a:spcBef>
-                <a:spcPts val="0"/>
-              </a:spcBef>
-              <a:spcAft>
-                <a:spcPts val="900"/>
-              </a:spcAft>
-            </a:pPr>
-            <a:r>
-              <a:rPr sz="1600" b="1" i="0">
-                <a:solidFill>
-                  <a:srgbClr val="15503A"/>
-                </a:solidFill>
-                <a:latin typeface="Calibri"/>
-              </a:rPr>
-              <a:t>•  </a:t>
-            </a:r>
-            <a:r>
-              <a:rPr sz="1600" b="1" i="0">
-                <a:solidFill>
-                  <a:srgbClr val="14241C"/>
-                </a:solidFill>
-                <a:latin typeface="Calibri"/>
-              </a:rPr>
-              <a:t>Like &amp; comment</a:t>
-            </a:r>
-            <a:r>
-              <a:rPr sz="1600" b="0" i="0">
-                <a:solidFill>
-                  <a:srgbClr val="14241C"/>
-                </a:solidFill>
-                <a:latin typeface="Calibri"/>
-              </a:rPr>
-              <a:t> — tag people with @name</a:t>
-            </a:r>
-          </a:p>
-          <a:p>
-            <a:pPr algn="l">
-              <a:lnSpc>
-                <a:spcPct val="100000"/>
-              </a:lnSpc>
-              <a:spcBef>
-                <a:spcPts val="0"/>
-              </a:spcBef>
-              <a:spcAft>
-                <a:spcPts val="900"/>
-              </a:spcAft>
-            </a:pPr>
-            <a:r>
-              <a:rPr sz="1600" b="1" i="0">
-                <a:solidFill>
-                  <a:srgbClr val="15503A"/>
-                </a:solidFill>
-                <a:latin typeface="Calibri"/>
-              </a:rPr>
-              <a:t>•  </a:t>
-            </a:r>
-            <a:r>
-              <a:rPr sz="1600" b="1" i="0">
-                <a:solidFill>
-                  <a:srgbClr val="14241C"/>
-                </a:solidFill>
-                <a:latin typeface="Calibri"/>
-              </a:rPr>
-              <a:t>Private to family</a:t>
-            </a:r>
-            <a:r>
-              <a:rPr sz="1600" b="0" i="0">
-                <a:solidFill>
-                  <a:srgbClr val="14241C"/>
-                </a:solidFill>
-                <a:latin typeface="Calibri"/>
-              </a:rPr>
-              <a:t> — not public, not strangers — just us</a:t>
-            </a:r>
-          </a:p>
-          <a:p>
-            <a:pPr algn="l">
-              <a:lnSpc>
-                <a:spcPct val="100000"/>
-              </a:lnSpc>
-              <a:spcBef>
-                <a:spcPts val="0"/>
-              </a:spcBef>
-              <a:spcAft>
-                <a:spcPts val="900"/>
-              </a:spcAft>
-            </a:pPr>
-            <a:r>
-              <a:rPr sz="1600" b="1" i="0">
-                <a:solidFill>
-                  <a:srgbClr val="15503A"/>
-                </a:solidFill>
-                <a:latin typeface="Calibri"/>
-              </a:rPr>
-              <a:t>•  </a:t>
-            </a:r>
-            <a:r>
-              <a:rPr sz="1600" b="1" i="0">
-                <a:solidFill>
-                  <a:srgbClr val="14241C"/>
-                </a:solidFill>
-                <a:latin typeface="Calibri"/>
-              </a:rPr>
-              <a:t>Real examples</a:t>
-            </a:r>
-            <a:r>
-              <a:rPr sz="1600" b="0" i="0">
-                <a:solidFill>
-                  <a:srgbClr val="14241C"/>
-                </a:solidFill>
-                <a:latin typeface="Calibri"/>
-              </a:rPr>
-              <a:t> — Grandpa's musky, Aunt Linda's countdown post</a:t>
-            </a:r>
-          </a:p>
-        </p:txBody>
-      </p:sp>
-      <p:sp>
-        <p:nvSpPr>
-          <p:cNvPr id="17" name="Rounded Rectangle 16"/>
-          <p:cNvSpPr/>
-          <p:nvPr/>
-        </p:nvSpPr>
-        <p:spPr>
-          <a:xfrm>
-            <a:off x="502920" y="5486400"/>
-            <a:ext cx="11201400" cy="566928"/>
-          </a:xfrm>
-          <a:prstGeom prst="roundRect">
-            <a:avLst>
-              <a:gd name="adj" fmla="val 6000"/>
-            </a:avLst>
-          </a:prstGeom>
-          <a:solidFill>
-            <a:srgbClr val="F3EEF0"/>
-          </a:solidFill>
-          <a:ln w="12700">
-            <a:solidFill>
-              <a:srgbClr val="E5E4DA"/>
-            </a:solidFill>
-          </a:ln>
-          <a:effectLst/>
-        </p:spPr>
-        <p:style>
-          <a:lnRef idx="1">
-            <a:schemeClr val="accent1"/>
-          </a:lnRef>
-          <a:fillRef idx="3">
-            <a:schemeClr val="accent1"/>
-          </a:fillRef>
-          <a:effectRef idx="2">
-            <a:schemeClr val="accent1"/>
-          </a:effectRef>
-          <a:fontRef idx="minor">
-            <a:schemeClr val="lt1"/>
-          </a:fontRef>
-        </p:style>
-        <p:txBody>
-          <a:bodyPr rtlCol="0" anchor="ctr"/>
-          <a:lstStyle/>
-          <a:p>
-            <a:pPr algn="ctr"/>
-          </a:p>
-        </p:txBody>
-      </p:sp>
-      <p:sp>
-        <p:nvSpPr>
-          <p:cNvPr id="18" name="TextBox 17"/>
-          <p:cNvSpPr txBox="1"/>
-          <p:nvPr/>
-        </p:nvSpPr>
-        <p:spPr>
-          <a:xfrm>
-            <a:off x="667512" y="5486400"/>
-            <a:ext cx="1463040" cy="566928"/>
-          </a:xfrm>
-          <a:prstGeom prst="rect">
-            <a:avLst/>
-          </a:prstGeom>
-          <a:noFill/>
-        </p:spPr>
-        <p:txBody>
-          <a:bodyPr wrap="square" anchor="ctr" lIns="25400" rIns="25400" tIns="12700" bIns="12700">
-            <a:spAutoFit/>
-          </a:bodyPr>
-          <a:lstStyle/>
-          <a:p>
-            <a:pPr algn="l">
-              <a:lnSpc>
-                <a:spcPct val="100000"/>
-              </a:lnSpc>
-              <a:spcBef>
-                <a:spcPts val="0"/>
-              </a:spcBef>
-              <a:spcAft>
-                <a:spcPts val="400"/>
-              </a:spcAft>
-            </a:pPr>
-            <a:r>
-              <a:rPr sz="1200" b="1" i="0">
-                <a:solidFill>
-                  <a:srgbClr val="8B2E2E"/>
-                </a:solidFill>
-                <a:latin typeface="Calibri"/>
-              </a:rPr>
-              <a:t>❓ IF ASKED</a:t>
-            </a:r>
-          </a:p>
-        </p:txBody>
-      </p:sp>
-      <p:sp>
-        <p:nvSpPr>
-          <p:cNvPr id="19" name="TextBox 18"/>
-          <p:cNvSpPr txBox="1"/>
-          <p:nvPr/>
-        </p:nvSpPr>
-        <p:spPr>
-          <a:xfrm>
-            <a:off x="2103120" y="5486400"/>
-            <a:ext cx="9464040" cy="566928"/>
-          </a:xfrm>
-          <a:prstGeom prst="rect">
-            <a:avLst/>
-          </a:prstGeom>
-          <a:noFill/>
-        </p:spPr>
-        <p:txBody>
-          <a:bodyPr wrap="square" anchor="ctr" lIns="25400" rIns="25400" tIns="12700" bIns="12700">
-            <a:spAutoFit/>
-          </a:bodyPr>
-          <a:lstStyle/>
-          <a:p>
-            <a:pPr algn="l">
-              <a:lnSpc>
-                <a:spcPct val="100000"/>
-              </a:lnSpc>
-              <a:spcBef>
-                <a:spcPts val="0"/>
-              </a:spcBef>
-              <a:spcAft>
-                <a:spcPts val="400"/>
-              </a:spcAft>
-            </a:pPr>
-            <a:r>
-              <a:rPr sz="1300" b="0" i="0">
-                <a:solidFill>
-                  <a:srgbClr val="14241C"/>
-                </a:solidFill>
-                <a:latin typeface="Calibri"/>
-              </a:rPr>
               <a:t>“Anything inappropriate gets held for review automatically — it's a family-safe space.”</a:t>
             </a:r>
           </a:p>
@@ -22257,7 +21324,7 @@
       </p:sp>
       <p:sp>
         <p:nvSpPr>
-          <p:cNvPr id="20" name="Rounded Rectangle 19"/>
+          <p:cNvPr id="18" name="Rounded Rectangle 17"/>
           <p:cNvSpPr/>
           <p:nvPr/>
         </p:nvSpPr>
@@ -22303,7 +21370,7 @@
       </p:sp>
       <p:sp>
         <p:nvSpPr>
-          <p:cNvPr id="21" name="Rounded Rectangle 20"/>
+          <p:cNvPr id="19" name="Rounded Rectangle 18"/>
           <p:cNvSpPr/>
           <p:nvPr/>
         </p:nvSpPr>
@@ -22349,7 +21416,7 @@
       </p:sp>
       <p:sp>
         <p:nvSpPr>
-          <p:cNvPr id="22" name="TextBox 21"/>
+          <p:cNvPr id="20" name="TextBox 19"/>
           <p:cNvSpPr txBox="1"/>
           <p:nvPr/>
         </p:nvSpPr>

--- a/presentation/MLR-App-Presentation.pptx
+++ b/presentation/MLR-App-Presentation.pptx
@@ -23,6 +23,7 @@
     <p:sldId id="271" r:id="rId23"/>
     <p:sldId id="272" r:id="rId24"/>
     <p:sldId id="273" r:id="rId25"/>
+    <p:sldId id="274" r:id="rId26"/>
   </p:sldIdLst>
   <p:sldSz cx="12191695" cy="6858000" type="screen4x3"/>
   <p:notesSz cx="6858000" cy="9144000"/>
@@ -1009,7 +1010,7 @@
           <a:lstStyle/>
           <a:p>
             <a:r>
-              <a:t>This is the reassurance slide for the older / less techy crowd. Emphasize the human escape hatch — they can always just call you.</a:t>
+              <a:t>Leave this up while people scan. Or read the link aloud: mlr-app-omega.vercel.app. iPhone users: once it opens, add to Home Screen, then sign in there so they don't sign in twice.</a:t>
             </a:r>
           </a:p>
         </p:txBody>
@@ -1079,7 +1080,7 @@
           <a:lstStyle/>
           <a:p>
             <a:r>
-              <a:t>End on action, not features. Get them to do the three things in the room if you can. Then take questions — the appendix has your backup facts.</a:t>
+              <a:t>This is the reassurance slide for the older / less techy crowd. Emphasize the human escape hatch — they can always just call you.</a:t>
             </a:r>
           </a:p>
         </p:txBody>
@@ -1105,6 +1106,76 @@
 </file>
 
 <file path=ppt/notesSlides/notesSlide18.xml><?xml version="1.0" encoding="utf-8"?>
+<p:notes xmlns:a="http://schemas.openxmlformats.org/drawingml/2006/main" xmlns:p="http://schemas.openxmlformats.org/presentationml/2006/main" xmlns:r="http://schemas.openxmlformats.org/officeDocument/2006/relationships">
+  <p:cSld>
+    <p:spTree>
+      <p:nvGrpSpPr>
+        <p:cNvPr id="1" name=""/>
+        <p:cNvGrpSpPr/>
+        <p:nvPr/>
+      </p:nvGrpSpPr>
+      <p:grpSpPr>
+        <a:xfrm>
+          <a:off x="0" y="0"/>
+          <a:ext cx="0" cy="0"/>
+          <a:chOff x="0" y="0"/>
+          <a:chExt cx="0" cy="0"/>
+        </a:xfrm>
+      </p:grpSpPr>
+      <p:sp>
+        <p:nvSpPr>
+          <p:cNvPr id="2" name="Slide Image Placeholder 1"/>
+          <p:cNvSpPr>
+            <a:spLocks noGrp="1"/>
+          </p:cNvSpPr>
+          <p:nvPr>
+            <p:ph type="sldImg" idx="2"/>
+          </p:nvPr>
+        </p:nvSpPr>
+        <p:spPr/>
+      </p:sp>
+      <p:sp>
+        <p:nvSpPr>
+          <p:cNvPr id="3" name="Notes Placeholder 2"/>
+          <p:cNvSpPr>
+            <a:spLocks noGrp="1"/>
+          </p:cNvSpPr>
+          <p:nvPr>
+            <p:ph type="body" idx="3" sz="quarter"/>
+          </p:nvPr>
+        </p:nvSpPr>
+        <p:spPr/>
+        <p:txBody>
+          <a:bodyPr/>
+          <a:lstStyle/>
+          <a:p>
+            <a:r>
+              <a:t>End on action, not features. Get them to do the three things in the room if you can. Then take questions — the appendix has your backup facts.</a:t>
+            </a:r>
+          </a:p>
+        </p:txBody>
+      </p:sp>
+      <p:sp>
+        <p:nvSpPr>
+          <p:cNvPr id="4" name="Slide Number Placeholder 3"/>
+          <p:cNvSpPr>
+            <a:spLocks noGrp="1"/>
+          </p:cNvSpPr>
+          <p:nvPr>
+            <p:ph type="sldNum" idx="5" sz="quarter"/>
+          </p:nvPr>
+        </p:nvSpPr>
+        <p:spPr/>
+      </p:sp>
+    </p:spTree>
+  </p:cSld>
+  <p:clrMapOvr>
+    <a:masterClrMapping/>
+  </p:clrMapOvr>
+</p:notes>
+</file>
+
+<file path=ppt/notesSlides/notesSlide19.xml><?xml version="1.0" encoding="utf-8"?>
 <p:notes xmlns:a="http://schemas.openxmlformats.org/drawingml/2006/main" xmlns:p="http://schemas.openxmlformats.org/presentationml/2006/main" xmlns:r="http://schemas.openxmlformats.org/officeDocument/2006/relationships">
   <p:cSld>
     <p:spTree>
@@ -10769,7 +10840,7 @@
                 </a:solidFill>
                 <a:latin typeface="Calibri"/>
               </a:rPr>
-              <a:t> — (share the URL / QR you have ready)</a:t>
+              <a:t> — go to mlr-app-omega.vercel.app — or scan the code (next slide)</a:t>
             </a:r>
           </a:p>
           <a:p>
@@ -11173,7 +11244,7 @@
                 </a:solidFill>
                 <a:latin typeface="Calibri"/>
               </a:rPr>
-              <a:t>Privacy, safety &amp; help</a:t>
+              <a:t>Scan to open the app</a:t>
             </a:r>
           </a:p>
         </p:txBody>
@@ -11211,7 +11282,7 @@
             <a:avLst/>
           </a:prstGeom>
           <a:solidFill>
-            <a:srgbClr val="F6F6F1"/>
+            <a:srgbClr val="0C4029"/>
           </a:solidFill>
           <a:ln>
             <a:noFill/>
@@ -11242,104 +11313,14 @@
       </p:sp>
       <p:sp>
         <p:nvSpPr>
-          <p:cNvPr id="3" name="Rectangle 2"/>
-          <p:cNvSpPr/>
-          <p:nvPr/>
-        </p:nvSpPr>
-        <p:spPr>
-          <a:xfrm>
-            <a:off x="0" y="0"/>
-            <a:ext cx="12191695" cy="1078992"/>
-          </a:xfrm>
-          <a:prstGeom prst="rect">
-            <a:avLst/>
-          </a:prstGeom>
-          <a:solidFill>
-            <a:srgbClr val="15503A"/>
-          </a:solidFill>
-          <a:ln>
-            <a:noFill/>
-          </a:ln>
-          <a:effectLst/>
-        </p:spPr>
-        <p:style>
-          <a:lnRef idx="1">
-            <a:schemeClr val="accent1"/>
-          </a:lnRef>
-          <a:fillRef idx="3">
-            <a:schemeClr val="accent1"/>
-          </a:fillRef>
-          <a:effectRef idx="2">
-            <a:schemeClr val="accent1"/>
-          </a:effectRef>
-          <a:fontRef idx="minor">
-            <a:schemeClr val="lt1"/>
-          </a:fontRef>
-        </p:style>
-        <p:txBody>
-          <a:bodyPr rtlCol="0" anchor="ctr"/>
-          <a:lstStyle/>
-          <a:p>
-            <a:pPr algn="ctr"/>
-          </a:p>
-        </p:txBody>
-      </p:sp>
-      <p:sp>
-        <p:nvSpPr>
-          <p:cNvPr id="4" name="Rounded Rectangle 3"/>
-          <p:cNvSpPr/>
-          <p:nvPr/>
-        </p:nvSpPr>
-        <p:spPr>
-          <a:xfrm>
-            <a:off x="365760" y="201168"/>
-            <a:ext cx="1371600" cy="676656"/>
-          </a:xfrm>
-          <a:prstGeom prst="roundRect">
-            <a:avLst>
-              <a:gd name="adj" fmla="val 6000"/>
-            </a:avLst>
-          </a:prstGeom>
-          <a:solidFill>
-            <a:srgbClr val="FFFFFF"/>
-          </a:solidFill>
-          <a:ln>
-            <a:noFill/>
-          </a:ln>
-          <a:effectLst/>
-        </p:spPr>
-        <p:style>
-          <a:lnRef idx="1">
-            <a:schemeClr val="accent1"/>
-          </a:lnRef>
-          <a:fillRef idx="3">
-            <a:schemeClr val="accent1"/>
-          </a:fillRef>
-          <a:effectRef idx="2">
-            <a:schemeClr val="accent1"/>
-          </a:effectRef>
-          <a:fontRef idx="minor">
-            <a:schemeClr val="lt1"/>
-          </a:fontRef>
-        </p:style>
-        <p:txBody>
-          <a:bodyPr rtlCol="0" anchor="ctr"/>
-          <a:lstStyle/>
-          <a:p>
-            <a:pPr algn="ctr"/>
-          </a:p>
-        </p:txBody>
-      </p:sp>
-      <p:sp>
-        <p:nvSpPr>
-          <p:cNvPr id="5" name="TextBox 4"/>
+          <p:cNvPr id="3" name="TextBox 2"/>
           <p:cNvSpPr txBox="1"/>
           <p:nvPr/>
         </p:nvSpPr>
         <p:spPr>
           <a:xfrm>
-            <a:off x="365760" y="219456"/>
-            <a:ext cx="1371600" cy="640080"/>
+            <a:off x="640080" y="640080"/>
+            <a:ext cx="10908792" cy="822960"/>
           </a:xfrm>
           <a:prstGeom prst="rect">
             <a:avLst/>
@@ -11347,7 +11328,7 @@
           <a:noFill/>
         </p:spPr>
         <p:txBody>
-          <a:bodyPr wrap="square" anchor="ctr" lIns="25400" rIns="25400" tIns="12700" bIns="12700">
+          <a:bodyPr wrap="square" anchor="t" lIns="25400" rIns="25400" tIns="12700" bIns="12700">
             <a:spAutoFit/>
           </a:bodyPr>
           <a:lstStyle/>
@@ -11364,27 +11345,27 @@
               </a:spcAft>
             </a:pPr>
             <a:r>
-              <a:rPr sz="2200" b="1" i="0">
-                <a:solidFill>
-                  <a:srgbClr val="15503A"/>
-                </a:solidFill>
-                <a:latin typeface="Calibri"/>
-              </a:rPr>
-              <a:t>STEP 15</a:t>
-            </a:r>
-          </a:p>
-        </p:txBody>
-      </p:sp>
-      <p:sp>
-        <p:nvSpPr>
-          <p:cNvPr id="6" name="TextBox 5"/>
+              <a:rPr sz="3600" b="1" i="0">
+                <a:solidFill>
+                  <a:srgbClr val="FFFFFF"/>
+                </a:solidFill>
+                <a:latin typeface="Calibri"/>
+              </a:rPr>
+              <a:t>Scan to open the app</a:t>
+            </a:r>
+          </a:p>
+        </p:txBody>
+      </p:sp>
+      <p:sp>
+        <p:nvSpPr>
+          <p:cNvPr id="4" name="TextBox 3"/>
           <p:cNvSpPr txBox="1"/>
           <p:nvPr/>
         </p:nvSpPr>
         <p:spPr>
           <a:xfrm>
-            <a:off x="1920240" y="146304"/>
-            <a:ext cx="8595360" cy="786384"/>
+            <a:off x="640080" y="1481328"/>
+            <a:ext cx="10908792" cy="457200"/>
           </a:xfrm>
           <a:prstGeom prst="rect">
             <a:avLst/>
@@ -11392,12 +11373,12 @@
           <a:noFill/>
         </p:spPr>
         <p:txBody>
-          <a:bodyPr wrap="square" anchor="ctr" lIns="25400" rIns="25400" tIns="12700" bIns="12700">
+          <a:bodyPr wrap="square" anchor="t" lIns="25400" rIns="25400" tIns="12700" bIns="12700">
             <a:spAutoFit/>
           </a:bodyPr>
           <a:lstStyle/>
           <a:p>
-            <a:pPr algn="l">
+            <a:pPr algn="ctr">
               <a:lnSpc>
                 <a:spcPct val="100000"/>
               </a:lnSpc>
@@ -11409,27 +11390,143 @@
               </a:spcAft>
             </a:pPr>
             <a:r>
-              <a:rPr sz="2700" b="1" i="0">
-                <a:solidFill>
-                  <a:srgbClr val="FFFFFF"/>
-                </a:solidFill>
-                <a:latin typeface="Calibri"/>
-              </a:rPr>
-              <a:t>Privacy, safety &amp; help</a:t>
-            </a:r>
-          </a:p>
-        </p:txBody>
-      </p:sp>
-      <p:sp>
-        <p:nvSpPr>
-          <p:cNvPr id="7" name="TextBox 6"/>
+              <a:rPr sz="1700" b="0" i="0">
+                <a:solidFill>
+                  <a:srgbClr val="E9E2C9"/>
+                </a:solidFill>
+                <a:latin typeface="Calibri"/>
+              </a:rPr>
+              <a:t>Point your phone camera at the code — it opens right up</a:t>
+            </a:r>
+          </a:p>
+        </p:txBody>
+      </p:sp>
+      <p:sp>
+        <p:nvSpPr>
+          <p:cNvPr id="5" name="Rounded Rectangle 4"/>
+          <p:cNvSpPr/>
+          <p:nvPr/>
+        </p:nvSpPr>
+        <p:spPr>
+          <a:xfrm>
+            <a:off x="4358487" y="2057400"/>
+            <a:ext cx="3474720" cy="3474720"/>
+          </a:xfrm>
+          <a:prstGeom prst="roundRect">
+            <a:avLst>
+              <a:gd name="adj" fmla="val 6000"/>
+            </a:avLst>
+          </a:prstGeom>
+          <a:solidFill>
+            <a:srgbClr val="FFFFFF"/>
+          </a:solidFill>
+          <a:ln>
+            <a:noFill/>
+          </a:ln>
+          <a:effectLst/>
+        </p:spPr>
+        <p:style>
+          <a:lnRef idx="1">
+            <a:schemeClr val="accent1"/>
+          </a:lnRef>
+          <a:fillRef idx="3">
+            <a:schemeClr val="accent1"/>
+          </a:fillRef>
+          <a:effectRef idx="2">
+            <a:schemeClr val="accent1"/>
+          </a:effectRef>
+          <a:fontRef idx="minor">
+            <a:schemeClr val="lt1"/>
+          </a:fontRef>
+        </p:style>
+        <p:txBody>
+          <a:bodyPr rtlCol="0" anchor="ctr"/>
+          <a:lstStyle/>
+          <a:p>
+            <a:pPr algn="ctr"/>
+          </a:p>
+        </p:txBody>
+      </p:sp>
+      <p:pic>
+        <p:nvPicPr>
+          <p:cNvPr id="6" name="Picture 5" descr="qr_app.png"/>
+          <p:cNvPicPr>
+            <a:picLocks noChangeAspect="1"/>
+          </p:cNvPicPr>
+          <p:nvPr/>
+        </p:nvPicPr>
+        <p:blipFill>
+          <a:blip r:embed="rId2"/>
+          <a:stretch>
+            <a:fillRect/>
+          </a:stretch>
+        </p:blipFill>
+        <p:spPr>
+          <a:xfrm>
+            <a:off x="4587087" y="2286000"/>
+            <a:ext cx="3017520" cy="3017520"/>
+          </a:xfrm>
+          <a:prstGeom prst="rect">
+            <a:avLst/>
+          </a:prstGeom>
+        </p:spPr>
+      </p:pic>
+      <p:sp>
+        <p:nvSpPr>
+          <p:cNvPr id="7" name="Rounded Rectangle 6"/>
+          <p:cNvSpPr/>
+          <p:nvPr/>
+        </p:nvSpPr>
+        <p:spPr>
+          <a:xfrm>
+            <a:off x="3261207" y="5806440"/>
+            <a:ext cx="5669280" cy="566928"/>
+          </a:xfrm>
+          <a:prstGeom prst="roundRect">
+            <a:avLst>
+              <a:gd name="adj" fmla="val 6000"/>
+            </a:avLst>
+          </a:prstGeom>
+          <a:solidFill>
+            <a:srgbClr val="C2410C"/>
+          </a:solidFill>
+          <a:ln>
+            <a:noFill/>
+          </a:ln>
+          <a:effectLst/>
+        </p:spPr>
+        <p:style>
+          <a:lnRef idx="1">
+            <a:schemeClr val="accent1"/>
+          </a:lnRef>
+          <a:fillRef idx="3">
+            <a:schemeClr val="accent1"/>
+          </a:fillRef>
+          <a:effectRef idx="2">
+            <a:schemeClr val="accent1"/>
+          </a:effectRef>
+          <a:fontRef idx="minor">
+            <a:schemeClr val="lt1"/>
+          </a:fontRef>
+        </p:style>
+        <p:txBody>
+          <a:bodyPr rtlCol="0" anchor="ctr"/>
+          <a:lstStyle/>
+          <a:p>
+            <a:pPr algn="ctr"/>
+          </a:p>
+        </p:txBody>
+      </p:sp>
+      <p:sp>
+        <p:nvSpPr>
+          <p:cNvPr id="8" name="TextBox 7"/>
           <p:cNvSpPr txBox="1"/>
           <p:nvPr/>
         </p:nvSpPr>
         <p:spPr>
           <a:xfrm>
-            <a:off x="9509760" y="146304"/>
-            <a:ext cx="2377440" cy="786384"/>
+            <a:off x="3261207" y="5824728"/>
+            <a:ext cx="5669280" cy="530352"/>
           </a:xfrm>
           <a:prstGeom prst="rect">
             <a:avLst/>
@@ -11442,7 +11539,7 @@
           </a:bodyPr>
           <a:lstStyle/>
           <a:p>
-            <a:pPr algn="r">
+            <a:pPr algn="ctr">
               <a:lnSpc>
                 <a:spcPct val="100000"/>
               </a:lnSpc>
@@ -11454,755 +11551,13 @@
               </a:spcAft>
             </a:pPr>
             <a:r>
-              <a:rPr sz="1300" b="0" i="0">
-                <a:solidFill>
-                  <a:srgbClr val="ECF3EF"/>
-                </a:solidFill>
-                <a:latin typeface="Calibri"/>
-              </a:rPr>
-              <a:t>Step 15 of 16</a:t>
-            </a:r>
-          </a:p>
-        </p:txBody>
-      </p:sp>
-      <p:sp>
-        <p:nvSpPr>
-          <p:cNvPr id="8" name="Rounded Rectangle 7"/>
-          <p:cNvSpPr/>
-          <p:nvPr/>
-        </p:nvSpPr>
-        <p:spPr>
-          <a:xfrm>
-            <a:off x="502920" y="1298448"/>
-            <a:ext cx="11201400" cy="603504"/>
-          </a:xfrm>
-          <a:prstGeom prst="roundRect">
-            <a:avLst>
-              <a:gd name="adj" fmla="val 6000"/>
-            </a:avLst>
-          </a:prstGeom>
-          <a:solidFill>
-            <a:srgbClr val="ECF3EF"/>
-          </a:solidFill>
-          <a:ln w="12700">
-            <a:solidFill>
-              <a:srgbClr val="E5E4DA"/>
-            </a:solidFill>
-          </a:ln>
-          <a:effectLst/>
-        </p:spPr>
-        <p:style>
-          <a:lnRef idx="1">
-            <a:schemeClr val="accent1"/>
-          </a:lnRef>
-          <a:fillRef idx="3">
-            <a:schemeClr val="accent1"/>
-          </a:fillRef>
-          <a:effectRef idx="2">
-            <a:schemeClr val="accent1"/>
-          </a:effectRef>
-          <a:fontRef idx="minor">
-            <a:schemeClr val="lt1"/>
-          </a:fontRef>
-        </p:style>
-        <p:txBody>
-          <a:bodyPr rtlCol="0" anchor="ctr"/>
-          <a:lstStyle/>
-          <a:p>
-            <a:pPr algn="ctr"/>
-          </a:p>
-        </p:txBody>
-      </p:sp>
-      <p:sp>
-        <p:nvSpPr>
-          <p:cNvPr id="9" name="TextBox 8"/>
-          <p:cNvSpPr txBox="1"/>
-          <p:nvPr/>
-        </p:nvSpPr>
-        <p:spPr>
-          <a:xfrm>
-            <a:off x="667512" y="1298448"/>
-            <a:ext cx="1463040" cy="603504"/>
-          </a:xfrm>
-          <a:prstGeom prst="rect">
-            <a:avLst/>
-          </a:prstGeom>
-          <a:noFill/>
-        </p:spPr>
-        <p:txBody>
-          <a:bodyPr wrap="square" anchor="ctr" lIns="25400" rIns="25400" tIns="12700" bIns="12700">
-            <a:spAutoFit/>
-          </a:bodyPr>
-          <a:lstStyle/>
-          <a:p>
-            <a:pPr algn="l">
-              <a:lnSpc>
-                <a:spcPct val="100000"/>
-              </a:lnSpc>
-              <a:spcBef>
-                <a:spcPts val="0"/>
-              </a:spcBef>
-              <a:spcAft>
-                <a:spcPts val="400"/>
-              </a:spcAft>
-            </a:pPr>
-            <a:r>
-              <a:rPr sz="1300" b="1" i="0">
-                <a:solidFill>
-                  <a:srgbClr val="15503A"/>
-                </a:solidFill>
-                <a:latin typeface="Calibri"/>
-              </a:rPr>
-              <a:t>📍  FIND IT</a:t>
-            </a:r>
-          </a:p>
-        </p:txBody>
-      </p:sp>
-      <p:sp>
-        <p:nvSpPr>
-          <p:cNvPr id="10" name="TextBox 9"/>
-          <p:cNvSpPr txBox="1"/>
-          <p:nvPr/>
-        </p:nvSpPr>
-        <p:spPr>
-          <a:xfrm>
-            <a:off x="2194560" y="1298448"/>
-            <a:ext cx="9372600" cy="603504"/>
-          </a:xfrm>
-          <a:prstGeom prst="rect">
-            <a:avLst/>
-          </a:prstGeom>
-          <a:noFill/>
-        </p:spPr>
-        <p:txBody>
-          <a:bodyPr wrap="square" anchor="ctr" lIns="25400" rIns="25400" tIns="12700" bIns="12700">
-            <a:spAutoFit/>
-          </a:bodyPr>
-          <a:lstStyle/>
-          <a:p>
-            <a:pPr algn="l">
-              <a:lnSpc>
-                <a:spcPct val="100000"/>
-              </a:lnSpc>
-              <a:spcBef>
-                <a:spcPts val="0"/>
-              </a:spcBef>
-              <a:spcAft>
-                <a:spcPts val="400"/>
-              </a:spcAft>
-            </a:pPr>
-            <a:r>
-              <a:rPr sz="1500" b="1" i="0">
-                <a:solidFill>
-                  <a:srgbClr val="14241C"/>
-                </a:solidFill>
-                <a:latin typeface="Calibri"/>
-              </a:rPr>
-              <a:t>Profile  →  Text size  ·  Help page</a:t>
-            </a:r>
-          </a:p>
-        </p:txBody>
-      </p:sp>
-      <p:sp>
-        <p:nvSpPr>
-          <p:cNvPr id="11" name="Rounded Rectangle 10"/>
-          <p:cNvSpPr/>
-          <p:nvPr/>
-        </p:nvSpPr>
-        <p:spPr>
-          <a:xfrm>
-            <a:off x="502920" y="2029968"/>
-            <a:ext cx="11201400" cy="786384"/>
-          </a:xfrm>
-          <a:prstGeom prst="roundRect">
-            <a:avLst>
-              <a:gd name="adj" fmla="val 6000"/>
-            </a:avLst>
-          </a:prstGeom>
-          <a:solidFill>
-            <a:srgbClr val="FBF7EC"/>
-          </a:solidFill>
-          <a:ln w="12700">
-            <a:solidFill>
-              <a:srgbClr val="E6D9B8"/>
-            </a:solidFill>
-          </a:ln>
-          <a:effectLst/>
-        </p:spPr>
-        <p:style>
-          <a:lnRef idx="1">
-            <a:schemeClr val="accent1"/>
-          </a:lnRef>
-          <a:fillRef idx="3">
-            <a:schemeClr val="accent1"/>
-          </a:fillRef>
-          <a:effectRef idx="2">
-            <a:schemeClr val="accent1"/>
-          </a:effectRef>
-          <a:fontRef idx="minor">
-            <a:schemeClr val="lt1"/>
-          </a:fontRef>
-        </p:style>
-        <p:txBody>
-          <a:bodyPr rtlCol="0" anchor="ctr"/>
-          <a:lstStyle/>
-          <a:p>
-            <a:pPr algn="ctr"/>
-          </a:p>
-        </p:txBody>
-      </p:sp>
-      <p:sp>
-        <p:nvSpPr>
-          <p:cNvPr id="12" name="Rectangle 11"/>
-          <p:cNvSpPr/>
-          <p:nvPr/>
-        </p:nvSpPr>
-        <p:spPr>
-          <a:xfrm>
-            <a:off x="502920" y="2029968"/>
-            <a:ext cx="91440" cy="786384"/>
-          </a:xfrm>
-          <a:prstGeom prst="rect">
-            <a:avLst/>
-          </a:prstGeom>
-          <a:solidFill>
-            <a:srgbClr val="C2410C"/>
-          </a:solidFill>
-          <a:ln>
-            <a:noFill/>
-          </a:ln>
-          <a:effectLst/>
-        </p:spPr>
-        <p:style>
-          <a:lnRef idx="1">
-            <a:schemeClr val="accent1"/>
-          </a:lnRef>
-          <a:fillRef idx="3">
-            <a:schemeClr val="accent1"/>
-          </a:fillRef>
-          <a:effectRef idx="2">
-            <a:schemeClr val="accent1"/>
-          </a:effectRef>
-          <a:fontRef idx="minor">
-            <a:schemeClr val="lt1"/>
-          </a:fontRef>
-        </p:style>
-        <p:txBody>
-          <a:bodyPr rtlCol="0" anchor="ctr"/>
-          <a:lstStyle/>
-          <a:p>
-            <a:pPr algn="ctr"/>
-          </a:p>
-        </p:txBody>
-      </p:sp>
-      <p:sp>
-        <p:nvSpPr>
-          <p:cNvPr id="13" name="TextBox 12"/>
-          <p:cNvSpPr txBox="1"/>
-          <p:nvPr/>
-        </p:nvSpPr>
-        <p:spPr>
-          <a:xfrm>
-            <a:off x="813816" y="2029968"/>
-            <a:ext cx="10698480" cy="786384"/>
-          </a:xfrm>
-          <a:prstGeom prst="rect">
-            <a:avLst/>
-          </a:prstGeom>
-          <a:noFill/>
-        </p:spPr>
-        <p:txBody>
-          <a:bodyPr wrap="square" anchor="ctr" lIns="25400" rIns="25400" tIns="12700" bIns="12700">
-            <a:spAutoFit/>
-          </a:bodyPr>
-          <a:lstStyle/>
-          <a:p>
-            <a:pPr algn="l">
-              <a:lnSpc>
-                <a:spcPct val="100000"/>
-              </a:lnSpc>
-              <a:spcBef>
-                <a:spcPts val="0"/>
-              </a:spcBef>
-              <a:spcAft>
-                <a:spcPts val="400"/>
-              </a:spcAft>
-            </a:pPr>
-            <a:r>
-              <a:rPr sz="1800" b="1" i="0">
-                <a:solidFill>
-                  <a:srgbClr val="14241C"/>
-                </a:solidFill>
-                <a:latin typeface="Calibri"/>
-              </a:rPr>
-              <a:t>It's just us — family only — and we made it easy for every age to use.</a:t>
-            </a:r>
-          </a:p>
-        </p:txBody>
-      </p:sp>
-      <p:sp>
-        <p:nvSpPr>
-          <p:cNvPr id="14" name="TextBox 13"/>
-          <p:cNvSpPr txBox="1"/>
-          <p:nvPr/>
-        </p:nvSpPr>
-        <p:spPr>
-          <a:xfrm>
-            <a:off x="594360" y="3035808"/>
-            <a:ext cx="11018520" cy="2468880"/>
-          </a:xfrm>
-          <a:prstGeom prst="rect">
-            <a:avLst/>
-          </a:prstGeom>
-          <a:noFill/>
-        </p:spPr>
-        <p:txBody>
-          <a:bodyPr wrap="square" anchor="t" lIns="25400" rIns="25400" tIns="12700" bIns="12700">
-            <a:spAutoFit/>
-          </a:bodyPr>
-          <a:lstStyle/>
-          <a:p>
-            <a:pPr algn="l">
-              <a:lnSpc>
-                <a:spcPct val="100000"/>
-              </a:lnSpc>
-              <a:spcBef>
-                <a:spcPts val="0"/>
-              </a:spcBef>
-              <a:spcAft>
-                <a:spcPts val="1000"/>
-              </a:spcAft>
-            </a:pPr>
-            <a:r>
-              <a:rPr sz="1600" b="1" i="0">
-                <a:solidFill>
-                  <a:srgbClr val="15503A"/>
-                </a:solidFill>
-                <a:latin typeface="Calibri"/>
-              </a:rPr>
-              <a:t>•  </a:t>
-            </a:r>
-            <a:r>
-              <a:rPr sz="1600" b="1" i="0">
-                <a:solidFill>
-                  <a:srgbClr val="14241C"/>
-                </a:solidFill>
-                <a:latin typeface="Calibri"/>
-              </a:rPr>
-              <a:t>Family only</a:t>
-            </a:r>
-            <a:r>
-              <a:rPr sz="1600" b="0" i="0">
-                <a:solidFill>
-                  <a:srgbClr val="14241C"/>
-                </a:solidFill>
-                <a:latin typeface="Calibri"/>
-              </a:rPr>
-              <a:t> — not public; sensitive info hidden until you sign in</a:t>
-            </a:r>
-          </a:p>
-          <a:p>
-            <a:pPr algn="l">
-              <a:lnSpc>
-                <a:spcPct val="100000"/>
-              </a:lnSpc>
-              <a:spcBef>
-                <a:spcPts val="0"/>
-              </a:spcBef>
-              <a:spcAft>
-                <a:spcPts val="1000"/>
-              </a:spcAft>
-            </a:pPr>
-            <a:r>
-              <a:rPr sz="1600" b="1" i="0">
-                <a:solidFill>
-                  <a:srgbClr val="15503A"/>
-                </a:solidFill>
-                <a:latin typeface="Calibri"/>
-              </a:rPr>
-              <a:t>•  </a:t>
-            </a:r>
-            <a:r>
-              <a:rPr sz="1600" b="1" i="0">
-                <a:solidFill>
-                  <a:srgbClr val="14241C"/>
-                </a:solidFill>
-                <a:latin typeface="Calibri"/>
-              </a:rPr>
-              <a:t>Bigger text</a:t>
-            </a:r>
-            <a:r>
-              <a:rPr sz="1600" b="0" i="0">
-                <a:solidFill>
-                  <a:srgbClr val="14241C"/>
-                </a:solidFill>
-                <a:latin typeface="Calibri"/>
-              </a:rPr>
-              <a:t> — Profile → Text size: Normal / Large / Largest</a:t>
-            </a:r>
-          </a:p>
-          <a:p>
-            <a:pPr algn="l">
-              <a:lnSpc>
-                <a:spcPct val="100000"/>
-              </a:lnSpc>
-              <a:spcBef>
-                <a:spcPts val="0"/>
-              </a:spcBef>
-              <a:spcAft>
-                <a:spcPts val="1000"/>
-              </a:spcAft>
-            </a:pPr>
-            <a:r>
-              <a:rPr sz="1600" b="1" i="0">
-                <a:solidFill>
-                  <a:srgbClr val="15503A"/>
-                </a:solidFill>
-                <a:latin typeface="Calibri"/>
-              </a:rPr>
-              <a:t>•  </a:t>
-            </a:r>
-            <a:r>
-              <a:rPr sz="1600" b="1" i="0">
-                <a:solidFill>
-                  <a:srgbClr val="14241C"/>
-                </a:solidFill>
-                <a:latin typeface="Calibri"/>
-              </a:rPr>
-              <a:t>Help page</a:t>
-            </a:r>
-            <a:r>
-              <a:rPr sz="1600" b="0" i="0">
-                <a:solidFill>
-                  <a:srgbClr val="14241C"/>
-                </a:solidFill>
-                <a:latin typeface="Calibri"/>
-              </a:rPr>
-              <a:t> — plain-language how-tos for anyone stuck</a:t>
-            </a:r>
-          </a:p>
-          <a:p>
-            <a:pPr algn="l">
-              <a:lnSpc>
-                <a:spcPct val="100000"/>
-              </a:lnSpc>
-              <a:spcBef>
-                <a:spcPts val="0"/>
-              </a:spcBef>
-              <a:spcAft>
-                <a:spcPts val="1000"/>
-              </a:spcAft>
-            </a:pPr>
-            <a:r>
-              <a:rPr sz="1600" b="1" i="0">
-                <a:solidFill>
-                  <a:srgbClr val="15503A"/>
-                </a:solidFill>
-                <a:latin typeface="Calibri"/>
-              </a:rPr>
-              <a:t>•  </a:t>
-            </a:r>
-            <a:r>
-              <a:rPr sz="1600" b="1" i="0">
-                <a:solidFill>
-                  <a:srgbClr val="14241C"/>
-                </a:solidFill>
-                <a:latin typeface="Calibri"/>
-              </a:rPr>
-              <a:t>A real person</a:t>
-            </a:r>
-            <a:r>
-              <a:rPr sz="1600" b="0" i="0">
-                <a:solidFill>
-                  <a:srgbClr val="14241C"/>
-                </a:solidFill>
-                <a:latin typeface="Calibri"/>
-              </a:rPr>
-              <a:t> — text or call me (Brian) anytime — it's on the Help page</a:t>
-            </a:r>
-          </a:p>
-        </p:txBody>
-      </p:sp>
-      <p:sp>
-        <p:nvSpPr>
-          <p:cNvPr id="15" name="Rounded Rectangle 14"/>
-          <p:cNvSpPr/>
-          <p:nvPr/>
-        </p:nvSpPr>
-        <p:spPr>
-          <a:xfrm>
-            <a:off x="502920" y="5486400"/>
-            <a:ext cx="11201400" cy="566928"/>
-          </a:xfrm>
-          <a:prstGeom prst="roundRect">
-            <a:avLst>
-              <a:gd name="adj" fmla="val 6000"/>
-            </a:avLst>
-          </a:prstGeom>
-          <a:solidFill>
-            <a:srgbClr val="F3EEF0"/>
-          </a:solidFill>
-          <a:ln w="12700">
-            <a:solidFill>
-              <a:srgbClr val="E5E4DA"/>
-            </a:solidFill>
-          </a:ln>
-          <a:effectLst/>
-        </p:spPr>
-        <p:style>
-          <a:lnRef idx="1">
-            <a:schemeClr val="accent1"/>
-          </a:lnRef>
-          <a:fillRef idx="3">
-            <a:schemeClr val="accent1"/>
-          </a:fillRef>
-          <a:effectRef idx="2">
-            <a:schemeClr val="accent1"/>
-          </a:effectRef>
-          <a:fontRef idx="minor">
-            <a:schemeClr val="lt1"/>
-          </a:fontRef>
-        </p:style>
-        <p:txBody>
-          <a:bodyPr rtlCol="0" anchor="ctr"/>
-          <a:lstStyle/>
-          <a:p>
-            <a:pPr algn="ctr"/>
-          </a:p>
-        </p:txBody>
-      </p:sp>
-      <p:sp>
-        <p:nvSpPr>
-          <p:cNvPr id="16" name="TextBox 15"/>
-          <p:cNvSpPr txBox="1"/>
-          <p:nvPr/>
-        </p:nvSpPr>
-        <p:spPr>
-          <a:xfrm>
-            <a:off x="667512" y="5486400"/>
-            <a:ext cx="1828800" cy="566928"/>
-          </a:xfrm>
-          <a:prstGeom prst="rect">
-            <a:avLst/>
-          </a:prstGeom>
-          <a:noFill/>
-        </p:spPr>
-        <p:txBody>
-          <a:bodyPr wrap="square" anchor="ctr" lIns="25400" rIns="25400" tIns="12700" bIns="12700">
-            <a:spAutoFit/>
-          </a:bodyPr>
-          <a:lstStyle/>
-          <a:p>
-            <a:pPr algn="l">
-              <a:lnSpc>
-                <a:spcPct val="100000"/>
-              </a:lnSpc>
-              <a:spcBef>
-                <a:spcPts val="0"/>
-              </a:spcBef>
-              <a:spcAft>
-                <a:spcPts val="400"/>
-              </a:spcAft>
-            </a:pPr>
-            <a:r>
-              <a:rPr sz="1200" b="1" i="0">
-                <a:solidFill>
-                  <a:srgbClr val="8B2E2E"/>
-                </a:solidFill>
-                <a:latin typeface="Calibri"/>
-              </a:rPr>
-              <a:t>💡 GOOD TO KNOW</a:t>
-            </a:r>
-          </a:p>
-        </p:txBody>
-      </p:sp>
-      <p:sp>
-        <p:nvSpPr>
-          <p:cNvPr id="17" name="TextBox 16"/>
-          <p:cNvSpPr txBox="1"/>
-          <p:nvPr/>
-        </p:nvSpPr>
-        <p:spPr>
-          <a:xfrm>
-            <a:off x="2560320" y="5486400"/>
-            <a:ext cx="9006840" cy="566928"/>
-          </a:xfrm>
-          <a:prstGeom prst="rect">
-            <a:avLst/>
-          </a:prstGeom>
-          <a:noFill/>
-        </p:spPr>
-        <p:txBody>
-          <a:bodyPr wrap="square" anchor="ctr" lIns="25400" rIns="25400" tIns="12700" bIns="12700">
-            <a:spAutoFit/>
-          </a:bodyPr>
-          <a:lstStyle/>
-          <a:p>
-            <a:pPr algn="l">
-              <a:lnSpc>
-                <a:spcPct val="100000"/>
-              </a:lnSpc>
-              <a:spcBef>
-                <a:spcPts val="0"/>
-              </a:spcBef>
-              <a:spcAft>
-                <a:spcPts val="400"/>
-              </a:spcAft>
-            </a:pPr>
-            <a:r>
-              <a:rPr sz="1300" b="0" i="0">
-                <a:solidFill>
-                  <a:srgbClr val="14241C"/>
-                </a:solidFill>
-                <a:latin typeface="Calibri"/>
-              </a:rPr>
-              <a:t>“No strangers, no ads, no selling anything. It's our family's app.”</a:t>
-            </a:r>
-          </a:p>
-        </p:txBody>
-      </p:sp>
-      <p:sp>
-        <p:nvSpPr>
-          <p:cNvPr id="18" name="Rounded Rectangle 17"/>
-          <p:cNvSpPr/>
-          <p:nvPr/>
-        </p:nvSpPr>
-        <p:spPr>
-          <a:xfrm>
-            <a:off x="365760" y="6510528"/>
-            <a:ext cx="11521440" cy="63500"/>
-          </a:xfrm>
-          <a:prstGeom prst="roundRect">
-            <a:avLst>
-              <a:gd name="adj" fmla="val 6000"/>
-            </a:avLst>
-          </a:prstGeom>
-          <a:solidFill>
-            <a:srgbClr val="E5E4DA"/>
-          </a:solidFill>
-          <a:ln>
-            <a:noFill/>
-          </a:ln>
-          <a:effectLst/>
-        </p:spPr>
-        <p:style>
-          <a:lnRef idx="1">
-            <a:schemeClr val="accent1"/>
-          </a:lnRef>
-          <a:fillRef idx="3">
-            <a:schemeClr val="accent1"/>
-          </a:fillRef>
-          <a:effectRef idx="2">
-            <a:schemeClr val="accent1"/>
-          </a:effectRef>
-          <a:fontRef idx="minor">
-            <a:schemeClr val="lt1"/>
-          </a:fontRef>
-        </p:style>
-        <p:txBody>
-          <a:bodyPr rtlCol="0" anchor="ctr"/>
-          <a:lstStyle/>
-          <a:p>
-            <a:pPr algn="ctr"/>
-          </a:p>
-        </p:txBody>
-      </p:sp>
-      <p:sp>
-        <p:nvSpPr>
-          <p:cNvPr id="19" name="Rounded Rectangle 18"/>
-          <p:cNvSpPr/>
-          <p:nvPr/>
-        </p:nvSpPr>
-        <p:spPr>
-          <a:xfrm>
-            <a:off x="365760" y="6510528"/>
-            <a:ext cx="10801350" cy="63500"/>
-          </a:xfrm>
-          <a:prstGeom prst="roundRect">
-            <a:avLst>
-              <a:gd name="adj" fmla="val 6000"/>
-            </a:avLst>
-          </a:prstGeom>
-          <a:solidFill>
-            <a:srgbClr val="15503A"/>
-          </a:solidFill>
-          <a:ln>
-            <a:noFill/>
-          </a:ln>
-          <a:effectLst/>
-        </p:spPr>
-        <p:style>
-          <a:lnRef idx="1">
-            <a:schemeClr val="accent1"/>
-          </a:lnRef>
-          <a:fillRef idx="3">
-            <a:schemeClr val="accent1"/>
-          </a:fillRef>
-          <a:effectRef idx="2">
-            <a:schemeClr val="accent1"/>
-          </a:effectRef>
-          <a:fontRef idx="minor">
-            <a:schemeClr val="lt1"/>
-          </a:fontRef>
-        </p:style>
-        <p:txBody>
-          <a:bodyPr rtlCol="0" anchor="ctr"/>
-          <a:lstStyle/>
-          <a:p>
-            <a:pPr algn="ctr"/>
-          </a:p>
-        </p:txBody>
-      </p:sp>
-      <p:sp>
-        <p:nvSpPr>
-          <p:cNvPr id="20" name="TextBox 19"/>
-          <p:cNvSpPr txBox="1"/>
-          <p:nvPr/>
-        </p:nvSpPr>
-        <p:spPr>
-          <a:xfrm>
-            <a:off x="365760" y="6163056"/>
-            <a:ext cx="11430000" cy="292608"/>
-          </a:xfrm>
-          <a:prstGeom prst="rect">
-            <a:avLst/>
-          </a:prstGeom>
-          <a:noFill/>
-        </p:spPr>
-        <p:txBody>
-          <a:bodyPr wrap="square" anchor="t" lIns="25400" rIns="25400" tIns="12700" bIns="12700">
-            <a:spAutoFit/>
-          </a:bodyPr>
-          <a:lstStyle/>
-          <a:p>
-            <a:pPr algn="l">
-              <a:lnSpc>
-                <a:spcPct val="100000"/>
-              </a:lnSpc>
-              <a:spcBef>
-                <a:spcPts val="0"/>
-              </a:spcBef>
-              <a:spcAft>
-                <a:spcPts val="400"/>
-              </a:spcAft>
-            </a:pPr>
-            <a:r>
-              <a:rPr sz="1100" b="1" i="0">
-                <a:solidFill>
-                  <a:srgbClr val="6B7068"/>
-                </a:solidFill>
-                <a:latin typeface="Calibri"/>
-              </a:rPr>
-              <a:t>NEXT  ›  </a:t>
-            </a:r>
-            <a:r>
-              <a:rPr sz="1100" b="0" i="1">
-                <a:solidFill>
-                  <a:srgbClr val="6B7068"/>
-                </a:solidFill>
-                <a:latin typeface="Calibri"/>
-              </a:rPr>
-              <a:t>What to do right now</a:t>
+              <a:rPr sz="2000" b="1" i="0">
+                <a:solidFill>
+                  <a:srgbClr val="FFFFFF"/>
+                </a:solidFill>
+                <a:latin typeface="Calibri"/>
+              </a:rPr>
+              <a:t>mlr-app-omega.vercel.app</a:t>
             </a:r>
           </a:p>
         </p:txBody>
@@ -12284,7 +11639,7 @@
             <a:avLst/>
           </a:prstGeom>
           <a:solidFill>
-            <a:srgbClr val="C2410C"/>
+            <a:srgbClr val="15503A"/>
           </a:solidFill>
           <a:ln>
             <a:noFill/>
@@ -12395,11 +11750,11 @@
             <a:r>
               <a:rPr sz="2200" b="1" i="0">
                 <a:solidFill>
-                  <a:srgbClr val="C2410C"/>
-                </a:solidFill>
-                <a:latin typeface="Calibri"/>
-              </a:rPr>
-              <a:t>STEP 16</a:t>
+                  <a:srgbClr val="15503A"/>
+                </a:solidFill>
+                <a:latin typeface="Calibri"/>
+              </a:rPr>
+              <a:t>STEP 15</a:t>
             </a:r>
           </a:p>
         </p:txBody>
@@ -12444,7 +11799,7 @@
                 </a:solidFill>
                 <a:latin typeface="Calibri"/>
               </a:rPr>
-              <a:t>BEFORE YOU LEAVE</a:t>
+              <a:t>Privacy, safety &amp; help</a:t>
             </a:r>
           </a:p>
         </p:txBody>
@@ -12489,21 +11844,69 @@
                 </a:solidFill>
                 <a:latin typeface="Calibri"/>
               </a:rPr>
-              <a:t>Step 16 of 16</a:t>
-            </a:r>
-          </a:p>
-        </p:txBody>
-      </p:sp>
-      <p:sp>
-        <p:nvSpPr>
-          <p:cNvPr id="8" name="TextBox 7"/>
+              <a:t>Step 15 of 16</a:t>
+            </a:r>
+          </a:p>
+        </p:txBody>
+      </p:sp>
+      <p:sp>
+        <p:nvSpPr>
+          <p:cNvPr id="8" name="Rounded Rectangle 7"/>
+          <p:cNvSpPr/>
+          <p:nvPr/>
+        </p:nvSpPr>
+        <p:spPr>
+          <a:xfrm>
+            <a:off x="502920" y="1298448"/>
+            <a:ext cx="11201400" cy="603504"/>
+          </a:xfrm>
+          <a:prstGeom prst="roundRect">
+            <a:avLst>
+              <a:gd name="adj" fmla="val 6000"/>
+            </a:avLst>
+          </a:prstGeom>
+          <a:solidFill>
+            <a:srgbClr val="ECF3EF"/>
+          </a:solidFill>
+          <a:ln w="12700">
+            <a:solidFill>
+              <a:srgbClr val="E5E4DA"/>
+            </a:solidFill>
+          </a:ln>
+          <a:effectLst/>
+        </p:spPr>
+        <p:style>
+          <a:lnRef idx="1">
+            <a:schemeClr val="accent1"/>
+          </a:lnRef>
+          <a:fillRef idx="3">
+            <a:schemeClr val="accent1"/>
+          </a:fillRef>
+          <a:effectRef idx="2">
+            <a:schemeClr val="accent1"/>
+          </a:effectRef>
+          <a:fontRef idx="minor">
+            <a:schemeClr val="lt1"/>
+          </a:fontRef>
+        </p:style>
+        <p:txBody>
+          <a:bodyPr rtlCol="0" anchor="ctr"/>
+          <a:lstStyle/>
+          <a:p>
+            <a:pPr algn="ctr"/>
+          </a:p>
+        </p:txBody>
+      </p:sp>
+      <p:sp>
+        <p:nvSpPr>
+          <p:cNvPr id="9" name="TextBox 8"/>
           <p:cNvSpPr txBox="1"/>
           <p:nvPr/>
         </p:nvSpPr>
         <p:spPr>
           <a:xfrm>
-            <a:off x="640080" y="1371600"/>
-            <a:ext cx="10972800" cy="914400"/>
+            <a:off x="667512" y="1298448"/>
+            <a:ext cx="1463040" cy="603504"/>
           </a:xfrm>
           <a:prstGeom prst="rect">
             <a:avLst/>
@@ -12511,7 +11914,7 @@
           <a:noFill/>
         </p:spPr>
         <p:txBody>
-          <a:bodyPr wrap="square" anchor="t" lIns="25400" rIns="25400" tIns="12700" bIns="12700">
+          <a:bodyPr wrap="square" anchor="ctr" lIns="25400" rIns="25400" tIns="12700" bIns="12700">
             <a:spAutoFit/>
           </a:bodyPr>
           <a:lstStyle/>
@@ -12528,62 +11931,14 @@
               </a:spcAft>
             </a:pPr>
             <a:r>
-              <a:rPr sz="3200" b="1" i="0">
-                <a:solidFill>
-                  <a:srgbClr val="14241C"/>
-                </a:solidFill>
-                <a:latin typeface="Calibri"/>
-              </a:rPr>
-              <a:t>Three things to do right now</a:t>
-            </a:r>
-          </a:p>
-        </p:txBody>
-      </p:sp>
-      <p:sp>
-        <p:nvSpPr>
-          <p:cNvPr id="9" name="Rounded Rectangle 8"/>
-          <p:cNvSpPr/>
-          <p:nvPr/>
-        </p:nvSpPr>
-        <p:spPr>
-          <a:xfrm>
-            <a:off x="640080" y="2331720"/>
-            <a:ext cx="10908792" cy="3566160"/>
-          </a:xfrm>
-          <a:prstGeom prst="roundRect">
-            <a:avLst>
-              <a:gd name="adj" fmla="val 6000"/>
-            </a:avLst>
-          </a:prstGeom>
-          <a:solidFill>
-            <a:srgbClr val="FFFFFF"/>
-          </a:solidFill>
-          <a:ln w="12700">
-            <a:solidFill>
-              <a:srgbClr val="E5E4DA"/>
-            </a:solidFill>
-          </a:ln>
-          <a:effectLst/>
-        </p:spPr>
-        <p:style>
-          <a:lnRef idx="1">
-            <a:schemeClr val="accent1"/>
-          </a:lnRef>
-          <a:fillRef idx="3">
-            <a:schemeClr val="accent1"/>
-          </a:fillRef>
-          <a:effectRef idx="2">
-            <a:schemeClr val="accent1"/>
-          </a:effectRef>
-          <a:fontRef idx="minor">
-            <a:schemeClr val="lt1"/>
-          </a:fontRef>
-        </p:style>
-        <p:txBody>
-          <a:bodyPr rtlCol="0" anchor="ctr"/>
-          <a:lstStyle/>
-          <a:p>
-            <a:pPr algn="ctr"/>
+              <a:rPr sz="1300" b="1" i="0">
+                <a:solidFill>
+                  <a:srgbClr val="15503A"/>
+                </a:solidFill>
+                <a:latin typeface="Calibri"/>
+              </a:rPr>
+              <a:t>📍  FIND IT</a:t>
+            </a:r>
           </a:p>
         </p:txBody>
       </p:sp>
@@ -12595,8 +11950,8 @@
         </p:nvSpPr>
         <p:spPr>
           <a:xfrm>
-            <a:off x="1005840" y="2606040"/>
-            <a:ext cx="10149840" cy="3108960"/>
+            <a:off x="2194560" y="1298448"/>
+            <a:ext cx="9372600" cy="603504"/>
           </a:xfrm>
           <a:prstGeom prst="rect">
             <a:avLst/>
@@ -12604,264 +11959,7 @@
           <a:noFill/>
         </p:spPr>
         <p:txBody>
-          <a:bodyPr wrap="square" anchor="t" lIns="25400" rIns="25400" tIns="12700" bIns="12700">
-            <a:spAutoFit/>
-          </a:bodyPr>
-          <a:lstStyle/>
-          <a:p>
-            <a:pPr algn="l">
-              <a:lnSpc>
-                <a:spcPct val="105000"/>
-              </a:lnSpc>
-              <a:spcBef>
-                <a:spcPts val="0"/>
-              </a:spcBef>
-              <a:spcAft>
-                <a:spcPts val="1000"/>
-              </a:spcAft>
-            </a:pPr>
-            <a:r>
-              <a:rPr sz="2000" b="1" i="0">
-                <a:solidFill>
-                  <a:srgbClr val="C2410C"/>
-                </a:solidFill>
-                <a:latin typeface="Calibri"/>
-              </a:rPr>
-              <a:t>1.  </a:t>
-            </a:r>
-            <a:r>
-              <a:rPr sz="2000" b="1" i="0">
-                <a:solidFill>
-                  <a:srgbClr val="14241C"/>
-                </a:solidFill>
-                <a:latin typeface="Calibri"/>
-              </a:rPr>
-              <a:t>Add it to your home screen</a:t>
-            </a:r>
-            <a:r>
-              <a:rPr sz="2000" b="0" i="0">
-                <a:solidFill>
-                  <a:srgbClr val="14241C"/>
-                </a:solidFill>
-                <a:latin typeface="Calibri"/>
-              </a:rPr>
-              <a:t>  — so it's one tap away.</a:t>
-            </a:r>
-          </a:p>
-          <a:p>
-            <a:pPr algn="l">
-              <a:lnSpc>
-                <a:spcPct val="105000"/>
-              </a:lnSpc>
-              <a:spcBef>
-                <a:spcPts val="0"/>
-              </a:spcBef>
-              <a:spcAft>
-                <a:spcPts val="1000"/>
-              </a:spcAft>
-            </a:pPr>
-            <a:r>
-              <a:rPr sz="2000" b="1" i="0">
-                <a:solidFill>
-                  <a:srgbClr val="C2410C"/>
-                </a:solidFill>
-                <a:latin typeface="Calibri"/>
-              </a:rPr>
-              <a:t>2.  </a:t>
-            </a:r>
-            <a:r>
-              <a:rPr sz="2000" b="1" i="0">
-                <a:solidFill>
-                  <a:srgbClr val="14241C"/>
-                </a:solidFill>
-                <a:latin typeface="Calibri"/>
-              </a:rPr>
-              <a:t>Sign in with your email</a:t>
-            </a:r>
-            <a:r>
-              <a:rPr sz="2000" b="0" i="0">
-                <a:solidFill>
-                  <a:srgbClr val="14241C"/>
-                </a:solidFill>
-                <a:latin typeface="Calibri"/>
-              </a:rPr>
-              <a:t>  — name + the 6-digit code, no password.</a:t>
-            </a:r>
-          </a:p>
-          <a:p>
-            <a:pPr algn="l">
-              <a:lnSpc>
-                <a:spcPct val="105000"/>
-              </a:lnSpc>
-              <a:spcBef>
-                <a:spcPts val="0"/>
-              </a:spcBef>
-              <a:spcAft>
-                <a:spcPts val="1000"/>
-              </a:spcAft>
-            </a:pPr>
-            <a:r>
-              <a:rPr sz="2000" b="1" i="0">
-                <a:solidFill>
-                  <a:srgbClr val="C2410C"/>
-                </a:solidFill>
-                <a:latin typeface="Calibri"/>
-              </a:rPr>
-              <a:t>3.  </a:t>
-            </a:r>
-            <a:r>
-              <a:rPr sz="2000" b="1" i="0">
-                <a:solidFill>
-                  <a:srgbClr val="14241C"/>
-                </a:solidFill>
-                <a:latin typeface="Calibri"/>
-              </a:rPr>
-              <a:t>RSVP to Family Fest</a:t>
-            </a:r>
-            <a:r>
-              <a:rPr sz="2000" b="0" i="0">
-                <a:solidFill>
-                  <a:srgbClr val="14241C"/>
-                </a:solidFill>
-                <a:latin typeface="Calibri"/>
-              </a:rPr>
-              <a:t>  — tell us which days, July 27–31.</a:t>
-            </a:r>
-          </a:p>
-          <a:p>
-            <a:pPr algn="l">
-              <a:lnSpc>
-                <a:spcPct val="105000"/>
-              </a:lnSpc>
-              <a:spcBef>
-                <a:spcPts val="0"/>
-              </a:spcBef>
-              <a:spcAft>
-                <a:spcPts val="1000"/>
-              </a:spcAft>
-            </a:pPr>
-            <a:r>
-              <a:rPr sz="1800" b="1" i="0">
-                <a:solidFill>
-                  <a:srgbClr val="15503A"/>
-                </a:solidFill>
-                <a:latin typeface="Calibri"/>
-              </a:rPr>
-              <a:t>“Do those three today and you're all set. Post a photo this week so we know it's working — and I'm right here if anyone gets stuck.”</a:t>
-            </a:r>
-          </a:p>
-        </p:txBody>
-      </p:sp>
-      <p:sp>
-        <p:nvSpPr>
-          <p:cNvPr id="11" name="Rounded Rectangle 10"/>
-          <p:cNvSpPr/>
-          <p:nvPr/>
-        </p:nvSpPr>
-        <p:spPr>
-          <a:xfrm>
-            <a:off x="365760" y="6510528"/>
-            <a:ext cx="11521440" cy="63500"/>
-          </a:xfrm>
-          <a:prstGeom prst="roundRect">
-            <a:avLst>
-              <a:gd name="adj" fmla="val 6000"/>
-            </a:avLst>
-          </a:prstGeom>
-          <a:solidFill>
-            <a:srgbClr val="E5E4DA"/>
-          </a:solidFill>
-          <a:ln>
-            <a:noFill/>
-          </a:ln>
-          <a:effectLst/>
-        </p:spPr>
-        <p:style>
-          <a:lnRef idx="1">
-            <a:schemeClr val="accent1"/>
-          </a:lnRef>
-          <a:fillRef idx="3">
-            <a:schemeClr val="accent1"/>
-          </a:fillRef>
-          <a:effectRef idx="2">
-            <a:schemeClr val="accent1"/>
-          </a:effectRef>
-          <a:fontRef idx="minor">
-            <a:schemeClr val="lt1"/>
-          </a:fontRef>
-        </p:style>
-        <p:txBody>
-          <a:bodyPr rtlCol="0" anchor="ctr"/>
-          <a:lstStyle/>
-          <a:p>
-            <a:pPr algn="ctr"/>
-          </a:p>
-        </p:txBody>
-      </p:sp>
-      <p:sp>
-        <p:nvSpPr>
-          <p:cNvPr id="12" name="Rounded Rectangle 11"/>
-          <p:cNvSpPr/>
-          <p:nvPr/>
-        </p:nvSpPr>
-        <p:spPr>
-          <a:xfrm>
-            <a:off x="365760" y="6510528"/>
-            <a:ext cx="11521440" cy="63500"/>
-          </a:xfrm>
-          <a:prstGeom prst="roundRect">
-            <a:avLst>
-              <a:gd name="adj" fmla="val 6000"/>
-            </a:avLst>
-          </a:prstGeom>
-          <a:solidFill>
-            <a:srgbClr val="C2410C"/>
-          </a:solidFill>
-          <a:ln>
-            <a:noFill/>
-          </a:ln>
-          <a:effectLst/>
-        </p:spPr>
-        <p:style>
-          <a:lnRef idx="1">
-            <a:schemeClr val="accent1"/>
-          </a:lnRef>
-          <a:fillRef idx="3">
-            <a:schemeClr val="accent1"/>
-          </a:fillRef>
-          <a:effectRef idx="2">
-            <a:schemeClr val="accent1"/>
-          </a:effectRef>
-          <a:fontRef idx="minor">
-            <a:schemeClr val="lt1"/>
-          </a:fontRef>
-        </p:style>
-        <p:txBody>
-          <a:bodyPr rtlCol="0" anchor="ctr"/>
-          <a:lstStyle/>
-          <a:p>
-            <a:pPr algn="ctr"/>
-          </a:p>
-        </p:txBody>
-      </p:sp>
-      <p:sp>
-        <p:nvSpPr>
-          <p:cNvPr id="13" name="TextBox 12"/>
-          <p:cNvSpPr txBox="1"/>
-          <p:nvPr/>
-        </p:nvSpPr>
-        <p:spPr>
-          <a:xfrm>
-            <a:off x="365760" y="6163056"/>
-            <a:ext cx="11430000" cy="292608"/>
-          </a:xfrm>
-          <a:prstGeom prst="rect">
-            <a:avLst/>
-          </a:prstGeom>
-          <a:noFill/>
-        </p:spPr>
-        <p:txBody>
-          <a:bodyPr wrap="square" anchor="t" lIns="25400" rIns="25400" tIns="12700" bIns="12700">
+          <a:bodyPr wrap="square" anchor="ctr" lIns="25400" rIns="25400" tIns="12700" bIns="12700">
             <a:spAutoFit/>
           </a:bodyPr>
           <a:lstStyle/>
@@ -12878,6 +11976,601 @@
               </a:spcAft>
             </a:pPr>
             <a:r>
+              <a:rPr sz="1500" b="1" i="0">
+                <a:solidFill>
+                  <a:srgbClr val="14241C"/>
+                </a:solidFill>
+                <a:latin typeface="Calibri"/>
+              </a:rPr>
+              <a:t>Profile  →  Text size  ·  Help page</a:t>
+            </a:r>
+          </a:p>
+        </p:txBody>
+      </p:sp>
+      <p:sp>
+        <p:nvSpPr>
+          <p:cNvPr id="11" name="Rounded Rectangle 10"/>
+          <p:cNvSpPr/>
+          <p:nvPr/>
+        </p:nvSpPr>
+        <p:spPr>
+          <a:xfrm>
+            <a:off x="502920" y="2029968"/>
+            <a:ext cx="11201400" cy="786384"/>
+          </a:xfrm>
+          <a:prstGeom prst="roundRect">
+            <a:avLst>
+              <a:gd name="adj" fmla="val 6000"/>
+            </a:avLst>
+          </a:prstGeom>
+          <a:solidFill>
+            <a:srgbClr val="FBF7EC"/>
+          </a:solidFill>
+          <a:ln w="12700">
+            <a:solidFill>
+              <a:srgbClr val="E6D9B8"/>
+            </a:solidFill>
+          </a:ln>
+          <a:effectLst/>
+        </p:spPr>
+        <p:style>
+          <a:lnRef idx="1">
+            <a:schemeClr val="accent1"/>
+          </a:lnRef>
+          <a:fillRef idx="3">
+            <a:schemeClr val="accent1"/>
+          </a:fillRef>
+          <a:effectRef idx="2">
+            <a:schemeClr val="accent1"/>
+          </a:effectRef>
+          <a:fontRef idx="minor">
+            <a:schemeClr val="lt1"/>
+          </a:fontRef>
+        </p:style>
+        <p:txBody>
+          <a:bodyPr rtlCol="0" anchor="ctr"/>
+          <a:lstStyle/>
+          <a:p>
+            <a:pPr algn="ctr"/>
+          </a:p>
+        </p:txBody>
+      </p:sp>
+      <p:sp>
+        <p:nvSpPr>
+          <p:cNvPr id="12" name="Rectangle 11"/>
+          <p:cNvSpPr/>
+          <p:nvPr/>
+        </p:nvSpPr>
+        <p:spPr>
+          <a:xfrm>
+            <a:off x="502920" y="2029968"/>
+            <a:ext cx="91440" cy="786384"/>
+          </a:xfrm>
+          <a:prstGeom prst="rect">
+            <a:avLst/>
+          </a:prstGeom>
+          <a:solidFill>
+            <a:srgbClr val="C2410C"/>
+          </a:solidFill>
+          <a:ln>
+            <a:noFill/>
+          </a:ln>
+          <a:effectLst/>
+        </p:spPr>
+        <p:style>
+          <a:lnRef idx="1">
+            <a:schemeClr val="accent1"/>
+          </a:lnRef>
+          <a:fillRef idx="3">
+            <a:schemeClr val="accent1"/>
+          </a:fillRef>
+          <a:effectRef idx="2">
+            <a:schemeClr val="accent1"/>
+          </a:effectRef>
+          <a:fontRef idx="minor">
+            <a:schemeClr val="lt1"/>
+          </a:fontRef>
+        </p:style>
+        <p:txBody>
+          <a:bodyPr rtlCol="0" anchor="ctr"/>
+          <a:lstStyle/>
+          <a:p>
+            <a:pPr algn="ctr"/>
+          </a:p>
+        </p:txBody>
+      </p:sp>
+      <p:sp>
+        <p:nvSpPr>
+          <p:cNvPr id="13" name="TextBox 12"/>
+          <p:cNvSpPr txBox="1"/>
+          <p:nvPr/>
+        </p:nvSpPr>
+        <p:spPr>
+          <a:xfrm>
+            <a:off x="813816" y="2029968"/>
+            <a:ext cx="10698480" cy="786384"/>
+          </a:xfrm>
+          <a:prstGeom prst="rect">
+            <a:avLst/>
+          </a:prstGeom>
+          <a:noFill/>
+        </p:spPr>
+        <p:txBody>
+          <a:bodyPr wrap="square" anchor="ctr" lIns="25400" rIns="25400" tIns="12700" bIns="12700">
+            <a:spAutoFit/>
+          </a:bodyPr>
+          <a:lstStyle/>
+          <a:p>
+            <a:pPr algn="l">
+              <a:lnSpc>
+                <a:spcPct val="100000"/>
+              </a:lnSpc>
+              <a:spcBef>
+                <a:spcPts val="0"/>
+              </a:spcBef>
+              <a:spcAft>
+                <a:spcPts val="400"/>
+              </a:spcAft>
+            </a:pPr>
+            <a:r>
+              <a:rPr sz="1800" b="1" i="0">
+                <a:solidFill>
+                  <a:srgbClr val="14241C"/>
+                </a:solidFill>
+                <a:latin typeface="Calibri"/>
+              </a:rPr>
+              <a:t>It's just us — family only — and we made it easy for every age to use.</a:t>
+            </a:r>
+          </a:p>
+        </p:txBody>
+      </p:sp>
+      <p:sp>
+        <p:nvSpPr>
+          <p:cNvPr id="14" name="TextBox 13"/>
+          <p:cNvSpPr txBox="1"/>
+          <p:nvPr/>
+        </p:nvSpPr>
+        <p:spPr>
+          <a:xfrm>
+            <a:off x="594360" y="3035808"/>
+            <a:ext cx="11018520" cy="2468880"/>
+          </a:xfrm>
+          <a:prstGeom prst="rect">
+            <a:avLst/>
+          </a:prstGeom>
+          <a:noFill/>
+        </p:spPr>
+        <p:txBody>
+          <a:bodyPr wrap="square" anchor="t" lIns="25400" rIns="25400" tIns="12700" bIns="12700">
+            <a:spAutoFit/>
+          </a:bodyPr>
+          <a:lstStyle/>
+          <a:p>
+            <a:pPr algn="l">
+              <a:lnSpc>
+                <a:spcPct val="100000"/>
+              </a:lnSpc>
+              <a:spcBef>
+                <a:spcPts val="0"/>
+              </a:spcBef>
+              <a:spcAft>
+                <a:spcPts val="1000"/>
+              </a:spcAft>
+            </a:pPr>
+            <a:r>
+              <a:rPr sz="1600" b="1" i="0">
+                <a:solidFill>
+                  <a:srgbClr val="15503A"/>
+                </a:solidFill>
+                <a:latin typeface="Calibri"/>
+              </a:rPr>
+              <a:t>•  </a:t>
+            </a:r>
+            <a:r>
+              <a:rPr sz="1600" b="1" i="0">
+                <a:solidFill>
+                  <a:srgbClr val="14241C"/>
+                </a:solidFill>
+                <a:latin typeface="Calibri"/>
+              </a:rPr>
+              <a:t>Family only</a:t>
+            </a:r>
+            <a:r>
+              <a:rPr sz="1600" b="0" i="0">
+                <a:solidFill>
+                  <a:srgbClr val="14241C"/>
+                </a:solidFill>
+                <a:latin typeface="Calibri"/>
+              </a:rPr>
+              <a:t> — not public; sensitive info hidden until you sign in</a:t>
+            </a:r>
+          </a:p>
+          <a:p>
+            <a:pPr algn="l">
+              <a:lnSpc>
+                <a:spcPct val="100000"/>
+              </a:lnSpc>
+              <a:spcBef>
+                <a:spcPts val="0"/>
+              </a:spcBef>
+              <a:spcAft>
+                <a:spcPts val="1000"/>
+              </a:spcAft>
+            </a:pPr>
+            <a:r>
+              <a:rPr sz="1600" b="1" i="0">
+                <a:solidFill>
+                  <a:srgbClr val="15503A"/>
+                </a:solidFill>
+                <a:latin typeface="Calibri"/>
+              </a:rPr>
+              <a:t>•  </a:t>
+            </a:r>
+            <a:r>
+              <a:rPr sz="1600" b="1" i="0">
+                <a:solidFill>
+                  <a:srgbClr val="14241C"/>
+                </a:solidFill>
+                <a:latin typeface="Calibri"/>
+              </a:rPr>
+              <a:t>Bigger text</a:t>
+            </a:r>
+            <a:r>
+              <a:rPr sz="1600" b="0" i="0">
+                <a:solidFill>
+                  <a:srgbClr val="14241C"/>
+                </a:solidFill>
+                <a:latin typeface="Calibri"/>
+              </a:rPr>
+              <a:t> — Profile → Text size: Normal / Large / Largest</a:t>
+            </a:r>
+          </a:p>
+          <a:p>
+            <a:pPr algn="l">
+              <a:lnSpc>
+                <a:spcPct val="100000"/>
+              </a:lnSpc>
+              <a:spcBef>
+                <a:spcPts val="0"/>
+              </a:spcBef>
+              <a:spcAft>
+                <a:spcPts val="1000"/>
+              </a:spcAft>
+            </a:pPr>
+            <a:r>
+              <a:rPr sz="1600" b="1" i="0">
+                <a:solidFill>
+                  <a:srgbClr val="15503A"/>
+                </a:solidFill>
+                <a:latin typeface="Calibri"/>
+              </a:rPr>
+              <a:t>•  </a:t>
+            </a:r>
+            <a:r>
+              <a:rPr sz="1600" b="1" i="0">
+                <a:solidFill>
+                  <a:srgbClr val="14241C"/>
+                </a:solidFill>
+                <a:latin typeface="Calibri"/>
+              </a:rPr>
+              <a:t>Help page</a:t>
+            </a:r>
+            <a:r>
+              <a:rPr sz="1600" b="0" i="0">
+                <a:solidFill>
+                  <a:srgbClr val="14241C"/>
+                </a:solidFill>
+                <a:latin typeface="Calibri"/>
+              </a:rPr>
+              <a:t> — plain-language how-tos for anyone stuck</a:t>
+            </a:r>
+          </a:p>
+          <a:p>
+            <a:pPr algn="l">
+              <a:lnSpc>
+                <a:spcPct val="100000"/>
+              </a:lnSpc>
+              <a:spcBef>
+                <a:spcPts val="0"/>
+              </a:spcBef>
+              <a:spcAft>
+                <a:spcPts val="1000"/>
+              </a:spcAft>
+            </a:pPr>
+            <a:r>
+              <a:rPr sz="1600" b="1" i="0">
+                <a:solidFill>
+                  <a:srgbClr val="15503A"/>
+                </a:solidFill>
+                <a:latin typeface="Calibri"/>
+              </a:rPr>
+              <a:t>•  </a:t>
+            </a:r>
+            <a:r>
+              <a:rPr sz="1600" b="1" i="0">
+                <a:solidFill>
+                  <a:srgbClr val="14241C"/>
+                </a:solidFill>
+                <a:latin typeface="Calibri"/>
+              </a:rPr>
+              <a:t>A real person</a:t>
+            </a:r>
+            <a:r>
+              <a:rPr sz="1600" b="0" i="0">
+                <a:solidFill>
+                  <a:srgbClr val="14241C"/>
+                </a:solidFill>
+                <a:latin typeface="Calibri"/>
+              </a:rPr>
+              <a:t> — text or call me (Brian) anytime — it's on the Help page</a:t>
+            </a:r>
+          </a:p>
+        </p:txBody>
+      </p:sp>
+      <p:sp>
+        <p:nvSpPr>
+          <p:cNvPr id="15" name="Rounded Rectangle 14"/>
+          <p:cNvSpPr/>
+          <p:nvPr/>
+        </p:nvSpPr>
+        <p:spPr>
+          <a:xfrm>
+            <a:off x="502920" y="5486400"/>
+            <a:ext cx="11201400" cy="566928"/>
+          </a:xfrm>
+          <a:prstGeom prst="roundRect">
+            <a:avLst>
+              <a:gd name="adj" fmla="val 6000"/>
+            </a:avLst>
+          </a:prstGeom>
+          <a:solidFill>
+            <a:srgbClr val="F3EEF0"/>
+          </a:solidFill>
+          <a:ln w="12700">
+            <a:solidFill>
+              <a:srgbClr val="E5E4DA"/>
+            </a:solidFill>
+          </a:ln>
+          <a:effectLst/>
+        </p:spPr>
+        <p:style>
+          <a:lnRef idx="1">
+            <a:schemeClr val="accent1"/>
+          </a:lnRef>
+          <a:fillRef idx="3">
+            <a:schemeClr val="accent1"/>
+          </a:fillRef>
+          <a:effectRef idx="2">
+            <a:schemeClr val="accent1"/>
+          </a:effectRef>
+          <a:fontRef idx="minor">
+            <a:schemeClr val="lt1"/>
+          </a:fontRef>
+        </p:style>
+        <p:txBody>
+          <a:bodyPr rtlCol="0" anchor="ctr"/>
+          <a:lstStyle/>
+          <a:p>
+            <a:pPr algn="ctr"/>
+          </a:p>
+        </p:txBody>
+      </p:sp>
+      <p:sp>
+        <p:nvSpPr>
+          <p:cNvPr id="16" name="TextBox 15"/>
+          <p:cNvSpPr txBox="1"/>
+          <p:nvPr/>
+        </p:nvSpPr>
+        <p:spPr>
+          <a:xfrm>
+            <a:off x="667512" y="5486400"/>
+            <a:ext cx="1828800" cy="566928"/>
+          </a:xfrm>
+          <a:prstGeom prst="rect">
+            <a:avLst/>
+          </a:prstGeom>
+          <a:noFill/>
+        </p:spPr>
+        <p:txBody>
+          <a:bodyPr wrap="square" anchor="ctr" lIns="25400" rIns="25400" tIns="12700" bIns="12700">
+            <a:spAutoFit/>
+          </a:bodyPr>
+          <a:lstStyle/>
+          <a:p>
+            <a:pPr algn="l">
+              <a:lnSpc>
+                <a:spcPct val="100000"/>
+              </a:lnSpc>
+              <a:spcBef>
+                <a:spcPts val="0"/>
+              </a:spcBef>
+              <a:spcAft>
+                <a:spcPts val="400"/>
+              </a:spcAft>
+            </a:pPr>
+            <a:r>
+              <a:rPr sz="1200" b="1" i="0">
+                <a:solidFill>
+                  <a:srgbClr val="8B2E2E"/>
+                </a:solidFill>
+                <a:latin typeface="Calibri"/>
+              </a:rPr>
+              <a:t>💡 GOOD TO KNOW</a:t>
+            </a:r>
+          </a:p>
+        </p:txBody>
+      </p:sp>
+      <p:sp>
+        <p:nvSpPr>
+          <p:cNvPr id="17" name="TextBox 16"/>
+          <p:cNvSpPr txBox="1"/>
+          <p:nvPr/>
+        </p:nvSpPr>
+        <p:spPr>
+          <a:xfrm>
+            <a:off x="2560320" y="5486400"/>
+            <a:ext cx="9006840" cy="566928"/>
+          </a:xfrm>
+          <a:prstGeom prst="rect">
+            <a:avLst/>
+          </a:prstGeom>
+          <a:noFill/>
+        </p:spPr>
+        <p:txBody>
+          <a:bodyPr wrap="square" anchor="ctr" lIns="25400" rIns="25400" tIns="12700" bIns="12700">
+            <a:spAutoFit/>
+          </a:bodyPr>
+          <a:lstStyle/>
+          <a:p>
+            <a:pPr algn="l">
+              <a:lnSpc>
+                <a:spcPct val="100000"/>
+              </a:lnSpc>
+              <a:spcBef>
+                <a:spcPts val="0"/>
+              </a:spcBef>
+              <a:spcAft>
+                <a:spcPts val="400"/>
+              </a:spcAft>
+            </a:pPr>
+            <a:r>
+              <a:rPr sz="1300" b="0" i="0">
+                <a:solidFill>
+                  <a:srgbClr val="14241C"/>
+                </a:solidFill>
+                <a:latin typeface="Calibri"/>
+              </a:rPr>
+              <a:t>“No strangers, no ads, no selling anything. It's our family's app.”</a:t>
+            </a:r>
+          </a:p>
+        </p:txBody>
+      </p:sp>
+      <p:sp>
+        <p:nvSpPr>
+          <p:cNvPr id="18" name="Rounded Rectangle 17"/>
+          <p:cNvSpPr/>
+          <p:nvPr/>
+        </p:nvSpPr>
+        <p:spPr>
+          <a:xfrm>
+            <a:off x="365760" y="6510528"/>
+            <a:ext cx="11521440" cy="63500"/>
+          </a:xfrm>
+          <a:prstGeom prst="roundRect">
+            <a:avLst>
+              <a:gd name="adj" fmla="val 6000"/>
+            </a:avLst>
+          </a:prstGeom>
+          <a:solidFill>
+            <a:srgbClr val="E5E4DA"/>
+          </a:solidFill>
+          <a:ln>
+            <a:noFill/>
+          </a:ln>
+          <a:effectLst/>
+        </p:spPr>
+        <p:style>
+          <a:lnRef idx="1">
+            <a:schemeClr val="accent1"/>
+          </a:lnRef>
+          <a:fillRef idx="3">
+            <a:schemeClr val="accent1"/>
+          </a:fillRef>
+          <a:effectRef idx="2">
+            <a:schemeClr val="accent1"/>
+          </a:effectRef>
+          <a:fontRef idx="minor">
+            <a:schemeClr val="lt1"/>
+          </a:fontRef>
+        </p:style>
+        <p:txBody>
+          <a:bodyPr rtlCol="0" anchor="ctr"/>
+          <a:lstStyle/>
+          <a:p>
+            <a:pPr algn="ctr"/>
+          </a:p>
+        </p:txBody>
+      </p:sp>
+      <p:sp>
+        <p:nvSpPr>
+          <p:cNvPr id="19" name="Rounded Rectangle 18"/>
+          <p:cNvSpPr/>
+          <p:nvPr/>
+        </p:nvSpPr>
+        <p:spPr>
+          <a:xfrm>
+            <a:off x="365760" y="6510528"/>
+            <a:ext cx="10801350" cy="63500"/>
+          </a:xfrm>
+          <a:prstGeom prst="roundRect">
+            <a:avLst>
+              <a:gd name="adj" fmla="val 6000"/>
+            </a:avLst>
+          </a:prstGeom>
+          <a:solidFill>
+            <a:srgbClr val="15503A"/>
+          </a:solidFill>
+          <a:ln>
+            <a:noFill/>
+          </a:ln>
+          <a:effectLst/>
+        </p:spPr>
+        <p:style>
+          <a:lnRef idx="1">
+            <a:schemeClr val="accent1"/>
+          </a:lnRef>
+          <a:fillRef idx="3">
+            <a:schemeClr val="accent1"/>
+          </a:fillRef>
+          <a:effectRef idx="2">
+            <a:schemeClr val="accent1"/>
+          </a:effectRef>
+          <a:fontRef idx="minor">
+            <a:schemeClr val="lt1"/>
+          </a:fontRef>
+        </p:style>
+        <p:txBody>
+          <a:bodyPr rtlCol="0" anchor="ctr"/>
+          <a:lstStyle/>
+          <a:p>
+            <a:pPr algn="ctr"/>
+          </a:p>
+        </p:txBody>
+      </p:sp>
+      <p:sp>
+        <p:nvSpPr>
+          <p:cNvPr id="20" name="TextBox 19"/>
+          <p:cNvSpPr txBox="1"/>
+          <p:nvPr/>
+        </p:nvSpPr>
+        <p:spPr>
+          <a:xfrm>
+            <a:off x="365760" y="6163056"/>
+            <a:ext cx="11430000" cy="292608"/>
+          </a:xfrm>
+          <a:prstGeom prst="rect">
+            <a:avLst/>
+          </a:prstGeom>
+          <a:noFill/>
+        </p:spPr>
+        <p:txBody>
+          <a:bodyPr wrap="square" anchor="t" lIns="25400" rIns="25400" tIns="12700" bIns="12700">
+            <a:spAutoFit/>
+          </a:bodyPr>
+          <a:lstStyle/>
+          <a:p>
+            <a:pPr algn="l">
+              <a:lnSpc>
+                <a:spcPct val="100000"/>
+              </a:lnSpc>
+              <a:spcBef>
+                <a:spcPts val="0"/>
+              </a:spcBef>
+              <a:spcAft>
+                <a:spcPts val="400"/>
+              </a:spcAft>
+            </a:pPr>
+            <a:r>
               <a:rPr sz="1100" b="1" i="0">
                 <a:solidFill>
                   <a:srgbClr val="6B7068"/>
@@ -12893,7 +12586,7 @@
                 </a:solidFill>
                 <a:latin typeface="Calibri"/>
               </a:rPr>
-              <a:t>Quick facts (for Q&amp;A)</a:t>
+              <a:t>What to do right now</a:t>
             </a:r>
           </a:p>
         </p:txBody>
@@ -12975,7 +12668,7 @@
             <a:avLst/>
           </a:prstGeom>
           <a:solidFill>
-            <a:srgbClr val="0C4029"/>
+            <a:srgbClr val="C2410C"/>
           </a:solidFill>
           <a:ln>
             <a:noFill/>
@@ -13006,14 +12699,105 @@
       </p:sp>
       <p:sp>
         <p:nvSpPr>
-          <p:cNvPr id="4" name="TextBox 3"/>
+          <p:cNvPr id="4" name="Rounded Rectangle 3"/>
+          <p:cNvSpPr/>
+          <p:nvPr/>
+        </p:nvSpPr>
+        <p:spPr>
+          <a:xfrm>
+            <a:off x="365760" y="201168"/>
+            <a:ext cx="1371600" cy="676656"/>
+          </a:xfrm>
+          <a:prstGeom prst="roundRect">
+            <a:avLst>
+              <a:gd name="adj" fmla="val 6000"/>
+            </a:avLst>
+          </a:prstGeom>
+          <a:solidFill>
+            <a:srgbClr val="FFFFFF"/>
+          </a:solidFill>
+          <a:ln>
+            <a:noFill/>
+          </a:ln>
+          <a:effectLst/>
+        </p:spPr>
+        <p:style>
+          <a:lnRef idx="1">
+            <a:schemeClr val="accent1"/>
+          </a:lnRef>
+          <a:fillRef idx="3">
+            <a:schemeClr val="accent1"/>
+          </a:fillRef>
+          <a:effectRef idx="2">
+            <a:schemeClr val="accent1"/>
+          </a:effectRef>
+          <a:fontRef idx="minor">
+            <a:schemeClr val="lt1"/>
+          </a:fontRef>
+        </p:style>
+        <p:txBody>
+          <a:bodyPr rtlCol="0" anchor="ctr"/>
+          <a:lstStyle/>
+          <a:p>
+            <a:pPr algn="ctr"/>
+          </a:p>
+        </p:txBody>
+      </p:sp>
+      <p:sp>
+        <p:nvSpPr>
+          <p:cNvPr id="5" name="TextBox 4"/>
           <p:cNvSpPr txBox="1"/>
           <p:nvPr/>
         </p:nvSpPr>
         <p:spPr>
           <a:xfrm>
-            <a:off x="457200" y="146304"/>
-            <a:ext cx="10972800" cy="786384"/>
+            <a:off x="365760" y="219456"/>
+            <a:ext cx="1371600" cy="640080"/>
+          </a:xfrm>
+          <a:prstGeom prst="rect">
+            <a:avLst/>
+          </a:prstGeom>
+          <a:noFill/>
+        </p:spPr>
+        <p:txBody>
+          <a:bodyPr wrap="square" anchor="ctr" lIns="25400" rIns="25400" tIns="12700" bIns="12700">
+            <a:spAutoFit/>
+          </a:bodyPr>
+          <a:lstStyle/>
+          <a:p>
+            <a:pPr algn="ctr">
+              <a:lnSpc>
+                <a:spcPct val="100000"/>
+              </a:lnSpc>
+              <a:spcBef>
+                <a:spcPts val="0"/>
+              </a:spcBef>
+              <a:spcAft>
+                <a:spcPts val="400"/>
+              </a:spcAft>
+            </a:pPr>
+            <a:r>
+              <a:rPr sz="2200" b="1" i="0">
+                <a:solidFill>
+                  <a:srgbClr val="C2410C"/>
+                </a:solidFill>
+                <a:latin typeface="Calibri"/>
+              </a:rPr>
+              <a:t>STEP 16</a:t>
+            </a:r>
+          </a:p>
+        </p:txBody>
+      </p:sp>
+      <p:sp>
+        <p:nvSpPr>
+          <p:cNvPr id="6" name="TextBox 5"/>
+          <p:cNvSpPr txBox="1"/>
+          <p:nvPr/>
+        </p:nvSpPr>
+        <p:spPr>
+          <a:xfrm>
+            <a:off x="1920240" y="146304"/>
+            <a:ext cx="8595360" cy="786384"/>
           </a:xfrm>
           <a:prstGeom prst="rect">
             <a:avLst/>
@@ -13044,69 +12828,66 @@
                 </a:solidFill>
                 <a:latin typeface="Calibri"/>
               </a:rPr>
-              <a:t>Quick facts  ·  for live Q&amp;A</a:t>
-            </a:r>
-          </a:p>
-        </p:txBody>
-      </p:sp>
-      <p:sp>
-        <p:nvSpPr>
-          <p:cNvPr id="5" name="Rounded Rectangle 4"/>
-          <p:cNvSpPr/>
-          <p:nvPr/>
-        </p:nvSpPr>
-        <p:spPr>
-          <a:xfrm>
-            <a:off x="457200" y="1371600"/>
-            <a:ext cx="5486400" cy="1078992"/>
-          </a:xfrm>
-          <a:prstGeom prst="roundRect">
-            <a:avLst>
-              <a:gd name="adj" fmla="val 6000"/>
-            </a:avLst>
-          </a:prstGeom>
-          <a:solidFill>
-            <a:srgbClr val="FFFFFF"/>
-          </a:solidFill>
-          <a:ln w="12700">
-            <a:solidFill>
-              <a:srgbClr val="E5E4DA"/>
-            </a:solidFill>
-          </a:ln>
-          <a:effectLst/>
-        </p:spPr>
-        <p:style>
-          <a:lnRef idx="1">
-            <a:schemeClr val="accent1"/>
-          </a:lnRef>
-          <a:fillRef idx="3">
-            <a:schemeClr val="accent1"/>
-          </a:fillRef>
-          <a:effectRef idx="2">
-            <a:schemeClr val="accent1"/>
-          </a:effectRef>
-          <a:fontRef idx="minor">
-            <a:schemeClr val="lt1"/>
-          </a:fontRef>
-        </p:style>
-        <p:txBody>
-          <a:bodyPr rtlCol="0" anchor="ctr"/>
-          <a:lstStyle/>
-          <a:p>
-            <a:pPr algn="ctr"/>
-          </a:p>
-        </p:txBody>
-      </p:sp>
-      <p:sp>
-        <p:nvSpPr>
-          <p:cNvPr id="6" name="TextBox 5"/>
+              <a:t>BEFORE YOU LEAVE</a:t>
+            </a:r>
+          </a:p>
+        </p:txBody>
+      </p:sp>
+      <p:sp>
+        <p:nvSpPr>
+          <p:cNvPr id="7" name="TextBox 6"/>
           <p:cNvSpPr txBox="1"/>
           <p:nvPr/>
         </p:nvSpPr>
         <p:spPr>
           <a:xfrm>
-            <a:off x="685800" y="1481328"/>
-            <a:ext cx="5029200" cy="365760"/>
+            <a:off x="9509760" y="146304"/>
+            <a:ext cx="2377440" cy="786384"/>
+          </a:xfrm>
+          <a:prstGeom prst="rect">
+            <a:avLst/>
+          </a:prstGeom>
+          <a:noFill/>
+        </p:spPr>
+        <p:txBody>
+          <a:bodyPr wrap="square" anchor="ctr" lIns="25400" rIns="25400" tIns="12700" bIns="12700">
+            <a:spAutoFit/>
+          </a:bodyPr>
+          <a:lstStyle/>
+          <a:p>
+            <a:pPr algn="r">
+              <a:lnSpc>
+                <a:spcPct val="100000"/>
+              </a:lnSpc>
+              <a:spcBef>
+                <a:spcPts val="0"/>
+              </a:spcBef>
+              <a:spcAft>
+                <a:spcPts val="400"/>
+              </a:spcAft>
+            </a:pPr>
+            <a:r>
+              <a:rPr sz="1300" b="0" i="0">
+                <a:solidFill>
+                  <a:srgbClr val="ECF3EF"/>
+                </a:solidFill>
+                <a:latin typeface="Calibri"/>
+              </a:rPr>
+              <a:t>Step 16 of 16</a:t>
+            </a:r>
+          </a:p>
+        </p:txBody>
+      </p:sp>
+      <p:sp>
+        <p:nvSpPr>
+          <p:cNvPr id="8" name="TextBox 7"/>
+          <p:cNvSpPr txBox="1"/>
+          <p:nvPr/>
+        </p:nvSpPr>
+        <p:spPr>
+          <a:xfrm>
+            <a:off x="640080" y="1371600"/>
+            <a:ext cx="10972800" cy="914400"/>
           </a:xfrm>
           <a:prstGeom prst="rect">
             <a:avLst/>
@@ -13131,27 +12912,363 @@
               </a:spcAft>
             </a:pPr>
             <a:r>
+              <a:rPr sz="3200" b="1" i="0">
+                <a:solidFill>
+                  <a:srgbClr val="14241C"/>
+                </a:solidFill>
+                <a:latin typeface="Calibri"/>
+              </a:rPr>
+              <a:t>Three things to do right now</a:t>
+            </a:r>
+          </a:p>
+        </p:txBody>
+      </p:sp>
+      <p:sp>
+        <p:nvSpPr>
+          <p:cNvPr id="9" name="Rounded Rectangle 8"/>
+          <p:cNvSpPr/>
+          <p:nvPr/>
+        </p:nvSpPr>
+        <p:spPr>
+          <a:xfrm>
+            <a:off x="640080" y="2331720"/>
+            <a:ext cx="10908792" cy="3566160"/>
+          </a:xfrm>
+          <a:prstGeom prst="roundRect">
+            <a:avLst>
+              <a:gd name="adj" fmla="val 6000"/>
+            </a:avLst>
+          </a:prstGeom>
+          <a:solidFill>
+            <a:srgbClr val="FFFFFF"/>
+          </a:solidFill>
+          <a:ln w="12700">
+            <a:solidFill>
+              <a:srgbClr val="E5E4DA"/>
+            </a:solidFill>
+          </a:ln>
+          <a:effectLst/>
+        </p:spPr>
+        <p:style>
+          <a:lnRef idx="1">
+            <a:schemeClr val="accent1"/>
+          </a:lnRef>
+          <a:fillRef idx="3">
+            <a:schemeClr val="accent1"/>
+          </a:fillRef>
+          <a:effectRef idx="2">
+            <a:schemeClr val="accent1"/>
+          </a:effectRef>
+          <a:fontRef idx="minor">
+            <a:schemeClr val="lt1"/>
+          </a:fontRef>
+        </p:style>
+        <p:txBody>
+          <a:bodyPr rtlCol="0" anchor="ctr"/>
+          <a:lstStyle/>
+          <a:p>
+            <a:pPr algn="ctr"/>
+          </a:p>
+        </p:txBody>
+      </p:sp>
+      <p:sp>
+        <p:nvSpPr>
+          <p:cNvPr id="10" name="TextBox 9"/>
+          <p:cNvSpPr txBox="1"/>
+          <p:nvPr/>
+        </p:nvSpPr>
+        <p:spPr>
+          <a:xfrm>
+            <a:off x="1005840" y="2606040"/>
+            <a:ext cx="10149840" cy="3108960"/>
+          </a:xfrm>
+          <a:prstGeom prst="rect">
+            <a:avLst/>
+          </a:prstGeom>
+          <a:noFill/>
+        </p:spPr>
+        <p:txBody>
+          <a:bodyPr wrap="square" anchor="t" lIns="25400" rIns="25400" tIns="12700" bIns="12700">
+            <a:spAutoFit/>
+          </a:bodyPr>
+          <a:lstStyle/>
+          <a:p>
+            <a:pPr algn="l">
+              <a:lnSpc>
+                <a:spcPct val="105000"/>
+              </a:lnSpc>
+              <a:spcBef>
+                <a:spcPts val="0"/>
+              </a:spcBef>
+              <a:spcAft>
+                <a:spcPts val="1000"/>
+              </a:spcAft>
+            </a:pPr>
+            <a:r>
+              <a:rPr sz="2000" b="1" i="0">
+                <a:solidFill>
+                  <a:srgbClr val="C2410C"/>
+                </a:solidFill>
+                <a:latin typeface="Calibri"/>
+              </a:rPr>
+              <a:t>1.  </a:t>
+            </a:r>
+            <a:r>
+              <a:rPr sz="2000" b="1" i="0">
+                <a:solidFill>
+                  <a:srgbClr val="14241C"/>
+                </a:solidFill>
+                <a:latin typeface="Calibri"/>
+              </a:rPr>
+              <a:t>Add it to your home screen</a:t>
+            </a:r>
+            <a:r>
+              <a:rPr sz="2000" b="0" i="0">
+                <a:solidFill>
+                  <a:srgbClr val="14241C"/>
+                </a:solidFill>
+                <a:latin typeface="Calibri"/>
+              </a:rPr>
+              <a:t>  — so it's one tap away.</a:t>
+            </a:r>
+          </a:p>
+          <a:p>
+            <a:pPr algn="l">
+              <a:lnSpc>
+                <a:spcPct val="105000"/>
+              </a:lnSpc>
+              <a:spcBef>
+                <a:spcPts val="0"/>
+              </a:spcBef>
+              <a:spcAft>
+                <a:spcPts val="1000"/>
+              </a:spcAft>
+            </a:pPr>
+            <a:r>
+              <a:rPr sz="2000" b="1" i="0">
+                <a:solidFill>
+                  <a:srgbClr val="C2410C"/>
+                </a:solidFill>
+                <a:latin typeface="Calibri"/>
+              </a:rPr>
+              <a:t>2.  </a:t>
+            </a:r>
+            <a:r>
+              <a:rPr sz="2000" b="1" i="0">
+                <a:solidFill>
+                  <a:srgbClr val="14241C"/>
+                </a:solidFill>
+                <a:latin typeface="Calibri"/>
+              </a:rPr>
+              <a:t>Sign in with your email</a:t>
+            </a:r>
+            <a:r>
+              <a:rPr sz="2000" b="0" i="0">
+                <a:solidFill>
+                  <a:srgbClr val="14241C"/>
+                </a:solidFill>
+                <a:latin typeface="Calibri"/>
+              </a:rPr>
+              <a:t>  — name + the 6-digit code, no password.</a:t>
+            </a:r>
+          </a:p>
+          <a:p>
+            <a:pPr algn="l">
+              <a:lnSpc>
+                <a:spcPct val="105000"/>
+              </a:lnSpc>
+              <a:spcBef>
+                <a:spcPts val="0"/>
+              </a:spcBef>
+              <a:spcAft>
+                <a:spcPts val="1000"/>
+              </a:spcAft>
+            </a:pPr>
+            <a:r>
+              <a:rPr sz="2000" b="1" i="0">
+                <a:solidFill>
+                  <a:srgbClr val="C2410C"/>
+                </a:solidFill>
+                <a:latin typeface="Calibri"/>
+              </a:rPr>
+              <a:t>3.  </a:t>
+            </a:r>
+            <a:r>
+              <a:rPr sz="2000" b="1" i="0">
+                <a:solidFill>
+                  <a:srgbClr val="14241C"/>
+                </a:solidFill>
+                <a:latin typeface="Calibri"/>
+              </a:rPr>
+              <a:t>RSVP to Family Fest</a:t>
+            </a:r>
+            <a:r>
+              <a:rPr sz="2000" b="0" i="0">
+                <a:solidFill>
+                  <a:srgbClr val="14241C"/>
+                </a:solidFill>
+                <a:latin typeface="Calibri"/>
+              </a:rPr>
+              <a:t>  — tell us which days, July 27–31.</a:t>
+            </a:r>
+          </a:p>
+          <a:p>
+            <a:pPr algn="l">
+              <a:lnSpc>
+                <a:spcPct val="105000"/>
+              </a:lnSpc>
+              <a:spcBef>
+                <a:spcPts val="0"/>
+              </a:spcBef>
+              <a:spcAft>
+                <a:spcPts val="1000"/>
+              </a:spcAft>
+            </a:pPr>
+            <a:r>
+              <a:rPr sz="1800" b="1" i="0">
+                <a:solidFill>
+                  <a:srgbClr val="15503A"/>
+                </a:solidFill>
+                <a:latin typeface="Calibri"/>
+              </a:rPr>
+              <a:t>“Do those three today and you're all set. Post a photo this week so we know it's working — and I'm right here if anyone gets stuck.”</a:t>
+            </a:r>
+          </a:p>
+          <a:p>
+            <a:pPr algn="l">
+              <a:lnSpc>
+                <a:spcPct val="105000"/>
+              </a:lnSpc>
+              <a:spcBef>
+                <a:spcPts val="0"/>
+              </a:spcBef>
+              <a:spcAft>
+                <a:spcPts val="1000"/>
+              </a:spcAft>
+            </a:pPr>
+            <a:r>
               <a:rPr sz="1600" b="1" i="0">
                 <a:solidFill>
+                  <a:srgbClr val="6B7068"/>
+                </a:solidFill>
+                <a:latin typeface="Calibri"/>
+              </a:rPr>
+              <a:t>Get it at  </a:t>
+            </a:r>
+            <a:r>
+              <a:rPr sz="1600" b="1" i="0">
+                <a:solidFill>
                   <a:srgbClr val="15503A"/>
                 </a:solidFill>
                 <a:latin typeface="Calibri"/>
               </a:rPr>
-              <a:t>Family Fest 2026</a:t>
-            </a:r>
-          </a:p>
-        </p:txBody>
-      </p:sp>
-      <p:sp>
-        <p:nvSpPr>
-          <p:cNvPr id="7" name="TextBox 6"/>
+              <a:t>mlr-app-omega.vercel.app</a:t>
+            </a:r>
+          </a:p>
+        </p:txBody>
+      </p:sp>
+      <p:sp>
+        <p:nvSpPr>
+          <p:cNvPr id="11" name="Rounded Rectangle 10"/>
+          <p:cNvSpPr/>
+          <p:nvPr/>
+        </p:nvSpPr>
+        <p:spPr>
+          <a:xfrm>
+            <a:off x="365760" y="6510528"/>
+            <a:ext cx="11521440" cy="63500"/>
+          </a:xfrm>
+          <a:prstGeom prst="roundRect">
+            <a:avLst>
+              <a:gd name="adj" fmla="val 6000"/>
+            </a:avLst>
+          </a:prstGeom>
+          <a:solidFill>
+            <a:srgbClr val="E5E4DA"/>
+          </a:solidFill>
+          <a:ln>
+            <a:noFill/>
+          </a:ln>
+          <a:effectLst/>
+        </p:spPr>
+        <p:style>
+          <a:lnRef idx="1">
+            <a:schemeClr val="accent1"/>
+          </a:lnRef>
+          <a:fillRef idx="3">
+            <a:schemeClr val="accent1"/>
+          </a:fillRef>
+          <a:effectRef idx="2">
+            <a:schemeClr val="accent1"/>
+          </a:effectRef>
+          <a:fontRef idx="minor">
+            <a:schemeClr val="lt1"/>
+          </a:fontRef>
+        </p:style>
+        <p:txBody>
+          <a:bodyPr rtlCol="0" anchor="ctr"/>
+          <a:lstStyle/>
+          <a:p>
+            <a:pPr algn="ctr"/>
+          </a:p>
+        </p:txBody>
+      </p:sp>
+      <p:sp>
+        <p:nvSpPr>
+          <p:cNvPr id="12" name="Rounded Rectangle 11"/>
+          <p:cNvSpPr/>
+          <p:nvPr/>
+        </p:nvSpPr>
+        <p:spPr>
+          <a:xfrm>
+            <a:off x="365760" y="6510528"/>
+            <a:ext cx="11521440" cy="63500"/>
+          </a:xfrm>
+          <a:prstGeom prst="roundRect">
+            <a:avLst>
+              <a:gd name="adj" fmla="val 6000"/>
+            </a:avLst>
+          </a:prstGeom>
+          <a:solidFill>
+            <a:srgbClr val="C2410C"/>
+          </a:solidFill>
+          <a:ln>
+            <a:noFill/>
+          </a:ln>
+          <a:effectLst/>
+        </p:spPr>
+        <p:style>
+          <a:lnRef idx="1">
+            <a:schemeClr val="accent1"/>
+          </a:lnRef>
+          <a:fillRef idx="3">
+            <a:schemeClr val="accent1"/>
+          </a:fillRef>
+          <a:effectRef idx="2">
+            <a:schemeClr val="accent1"/>
+          </a:effectRef>
+          <a:fontRef idx="minor">
+            <a:schemeClr val="lt1"/>
+          </a:fontRef>
+        </p:style>
+        <p:txBody>
+          <a:bodyPr rtlCol="0" anchor="ctr"/>
+          <a:lstStyle/>
+          <a:p>
+            <a:pPr algn="ctr"/>
+          </a:p>
+        </p:txBody>
+      </p:sp>
+      <p:sp>
+        <p:nvSpPr>
+          <p:cNvPr id="13" name="TextBox 12"/>
           <p:cNvSpPr txBox="1"/>
           <p:nvPr/>
         </p:nvSpPr>
         <p:spPr>
           <a:xfrm>
-            <a:off x="685800" y="1874520"/>
-            <a:ext cx="5029200" cy="548640"/>
+            <a:off x="365760" y="6163056"/>
+            <a:ext cx="11430000" cy="292608"/>
           </a:xfrm>
           <a:prstGeom prst="rect">
             <a:avLst/>
@@ -13176,40 +13293,63 @@
               </a:spcAft>
             </a:pPr>
             <a:r>
-              <a:rPr sz="1300" b="0" i="0">
-                <a:solidFill>
-                  <a:srgbClr val="14241C"/>
-                </a:solidFill>
-                <a:latin typeface="Calibri"/>
-              </a:rPr>
-              <a:t>July 27–31 (Mon–Fri) · “Ye Olde Family Feste” · $100/adult</a:t>
-            </a:r>
-          </a:p>
-        </p:txBody>
-      </p:sp>
-      <p:sp>
-        <p:nvSpPr>
-          <p:cNvPr id="8" name="Rounded Rectangle 7"/>
+              <a:rPr sz="1100" b="1" i="0">
+                <a:solidFill>
+                  <a:srgbClr val="6B7068"/>
+                </a:solidFill>
+                <a:latin typeface="Calibri"/>
+              </a:rPr>
+              <a:t>NEXT  ›  </a:t>
+            </a:r>
+            <a:r>
+              <a:rPr sz="1100" b="0" i="1">
+                <a:solidFill>
+                  <a:srgbClr val="6B7068"/>
+                </a:solidFill>
+                <a:latin typeface="Calibri"/>
+              </a:rPr>
+              <a:t>Quick facts (for Q&amp;A)</a:t>
+            </a:r>
+          </a:p>
+        </p:txBody>
+      </p:sp>
+    </p:spTree>
+  </p:cSld>
+  <p:clrMapOvr>
+    <a:masterClrMapping/>
+  </p:clrMapOvr>
+</p:sld>
+</file>
+
+<file path=ppt/slides/slide19.xml><?xml version="1.0" encoding="utf-8"?>
+<p:sld xmlns:a="http://schemas.openxmlformats.org/drawingml/2006/main" xmlns:p="http://schemas.openxmlformats.org/presentationml/2006/main" xmlns:r="http://schemas.openxmlformats.org/officeDocument/2006/relationships">
+  <p:cSld>
+    <p:spTree>
+      <p:nvGrpSpPr>
+        <p:cNvPr id="1" name=""/>
+        <p:cNvGrpSpPr/>
+        <p:nvPr/>
+      </p:nvGrpSpPr>
+      <p:grpSpPr/>
+      <p:sp>
+        <p:nvSpPr>
+          <p:cNvPr id="2" name="Rectangle 1"/>
           <p:cNvSpPr/>
           <p:nvPr/>
         </p:nvSpPr>
         <p:spPr>
           <a:xfrm>
-            <a:off x="457200" y="2596896"/>
-            <a:ext cx="5486400" cy="1078992"/>
-          </a:xfrm>
-          <a:prstGeom prst="roundRect">
-            <a:avLst>
-              <a:gd name="adj" fmla="val 6000"/>
-            </a:avLst>
+            <a:off x="0" y="0"/>
+            <a:ext cx="12191695" cy="6858000"/>
+          </a:xfrm>
+          <a:prstGeom prst="rect">
+            <a:avLst/>
           </a:prstGeom>
           <a:solidFill>
-            <a:srgbClr val="FFFFFF"/>
+            <a:srgbClr val="F6F6F1"/>
           </a:solidFill>
-          <a:ln w="12700">
-            <a:solidFill>
-              <a:srgbClr val="E5E4DA"/>
-            </a:solidFill>
+          <a:ln>
+            <a:noFill/>
           </a:ln>
           <a:effectLst/>
         </p:spPr>
@@ -13237,14 +13377,58 @@
       </p:sp>
       <p:sp>
         <p:nvSpPr>
-          <p:cNvPr id="9" name="TextBox 8"/>
+          <p:cNvPr id="3" name="Rectangle 2"/>
+          <p:cNvSpPr/>
+          <p:nvPr/>
+        </p:nvSpPr>
+        <p:spPr>
+          <a:xfrm>
+            <a:off x="0" y="0"/>
+            <a:ext cx="12191695" cy="1078992"/>
+          </a:xfrm>
+          <a:prstGeom prst="rect">
+            <a:avLst/>
+          </a:prstGeom>
+          <a:solidFill>
+            <a:srgbClr val="0C4029"/>
+          </a:solidFill>
+          <a:ln>
+            <a:noFill/>
+          </a:ln>
+          <a:effectLst/>
+        </p:spPr>
+        <p:style>
+          <a:lnRef idx="1">
+            <a:schemeClr val="accent1"/>
+          </a:lnRef>
+          <a:fillRef idx="3">
+            <a:schemeClr val="accent1"/>
+          </a:fillRef>
+          <a:effectRef idx="2">
+            <a:schemeClr val="accent1"/>
+          </a:effectRef>
+          <a:fontRef idx="minor">
+            <a:schemeClr val="lt1"/>
+          </a:fontRef>
+        </p:style>
+        <p:txBody>
+          <a:bodyPr rtlCol="0" anchor="ctr"/>
+          <a:lstStyle/>
+          <a:p>
+            <a:pPr algn="ctr"/>
+          </a:p>
+        </p:txBody>
+      </p:sp>
+      <p:sp>
+        <p:nvSpPr>
+          <p:cNvPr id="4" name="TextBox 3"/>
           <p:cNvSpPr txBox="1"/>
           <p:nvPr/>
         </p:nvSpPr>
         <p:spPr>
           <a:xfrm>
-            <a:off x="685800" y="2706624"/>
-            <a:ext cx="5029200" cy="365760"/>
+            <a:off x="457200" y="146304"/>
+            <a:ext cx="10972800" cy="786384"/>
           </a:xfrm>
           <a:prstGeom prst="rect">
             <a:avLst/>
@@ -13252,7 +13436,7 @@
           <a:noFill/>
         </p:spPr>
         <p:txBody>
-          <a:bodyPr wrap="square" anchor="t" lIns="25400" rIns="25400" tIns="12700" bIns="12700">
+          <a:bodyPr wrap="square" anchor="ctr" lIns="25400" rIns="25400" tIns="12700" bIns="12700">
             <a:spAutoFit/>
           </a:bodyPr>
           <a:lstStyle/>
@@ -13269,27 +13453,75 @@
               </a:spcAft>
             </a:pPr>
             <a:r>
-              <a:rPr sz="1600" b="1" i="0">
-                <a:solidFill>
-                  <a:srgbClr val="15503A"/>
-                </a:solidFill>
-                <a:latin typeface="Calibri"/>
-              </a:rPr>
-              <a:t>Where</a:t>
-            </a:r>
-          </a:p>
-        </p:txBody>
-      </p:sp>
-      <p:sp>
-        <p:nvSpPr>
-          <p:cNvPr id="10" name="TextBox 9"/>
+              <a:rPr sz="2700" b="1" i="0">
+                <a:solidFill>
+                  <a:srgbClr val="FFFFFF"/>
+                </a:solidFill>
+                <a:latin typeface="Calibri"/>
+              </a:rPr>
+              <a:t>Quick facts  ·  for live Q&amp;A</a:t>
+            </a:r>
+          </a:p>
+        </p:txBody>
+      </p:sp>
+      <p:sp>
+        <p:nvSpPr>
+          <p:cNvPr id="5" name="Rounded Rectangle 4"/>
+          <p:cNvSpPr/>
+          <p:nvPr/>
+        </p:nvSpPr>
+        <p:spPr>
+          <a:xfrm>
+            <a:off x="457200" y="1371600"/>
+            <a:ext cx="5486400" cy="1078992"/>
+          </a:xfrm>
+          <a:prstGeom prst="roundRect">
+            <a:avLst>
+              <a:gd name="adj" fmla="val 6000"/>
+            </a:avLst>
+          </a:prstGeom>
+          <a:solidFill>
+            <a:srgbClr val="FFFFFF"/>
+          </a:solidFill>
+          <a:ln w="12700">
+            <a:solidFill>
+              <a:srgbClr val="E5E4DA"/>
+            </a:solidFill>
+          </a:ln>
+          <a:effectLst/>
+        </p:spPr>
+        <p:style>
+          <a:lnRef idx="1">
+            <a:schemeClr val="accent1"/>
+          </a:lnRef>
+          <a:fillRef idx="3">
+            <a:schemeClr val="accent1"/>
+          </a:fillRef>
+          <a:effectRef idx="2">
+            <a:schemeClr val="accent1"/>
+          </a:effectRef>
+          <a:fontRef idx="minor">
+            <a:schemeClr val="lt1"/>
+          </a:fontRef>
+        </p:style>
+        <p:txBody>
+          <a:bodyPr rtlCol="0" anchor="ctr"/>
+          <a:lstStyle/>
+          <a:p>
+            <a:pPr algn="ctr"/>
+          </a:p>
+        </p:txBody>
+      </p:sp>
+      <p:sp>
+        <p:nvSpPr>
+          <p:cNvPr id="6" name="TextBox 5"/>
           <p:cNvSpPr txBox="1"/>
           <p:nvPr/>
         </p:nvSpPr>
         <p:spPr>
           <a:xfrm>
-            <a:off x="685800" y="3099816"/>
-            <a:ext cx="5029200" cy="548640"/>
+            <a:off x="685800" y="1481328"/>
+            <a:ext cx="5029200" cy="365760"/>
           </a:xfrm>
           <a:prstGeom prst="rect">
             <a:avLst/>
@@ -13314,75 +13546,27 @@
               </a:spcAft>
             </a:pPr>
             <a:r>
-              <a:rPr sz="1300" b="0" i="0">
-                <a:solidFill>
-                  <a:srgbClr val="14241C"/>
-                </a:solidFill>
-                <a:latin typeface="Calibri"/>
-              </a:rPr>
-              <a:t>Muskellunge Lake Resort, Tomahawk WI · Hwy 8, in the family since 1959</a:t>
-            </a:r>
-          </a:p>
-        </p:txBody>
-      </p:sp>
-      <p:sp>
-        <p:nvSpPr>
-          <p:cNvPr id="11" name="Rounded Rectangle 10"/>
-          <p:cNvSpPr/>
-          <p:nvPr/>
-        </p:nvSpPr>
-        <p:spPr>
-          <a:xfrm>
-            <a:off x="457200" y="3822192"/>
-            <a:ext cx="5486400" cy="1078992"/>
-          </a:xfrm>
-          <a:prstGeom prst="roundRect">
-            <a:avLst>
-              <a:gd name="adj" fmla="val 6000"/>
-            </a:avLst>
-          </a:prstGeom>
-          <a:solidFill>
-            <a:srgbClr val="FFFFFF"/>
-          </a:solidFill>
-          <a:ln w="12700">
-            <a:solidFill>
-              <a:srgbClr val="E5E4DA"/>
-            </a:solidFill>
-          </a:ln>
-          <a:effectLst/>
-        </p:spPr>
-        <p:style>
-          <a:lnRef idx="1">
-            <a:schemeClr val="accent1"/>
-          </a:lnRef>
-          <a:fillRef idx="3">
-            <a:schemeClr val="accent1"/>
-          </a:fillRef>
-          <a:effectRef idx="2">
-            <a:schemeClr val="accent1"/>
-          </a:effectRef>
-          <a:fontRef idx="minor">
-            <a:schemeClr val="lt1"/>
-          </a:fontRef>
-        </p:style>
-        <p:txBody>
-          <a:bodyPr rtlCol="0" anchor="ctr"/>
-          <a:lstStyle/>
-          <a:p>
-            <a:pPr algn="ctr"/>
-          </a:p>
-        </p:txBody>
-      </p:sp>
-      <p:sp>
-        <p:nvSpPr>
-          <p:cNvPr id="12" name="TextBox 11"/>
+              <a:rPr sz="1600" b="1" i="0">
+                <a:solidFill>
+                  <a:srgbClr val="15503A"/>
+                </a:solidFill>
+                <a:latin typeface="Calibri"/>
+              </a:rPr>
+              <a:t>Family Fest 2026</a:t>
+            </a:r>
+          </a:p>
+        </p:txBody>
+      </p:sp>
+      <p:sp>
+        <p:nvSpPr>
+          <p:cNvPr id="7" name="TextBox 6"/>
           <p:cNvSpPr txBox="1"/>
           <p:nvPr/>
         </p:nvSpPr>
         <p:spPr>
           <a:xfrm>
-            <a:off x="685800" y="3931920"/>
-            <a:ext cx="5029200" cy="365760"/>
+            <a:off x="685800" y="1874520"/>
+            <a:ext cx="5029200" cy="548640"/>
           </a:xfrm>
           <a:prstGeom prst="rect">
             <a:avLst/>
@@ -13407,27 +13591,75 @@
               </a:spcAft>
             </a:pPr>
             <a:r>
-              <a:rPr sz="1600" b="1" i="0">
-                <a:solidFill>
-                  <a:srgbClr val="15503A"/>
-                </a:solidFill>
-                <a:latin typeface="Calibri"/>
-              </a:rPr>
-              <a:t>Sign-in</a:t>
-            </a:r>
-          </a:p>
-        </p:txBody>
-      </p:sp>
-      <p:sp>
-        <p:nvSpPr>
-          <p:cNvPr id="13" name="TextBox 12"/>
+              <a:rPr sz="1300" b="0" i="0">
+                <a:solidFill>
+                  <a:srgbClr val="14241C"/>
+                </a:solidFill>
+                <a:latin typeface="Calibri"/>
+              </a:rPr>
+              <a:t>July 27–31 (Mon–Fri) · “Ye Olde Family Feste” · $100/adult</a:t>
+            </a:r>
+          </a:p>
+        </p:txBody>
+      </p:sp>
+      <p:sp>
+        <p:nvSpPr>
+          <p:cNvPr id="8" name="Rounded Rectangle 7"/>
+          <p:cNvSpPr/>
+          <p:nvPr/>
+        </p:nvSpPr>
+        <p:spPr>
+          <a:xfrm>
+            <a:off x="457200" y="2596896"/>
+            <a:ext cx="5486400" cy="1078992"/>
+          </a:xfrm>
+          <a:prstGeom prst="roundRect">
+            <a:avLst>
+              <a:gd name="adj" fmla="val 6000"/>
+            </a:avLst>
+          </a:prstGeom>
+          <a:solidFill>
+            <a:srgbClr val="FFFFFF"/>
+          </a:solidFill>
+          <a:ln w="12700">
+            <a:solidFill>
+              <a:srgbClr val="E5E4DA"/>
+            </a:solidFill>
+          </a:ln>
+          <a:effectLst/>
+        </p:spPr>
+        <p:style>
+          <a:lnRef idx="1">
+            <a:schemeClr val="accent1"/>
+          </a:lnRef>
+          <a:fillRef idx="3">
+            <a:schemeClr val="accent1"/>
+          </a:fillRef>
+          <a:effectRef idx="2">
+            <a:schemeClr val="accent1"/>
+          </a:effectRef>
+          <a:fontRef idx="minor">
+            <a:schemeClr val="lt1"/>
+          </a:fontRef>
+        </p:style>
+        <p:txBody>
+          <a:bodyPr rtlCol="0" anchor="ctr"/>
+          <a:lstStyle/>
+          <a:p>
+            <a:pPr algn="ctr"/>
+          </a:p>
+        </p:txBody>
+      </p:sp>
+      <p:sp>
+        <p:nvSpPr>
+          <p:cNvPr id="9" name="TextBox 8"/>
           <p:cNvSpPr txBox="1"/>
           <p:nvPr/>
         </p:nvSpPr>
         <p:spPr>
           <a:xfrm>
-            <a:off x="685800" y="4325112"/>
-            <a:ext cx="5029200" cy="548640"/>
+            <a:off x="685800" y="2706624"/>
+            <a:ext cx="5029200" cy="365760"/>
           </a:xfrm>
           <a:prstGeom prst="rect">
             <a:avLst/>
@@ -13452,13 +13684,196 @@
               </a:spcAft>
             </a:pPr>
             <a:r>
+              <a:rPr sz="1600" b="1" i="0">
+                <a:solidFill>
+                  <a:srgbClr val="15503A"/>
+                </a:solidFill>
+                <a:latin typeface="Calibri"/>
+              </a:rPr>
+              <a:t>Where</a:t>
+            </a:r>
+          </a:p>
+        </p:txBody>
+      </p:sp>
+      <p:sp>
+        <p:nvSpPr>
+          <p:cNvPr id="10" name="TextBox 9"/>
+          <p:cNvSpPr txBox="1"/>
+          <p:nvPr/>
+        </p:nvSpPr>
+        <p:spPr>
+          <a:xfrm>
+            <a:off x="685800" y="3099816"/>
+            <a:ext cx="5029200" cy="548640"/>
+          </a:xfrm>
+          <a:prstGeom prst="rect">
+            <a:avLst/>
+          </a:prstGeom>
+          <a:noFill/>
+        </p:spPr>
+        <p:txBody>
+          <a:bodyPr wrap="square" anchor="t" lIns="25400" rIns="25400" tIns="12700" bIns="12700">
+            <a:spAutoFit/>
+          </a:bodyPr>
+          <a:lstStyle/>
+          <a:p>
+            <a:pPr algn="l">
+              <a:lnSpc>
+                <a:spcPct val="100000"/>
+              </a:lnSpc>
+              <a:spcBef>
+                <a:spcPts val="0"/>
+              </a:spcBef>
+              <a:spcAft>
+                <a:spcPts val="400"/>
+              </a:spcAft>
+            </a:pPr>
+            <a:r>
               <a:rPr sz="1300" b="0" i="0">
                 <a:solidFill>
                   <a:srgbClr val="14241C"/>
                 </a:solidFill>
                 <a:latin typeface="Calibri"/>
               </a:rPr>
-              <a:t>Email a 6-digit code — no password. Browsing needs no account.</a:t>
+              <a:t>Muskellunge Lake Resort, Tomahawk WI · Hwy 8, in the family since 1959</a:t>
+            </a:r>
+          </a:p>
+        </p:txBody>
+      </p:sp>
+      <p:sp>
+        <p:nvSpPr>
+          <p:cNvPr id="11" name="Rounded Rectangle 10"/>
+          <p:cNvSpPr/>
+          <p:nvPr/>
+        </p:nvSpPr>
+        <p:spPr>
+          <a:xfrm>
+            <a:off x="457200" y="3822192"/>
+            <a:ext cx="5486400" cy="1078992"/>
+          </a:xfrm>
+          <a:prstGeom prst="roundRect">
+            <a:avLst>
+              <a:gd name="adj" fmla="val 6000"/>
+            </a:avLst>
+          </a:prstGeom>
+          <a:solidFill>
+            <a:srgbClr val="FFFFFF"/>
+          </a:solidFill>
+          <a:ln w="12700">
+            <a:solidFill>
+              <a:srgbClr val="E5E4DA"/>
+            </a:solidFill>
+          </a:ln>
+          <a:effectLst/>
+        </p:spPr>
+        <p:style>
+          <a:lnRef idx="1">
+            <a:schemeClr val="accent1"/>
+          </a:lnRef>
+          <a:fillRef idx="3">
+            <a:schemeClr val="accent1"/>
+          </a:fillRef>
+          <a:effectRef idx="2">
+            <a:schemeClr val="accent1"/>
+          </a:effectRef>
+          <a:fontRef idx="minor">
+            <a:schemeClr val="lt1"/>
+          </a:fontRef>
+        </p:style>
+        <p:txBody>
+          <a:bodyPr rtlCol="0" anchor="ctr"/>
+          <a:lstStyle/>
+          <a:p>
+            <a:pPr algn="ctr"/>
+          </a:p>
+        </p:txBody>
+      </p:sp>
+      <p:sp>
+        <p:nvSpPr>
+          <p:cNvPr id="12" name="TextBox 11"/>
+          <p:cNvSpPr txBox="1"/>
+          <p:nvPr/>
+        </p:nvSpPr>
+        <p:spPr>
+          <a:xfrm>
+            <a:off x="685800" y="3931920"/>
+            <a:ext cx="5029200" cy="365760"/>
+          </a:xfrm>
+          <a:prstGeom prst="rect">
+            <a:avLst/>
+          </a:prstGeom>
+          <a:noFill/>
+        </p:spPr>
+        <p:txBody>
+          <a:bodyPr wrap="square" anchor="t" lIns="25400" rIns="25400" tIns="12700" bIns="12700">
+            <a:spAutoFit/>
+          </a:bodyPr>
+          <a:lstStyle/>
+          <a:p>
+            <a:pPr algn="l">
+              <a:lnSpc>
+                <a:spcPct val="100000"/>
+              </a:lnSpc>
+              <a:spcBef>
+                <a:spcPts val="0"/>
+              </a:spcBef>
+              <a:spcAft>
+                <a:spcPts val="400"/>
+              </a:spcAft>
+            </a:pPr>
+            <a:r>
+              <a:rPr sz="1600" b="1" i="0">
+                <a:solidFill>
+                  <a:srgbClr val="15503A"/>
+                </a:solidFill>
+                <a:latin typeface="Calibri"/>
+              </a:rPr>
+              <a:t>Get it / sign in</a:t>
+            </a:r>
+          </a:p>
+        </p:txBody>
+      </p:sp>
+      <p:sp>
+        <p:nvSpPr>
+          <p:cNvPr id="13" name="TextBox 12"/>
+          <p:cNvSpPr txBox="1"/>
+          <p:nvPr/>
+        </p:nvSpPr>
+        <p:spPr>
+          <a:xfrm>
+            <a:off x="685800" y="4325112"/>
+            <a:ext cx="5029200" cy="548640"/>
+          </a:xfrm>
+          <a:prstGeom prst="rect">
+            <a:avLst/>
+          </a:prstGeom>
+          <a:noFill/>
+        </p:spPr>
+        <p:txBody>
+          <a:bodyPr wrap="square" anchor="t" lIns="25400" rIns="25400" tIns="12700" bIns="12700">
+            <a:spAutoFit/>
+          </a:bodyPr>
+          <a:lstStyle/>
+          <a:p>
+            <a:pPr algn="l">
+              <a:lnSpc>
+                <a:spcPct val="100000"/>
+              </a:lnSpc>
+              <a:spcBef>
+                <a:spcPts val="0"/>
+              </a:spcBef>
+              <a:spcAft>
+                <a:spcPts val="400"/>
+              </a:spcAft>
+            </a:pPr>
+            <a:r>
+              <a:rPr sz="1300" b="0" i="0">
+                <a:solidFill>
+                  <a:srgbClr val="14241C"/>
+                </a:solidFill>
+                <a:latin typeface="Calibri"/>
+              </a:rPr>
+              <a:t>mlr-app-omega.vercel.app · email a 6-digit code, no password · browsing needs no account</a:t>
             </a:r>
           </a:p>
         </p:txBody>

--- a/presentation/MLR-App-Presentation.pptx
+++ b/presentation/MLR-App-Presentation.pptx
@@ -25,7 +25,7 @@
     <p:sldId id="273" r:id="rId25"/>
     <p:sldId id="274" r:id="rId26"/>
   </p:sldIdLst>
-  <p:sldSz cx="12191695" cy="6858000" type="screen4x3"/>
+  <p:sldSz cx="6858000" cy="12191695" type="screen4x3"/>
   <p:notesSz cx="6858000" cy="9144000"/>
   <p:defaultTextStyle>
     <a:defPPr>
@@ -1151,76 +1151,6 @@
           <a:p>
             <a:r>
               <a:t>End on action, not features. Get them to do the three things in the room if you can. Then take questions — the appendix has your backup facts.</a:t>
-            </a:r>
-          </a:p>
-        </p:txBody>
-      </p:sp>
-      <p:sp>
-        <p:nvSpPr>
-          <p:cNvPr id="4" name="Slide Number Placeholder 3"/>
-          <p:cNvSpPr>
-            <a:spLocks noGrp="1"/>
-          </p:cNvSpPr>
-          <p:nvPr>
-            <p:ph type="sldNum" idx="5" sz="quarter"/>
-          </p:nvPr>
-        </p:nvSpPr>
-        <p:spPr/>
-      </p:sp>
-    </p:spTree>
-  </p:cSld>
-  <p:clrMapOvr>
-    <a:masterClrMapping/>
-  </p:clrMapOvr>
-</p:notes>
-</file>
-
-<file path=ppt/notesSlides/notesSlide19.xml><?xml version="1.0" encoding="utf-8"?>
-<p:notes xmlns:a="http://schemas.openxmlformats.org/drawingml/2006/main" xmlns:p="http://schemas.openxmlformats.org/presentationml/2006/main" xmlns:r="http://schemas.openxmlformats.org/officeDocument/2006/relationships">
-  <p:cSld>
-    <p:spTree>
-      <p:nvGrpSpPr>
-        <p:cNvPr id="1" name=""/>
-        <p:cNvGrpSpPr/>
-        <p:nvPr/>
-      </p:nvGrpSpPr>
-      <p:grpSpPr>
-        <a:xfrm>
-          <a:off x="0" y="0"/>
-          <a:ext cx="0" cy="0"/>
-          <a:chOff x="0" y="0"/>
-          <a:chExt cx="0" cy="0"/>
-        </a:xfrm>
-      </p:grpSpPr>
-      <p:sp>
-        <p:nvSpPr>
-          <p:cNvPr id="2" name="Slide Image Placeholder 1"/>
-          <p:cNvSpPr>
-            <a:spLocks noGrp="1"/>
-          </p:cNvSpPr>
-          <p:nvPr>
-            <p:ph type="sldImg" idx="2"/>
-          </p:nvPr>
-        </p:nvSpPr>
-        <p:spPr/>
-      </p:sp>
-      <p:sp>
-        <p:nvSpPr>
-          <p:cNvPr id="3" name="Notes Placeholder 2"/>
-          <p:cNvSpPr>
-            <a:spLocks noGrp="1"/>
-          </p:cNvSpPr>
-          <p:nvPr>
-            <p:ph type="body" idx="3" sz="quarter"/>
-          </p:nvPr>
-        </p:nvSpPr>
-        <p:spPr/>
-        <p:txBody>
-          <a:bodyPr/>
-          <a:lstStyle/>
-          <a:p>
-            <a:r>
-              <a:t>Backup facts for questions. You don't present this — it's your cheat sheet for whatever they throw at you.</a:t>
             </a:r>
           </a:p>
         </p:txBody>
@@ -4795,7 +4725,7 @@
         <p:spPr>
           <a:xfrm>
             <a:off x="0" y="0"/>
-            <a:ext cx="12191695" cy="6858000"/>
+            <a:ext cx="6858000" cy="12191695"/>
           </a:xfrm>
           <a:prstGeom prst="rect">
             <a:avLst/>
@@ -4846,8 +4776,8 @@
         </p:blipFill>
         <p:spPr>
           <a:xfrm>
-            <a:off x="4678527" y="822960"/>
-            <a:ext cx="2834640" cy="1895401"/>
+            <a:off x="1600200" y="2103120"/>
+            <a:ext cx="3657600" cy="2445679"/>
           </a:xfrm>
           <a:prstGeom prst="rect">
             <a:avLst/>
@@ -4862,8 +4792,8 @@
         </p:nvSpPr>
         <p:spPr>
           <a:xfrm>
-            <a:off x="914400" y="3886200"/>
-            <a:ext cx="10360152" cy="914400"/>
+            <a:off x="457200" y="6766560"/>
+            <a:ext cx="5943600" cy="1645920"/>
           </a:xfrm>
           <a:prstGeom prst="rect">
             <a:avLst/>
@@ -4888,7 +4818,7 @@
               </a:spcAft>
             </a:pPr>
             <a:r>
-              <a:rPr sz="4000" b="1" i="0">
+              <a:rPr sz="3800" b="1" i="0">
                 <a:solidFill>
                   <a:srgbClr val="FFFFFF"/>
                 </a:solidFill>
@@ -4907,8 +4837,8 @@
         </p:nvSpPr>
         <p:spPr>
           <a:xfrm>
-            <a:off x="914400" y="4709160"/>
-            <a:ext cx="10360152" cy="548640"/>
+            <a:off x="548640" y="8686800"/>
+            <a:ext cx="5760720" cy="914400"/>
           </a:xfrm>
           <a:prstGeom prst="rect">
             <a:avLst/>
@@ -4933,7 +4863,7 @@
               </a:spcAft>
             </a:pPr>
             <a:r>
-              <a:rPr sz="1800" b="0" i="0">
+              <a:rPr sz="1700" b="0" i="0">
                 <a:solidFill>
                   <a:srgbClr val="E9E2C9"/>
                 </a:solidFill>
@@ -4952,12 +4882,12 @@
         </p:nvSpPr>
         <p:spPr>
           <a:xfrm>
-            <a:off x="3169767" y="5715000"/>
-            <a:ext cx="5852160" cy="566928"/>
+            <a:off x="868680" y="10058400"/>
+            <a:ext cx="5120640" cy="603504"/>
           </a:xfrm>
           <a:prstGeom prst="roundRect">
             <a:avLst>
-              <a:gd name="adj" fmla="val 6000"/>
+              <a:gd name="adj" fmla="val 8000"/>
             </a:avLst>
           </a:prstGeom>
           <a:solidFill>
@@ -4998,8 +4928,8 @@
         </p:nvSpPr>
         <p:spPr>
           <a:xfrm>
-            <a:off x="3169767" y="5733288"/>
-            <a:ext cx="5852160" cy="530352"/>
+            <a:off x="868680" y="10076688"/>
+            <a:ext cx="5120640" cy="566928"/>
           </a:xfrm>
           <a:prstGeom prst="rect">
             <a:avLst/>
@@ -5062,7 +4992,7 @@
         <p:spPr>
           <a:xfrm>
             <a:off x="0" y="0"/>
-            <a:ext cx="12191695" cy="6858000"/>
+            <a:ext cx="6858000" cy="12191695"/>
           </a:xfrm>
           <a:prstGeom prst="rect">
             <a:avLst/>
@@ -5106,7 +5036,7 @@
         <p:spPr>
           <a:xfrm>
             <a:off x="0" y="0"/>
-            <a:ext cx="12191695" cy="1078992"/>
+            <a:ext cx="6858000" cy="1783080"/>
           </a:xfrm>
           <a:prstGeom prst="rect">
             <a:avLst/>
@@ -5149,12 +5079,12 @@
         </p:nvSpPr>
         <p:spPr>
           <a:xfrm>
-            <a:off x="365760" y="201168"/>
-            <a:ext cx="1371600" cy="676656"/>
+            <a:off x="365760" y="292608"/>
+            <a:ext cx="1417320" cy="713232"/>
           </a:xfrm>
           <a:prstGeom prst="roundRect">
             <a:avLst>
-              <a:gd name="adj" fmla="val 6000"/>
+              <a:gd name="adj" fmla="val 8000"/>
             </a:avLst>
           </a:prstGeom>
           <a:solidFill>
@@ -5195,8 +5125,8 @@
         </p:nvSpPr>
         <p:spPr>
           <a:xfrm>
-            <a:off x="365760" y="219456"/>
-            <a:ext cx="1371600" cy="640080"/>
+            <a:off x="365760" y="310896"/>
+            <a:ext cx="1417320" cy="676656"/>
           </a:xfrm>
           <a:prstGeom prst="rect">
             <a:avLst/>
@@ -5240,8 +5170,53 @@
         </p:nvSpPr>
         <p:spPr>
           <a:xfrm>
-            <a:off x="1920240" y="146304"/>
-            <a:ext cx="8595360" cy="786384"/>
+            <a:off x="1920240" y="292608"/>
+            <a:ext cx="4572000" cy="713232"/>
+          </a:xfrm>
+          <a:prstGeom prst="rect">
+            <a:avLst/>
+          </a:prstGeom>
+          <a:noFill/>
+        </p:spPr>
+        <p:txBody>
+          <a:bodyPr wrap="square" anchor="ctr" lIns="25400" rIns="25400" tIns="12700" bIns="12700">
+            <a:spAutoFit/>
+          </a:bodyPr>
+          <a:lstStyle/>
+          <a:p>
+            <a:pPr algn="r">
+              <a:lnSpc>
+                <a:spcPct val="100000"/>
+              </a:lnSpc>
+              <a:spcBef>
+                <a:spcPts val="0"/>
+              </a:spcBef>
+              <a:spcAft>
+                <a:spcPts val="400"/>
+              </a:spcAft>
+            </a:pPr>
+            <a:r>
+              <a:rPr sz="1400" b="0" i="0">
+                <a:solidFill>
+                  <a:srgbClr val="ECF3EF"/>
+                </a:solidFill>
+                <a:latin typeface="Calibri"/>
+              </a:rPr>
+              <a:t>Step 9 of 16</a:t>
+            </a:r>
+          </a:p>
+        </p:txBody>
+      </p:sp>
+      <p:sp>
+        <p:nvSpPr>
+          <p:cNvPr id="7" name="TextBox 6"/>
+          <p:cNvSpPr txBox="1"/>
+          <p:nvPr/>
+        </p:nvSpPr>
+        <p:spPr>
+          <a:xfrm>
+            <a:off x="411480" y="1024128"/>
+            <a:ext cx="6035040" cy="713232"/>
           </a:xfrm>
           <a:prstGeom prst="rect">
             <a:avLst/>
@@ -5266,58 +5241,13 @@
               </a:spcAft>
             </a:pPr>
             <a:r>
-              <a:rPr sz="2700" b="1" i="0">
+              <a:rPr sz="2800" b="1" i="0">
                 <a:solidFill>
                   <a:srgbClr val="FFFFFF"/>
                 </a:solidFill>
                 <a:latin typeface="Calibri"/>
               </a:rPr>
               <a:t>People — find &amp; reach anyone</a:t>
-            </a:r>
-          </a:p>
-        </p:txBody>
-      </p:sp>
-      <p:sp>
-        <p:nvSpPr>
-          <p:cNvPr id="7" name="TextBox 6"/>
-          <p:cNvSpPr txBox="1"/>
-          <p:nvPr/>
-        </p:nvSpPr>
-        <p:spPr>
-          <a:xfrm>
-            <a:off x="9509760" y="146304"/>
-            <a:ext cx="2377440" cy="786384"/>
-          </a:xfrm>
-          <a:prstGeom prst="rect">
-            <a:avLst/>
-          </a:prstGeom>
-          <a:noFill/>
-        </p:spPr>
-        <p:txBody>
-          <a:bodyPr wrap="square" anchor="ctr" lIns="25400" rIns="25400" tIns="12700" bIns="12700">
-            <a:spAutoFit/>
-          </a:bodyPr>
-          <a:lstStyle/>
-          <a:p>
-            <a:pPr algn="r">
-              <a:lnSpc>
-                <a:spcPct val="100000"/>
-              </a:lnSpc>
-              <a:spcBef>
-                <a:spcPts val="0"/>
-              </a:spcBef>
-              <a:spcAft>
-                <a:spcPts val="400"/>
-              </a:spcAft>
-            </a:pPr>
-            <a:r>
-              <a:rPr sz="1300" b="0" i="0">
-                <a:solidFill>
-                  <a:srgbClr val="ECF3EF"/>
-                </a:solidFill>
-                <a:latin typeface="Calibri"/>
-              </a:rPr>
-              <a:t>Step 9 of 16</a:t>
             </a:r>
           </a:p>
         </p:txBody>
@@ -5330,12 +5260,12 @@
         </p:nvSpPr>
         <p:spPr>
           <a:xfrm>
-            <a:off x="502920" y="1298448"/>
-            <a:ext cx="11201400" cy="603504"/>
+            <a:off x="411480" y="1965960"/>
+            <a:ext cx="6035040" cy="960120"/>
           </a:xfrm>
           <a:prstGeom prst="roundRect">
             <a:avLst>
-              <a:gd name="adj" fmla="val 6000"/>
+              <a:gd name="adj" fmla="val 8000"/>
             </a:avLst>
           </a:prstGeom>
           <a:solidFill>
@@ -5378,8 +5308,8 @@
         </p:nvSpPr>
         <p:spPr>
           <a:xfrm>
-            <a:off x="667512" y="1298448"/>
-            <a:ext cx="1463040" cy="603504"/>
+            <a:off x="612648" y="2084831"/>
+            <a:ext cx="2743200" cy="310896"/>
           </a:xfrm>
           <a:prstGeom prst="rect">
             <a:avLst/>
@@ -5387,7 +5317,7 @@
           <a:noFill/>
         </p:spPr>
         <p:txBody>
-          <a:bodyPr wrap="square" anchor="ctr" lIns="25400" rIns="25400" tIns="12700" bIns="12700">
+          <a:bodyPr wrap="square" anchor="t" lIns="25400" rIns="25400" tIns="12700" bIns="12700">
             <a:spAutoFit/>
           </a:bodyPr>
           <a:lstStyle/>
@@ -5404,7 +5334,7 @@
               </a:spcAft>
             </a:pPr>
             <a:r>
-              <a:rPr sz="1300" b="1" i="0">
+              <a:rPr sz="1500" b="1" i="0">
                 <a:solidFill>
                   <a:srgbClr val="15503A"/>
                 </a:solidFill>
@@ -5423,8 +5353,8 @@
         </p:nvSpPr>
         <p:spPr>
           <a:xfrm>
-            <a:off x="2194560" y="1298448"/>
-            <a:ext cx="9372600" cy="603504"/>
+            <a:off x="612648" y="2423160"/>
+            <a:ext cx="5632703" cy="457200"/>
           </a:xfrm>
           <a:prstGeom prst="rect">
             <a:avLst/>
@@ -5432,7 +5362,7 @@
           <a:noFill/>
         </p:spPr>
         <p:txBody>
-          <a:bodyPr wrap="square" anchor="ctr" lIns="25400" rIns="25400" tIns="12700" bIns="12700">
+          <a:bodyPr wrap="square" anchor="t" lIns="25400" rIns="25400" tIns="12700" bIns="12700">
             <a:spAutoFit/>
           </a:bodyPr>
           <a:lstStyle/>
@@ -5449,7 +5379,7 @@
               </a:spcAft>
             </a:pPr>
             <a:r>
-              <a:rPr sz="1500" b="1" i="0">
+              <a:rPr sz="1800" b="1" i="0">
                 <a:solidFill>
                   <a:srgbClr val="14241C"/>
                 </a:solidFill>
@@ -5468,12 +5398,12 @@
         </p:nvSpPr>
         <p:spPr>
           <a:xfrm>
-            <a:off x="502920" y="2029968"/>
-            <a:ext cx="11201400" cy="786384"/>
+            <a:off x="411480" y="3108960"/>
+            <a:ext cx="6035040" cy="1874519"/>
           </a:xfrm>
           <a:prstGeom prst="roundRect">
             <a:avLst>
-              <a:gd name="adj" fmla="val 6000"/>
+              <a:gd name="adj" fmla="val 8000"/>
             </a:avLst>
           </a:prstGeom>
           <a:solidFill>
@@ -5516,8 +5446,8 @@
         </p:nvSpPr>
         <p:spPr>
           <a:xfrm>
-            <a:off x="502920" y="2029968"/>
-            <a:ext cx="91440" cy="786384"/>
+            <a:off x="411480" y="3108960"/>
+            <a:ext cx="109728" cy="1874519"/>
           </a:xfrm>
           <a:prstGeom prst="rect">
             <a:avLst/>
@@ -5560,8 +5490,8 @@
         </p:nvSpPr>
         <p:spPr>
           <a:xfrm>
-            <a:off x="813816" y="2029968"/>
-            <a:ext cx="10698480" cy="786384"/>
+            <a:off x="731520" y="3108960"/>
+            <a:ext cx="5532120" cy="1874519"/>
           </a:xfrm>
           <a:prstGeom prst="rect">
             <a:avLst/>
@@ -5586,7 +5516,7 @@
               </a:spcAft>
             </a:pPr>
             <a:r>
-              <a:rPr sz="1800" b="1" i="0">
+              <a:rPr sz="2100" b="1" i="0">
                 <a:solidFill>
                   <a:srgbClr val="14241C"/>
                 </a:solidFill>
@@ -5605,8 +5535,8 @@
         </p:nvSpPr>
         <p:spPr>
           <a:xfrm>
-            <a:off x="594360" y="3035808"/>
-            <a:ext cx="11018520" cy="2468880"/>
+            <a:off x="502920" y="5212079"/>
+            <a:ext cx="5852159" cy="4480560"/>
           </a:xfrm>
           <a:prstGeom prst="rect">
             <a:avLst/>
@@ -5627,11 +5557,11 @@
                 <a:spcPts val="0"/>
               </a:spcBef>
               <a:spcAft>
-                <a:spcPts val="1000"/>
+                <a:spcPts val="1300"/>
               </a:spcAft>
             </a:pPr>
             <a:r>
-              <a:rPr sz="1600" b="1" i="0">
+              <a:rPr sz="1900" b="1" i="0">
                 <a:solidFill>
                   <a:srgbClr val="15503A"/>
                 </a:solidFill>
@@ -5640,7 +5570,7 @@
               <a:t>•  </a:t>
             </a:r>
             <a:r>
-              <a:rPr sz="1600" b="1" i="0">
+              <a:rPr sz="1900" b="1" i="0">
                 <a:solidFill>
                   <a:srgbClr val="14241C"/>
                 </a:solidFill>
@@ -5649,7 +5579,7 @@
               <a:t>Searchable list</a:t>
             </a:r>
             <a:r>
-              <a:rPr sz="1600" b="0" i="0">
+              <a:rPr sz="1900" b="0" i="0">
                 <a:solidFill>
                   <a:srgbClr val="14241C"/>
                 </a:solidFill>
@@ -5667,11 +5597,11 @@
                 <a:spcPts val="0"/>
               </a:spcBef>
               <a:spcAft>
-                <a:spcPts val="1000"/>
+                <a:spcPts val="1300"/>
               </a:spcAft>
             </a:pPr>
             <a:r>
-              <a:rPr sz="1600" b="1" i="0">
+              <a:rPr sz="1900" b="1" i="0">
                 <a:solidFill>
                   <a:srgbClr val="15503A"/>
                 </a:solidFill>
@@ -5680,7 +5610,7 @@
               <a:t>•  </a:t>
             </a:r>
             <a:r>
-              <a:rPr sz="1600" b="1" i="0">
+              <a:rPr sz="1900" b="1" i="0">
                 <a:solidFill>
                   <a:srgbClr val="14241C"/>
                 </a:solidFill>
@@ -5689,7 +5619,7 @@
               <a:t>Quick buttons</a:t>
             </a:r>
             <a:r>
-              <a:rPr sz="1600" b="0" i="0">
+              <a:rPr sz="1900" b="0" i="0">
                 <a:solidFill>
                   <a:srgbClr val="14241C"/>
                 </a:solidFill>
@@ -5707,11 +5637,11 @@
                 <a:spcPts val="0"/>
               </a:spcBef>
               <a:spcAft>
-                <a:spcPts val="1000"/>
+                <a:spcPts val="1300"/>
               </a:spcAft>
             </a:pPr>
             <a:r>
-              <a:rPr sz="1600" b="1" i="0">
+              <a:rPr sz="1900" b="1" i="0">
                 <a:solidFill>
                   <a:srgbClr val="15503A"/>
                 </a:solidFill>
@@ -5720,7 +5650,7 @@
               <a:t>•  </a:t>
             </a:r>
             <a:r>
-              <a:rPr sz="1600" b="1" i="0">
+              <a:rPr sz="1900" b="1" i="0">
                 <a:solidFill>
                   <a:srgbClr val="14241C"/>
                 </a:solidFill>
@@ -5729,7 +5659,7 @@
               <a:t>Tap through</a:t>
             </a:r>
             <a:r>
-              <a:rPr sz="1600" b="0" i="0">
+              <a:rPr sz="1900" b="0" i="0">
                 <a:solidFill>
                   <a:srgbClr val="14241C"/>
                 </a:solidFill>
@@ -5747,11 +5677,11 @@
                 <a:spcPts val="0"/>
               </a:spcBef>
               <a:spcAft>
-                <a:spcPts val="1000"/>
+                <a:spcPts val="1300"/>
               </a:spcAft>
             </a:pPr>
             <a:r>
-              <a:rPr sz="1600" b="1" i="0">
+              <a:rPr sz="1900" b="1" i="0">
                 <a:solidFill>
                   <a:srgbClr val="15503A"/>
                 </a:solidFill>
@@ -5760,7 +5690,7 @@
               <a:t>•  </a:t>
             </a:r>
             <a:r>
-              <a:rPr sz="1600" b="1" i="0">
+              <a:rPr sz="1900" b="1" i="0">
                 <a:solidFill>
                   <a:srgbClr val="14241C"/>
                 </a:solidFill>
@@ -5769,7 +5699,7 @@
               <a:t>Email a group</a:t>
             </a:r>
             <a:r>
-              <a:rPr sz="1600" b="0" i="0">
+              <a:rPr sz="1900" b="0" i="0">
                 <a:solidFill>
                   <a:srgbClr val="14241C"/>
                 </a:solidFill>
@@ -5788,12 +5718,12 @@
         </p:nvSpPr>
         <p:spPr>
           <a:xfrm>
-            <a:off x="502920" y="5486400"/>
-            <a:ext cx="11201400" cy="566928"/>
+            <a:off x="411480" y="9784080"/>
+            <a:ext cx="6035040" cy="1143000"/>
           </a:xfrm>
           <a:prstGeom prst="roundRect">
             <a:avLst>
-              <a:gd name="adj" fmla="val 6000"/>
+              <a:gd name="adj" fmla="val 8000"/>
             </a:avLst>
           </a:prstGeom>
           <a:solidFill>
@@ -5836,8 +5766,8 @@
         </p:nvSpPr>
         <p:spPr>
           <a:xfrm>
-            <a:off x="667512" y="5486400"/>
-            <a:ext cx="1828800" cy="566928"/>
+            <a:off x="612648" y="9902952"/>
+            <a:ext cx="3657600" cy="310896"/>
           </a:xfrm>
           <a:prstGeom prst="rect">
             <a:avLst/>
@@ -5845,7 +5775,7 @@
           <a:noFill/>
         </p:spPr>
         <p:txBody>
-          <a:bodyPr wrap="square" anchor="ctr" lIns="25400" rIns="25400" tIns="12700" bIns="12700">
+          <a:bodyPr wrap="square" anchor="t" lIns="25400" rIns="25400" tIns="12700" bIns="12700">
             <a:spAutoFit/>
           </a:bodyPr>
           <a:lstStyle/>
@@ -5862,7 +5792,7 @@
               </a:spcAft>
             </a:pPr>
             <a:r>
-              <a:rPr sz="1200" b="1" i="0">
+              <a:rPr sz="1400" b="1" i="0">
                 <a:solidFill>
                   <a:srgbClr val="8B2E2E"/>
                 </a:solidFill>
@@ -5881,8 +5811,8 @@
         </p:nvSpPr>
         <p:spPr>
           <a:xfrm>
-            <a:off x="2560320" y="5486400"/>
-            <a:ext cx="9006840" cy="566928"/>
+            <a:off x="612648" y="10241280"/>
+            <a:ext cx="5632703" cy="640080"/>
           </a:xfrm>
           <a:prstGeom prst="rect">
             <a:avLst/>
@@ -5890,7 +5820,7 @@
           <a:noFill/>
         </p:spPr>
         <p:txBody>
-          <a:bodyPr wrap="square" anchor="ctr" lIns="25400" rIns="25400" tIns="12700" bIns="12700">
+          <a:bodyPr wrap="square" anchor="t" lIns="25400" rIns="25400" tIns="12700" bIns="12700">
             <a:spAutoFit/>
           </a:bodyPr>
           <a:lstStyle/>
@@ -5907,7 +5837,7 @@
               </a:spcAft>
             </a:pPr>
             <a:r>
-              <a:rPr sz="1300" b="0" i="0">
+              <a:rPr sz="1500" b="0" i="0">
                 <a:solidFill>
                   <a:srgbClr val="14241C"/>
                 </a:solidFill>
@@ -5926,12 +5856,12 @@
         </p:nvSpPr>
         <p:spPr>
           <a:xfrm>
-            <a:off x="365760" y="6510528"/>
-            <a:ext cx="11521440" cy="63500"/>
+            <a:off x="411480" y="11539728"/>
+            <a:ext cx="6035040" cy="64008"/>
           </a:xfrm>
           <a:prstGeom prst="roundRect">
             <a:avLst>
-              <a:gd name="adj" fmla="val 6000"/>
+              <a:gd name="adj" fmla="val 8000"/>
             </a:avLst>
           </a:prstGeom>
           <a:solidFill>
@@ -5972,12 +5902,12 @@
         </p:nvSpPr>
         <p:spPr>
           <a:xfrm>
-            <a:off x="365760" y="6510528"/>
-            <a:ext cx="6480810" cy="63500"/>
+            <a:off x="411480" y="11539728"/>
+            <a:ext cx="3394710" cy="64008"/>
           </a:xfrm>
           <a:prstGeom prst="roundRect">
             <a:avLst>
-              <a:gd name="adj" fmla="val 6000"/>
+              <a:gd name="adj" fmla="val 8000"/>
             </a:avLst>
           </a:prstGeom>
           <a:solidFill>
@@ -6018,8 +5948,8 @@
         </p:nvSpPr>
         <p:spPr>
           <a:xfrm>
-            <a:off x="365760" y="6163056"/>
-            <a:ext cx="11430000" cy="292608"/>
+            <a:off x="411480" y="11137392"/>
+            <a:ext cx="6035040" cy="310896"/>
           </a:xfrm>
           <a:prstGeom prst="rect">
             <a:avLst/>
@@ -6044,7 +5974,7 @@
               </a:spcAft>
             </a:pPr>
             <a:r>
-              <a:rPr sz="1100" b="1" i="0">
+              <a:rPr sz="1200" b="1" i="0">
                 <a:solidFill>
                   <a:srgbClr val="6B7068"/>
                 </a:solidFill>
@@ -6053,7 +5983,7 @@
               <a:t>NEXT  ›  </a:t>
             </a:r>
             <a:r>
-              <a:rPr sz="1100" b="0" i="1">
+              <a:rPr sz="1200" b="0" i="1">
                 <a:solidFill>
                   <a:srgbClr val="6B7068"/>
                 </a:solidFill>
@@ -6091,7 +6021,7 @@
         <p:spPr>
           <a:xfrm>
             <a:off x="0" y="0"/>
-            <a:ext cx="12191695" cy="6858000"/>
+            <a:ext cx="6858000" cy="12191695"/>
           </a:xfrm>
           <a:prstGeom prst="rect">
             <a:avLst/>
@@ -6135,7 +6065,7 @@
         <p:spPr>
           <a:xfrm>
             <a:off x="0" y="0"/>
-            <a:ext cx="12191695" cy="1078992"/>
+            <a:ext cx="6858000" cy="1783080"/>
           </a:xfrm>
           <a:prstGeom prst="rect">
             <a:avLst/>
@@ -6178,12 +6108,12 @@
         </p:nvSpPr>
         <p:spPr>
           <a:xfrm>
-            <a:off x="365760" y="201168"/>
-            <a:ext cx="1371600" cy="676656"/>
+            <a:off x="365760" y="292608"/>
+            <a:ext cx="1417320" cy="713232"/>
           </a:xfrm>
           <a:prstGeom prst="roundRect">
             <a:avLst>
-              <a:gd name="adj" fmla="val 6000"/>
+              <a:gd name="adj" fmla="val 8000"/>
             </a:avLst>
           </a:prstGeom>
           <a:solidFill>
@@ -6224,8 +6154,8 @@
         </p:nvSpPr>
         <p:spPr>
           <a:xfrm>
-            <a:off x="365760" y="219456"/>
-            <a:ext cx="1371600" cy="640080"/>
+            <a:off x="365760" y="310896"/>
+            <a:ext cx="1417320" cy="676656"/>
           </a:xfrm>
           <a:prstGeom prst="rect">
             <a:avLst/>
@@ -6269,8 +6199,53 @@
         </p:nvSpPr>
         <p:spPr>
           <a:xfrm>
-            <a:off x="1920240" y="146304"/>
-            <a:ext cx="8595360" cy="786384"/>
+            <a:off x="1920240" y="292608"/>
+            <a:ext cx="4572000" cy="713232"/>
+          </a:xfrm>
+          <a:prstGeom prst="rect">
+            <a:avLst/>
+          </a:prstGeom>
+          <a:noFill/>
+        </p:spPr>
+        <p:txBody>
+          <a:bodyPr wrap="square" anchor="ctr" lIns="25400" rIns="25400" tIns="12700" bIns="12700">
+            <a:spAutoFit/>
+          </a:bodyPr>
+          <a:lstStyle/>
+          <a:p>
+            <a:pPr algn="r">
+              <a:lnSpc>
+                <a:spcPct val="100000"/>
+              </a:lnSpc>
+              <a:spcBef>
+                <a:spcPts val="0"/>
+              </a:spcBef>
+              <a:spcAft>
+                <a:spcPts val="400"/>
+              </a:spcAft>
+            </a:pPr>
+            <a:r>
+              <a:rPr sz="1400" b="0" i="0">
+                <a:solidFill>
+                  <a:srgbClr val="ECF3EF"/>
+                </a:solidFill>
+                <a:latin typeface="Calibri"/>
+              </a:rPr>
+              <a:t>Step 10 of 16</a:t>
+            </a:r>
+          </a:p>
+        </p:txBody>
+      </p:sp>
+      <p:sp>
+        <p:nvSpPr>
+          <p:cNvPr id="7" name="TextBox 6"/>
+          <p:cNvSpPr txBox="1"/>
+          <p:nvPr/>
+        </p:nvSpPr>
+        <p:spPr>
+          <a:xfrm>
+            <a:off x="411480" y="1024128"/>
+            <a:ext cx="6035040" cy="713232"/>
           </a:xfrm>
           <a:prstGeom prst="rect">
             <a:avLst/>
@@ -6295,58 +6270,13 @@
               </a:spcAft>
             </a:pPr>
             <a:r>
-              <a:rPr sz="2700" b="1" i="0">
+              <a:rPr sz="2800" b="1" i="0">
                 <a:solidFill>
                   <a:srgbClr val="FFFFFF"/>
                 </a:solidFill>
                 <a:latin typeface="Calibri"/>
               </a:rPr>
               <a:t>Committees &amp; chat</a:t>
-            </a:r>
-          </a:p>
-        </p:txBody>
-      </p:sp>
-      <p:sp>
-        <p:nvSpPr>
-          <p:cNvPr id="7" name="TextBox 6"/>
-          <p:cNvSpPr txBox="1"/>
-          <p:nvPr/>
-        </p:nvSpPr>
-        <p:spPr>
-          <a:xfrm>
-            <a:off x="9509760" y="146304"/>
-            <a:ext cx="2377440" cy="786384"/>
-          </a:xfrm>
-          <a:prstGeom prst="rect">
-            <a:avLst/>
-          </a:prstGeom>
-          <a:noFill/>
-        </p:spPr>
-        <p:txBody>
-          <a:bodyPr wrap="square" anchor="ctr" lIns="25400" rIns="25400" tIns="12700" bIns="12700">
-            <a:spAutoFit/>
-          </a:bodyPr>
-          <a:lstStyle/>
-          <a:p>
-            <a:pPr algn="r">
-              <a:lnSpc>
-                <a:spcPct val="100000"/>
-              </a:lnSpc>
-              <a:spcBef>
-                <a:spcPts val="0"/>
-              </a:spcBef>
-              <a:spcAft>
-                <a:spcPts val="400"/>
-              </a:spcAft>
-            </a:pPr>
-            <a:r>
-              <a:rPr sz="1300" b="0" i="0">
-                <a:solidFill>
-                  <a:srgbClr val="ECF3EF"/>
-                </a:solidFill>
-                <a:latin typeface="Calibri"/>
-              </a:rPr>
-              <a:t>Step 10 of 16</a:t>
             </a:r>
           </a:p>
         </p:txBody>
@@ -6359,12 +6289,12 @@
         </p:nvSpPr>
         <p:spPr>
           <a:xfrm>
-            <a:off x="502920" y="1298448"/>
-            <a:ext cx="11201400" cy="603504"/>
+            <a:off x="411480" y="1965960"/>
+            <a:ext cx="6035040" cy="960120"/>
           </a:xfrm>
           <a:prstGeom prst="roundRect">
             <a:avLst>
-              <a:gd name="adj" fmla="val 6000"/>
+              <a:gd name="adj" fmla="val 8000"/>
             </a:avLst>
           </a:prstGeom>
           <a:solidFill>
@@ -6407,8 +6337,8 @@
         </p:nvSpPr>
         <p:spPr>
           <a:xfrm>
-            <a:off x="667512" y="1298448"/>
-            <a:ext cx="1463040" cy="603504"/>
+            <a:off x="612648" y="2084831"/>
+            <a:ext cx="2743200" cy="310896"/>
           </a:xfrm>
           <a:prstGeom prst="rect">
             <a:avLst/>
@@ -6416,7 +6346,7 @@
           <a:noFill/>
         </p:spPr>
         <p:txBody>
-          <a:bodyPr wrap="square" anchor="ctr" lIns="25400" rIns="25400" tIns="12700" bIns="12700">
+          <a:bodyPr wrap="square" anchor="t" lIns="25400" rIns="25400" tIns="12700" bIns="12700">
             <a:spAutoFit/>
           </a:bodyPr>
           <a:lstStyle/>
@@ -6433,7 +6363,7 @@
               </a:spcAft>
             </a:pPr>
             <a:r>
-              <a:rPr sz="1300" b="1" i="0">
+              <a:rPr sz="1500" b="1" i="0">
                 <a:solidFill>
                   <a:srgbClr val="15503A"/>
                 </a:solidFill>
@@ -6452,8 +6382,8 @@
         </p:nvSpPr>
         <p:spPr>
           <a:xfrm>
-            <a:off x="2194560" y="1298448"/>
-            <a:ext cx="9372600" cy="603504"/>
+            <a:off x="612648" y="2423160"/>
+            <a:ext cx="5632703" cy="457200"/>
           </a:xfrm>
           <a:prstGeom prst="rect">
             <a:avLst/>
@@ -6461,7 +6391,7 @@
           <a:noFill/>
         </p:spPr>
         <p:txBody>
-          <a:bodyPr wrap="square" anchor="ctr" lIns="25400" rIns="25400" tIns="12700" bIns="12700">
+          <a:bodyPr wrap="square" anchor="t" lIns="25400" rIns="25400" tIns="12700" bIns="12700">
             <a:spAutoFit/>
           </a:bodyPr>
           <a:lstStyle/>
@@ -6478,7 +6408,7 @@
               </a:spcAft>
             </a:pPr>
             <a:r>
-              <a:rPr sz="1500" b="1" i="0">
+              <a:rPr sz="1800" b="1" i="0">
                 <a:solidFill>
                   <a:srgbClr val="14241C"/>
                 </a:solidFill>
@@ -6497,12 +6427,12 @@
         </p:nvSpPr>
         <p:spPr>
           <a:xfrm>
-            <a:off x="502920" y="2029968"/>
-            <a:ext cx="11201400" cy="786384"/>
+            <a:off x="411480" y="3108960"/>
+            <a:ext cx="6035040" cy="1874519"/>
           </a:xfrm>
           <a:prstGeom prst="roundRect">
             <a:avLst>
-              <a:gd name="adj" fmla="val 6000"/>
+              <a:gd name="adj" fmla="val 8000"/>
             </a:avLst>
           </a:prstGeom>
           <a:solidFill>
@@ -6545,8 +6475,8 @@
         </p:nvSpPr>
         <p:spPr>
           <a:xfrm>
-            <a:off x="502920" y="2029968"/>
-            <a:ext cx="91440" cy="786384"/>
+            <a:off x="411480" y="3108960"/>
+            <a:ext cx="109728" cy="1874519"/>
           </a:xfrm>
           <a:prstGeom prst="rect">
             <a:avLst/>
@@ -6589,8 +6519,8 @@
         </p:nvSpPr>
         <p:spPr>
           <a:xfrm>
-            <a:off x="813816" y="2029968"/>
-            <a:ext cx="10698480" cy="786384"/>
+            <a:off x="731520" y="3108960"/>
+            <a:ext cx="5532120" cy="1874519"/>
           </a:xfrm>
           <a:prstGeom prst="rect">
             <a:avLst/>
@@ -6615,7 +6545,7 @@
               </a:spcAft>
             </a:pPr>
             <a:r>
-              <a:rPr sz="1800" b="1" i="0">
+              <a:rPr sz="2100" b="1" i="0">
                 <a:solidFill>
                   <a:srgbClr val="14241C"/>
                 </a:solidFill>
@@ -6634,8 +6564,8 @@
         </p:nvSpPr>
         <p:spPr>
           <a:xfrm>
-            <a:off x="594360" y="3035808"/>
-            <a:ext cx="11018520" cy="2468880"/>
+            <a:off x="502920" y="5212079"/>
+            <a:ext cx="5852159" cy="4480560"/>
           </a:xfrm>
           <a:prstGeom prst="rect">
             <a:avLst/>
@@ -6656,11 +6586,11 @@
                 <a:spcPts val="0"/>
               </a:spcBef>
               <a:spcAft>
-                <a:spcPts val="1000"/>
+                <a:spcPts val="1300"/>
               </a:spcAft>
             </a:pPr>
             <a:r>
-              <a:rPr sz="1600" b="1" i="0">
+              <a:rPr sz="1900" b="1" i="0">
                 <a:solidFill>
                   <a:srgbClr val="15503A"/>
                 </a:solidFill>
@@ -6669,7 +6599,7 @@
               <a:t>•  </a:t>
             </a:r>
             <a:r>
-              <a:rPr sz="1600" b="1" i="0">
+              <a:rPr sz="1900" b="1" i="0">
                 <a:solidFill>
                   <a:srgbClr val="14241C"/>
                 </a:solidFill>
@@ -6678,7 +6608,7 @@
               <a:t>Meals</a:t>
             </a:r>
             <a:r>
-              <a:rPr sz="1600" b="0" i="0">
+              <a:rPr sz="1900" b="0" i="0">
                 <a:solidFill>
                   <a:srgbClr val="14241C"/>
                 </a:solidFill>
@@ -6696,11 +6626,11 @@
                 <a:spcPts val="0"/>
               </a:spcBef>
               <a:spcAft>
-                <a:spcPts val="1000"/>
+                <a:spcPts val="1300"/>
               </a:spcAft>
             </a:pPr>
             <a:r>
-              <a:rPr sz="1600" b="1" i="0">
+              <a:rPr sz="1900" b="1" i="0">
                 <a:solidFill>
                   <a:srgbClr val="15503A"/>
                 </a:solidFill>
@@ -6709,7 +6639,7 @@
               <a:t>•  </a:t>
             </a:r>
             <a:r>
-              <a:rPr sz="1600" b="1" i="0">
+              <a:rPr sz="1900" b="1" i="0">
                 <a:solidFill>
                   <a:srgbClr val="14241C"/>
                 </a:solidFill>
@@ -6718,7 +6648,7 @@
               <a:t>Entertainment &amp; Games</a:t>
             </a:r>
             <a:r>
-              <a:rPr sz="1600" b="0" i="0">
+              <a:rPr sz="1900" b="0" i="0">
                 <a:solidFill>
                   <a:srgbClr val="14241C"/>
                 </a:solidFill>
@@ -6736,11 +6666,11 @@
                 <a:spcPts val="0"/>
               </a:spcBef>
               <a:spcAft>
-                <a:spcPts val="1000"/>
+                <a:spcPts val="1300"/>
               </a:spcAft>
             </a:pPr>
             <a:r>
-              <a:rPr sz="1600" b="1" i="0">
+              <a:rPr sz="1900" b="1" i="0">
                 <a:solidFill>
                   <a:srgbClr val="15503A"/>
                 </a:solidFill>
@@ -6749,7 +6679,7 @@
               <a:t>•  </a:t>
             </a:r>
             <a:r>
-              <a:rPr sz="1600" b="1" i="0">
+              <a:rPr sz="1900" b="1" i="0">
                 <a:solidFill>
                   <a:srgbClr val="14241C"/>
                 </a:solidFill>
@@ -6758,7 +6688,7 @@
               <a:t>Art &amp; Decorating</a:t>
             </a:r>
             <a:r>
-              <a:rPr sz="1600" b="0" i="0">
+              <a:rPr sz="1900" b="0" i="0">
                 <a:solidFill>
                   <a:srgbClr val="14241C"/>
                 </a:solidFill>
@@ -6776,11 +6706,11 @@
                 <a:spcPts val="0"/>
               </a:spcBef>
               <a:spcAft>
-                <a:spcPts val="1000"/>
+                <a:spcPts val="1300"/>
               </a:spcAft>
             </a:pPr>
             <a:r>
-              <a:rPr sz="1600" b="1" i="0">
+              <a:rPr sz="1900" b="1" i="0">
                 <a:solidFill>
                   <a:srgbClr val="15503A"/>
                 </a:solidFill>
@@ -6789,7 +6719,7 @@
               <a:t>•  </a:t>
             </a:r>
             <a:r>
-              <a:rPr sz="1600" b="1" i="0">
+              <a:rPr sz="1900" b="1" i="0">
                 <a:solidFill>
                   <a:srgbClr val="14241C"/>
                 </a:solidFill>
@@ -6798,7 +6728,7 @@
               <a:t>Merch &amp; Fundraising / Logistics</a:t>
             </a:r>
             <a:r>
-              <a:rPr sz="1600" b="0" i="0">
+              <a:rPr sz="1900" b="0" i="0">
                 <a:solidFill>
                   <a:srgbClr val="14241C"/>
                 </a:solidFill>
@@ -6816,11 +6746,11 @@
                 <a:spcPts val="0"/>
               </a:spcBef>
               <a:spcAft>
-                <a:spcPts val="1000"/>
+                <a:spcPts val="1300"/>
               </a:spcAft>
             </a:pPr>
             <a:r>
-              <a:rPr sz="1600" b="1" i="0">
+              <a:rPr sz="1900" b="1" i="0">
                 <a:solidFill>
                   <a:srgbClr val="15503A"/>
                 </a:solidFill>
@@ -6829,7 +6759,7 @@
               <a:t>•  </a:t>
             </a:r>
             <a:r>
-              <a:rPr sz="1600" b="1" i="0">
+              <a:rPr sz="1900" b="1" i="0">
                 <a:solidFill>
                   <a:srgbClr val="14241C"/>
                 </a:solidFill>
@@ -6838,7 +6768,7 @@
               <a:t>Private chat per team</a:t>
             </a:r>
             <a:r>
-              <a:rPr sz="1600" b="0" i="0">
+              <a:rPr sz="1900" b="0" i="0">
                 <a:solidFill>
                   <a:srgbClr val="14241C"/>
                 </a:solidFill>
@@ -6857,12 +6787,12 @@
         </p:nvSpPr>
         <p:spPr>
           <a:xfrm>
-            <a:off x="502920" y="5486400"/>
-            <a:ext cx="11201400" cy="566928"/>
+            <a:off x="411480" y="9784080"/>
+            <a:ext cx="6035040" cy="1143000"/>
           </a:xfrm>
           <a:prstGeom prst="roundRect">
             <a:avLst>
-              <a:gd name="adj" fmla="val 6000"/>
+              <a:gd name="adj" fmla="val 8000"/>
             </a:avLst>
           </a:prstGeom>
           <a:solidFill>
@@ -6905,8 +6835,8 @@
         </p:nvSpPr>
         <p:spPr>
           <a:xfrm>
-            <a:off x="667512" y="5486400"/>
-            <a:ext cx="1828800" cy="566928"/>
+            <a:off x="612648" y="9902952"/>
+            <a:ext cx="3657600" cy="310896"/>
           </a:xfrm>
           <a:prstGeom prst="rect">
             <a:avLst/>
@@ -6914,7 +6844,7 @@
           <a:noFill/>
         </p:spPr>
         <p:txBody>
-          <a:bodyPr wrap="square" anchor="ctr" lIns="25400" rIns="25400" tIns="12700" bIns="12700">
+          <a:bodyPr wrap="square" anchor="t" lIns="25400" rIns="25400" tIns="12700" bIns="12700">
             <a:spAutoFit/>
           </a:bodyPr>
           <a:lstStyle/>
@@ -6931,7 +6861,7 @@
               </a:spcAft>
             </a:pPr>
             <a:r>
-              <a:rPr sz="1200" b="1" i="0">
+              <a:rPr sz="1400" b="1" i="0">
                 <a:solidFill>
                   <a:srgbClr val="8B2E2E"/>
                 </a:solidFill>
@@ -6950,8 +6880,8 @@
         </p:nvSpPr>
         <p:spPr>
           <a:xfrm>
-            <a:off x="2560320" y="5486400"/>
-            <a:ext cx="9006840" cy="566928"/>
+            <a:off x="612648" y="10241280"/>
+            <a:ext cx="5632703" cy="640080"/>
           </a:xfrm>
           <a:prstGeom prst="rect">
             <a:avLst/>
@@ -6959,7 +6889,7 @@
           <a:noFill/>
         </p:spPr>
         <p:txBody>
-          <a:bodyPr wrap="square" anchor="ctr" lIns="25400" rIns="25400" tIns="12700" bIns="12700">
+          <a:bodyPr wrap="square" anchor="t" lIns="25400" rIns="25400" tIns="12700" bIns="12700">
             <a:spAutoFit/>
           </a:bodyPr>
           <a:lstStyle/>
@@ -6976,7 +6906,7 @@
               </a:spcAft>
             </a:pPr>
             <a:r>
-              <a:rPr sz="1300" b="0" i="0">
+              <a:rPr sz="1500" b="0" i="0">
                 <a:solidFill>
                   <a:srgbClr val="14241C"/>
                 </a:solidFill>
@@ -6995,12 +6925,12 @@
         </p:nvSpPr>
         <p:spPr>
           <a:xfrm>
-            <a:off x="365760" y="6510528"/>
-            <a:ext cx="11521440" cy="63500"/>
+            <a:off x="411480" y="11539728"/>
+            <a:ext cx="6035040" cy="64008"/>
           </a:xfrm>
           <a:prstGeom prst="roundRect">
             <a:avLst>
-              <a:gd name="adj" fmla="val 6000"/>
+              <a:gd name="adj" fmla="val 8000"/>
             </a:avLst>
           </a:prstGeom>
           <a:solidFill>
@@ -7041,12 +6971,12 @@
         </p:nvSpPr>
         <p:spPr>
           <a:xfrm>
-            <a:off x="365760" y="6510528"/>
-            <a:ext cx="7200900" cy="63500"/>
+            <a:off x="411480" y="11539728"/>
+            <a:ext cx="3771900" cy="64008"/>
           </a:xfrm>
           <a:prstGeom prst="roundRect">
             <a:avLst>
-              <a:gd name="adj" fmla="val 6000"/>
+              <a:gd name="adj" fmla="val 8000"/>
             </a:avLst>
           </a:prstGeom>
           <a:solidFill>
@@ -7087,8 +7017,8 @@
         </p:nvSpPr>
         <p:spPr>
           <a:xfrm>
-            <a:off x="365760" y="6163056"/>
-            <a:ext cx="11430000" cy="292608"/>
+            <a:off x="411480" y="11137392"/>
+            <a:ext cx="6035040" cy="310896"/>
           </a:xfrm>
           <a:prstGeom prst="rect">
             <a:avLst/>
@@ -7113,7 +7043,7 @@
               </a:spcAft>
             </a:pPr>
             <a:r>
-              <a:rPr sz="1100" b="1" i="0">
+              <a:rPr sz="1200" b="1" i="0">
                 <a:solidFill>
                   <a:srgbClr val="6B7068"/>
                 </a:solidFill>
@@ -7122,7 +7052,7 @@
               <a:t>NEXT  ›  </a:t>
             </a:r>
             <a:r>
-              <a:rPr sz="1100" b="0" i="1">
+              <a:rPr sz="1200" b="0" i="1">
                 <a:solidFill>
                   <a:srgbClr val="6B7068"/>
                 </a:solidFill>
@@ -7160,7 +7090,7 @@
         <p:spPr>
           <a:xfrm>
             <a:off x="0" y="0"/>
-            <a:ext cx="12191695" cy="6858000"/>
+            <a:ext cx="6858000" cy="12191695"/>
           </a:xfrm>
           <a:prstGeom prst="rect">
             <a:avLst/>
@@ -7204,7 +7134,7 @@
         <p:spPr>
           <a:xfrm>
             <a:off x="0" y="0"/>
-            <a:ext cx="12191695" cy="1078992"/>
+            <a:ext cx="6858000" cy="1783080"/>
           </a:xfrm>
           <a:prstGeom prst="rect">
             <a:avLst/>
@@ -7247,12 +7177,12 @@
         </p:nvSpPr>
         <p:spPr>
           <a:xfrm>
-            <a:off x="365760" y="201168"/>
-            <a:ext cx="1371600" cy="676656"/>
+            <a:off x="365760" y="292608"/>
+            <a:ext cx="1417320" cy="713232"/>
           </a:xfrm>
           <a:prstGeom prst="roundRect">
             <a:avLst>
-              <a:gd name="adj" fmla="val 6000"/>
+              <a:gd name="adj" fmla="val 8000"/>
             </a:avLst>
           </a:prstGeom>
           <a:solidFill>
@@ -7293,8 +7223,8 @@
         </p:nvSpPr>
         <p:spPr>
           <a:xfrm>
-            <a:off x="365760" y="219456"/>
-            <a:ext cx="1371600" cy="640080"/>
+            <a:off x="365760" y="310896"/>
+            <a:ext cx="1417320" cy="676656"/>
           </a:xfrm>
           <a:prstGeom prst="rect">
             <a:avLst/>
@@ -7338,8 +7268,53 @@
         </p:nvSpPr>
         <p:spPr>
           <a:xfrm>
-            <a:off x="1920240" y="146304"/>
-            <a:ext cx="8595360" cy="786384"/>
+            <a:off x="1920240" y="292608"/>
+            <a:ext cx="4572000" cy="713232"/>
+          </a:xfrm>
+          <a:prstGeom prst="rect">
+            <a:avLst/>
+          </a:prstGeom>
+          <a:noFill/>
+        </p:spPr>
+        <p:txBody>
+          <a:bodyPr wrap="square" anchor="ctr" lIns="25400" rIns="25400" tIns="12700" bIns="12700">
+            <a:spAutoFit/>
+          </a:bodyPr>
+          <a:lstStyle/>
+          <a:p>
+            <a:pPr algn="r">
+              <a:lnSpc>
+                <a:spcPct val="100000"/>
+              </a:lnSpc>
+              <a:spcBef>
+                <a:spcPts val="0"/>
+              </a:spcBef>
+              <a:spcAft>
+                <a:spcPts val="400"/>
+              </a:spcAft>
+            </a:pPr>
+            <a:r>
+              <a:rPr sz="1400" b="0" i="0">
+                <a:solidFill>
+                  <a:srgbClr val="ECF3EF"/>
+                </a:solidFill>
+                <a:latin typeface="Calibri"/>
+              </a:rPr>
+              <a:t>Step 11 of 16</a:t>
+            </a:r>
+          </a:p>
+        </p:txBody>
+      </p:sp>
+      <p:sp>
+        <p:nvSpPr>
+          <p:cNvPr id="7" name="TextBox 6"/>
+          <p:cNvSpPr txBox="1"/>
+          <p:nvPr/>
+        </p:nvSpPr>
+        <p:spPr>
+          <a:xfrm>
+            <a:off x="411480" y="1024128"/>
+            <a:ext cx="6035040" cy="713232"/>
           </a:xfrm>
           <a:prstGeom prst="rect">
             <a:avLst/>
@@ -7364,58 +7339,13 @@
               </a:spcAft>
             </a:pPr>
             <a:r>
-              <a:rPr sz="2700" b="1" i="0">
+              <a:rPr sz="2800" b="1" i="0">
                 <a:solidFill>
                   <a:srgbClr val="FFFFFF"/>
                 </a:solidFill>
                 <a:latin typeface="Calibri"/>
               </a:rPr>
               <a:t>Ask for Help</a:t>
-            </a:r>
-          </a:p>
-        </p:txBody>
-      </p:sp>
-      <p:sp>
-        <p:nvSpPr>
-          <p:cNvPr id="7" name="TextBox 6"/>
-          <p:cNvSpPr txBox="1"/>
-          <p:nvPr/>
-        </p:nvSpPr>
-        <p:spPr>
-          <a:xfrm>
-            <a:off x="9509760" y="146304"/>
-            <a:ext cx="2377440" cy="786384"/>
-          </a:xfrm>
-          <a:prstGeom prst="rect">
-            <a:avLst/>
-          </a:prstGeom>
-          <a:noFill/>
-        </p:spPr>
-        <p:txBody>
-          <a:bodyPr wrap="square" anchor="ctr" lIns="25400" rIns="25400" tIns="12700" bIns="12700">
-            <a:spAutoFit/>
-          </a:bodyPr>
-          <a:lstStyle/>
-          <a:p>
-            <a:pPr algn="r">
-              <a:lnSpc>
-                <a:spcPct val="100000"/>
-              </a:lnSpc>
-              <a:spcBef>
-                <a:spcPts val="0"/>
-              </a:spcBef>
-              <a:spcAft>
-                <a:spcPts val="400"/>
-              </a:spcAft>
-            </a:pPr>
-            <a:r>
-              <a:rPr sz="1300" b="0" i="0">
-                <a:solidFill>
-                  <a:srgbClr val="ECF3EF"/>
-                </a:solidFill>
-                <a:latin typeface="Calibri"/>
-              </a:rPr>
-              <a:t>Step 11 of 16</a:t>
             </a:r>
           </a:p>
         </p:txBody>
@@ -7428,12 +7358,12 @@
         </p:nvSpPr>
         <p:spPr>
           <a:xfrm>
-            <a:off x="502920" y="1298448"/>
-            <a:ext cx="11201400" cy="603504"/>
+            <a:off x="411480" y="1965960"/>
+            <a:ext cx="6035040" cy="960120"/>
           </a:xfrm>
           <a:prstGeom prst="roundRect">
             <a:avLst>
-              <a:gd name="adj" fmla="val 6000"/>
+              <a:gd name="adj" fmla="val 8000"/>
             </a:avLst>
           </a:prstGeom>
           <a:solidFill>
@@ -7476,8 +7406,8 @@
         </p:nvSpPr>
         <p:spPr>
           <a:xfrm>
-            <a:off x="667512" y="1298448"/>
-            <a:ext cx="1463040" cy="603504"/>
+            <a:off x="612648" y="2084831"/>
+            <a:ext cx="2743200" cy="310896"/>
           </a:xfrm>
           <a:prstGeom prst="rect">
             <a:avLst/>
@@ -7485,7 +7415,7 @@
           <a:noFill/>
         </p:spPr>
         <p:txBody>
-          <a:bodyPr wrap="square" anchor="ctr" lIns="25400" rIns="25400" tIns="12700" bIns="12700">
+          <a:bodyPr wrap="square" anchor="t" lIns="25400" rIns="25400" tIns="12700" bIns="12700">
             <a:spAutoFit/>
           </a:bodyPr>
           <a:lstStyle/>
@@ -7502,7 +7432,7 @@
               </a:spcAft>
             </a:pPr>
             <a:r>
-              <a:rPr sz="1300" b="1" i="0">
+              <a:rPr sz="1500" b="1" i="0">
                 <a:solidFill>
                   <a:srgbClr val="15503A"/>
                 </a:solidFill>
@@ -7521,8 +7451,8 @@
         </p:nvSpPr>
         <p:spPr>
           <a:xfrm>
-            <a:off x="2194560" y="1298448"/>
-            <a:ext cx="9372600" cy="603504"/>
+            <a:off x="612648" y="2423160"/>
+            <a:ext cx="5632703" cy="457200"/>
           </a:xfrm>
           <a:prstGeom prst="rect">
             <a:avLst/>
@@ -7530,7 +7460,7 @@
           <a:noFill/>
         </p:spPr>
         <p:txBody>
-          <a:bodyPr wrap="square" anchor="ctr" lIns="25400" rIns="25400" tIns="12700" bIns="12700">
+          <a:bodyPr wrap="square" anchor="t" lIns="25400" rIns="25400" tIns="12700" bIns="12700">
             <a:spAutoFit/>
           </a:bodyPr>
           <a:lstStyle/>
@@ -7547,7 +7477,7 @@
               </a:spcAft>
             </a:pPr>
             <a:r>
-              <a:rPr sz="1500" b="1" i="0">
+              <a:rPr sz="1800" b="1" i="0">
                 <a:solidFill>
                   <a:srgbClr val="14241C"/>
                 </a:solidFill>
@@ -7566,12 +7496,12 @@
         </p:nvSpPr>
         <p:spPr>
           <a:xfrm>
-            <a:off x="502920" y="2029968"/>
-            <a:ext cx="11201400" cy="786384"/>
+            <a:off x="411480" y="3108960"/>
+            <a:ext cx="6035040" cy="1874519"/>
           </a:xfrm>
           <a:prstGeom prst="roundRect">
             <a:avLst>
-              <a:gd name="adj" fmla="val 6000"/>
+              <a:gd name="adj" fmla="val 8000"/>
             </a:avLst>
           </a:prstGeom>
           <a:solidFill>
@@ -7614,8 +7544,8 @@
         </p:nvSpPr>
         <p:spPr>
           <a:xfrm>
-            <a:off x="502920" y="2029968"/>
-            <a:ext cx="91440" cy="786384"/>
+            <a:off x="411480" y="3108960"/>
+            <a:ext cx="109728" cy="1874519"/>
           </a:xfrm>
           <a:prstGeom prst="rect">
             <a:avLst/>
@@ -7658,8 +7588,8 @@
         </p:nvSpPr>
         <p:spPr>
           <a:xfrm>
-            <a:off x="813816" y="2029968"/>
-            <a:ext cx="10698480" cy="786384"/>
+            <a:off x="731520" y="3108960"/>
+            <a:ext cx="5532120" cy="1874519"/>
           </a:xfrm>
           <a:prstGeom prst="rect">
             <a:avLst/>
@@ -7684,7 +7614,7 @@
               </a:spcAft>
             </a:pPr>
             <a:r>
-              <a:rPr sz="1800" b="1" i="0">
+              <a:rPr sz="2100" b="1" i="0">
                 <a:solidFill>
                   <a:srgbClr val="14241C"/>
                 </a:solidFill>
@@ -7703,8 +7633,8 @@
         </p:nvSpPr>
         <p:spPr>
           <a:xfrm>
-            <a:off x="594360" y="3035808"/>
-            <a:ext cx="11018520" cy="2468880"/>
+            <a:off x="502920" y="5212079"/>
+            <a:ext cx="5852159" cy="4480560"/>
           </a:xfrm>
           <a:prstGeom prst="rect">
             <a:avLst/>
@@ -7725,11 +7655,11 @@
                 <a:spcPts val="0"/>
               </a:spcBef>
               <a:spcAft>
-                <a:spcPts val="1000"/>
+                <a:spcPts val="1300"/>
               </a:spcAft>
             </a:pPr>
             <a:r>
-              <a:rPr sz="1600" b="1" i="0">
+              <a:rPr sz="1900" b="1" i="0">
                 <a:solidFill>
                   <a:srgbClr val="15503A"/>
                 </a:solidFill>
@@ -7738,7 +7668,7 @@
               <a:t>•  </a:t>
             </a:r>
             <a:r>
-              <a:rPr sz="1600" b="1" i="0">
+              <a:rPr sz="1900" b="1" i="0">
                 <a:solidFill>
                   <a:srgbClr val="14241C"/>
                 </a:solidFill>
@@ -7747,7 +7677,7 @@
               <a:t>Post a need</a:t>
             </a:r>
             <a:r>
-              <a:rPr sz="1600" b="0" i="0">
+              <a:rPr sz="1900" b="0" i="0">
                 <a:solidFill>
                   <a:srgbClr val="14241C"/>
                 </a:solidFill>
@@ -7765,11 +7695,11 @@
                 <a:spcPts val="0"/>
               </a:spcBef>
               <a:spcAft>
-                <a:spcPts val="1000"/>
+                <a:spcPts val="1300"/>
               </a:spcAft>
             </a:pPr>
             <a:r>
-              <a:rPr sz="1600" b="1" i="0">
+              <a:rPr sz="1900" b="1" i="0">
                 <a:solidFill>
                   <a:srgbClr val="15503A"/>
                 </a:solidFill>
@@ -7778,7 +7708,7 @@
               <a:t>•  </a:t>
             </a:r>
             <a:r>
-              <a:rPr sz="1600" b="1" i="0">
+              <a:rPr sz="1900" b="1" i="0">
                 <a:solidFill>
                   <a:srgbClr val="14241C"/>
                 </a:solidFill>
@@ -7787,7 +7717,7 @@
               <a:t>Helpers respond</a:t>
             </a:r>
             <a:r>
-              <a:rPr sz="1600" b="0" i="0">
+              <a:rPr sz="1900" b="0" i="0">
                 <a:solidFill>
                   <a:srgbClr val="14241C"/>
                 </a:solidFill>
@@ -7805,11 +7735,11 @@
                 <a:spcPts val="0"/>
               </a:spcBef>
               <a:spcAft>
-                <a:spcPts val="1000"/>
+                <a:spcPts val="1300"/>
               </a:spcAft>
             </a:pPr>
             <a:r>
-              <a:rPr sz="1600" b="1" i="0">
+              <a:rPr sz="1900" b="1" i="0">
                 <a:solidFill>
                   <a:srgbClr val="15503A"/>
                 </a:solidFill>
@@ -7818,7 +7748,7 @@
               <a:t>•  </a:t>
             </a:r>
             <a:r>
-              <a:rPr sz="1600" b="1" i="0">
+              <a:rPr sz="1900" b="1" i="0">
                 <a:solidFill>
                   <a:srgbClr val="14241C"/>
                 </a:solidFill>
@@ -7827,7 +7757,7 @@
               <a:t>What to bring</a:t>
             </a:r>
             <a:r>
-              <a:rPr sz="1600" b="0" i="0">
+              <a:rPr sz="1900" b="0" i="0">
                 <a:solidFill>
                   <a:srgbClr val="14241C"/>
                 </a:solidFill>
@@ -7845,11 +7775,11 @@
                 <a:spcPts val="0"/>
               </a:spcBef>
               <a:spcAft>
-                <a:spcPts val="1000"/>
+                <a:spcPts val="1300"/>
               </a:spcAft>
             </a:pPr>
             <a:r>
-              <a:rPr sz="1600" b="1" i="0">
+              <a:rPr sz="1900" b="1" i="0">
                 <a:solidFill>
                   <a:srgbClr val="15503A"/>
                 </a:solidFill>
@@ -7858,7 +7788,7 @@
               <a:t>•  </a:t>
             </a:r>
             <a:r>
-              <a:rPr sz="1600" b="1" i="0">
+              <a:rPr sz="1900" b="1" i="0">
                 <a:solidFill>
                   <a:srgbClr val="14241C"/>
                 </a:solidFill>
@@ -7867,7 +7797,7 @@
               <a:t>Urgent option</a:t>
             </a:r>
             <a:r>
-              <a:rPr sz="1600" b="0" i="0">
+              <a:rPr sz="1900" b="0" i="0">
                 <a:solidFill>
                   <a:srgbClr val="14241C"/>
                 </a:solidFill>
@@ -7886,12 +7816,12 @@
         </p:nvSpPr>
         <p:spPr>
           <a:xfrm>
-            <a:off x="502920" y="5486400"/>
-            <a:ext cx="11201400" cy="566928"/>
+            <a:off x="411480" y="9784080"/>
+            <a:ext cx="6035040" cy="1143000"/>
           </a:xfrm>
           <a:prstGeom prst="roundRect">
             <a:avLst>
-              <a:gd name="adj" fmla="val 6000"/>
+              <a:gd name="adj" fmla="val 8000"/>
             </a:avLst>
           </a:prstGeom>
           <a:solidFill>
@@ -7934,8 +7864,8 @@
         </p:nvSpPr>
         <p:spPr>
           <a:xfrm>
-            <a:off x="667512" y="5486400"/>
-            <a:ext cx="1828800" cy="566928"/>
+            <a:off x="612648" y="9902952"/>
+            <a:ext cx="3657600" cy="310896"/>
           </a:xfrm>
           <a:prstGeom prst="rect">
             <a:avLst/>
@@ -7943,7 +7873,7 @@
           <a:noFill/>
         </p:spPr>
         <p:txBody>
-          <a:bodyPr wrap="square" anchor="ctr" lIns="25400" rIns="25400" tIns="12700" bIns="12700">
+          <a:bodyPr wrap="square" anchor="t" lIns="25400" rIns="25400" tIns="12700" bIns="12700">
             <a:spAutoFit/>
           </a:bodyPr>
           <a:lstStyle/>
@@ -7960,7 +7890,7 @@
               </a:spcAft>
             </a:pPr>
             <a:r>
-              <a:rPr sz="1200" b="1" i="0">
+              <a:rPr sz="1400" b="1" i="0">
                 <a:solidFill>
                   <a:srgbClr val="8B2E2E"/>
                 </a:solidFill>
@@ -7979,8 +7909,8 @@
         </p:nvSpPr>
         <p:spPr>
           <a:xfrm>
-            <a:off x="2560320" y="5486400"/>
-            <a:ext cx="9006840" cy="566928"/>
+            <a:off x="612648" y="10241280"/>
+            <a:ext cx="5632703" cy="640080"/>
           </a:xfrm>
           <a:prstGeom prst="rect">
             <a:avLst/>
@@ -7988,7 +7918,7 @@
           <a:noFill/>
         </p:spPr>
         <p:txBody>
-          <a:bodyPr wrap="square" anchor="ctr" lIns="25400" rIns="25400" tIns="12700" bIns="12700">
+          <a:bodyPr wrap="square" anchor="t" lIns="25400" rIns="25400" tIns="12700" bIns="12700">
             <a:spAutoFit/>
           </a:bodyPr>
           <a:lstStyle/>
@@ -8005,7 +7935,7 @@
               </a:spcAft>
             </a:pPr>
             <a:r>
-              <a:rPr sz="1300" b="0" i="0">
+              <a:rPr sz="1500" b="0" i="0">
                 <a:solidFill>
                   <a:srgbClr val="14241C"/>
                 </a:solidFill>
@@ -8024,12 +7954,12 @@
         </p:nvSpPr>
         <p:spPr>
           <a:xfrm>
-            <a:off x="365760" y="6510528"/>
-            <a:ext cx="11521440" cy="63500"/>
+            <a:off x="411480" y="11539728"/>
+            <a:ext cx="6035040" cy="64008"/>
           </a:xfrm>
           <a:prstGeom prst="roundRect">
             <a:avLst>
-              <a:gd name="adj" fmla="val 6000"/>
+              <a:gd name="adj" fmla="val 8000"/>
             </a:avLst>
           </a:prstGeom>
           <a:solidFill>
@@ -8070,12 +8000,12 @@
         </p:nvSpPr>
         <p:spPr>
           <a:xfrm>
-            <a:off x="365760" y="6510528"/>
-            <a:ext cx="7920990" cy="63500"/>
+            <a:off x="411480" y="11539728"/>
+            <a:ext cx="4149089" cy="64008"/>
           </a:xfrm>
           <a:prstGeom prst="roundRect">
             <a:avLst>
-              <a:gd name="adj" fmla="val 6000"/>
+              <a:gd name="adj" fmla="val 8000"/>
             </a:avLst>
           </a:prstGeom>
           <a:solidFill>
@@ -8116,8 +8046,8 @@
         </p:nvSpPr>
         <p:spPr>
           <a:xfrm>
-            <a:off x="365760" y="6163056"/>
-            <a:ext cx="11430000" cy="292608"/>
+            <a:off x="411480" y="11137392"/>
+            <a:ext cx="6035040" cy="310896"/>
           </a:xfrm>
           <a:prstGeom prst="rect">
             <a:avLst/>
@@ -8142,7 +8072,7 @@
               </a:spcAft>
             </a:pPr>
             <a:r>
-              <a:rPr sz="1100" b="1" i="0">
+              <a:rPr sz="1200" b="1" i="0">
                 <a:solidFill>
                   <a:srgbClr val="6B7068"/>
                 </a:solidFill>
@@ -8151,7 +8081,7 @@
               <a:t>NEXT  ›  </a:t>
             </a:r>
             <a:r>
-              <a:rPr sz="1100" b="0" i="1">
+              <a:rPr sz="1200" b="0" i="1">
                 <a:solidFill>
                   <a:srgbClr val="6B7068"/>
                 </a:solidFill>
@@ -8189,7 +8119,7 @@
         <p:spPr>
           <a:xfrm>
             <a:off x="0" y="0"/>
-            <a:ext cx="12191695" cy="6858000"/>
+            <a:ext cx="6858000" cy="12191695"/>
           </a:xfrm>
           <a:prstGeom prst="rect">
             <a:avLst/>
@@ -8233,7 +8163,7 @@
         <p:spPr>
           <a:xfrm>
             <a:off x="0" y="0"/>
-            <a:ext cx="12191695" cy="1078992"/>
+            <a:ext cx="6858000" cy="1783080"/>
           </a:xfrm>
           <a:prstGeom prst="rect">
             <a:avLst/>
@@ -8276,12 +8206,12 @@
         </p:nvSpPr>
         <p:spPr>
           <a:xfrm>
-            <a:off x="365760" y="201168"/>
-            <a:ext cx="1371600" cy="676656"/>
+            <a:off x="365760" y="292608"/>
+            <a:ext cx="1417320" cy="713232"/>
           </a:xfrm>
           <a:prstGeom prst="roundRect">
             <a:avLst>
-              <a:gd name="adj" fmla="val 6000"/>
+              <a:gd name="adj" fmla="val 8000"/>
             </a:avLst>
           </a:prstGeom>
           <a:solidFill>
@@ -8322,8 +8252,8 @@
         </p:nvSpPr>
         <p:spPr>
           <a:xfrm>
-            <a:off x="365760" y="219456"/>
-            <a:ext cx="1371600" cy="640080"/>
+            <a:off x="365760" y="310896"/>
+            <a:ext cx="1417320" cy="676656"/>
           </a:xfrm>
           <a:prstGeom prst="rect">
             <a:avLst/>
@@ -8367,8 +8297,53 @@
         </p:nvSpPr>
         <p:spPr>
           <a:xfrm>
-            <a:off x="1920240" y="146304"/>
-            <a:ext cx="8595360" cy="786384"/>
+            <a:off x="1920240" y="292608"/>
+            <a:ext cx="4572000" cy="713232"/>
+          </a:xfrm>
+          <a:prstGeom prst="rect">
+            <a:avLst/>
+          </a:prstGeom>
+          <a:noFill/>
+        </p:spPr>
+        <p:txBody>
+          <a:bodyPr wrap="square" anchor="ctr" lIns="25400" rIns="25400" tIns="12700" bIns="12700">
+            <a:spAutoFit/>
+          </a:bodyPr>
+          <a:lstStyle/>
+          <a:p>
+            <a:pPr algn="r">
+              <a:lnSpc>
+                <a:spcPct val="100000"/>
+              </a:lnSpc>
+              <a:spcBef>
+                <a:spcPts val="0"/>
+              </a:spcBef>
+              <a:spcAft>
+                <a:spcPts val="400"/>
+              </a:spcAft>
+            </a:pPr>
+            <a:r>
+              <a:rPr sz="1400" b="0" i="0">
+                <a:solidFill>
+                  <a:srgbClr val="ECF3EF"/>
+                </a:solidFill>
+                <a:latin typeface="Calibri"/>
+              </a:rPr>
+              <a:t>Step 12 of 16</a:t>
+            </a:r>
+          </a:p>
+        </p:txBody>
+      </p:sp>
+      <p:sp>
+        <p:nvSpPr>
+          <p:cNvPr id="7" name="TextBox 6"/>
+          <p:cNvSpPr txBox="1"/>
+          <p:nvPr/>
+        </p:nvSpPr>
+        <p:spPr>
+          <a:xfrm>
+            <a:off x="411480" y="1024128"/>
+            <a:ext cx="6035040" cy="713232"/>
           </a:xfrm>
           <a:prstGeom prst="rect">
             <a:avLst/>
@@ -8393,58 +8368,13 @@
               </a:spcAft>
             </a:pPr>
             <a:r>
-              <a:rPr sz="2700" b="1" i="0">
+              <a:rPr sz="2800" b="1" i="0">
                 <a:solidFill>
                   <a:srgbClr val="FFFFFF"/>
                 </a:solidFill>
                 <a:latin typeface="Calibri"/>
               </a:rPr>
               <a:t>Paying dues</a:t>
-            </a:r>
-          </a:p>
-        </p:txBody>
-      </p:sp>
-      <p:sp>
-        <p:nvSpPr>
-          <p:cNvPr id="7" name="TextBox 6"/>
-          <p:cNvSpPr txBox="1"/>
-          <p:nvPr/>
-        </p:nvSpPr>
-        <p:spPr>
-          <a:xfrm>
-            <a:off x="9509760" y="146304"/>
-            <a:ext cx="2377440" cy="786384"/>
-          </a:xfrm>
-          <a:prstGeom prst="rect">
-            <a:avLst/>
-          </a:prstGeom>
-          <a:noFill/>
-        </p:spPr>
-        <p:txBody>
-          <a:bodyPr wrap="square" anchor="ctr" lIns="25400" rIns="25400" tIns="12700" bIns="12700">
-            <a:spAutoFit/>
-          </a:bodyPr>
-          <a:lstStyle/>
-          <a:p>
-            <a:pPr algn="r">
-              <a:lnSpc>
-                <a:spcPct val="100000"/>
-              </a:lnSpc>
-              <a:spcBef>
-                <a:spcPts val="0"/>
-              </a:spcBef>
-              <a:spcAft>
-                <a:spcPts val="400"/>
-              </a:spcAft>
-            </a:pPr>
-            <a:r>
-              <a:rPr sz="1300" b="0" i="0">
-                <a:solidFill>
-                  <a:srgbClr val="ECF3EF"/>
-                </a:solidFill>
-                <a:latin typeface="Calibri"/>
-              </a:rPr>
-              <a:t>Step 12 of 16</a:t>
             </a:r>
           </a:p>
         </p:txBody>
@@ -8457,12 +8387,12 @@
         </p:nvSpPr>
         <p:spPr>
           <a:xfrm>
-            <a:off x="502920" y="1298448"/>
-            <a:ext cx="11201400" cy="603504"/>
+            <a:off x="411480" y="1965960"/>
+            <a:ext cx="6035040" cy="960120"/>
           </a:xfrm>
           <a:prstGeom prst="roundRect">
             <a:avLst>
-              <a:gd name="adj" fmla="val 6000"/>
+              <a:gd name="adj" fmla="val 8000"/>
             </a:avLst>
           </a:prstGeom>
           <a:solidFill>
@@ -8505,8 +8435,8 @@
         </p:nvSpPr>
         <p:spPr>
           <a:xfrm>
-            <a:off x="667512" y="1298448"/>
-            <a:ext cx="1463040" cy="603504"/>
+            <a:off x="612648" y="2084831"/>
+            <a:ext cx="2743200" cy="310896"/>
           </a:xfrm>
           <a:prstGeom prst="rect">
             <a:avLst/>
@@ -8514,7 +8444,7 @@
           <a:noFill/>
         </p:spPr>
         <p:txBody>
-          <a:bodyPr wrap="square" anchor="ctr" lIns="25400" rIns="25400" tIns="12700" bIns="12700">
+          <a:bodyPr wrap="square" anchor="t" lIns="25400" rIns="25400" tIns="12700" bIns="12700">
             <a:spAutoFit/>
           </a:bodyPr>
           <a:lstStyle/>
@@ -8531,7 +8461,7 @@
               </a:spcAft>
             </a:pPr>
             <a:r>
-              <a:rPr sz="1300" b="1" i="0">
+              <a:rPr sz="1500" b="1" i="0">
                 <a:solidFill>
                   <a:srgbClr val="15503A"/>
                 </a:solidFill>
@@ -8550,8 +8480,8 @@
         </p:nvSpPr>
         <p:spPr>
           <a:xfrm>
-            <a:off x="2194560" y="1298448"/>
-            <a:ext cx="9372600" cy="603504"/>
+            <a:off x="612648" y="2423160"/>
+            <a:ext cx="5632703" cy="457200"/>
           </a:xfrm>
           <a:prstGeom prst="rect">
             <a:avLst/>
@@ -8559,7 +8489,7 @@
           <a:noFill/>
         </p:spPr>
         <p:txBody>
-          <a:bodyPr wrap="square" anchor="ctr" lIns="25400" rIns="25400" tIns="12700" bIns="12700">
+          <a:bodyPr wrap="square" anchor="t" lIns="25400" rIns="25400" tIns="12700" bIns="12700">
             <a:spAutoFit/>
           </a:bodyPr>
           <a:lstStyle/>
@@ -8576,7 +8506,7 @@
               </a:spcAft>
             </a:pPr>
             <a:r>
-              <a:rPr sz="1500" b="1" i="0">
+              <a:rPr sz="1800" b="1" i="0">
                 <a:solidFill>
                   <a:srgbClr val="14241C"/>
                 </a:solidFill>
@@ -8595,12 +8525,12 @@
         </p:nvSpPr>
         <p:spPr>
           <a:xfrm>
-            <a:off x="502920" y="2029968"/>
-            <a:ext cx="11201400" cy="786384"/>
+            <a:off x="411480" y="3108960"/>
+            <a:ext cx="6035040" cy="1874519"/>
           </a:xfrm>
           <a:prstGeom prst="roundRect">
             <a:avLst>
-              <a:gd name="adj" fmla="val 6000"/>
+              <a:gd name="adj" fmla="val 8000"/>
             </a:avLst>
           </a:prstGeom>
           <a:solidFill>
@@ -8643,8 +8573,8 @@
         </p:nvSpPr>
         <p:spPr>
           <a:xfrm>
-            <a:off x="502920" y="2029968"/>
-            <a:ext cx="91440" cy="786384"/>
+            <a:off x="411480" y="3108960"/>
+            <a:ext cx="109728" cy="1874519"/>
           </a:xfrm>
           <a:prstGeom prst="rect">
             <a:avLst/>
@@ -8687,8 +8617,8 @@
         </p:nvSpPr>
         <p:spPr>
           <a:xfrm>
-            <a:off x="813816" y="2029968"/>
-            <a:ext cx="10698480" cy="786384"/>
+            <a:off x="731520" y="3108960"/>
+            <a:ext cx="5532120" cy="1874519"/>
           </a:xfrm>
           <a:prstGeom prst="rect">
             <a:avLst/>
@@ -8713,7 +8643,7 @@
               </a:spcAft>
             </a:pPr>
             <a:r>
-              <a:rPr sz="1800" b="1" i="0">
+              <a:rPr sz="2100" b="1" i="0">
                 <a:solidFill>
                   <a:srgbClr val="14241C"/>
                 </a:solidFill>
@@ -8732,8 +8662,8 @@
         </p:nvSpPr>
         <p:spPr>
           <a:xfrm>
-            <a:off x="594360" y="3035808"/>
-            <a:ext cx="11018520" cy="2468880"/>
+            <a:off x="502920" y="5212079"/>
+            <a:ext cx="5852159" cy="4480560"/>
           </a:xfrm>
           <a:prstGeom prst="rect">
             <a:avLst/>
@@ -8754,11 +8684,11 @@
                 <a:spcPts val="0"/>
               </a:spcBef>
               <a:spcAft>
-                <a:spcPts val="1000"/>
+                <a:spcPts val="1300"/>
               </a:spcAft>
             </a:pPr>
             <a:r>
-              <a:rPr sz="1600" b="1" i="0">
+              <a:rPr sz="1900" b="1" i="0">
                 <a:solidFill>
                   <a:srgbClr val="15503A"/>
                 </a:solidFill>
@@ -8767,7 +8697,7 @@
               <a:t>•  </a:t>
             </a:r>
             <a:r>
-              <a:rPr sz="1600" b="1" i="0">
+              <a:rPr sz="1900" b="1" i="0">
                 <a:solidFill>
                   <a:srgbClr val="14241C"/>
                 </a:solidFill>
@@ -8776,7 +8706,7 @@
               <a:t>See who &amp; how</a:t>
             </a:r>
             <a:r>
-              <a:rPr sz="1600" b="0" i="0">
+              <a:rPr sz="1900" b="0" i="0">
                 <a:solidFill>
                   <a:srgbClr val="14241C"/>
                 </a:solidFill>
@@ -8794,11 +8724,11 @@
                 <a:spcPts val="0"/>
               </a:spcBef>
               <a:spcAft>
-                <a:spcPts val="1000"/>
+                <a:spcPts val="1300"/>
               </a:spcAft>
             </a:pPr>
             <a:r>
-              <a:rPr sz="1600" b="1" i="0">
+              <a:rPr sz="1900" b="1" i="0">
                 <a:solidFill>
                   <a:srgbClr val="15503A"/>
                 </a:solidFill>
@@ -8807,7 +8737,7 @@
               <a:t>•  </a:t>
             </a:r>
             <a:r>
-              <a:rPr sz="1600" b="1" i="0">
+              <a:rPr sz="1900" b="1" i="0">
                 <a:solidFill>
                   <a:srgbClr val="14241C"/>
                 </a:solidFill>
@@ -8816,7 +8746,7 @@
               <a:t>One tap opens</a:t>
             </a:r>
             <a:r>
-              <a:rPr sz="1600" b="0" i="0">
+              <a:rPr sz="1900" b="0" i="0">
                 <a:solidFill>
                   <a:srgbClr val="14241C"/>
                 </a:solidFill>
@@ -8834,11 +8764,11 @@
                 <a:spcPts val="0"/>
               </a:spcBef>
               <a:spcAft>
-                <a:spcPts val="1000"/>
+                <a:spcPts val="1300"/>
               </a:spcAft>
             </a:pPr>
             <a:r>
-              <a:rPr sz="1600" b="1" i="0">
+              <a:rPr sz="1900" b="1" i="0">
                 <a:solidFill>
                   <a:srgbClr val="15503A"/>
                 </a:solidFill>
@@ -8847,7 +8777,7 @@
               <a:t>•  </a:t>
             </a:r>
             <a:r>
-              <a:rPr sz="1600" b="1" i="0">
+              <a:rPr sz="1900" b="1" i="0">
                 <a:solidFill>
                   <a:srgbClr val="14241C"/>
                 </a:solidFill>
@@ -8856,7 +8786,7 @@
               <a:t>Nothing stored</a:t>
             </a:r>
             <a:r>
-              <a:rPr sz="1600" b="0" i="0">
+              <a:rPr sz="1900" b="0" i="0">
                 <a:solidFill>
                   <a:srgbClr val="14241C"/>
                 </a:solidFill>
@@ -8874,11 +8804,11 @@
                 <a:spcPts val="0"/>
               </a:spcBef>
               <a:spcAft>
-                <a:spcPts val="1000"/>
+                <a:spcPts val="1300"/>
               </a:spcAft>
             </a:pPr>
             <a:r>
-              <a:rPr sz="1600" b="1" i="0">
+              <a:rPr sz="1900" b="1" i="0">
                 <a:solidFill>
                   <a:srgbClr val="15503A"/>
                 </a:solidFill>
@@ -8887,7 +8817,7 @@
               <a:t>•  </a:t>
             </a:r>
             <a:r>
-              <a:rPr sz="1600" b="1" i="0">
+              <a:rPr sz="1900" b="1" i="0">
                 <a:solidFill>
                   <a:srgbClr val="14241C"/>
                 </a:solidFill>
@@ -8896,7 +8826,7 @@
               <a:t>$100 / adult</a:t>
             </a:r>
             <a:r>
-              <a:rPr sz="1600" b="0" i="0">
+              <a:rPr sz="1900" b="0" i="0">
                 <a:solidFill>
                   <a:srgbClr val="14241C"/>
                 </a:solidFill>
@@ -8915,12 +8845,12 @@
         </p:nvSpPr>
         <p:spPr>
           <a:xfrm>
-            <a:off x="502920" y="5486400"/>
-            <a:ext cx="11201400" cy="566928"/>
+            <a:off x="411480" y="9784080"/>
+            <a:ext cx="6035040" cy="1143000"/>
           </a:xfrm>
           <a:prstGeom prst="roundRect">
             <a:avLst>
-              <a:gd name="adj" fmla="val 6000"/>
+              <a:gd name="adj" fmla="val 8000"/>
             </a:avLst>
           </a:prstGeom>
           <a:solidFill>
@@ -8963,8 +8893,8 @@
         </p:nvSpPr>
         <p:spPr>
           <a:xfrm>
-            <a:off x="667512" y="5486400"/>
-            <a:ext cx="1828800" cy="566928"/>
+            <a:off x="612648" y="9902952"/>
+            <a:ext cx="3657600" cy="310896"/>
           </a:xfrm>
           <a:prstGeom prst="rect">
             <a:avLst/>
@@ -8972,7 +8902,7 @@
           <a:noFill/>
         </p:spPr>
         <p:txBody>
-          <a:bodyPr wrap="square" anchor="ctr" lIns="25400" rIns="25400" tIns="12700" bIns="12700">
+          <a:bodyPr wrap="square" anchor="t" lIns="25400" rIns="25400" tIns="12700" bIns="12700">
             <a:spAutoFit/>
           </a:bodyPr>
           <a:lstStyle/>
@@ -8989,7 +8919,7 @@
               </a:spcAft>
             </a:pPr>
             <a:r>
-              <a:rPr sz="1200" b="1" i="0">
+              <a:rPr sz="1400" b="1" i="0">
                 <a:solidFill>
                   <a:srgbClr val="8B2E2E"/>
                 </a:solidFill>
@@ -9008,8 +8938,8 @@
         </p:nvSpPr>
         <p:spPr>
           <a:xfrm>
-            <a:off x="2560320" y="5486400"/>
-            <a:ext cx="9006840" cy="566928"/>
+            <a:off x="612648" y="10241280"/>
+            <a:ext cx="5632703" cy="640080"/>
           </a:xfrm>
           <a:prstGeom prst="rect">
             <a:avLst/>
@@ -9017,7 +8947,7 @@
           <a:noFill/>
         </p:spPr>
         <p:txBody>
-          <a:bodyPr wrap="square" anchor="ctr" lIns="25400" rIns="25400" tIns="12700" bIns="12700">
+          <a:bodyPr wrap="square" anchor="t" lIns="25400" rIns="25400" tIns="12700" bIns="12700">
             <a:spAutoFit/>
           </a:bodyPr>
           <a:lstStyle/>
@@ -9034,7 +8964,7 @@
               </a:spcAft>
             </a:pPr>
             <a:r>
-              <a:rPr sz="1300" b="0" i="0">
+              <a:rPr sz="1500" b="0" i="0">
                 <a:solidFill>
                   <a:srgbClr val="14241C"/>
                 </a:solidFill>
@@ -9053,12 +8983,12 @@
         </p:nvSpPr>
         <p:spPr>
           <a:xfrm>
-            <a:off x="365760" y="6510528"/>
-            <a:ext cx="11521440" cy="63500"/>
+            <a:off x="411480" y="11539728"/>
+            <a:ext cx="6035040" cy="64008"/>
           </a:xfrm>
           <a:prstGeom prst="roundRect">
             <a:avLst>
-              <a:gd name="adj" fmla="val 6000"/>
+              <a:gd name="adj" fmla="val 8000"/>
             </a:avLst>
           </a:prstGeom>
           <a:solidFill>
@@ -9099,12 +9029,12 @@
         </p:nvSpPr>
         <p:spPr>
           <a:xfrm>
-            <a:off x="365760" y="6510528"/>
-            <a:ext cx="8641080" cy="63500"/>
+            <a:off x="411480" y="11539728"/>
+            <a:ext cx="4526279" cy="64008"/>
           </a:xfrm>
           <a:prstGeom prst="roundRect">
             <a:avLst>
-              <a:gd name="adj" fmla="val 6000"/>
+              <a:gd name="adj" fmla="val 8000"/>
             </a:avLst>
           </a:prstGeom>
           <a:solidFill>
@@ -9145,8 +9075,8 @@
         </p:nvSpPr>
         <p:spPr>
           <a:xfrm>
-            <a:off x="365760" y="6163056"/>
-            <a:ext cx="11430000" cy="292608"/>
+            <a:off x="411480" y="11137392"/>
+            <a:ext cx="6035040" cy="310896"/>
           </a:xfrm>
           <a:prstGeom prst="rect">
             <a:avLst/>
@@ -9171,7 +9101,7 @@
               </a:spcAft>
             </a:pPr>
             <a:r>
-              <a:rPr sz="1100" b="1" i="0">
+              <a:rPr sz="1200" b="1" i="0">
                 <a:solidFill>
                   <a:srgbClr val="6B7068"/>
                 </a:solidFill>
@@ -9180,7 +9110,7 @@
               <a:t>NEXT  ›  </a:t>
             </a:r>
             <a:r>
-              <a:rPr sz="1100" b="0" i="1">
+              <a:rPr sz="1200" b="0" i="1">
                 <a:solidFill>
                   <a:srgbClr val="6B7068"/>
                 </a:solidFill>
@@ -9218,7 +9148,7 @@
         <p:spPr>
           <a:xfrm>
             <a:off x="0" y="0"/>
-            <a:ext cx="12191695" cy="6858000"/>
+            <a:ext cx="6858000" cy="12191695"/>
           </a:xfrm>
           <a:prstGeom prst="rect">
             <a:avLst/>
@@ -9262,7 +9192,7 @@
         <p:spPr>
           <a:xfrm>
             <a:off x="0" y="0"/>
-            <a:ext cx="12191695" cy="1078992"/>
+            <a:ext cx="6858000" cy="1783080"/>
           </a:xfrm>
           <a:prstGeom prst="rect">
             <a:avLst/>
@@ -9305,12 +9235,12 @@
         </p:nvSpPr>
         <p:spPr>
           <a:xfrm>
-            <a:off x="365760" y="201168"/>
-            <a:ext cx="1371600" cy="676656"/>
+            <a:off x="365760" y="292608"/>
+            <a:ext cx="1417320" cy="713232"/>
           </a:xfrm>
           <a:prstGeom prst="roundRect">
             <a:avLst>
-              <a:gd name="adj" fmla="val 6000"/>
+              <a:gd name="adj" fmla="val 8000"/>
             </a:avLst>
           </a:prstGeom>
           <a:solidFill>
@@ -9351,8 +9281,8 @@
         </p:nvSpPr>
         <p:spPr>
           <a:xfrm>
-            <a:off x="365760" y="219456"/>
-            <a:ext cx="1371600" cy="640080"/>
+            <a:off x="365760" y="310896"/>
+            <a:ext cx="1417320" cy="676656"/>
           </a:xfrm>
           <a:prstGeom prst="rect">
             <a:avLst/>
@@ -9396,8 +9326,53 @@
         </p:nvSpPr>
         <p:spPr>
           <a:xfrm>
-            <a:off x="1920240" y="146304"/>
-            <a:ext cx="8595360" cy="786384"/>
+            <a:off x="1920240" y="292608"/>
+            <a:ext cx="4572000" cy="713232"/>
+          </a:xfrm>
+          <a:prstGeom prst="rect">
+            <a:avLst/>
+          </a:prstGeom>
+          <a:noFill/>
+        </p:spPr>
+        <p:txBody>
+          <a:bodyPr wrap="square" anchor="ctr" lIns="25400" rIns="25400" tIns="12700" bIns="12700">
+            <a:spAutoFit/>
+          </a:bodyPr>
+          <a:lstStyle/>
+          <a:p>
+            <a:pPr algn="r">
+              <a:lnSpc>
+                <a:spcPct val="100000"/>
+              </a:lnSpc>
+              <a:spcBef>
+                <a:spcPts val="0"/>
+              </a:spcBef>
+              <a:spcAft>
+                <a:spcPts val="400"/>
+              </a:spcAft>
+            </a:pPr>
+            <a:r>
+              <a:rPr sz="1400" b="0" i="0">
+                <a:solidFill>
+                  <a:srgbClr val="ECF3EF"/>
+                </a:solidFill>
+                <a:latin typeface="Calibri"/>
+              </a:rPr>
+              <a:t>Step 13 of 16</a:t>
+            </a:r>
+          </a:p>
+        </p:txBody>
+      </p:sp>
+      <p:sp>
+        <p:nvSpPr>
+          <p:cNvPr id="7" name="TextBox 6"/>
+          <p:cNvSpPr txBox="1"/>
+          <p:nvPr/>
+        </p:nvSpPr>
+        <p:spPr>
+          <a:xfrm>
+            <a:off x="411480" y="1024128"/>
+            <a:ext cx="6035040" cy="713232"/>
           </a:xfrm>
           <a:prstGeom prst="rect">
             <a:avLst/>
@@ -9422,58 +9397,13 @@
               </a:spcAft>
             </a:pPr>
             <a:r>
-              <a:rPr sz="2700" b="1" i="0">
+              <a:rPr sz="2800" b="1" i="0">
                 <a:solidFill>
                   <a:srgbClr val="FFFFFF"/>
                 </a:solidFill>
                 <a:latin typeface="Calibri"/>
               </a:rPr>
               <a:t>Notifications &amp; alerts</a:t>
-            </a:r>
-          </a:p>
-        </p:txBody>
-      </p:sp>
-      <p:sp>
-        <p:nvSpPr>
-          <p:cNvPr id="7" name="TextBox 6"/>
-          <p:cNvSpPr txBox="1"/>
-          <p:nvPr/>
-        </p:nvSpPr>
-        <p:spPr>
-          <a:xfrm>
-            <a:off x="9509760" y="146304"/>
-            <a:ext cx="2377440" cy="786384"/>
-          </a:xfrm>
-          <a:prstGeom prst="rect">
-            <a:avLst/>
-          </a:prstGeom>
-          <a:noFill/>
-        </p:spPr>
-        <p:txBody>
-          <a:bodyPr wrap="square" anchor="ctr" lIns="25400" rIns="25400" tIns="12700" bIns="12700">
-            <a:spAutoFit/>
-          </a:bodyPr>
-          <a:lstStyle/>
-          <a:p>
-            <a:pPr algn="r">
-              <a:lnSpc>
-                <a:spcPct val="100000"/>
-              </a:lnSpc>
-              <a:spcBef>
-                <a:spcPts val="0"/>
-              </a:spcBef>
-              <a:spcAft>
-                <a:spcPts val="400"/>
-              </a:spcAft>
-            </a:pPr>
-            <a:r>
-              <a:rPr sz="1300" b="0" i="0">
-                <a:solidFill>
-                  <a:srgbClr val="ECF3EF"/>
-                </a:solidFill>
-                <a:latin typeface="Calibri"/>
-              </a:rPr>
-              <a:t>Step 13 of 16</a:t>
             </a:r>
           </a:p>
         </p:txBody>
@@ -9486,12 +9416,12 @@
         </p:nvSpPr>
         <p:spPr>
           <a:xfrm>
-            <a:off x="502920" y="1298448"/>
-            <a:ext cx="11201400" cy="603504"/>
+            <a:off x="411480" y="1965960"/>
+            <a:ext cx="6035040" cy="960120"/>
           </a:xfrm>
           <a:prstGeom prst="roundRect">
             <a:avLst>
-              <a:gd name="adj" fmla="val 6000"/>
+              <a:gd name="adj" fmla="val 8000"/>
             </a:avLst>
           </a:prstGeom>
           <a:solidFill>
@@ -9534,8 +9464,8 @@
         </p:nvSpPr>
         <p:spPr>
           <a:xfrm>
-            <a:off x="667512" y="1298448"/>
-            <a:ext cx="1463040" cy="603504"/>
+            <a:off x="612648" y="2084831"/>
+            <a:ext cx="2743200" cy="310896"/>
           </a:xfrm>
           <a:prstGeom prst="rect">
             <a:avLst/>
@@ -9543,7 +9473,7 @@
           <a:noFill/>
         </p:spPr>
         <p:txBody>
-          <a:bodyPr wrap="square" anchor="ctr" lIns="25400" rIns="25400" tIns="12700" bIns="12700">
+          <a:bodyPr wrap="square" anchor="t" lIns="25400" rIns="25400" tIns="12700" bIns="12700">
             <a:spAutoFit/>
           </a:bodyPr>
           <a:lstStyle/>
@@ -9560,7 +9490,7 @@
               </a:spcAft>
             </a:pPr>
             <a:r>
-              <a:rPr sz="1300" b="1" i="0">
+              <a:rPr sz="1500" b="1" i="0">
                 <a:solidFill>
                   <a:srgbClr val="15503A"/>
                 </a:solidFill>
@@ -9579,8 +9509,8 @@
         </p:nvSpPr>
         <p:spPr>
           <a:xfrm>
-            <a:off x="2194560" y="1298448"/>
-            <a:ext cx="9372600" cy="603504"/>
+            <a:off x="612648" y="2423160"/>
+            <a:ext cx="5632703" cy="457200"/>
           </a:xfrm>
           <a:prstGeom prst="rect">
             <a:avLst/>
@@ -9588,7 +9518,7 @@
           <a:noFill/>
         </p:spPr>
         <p:txBody>
-          <a:bodyPr wrap="square" anchor="ctr" lIns="25400" rIns="25400" tIns="12700" bIns="12700">
+          <a:bodyPr wrap="square" anchor="t" lIns="25400" rIns="25400" tIns="12700" bIns="12700">
             <a:spAutoFit/>
           </a:bodyPr>
           <a:lstStyle/>
@@ -9605,7 +9535,7 @@
               </a:spcAft>
             </a:pPr>
             <a:r>
-              <a:rPr sz="1500" b="1" i="0">
+              <a:rPr sz="1800" b="1" i="0">
                 <a:solidFill>
                   <a:srgbClr val="14241C"/>
                 </a:solidFill>
@@ -9624,12 +9554,12 @@
         </p:nvSpPr>
         <p:spPr>
           <a:xfrm>
-            <a:off x="502920" y="2029968"/>
-            <a:ext cx="11201400" cy="786384"/>
+            <a:off x="411480" y="3108960"/>
+            <a:ext cx="6035040" cy="1874519"/>
           </a:xfrm>
           <a:prstGeom prst="roundRect">
             <a:avLst>
-              <a:gd name="adj" fmla="val 6000"/>
+              <a:gd name="adj" fmla="val 8000"/>
             </a:avLst>
           </a:prstGeom>
           <a:solidFill>
@@ -9672,8 +9602,8 @@
         </p:nvSpPr>
         <p:spPr>
           <a:xfrm>
-            <a:off x="502920" y="2029968"/>
-            <a:ext cx="91440" cy="786384"/>
+            <a:off x="411480" y="3108960"/>
+            <a:ext cx="109728" cy="1874519"/>
           </a:xfrm>
           <a:prstGeom prst="rect">
             <a:avLst/>
@@ -9716,8 +9646,8 @@
         </p:nvSpPr>
         <p:spPr>
           <a:xfrm>
-            <a:off x="813816" y="2029968"/>
-            <a:ext cx="10698480" cy="786384"/>
+            <a:off x="731520" y="3108960"/>
+            <a:ext cx="5532120" cy="1874519"/>
           </a:xfrm>
           <a:prstGeom prst="rect">
             <a:avLst/>
@@ -9742,7 +9672,7 @@
               </a:spcAft>
             </a:pPr>
             <a:r>
-              <a:rPr sz="1800" b="1" i="0">
+              <a:rPr sz="2100" b="1" i="0">
                 <a:solidFill>
                   <a:srgbClr val="14241C"/>
                 </a:solidFill>
@@ -9761,8 +9691,8 @@
         </p:nvSpPr>
         <p:spPr>
           <a:xfrm>
-            <a:off x="594360" y="3035808"/>
-            <a:ext cx="11018520" cy="2468880"/>
+            <a:off x="502920" y="5212079"/>
+            <a:ext cx="5852159" cy="4480560"/>
           </a:xfrm>
           <a:prstGeom prst="rect">
             <a:avLst/>
@@ -9783,11 +9713,11 @@
                 <a:spcPts val="0"/>
               </a:spcBef>
               <a:spcAft>
-                <a:spcPts val="1000"/>
+                <a:spcPts val="1300"/>
               </a:spcAft>
             </a:pPr>
             <a:r>
-              <a:rPr sz="1600" b="1" i="0">
+              <a:rPr sz="1900" b="1" i="0">
                 <a:solidFill>
                   <a:srgbClr val="15503A"/>
                 </a:solidFill>
@@ -9796,7 +9726,7 @@
               <a:t>•  </a:t>
             </a:r>
             <a:r>
-              <a:rPr sz="1600" b="1" i="0">
+              <a:rPr sz="1900" b="1" i="0">
                 <a:solidFill>
                   <a:srgbClr val="14241C"/>
                 </a:solidFill>
@@ -9805,7 +9735,7 @@
               <a:t>Activity feed</a:t>
             </a:r>
             <a:r>
-              <a:rPr sz="1600" b="0" i="0">
+              <a:rPr sz="1900" b="0" i="0">
                 <a:solidFill>
                   <a:srgbClr val="14241C"/>
                 </a:solidFill>
@@ -9823,11 +9753,11 @@
                 <a:spcPts val="0"/>
               </a:spcBef>
               <a:spcAft>
-                <a:spcPts val="1000"/>
+                <a:spcPts val="1300"/>
               </a:spcAft>
             </a:pPr>
             <a:r>
-              <a:rPr sz="1600" b="1" i="0">
+              <a:rPr sz="1900" b="1" i="0">
                 <a:solidFill>
                   <a:srgbClr val="15503A"/>
                 </a:solidFill>
@@ -9836,7 +9766,7 @@
               <a:t>•  </a:t>
             </a:r>
             <a:r>
-              <a:rPr sz="1600" b="1" i="0">
+              <a:rPr sz="1900" b="1" i="0">
                 <a:solidFill>
                   <a:srgbClr val="14241C"/>
                 </a:solidFill>
@@ -9845,7 +9775,7 @@
               <a:t>Red badge</a:t>
             </a:r>
             <a:r>
-              <a:rPr sz="1600" b="0" i="0">
+              <a:rPr sz="1900" b="0" i="0">
                 <a:solidFill>
                   <a:srgbClr val="14241C"/>
                 </a:solidFill>
@@ -9863,11 +9793,11 @@
                 <a:spcPts val="0"/>
               </a:spcBef>
               <a:spcAft>
-                <a:spcPts val="1000"/>
+                <a:spcPts val="1300"/>
               </a:spcAft>
             </a:pPr>
             <a:r>
-              <a:rPr sz="1600" b="1" i="0">
+              <a:rPr sz="1900" b="1" i="0">
                 <a:solidFill>
                   <a:srgbClr val="15503A"/>
                 </a:solidFill>
@@ -9876,7 +9806,7 @@
               <a:t>•  </a:t>
             </a:r>
             <a:r>
-              <a:rPr sz="1600" b="1" i="0">
+              <a:rPr sz="1900" b="1" i="0">
                 <a:solidFill>
                   <a:srgbClr val="14241C"/>
                 </a:solidFill>
@@ -9885,7 +9815,7 @@
               <a:t>Push to your phone</a:t>
             </a:r>
             <a:r>
-              <a:rPr sz="1600" b="0" i="0">
+              <a:rPr sz="1900" b="0" i="0">
                 <a:solidFill>
                   <a:srgbClr val="14241C"/>
                 </a:solidFill>
@@ -9903,11 +9833,11 @@
                 <a:spcPts val="0"/>
               </a:spcBef>
               <a:spcAft>
-                <a:spcPts val="1000"/>
+                <a:spcPts val="1300"/>
               </a:spcAft>
             </a:pPr>
             <a:r>
-              <a:rPr sz="1600" b="1" i="0">
+              <a:rPr sz="1900" b="1" i="0">
                 <a:solidFill>
                   <a:srgbClr val="15503A"/>
                 </a:solidFill>
@@ -9916,7 +9846,7 @@
               <a:t>•  </a:t>
             </a:r>
             <a:r>
-              <a:rPr sz="1600" b="1" i="0">
+              <a:rPr sz="1900" b="1" i="0">
                 <a:solidFill>
                   <a:srgbClr val="14241C"/>
                 </a:solidFill>
@@ -9925,7 +9855,7 @@
               <a:t>Admin announcements</a:t>
             </a:r>
             <a:r>
-              <a:rPr sz="1600" b="0" i="0">
+              <a:rPr sz="1900" b="0" i="0">
                 <a:solidFill>
                   <a:srgbClr val="14241C"/>
                 </a:solidFill>
@@ -9944,12 +9874,12 @@
         </p:nvSpPr>
         <p:spPr>
           <a:xfrm>
-            <a:off x="502920" y="5486400"/>
-            <a:ext cx="11201400" cy="566928"/>
+            <a:off x="411480" y="9784080"/>
+            <a:ext cx="6035040" cy="1143000"/>
           </a:xfrm>
           <a:prstGeom prst="roundRect">
             <a:avLst>
-              <a:gd name="adj" fmla="val 6000"/>
+              <a:gd name="adj" fmla="val 8000"/>
             </a:avLst>
           </a:prstGeom>
           <a:solidFill>
@@ -9992,8 +9922,8 @@
         </p:nvSpPr>
         <p:spPr>
           <a:xfrm>
-            <a:off x="667512" y="5486400"/>
-            <a:ext cx="1828800" cy="566928"/>
+            <a:off x="612648" y="9902952"/>
+            <a:ext cx="3657600" cy="310896"/>
           </a:xfrm>
           <a:prstGeom prst="rect">
             <a:avLst/>
@@ -10001,7 +9931,7 @@
           <a:noFill/>
         </p:spPr>
         <p:txBody>
-          <a:bodyPr wrap="square" anchor="ctr" lIns="25400" rIns="25400" tIns="12700" bIns="12700">
+          <a:bodyPr wrap="square" anchor="t" lIns="25400" rIns="25400" tIns="12700" bIns="12700">
             <a:spAutoFit/>
           </a:bodyPr>
           <a:lstStyle/>
@@ -10018,7 +9948,7 @@
               </a:spcAft>
             </a:pPr>
             <a:r>
-              <a:rPr sz="1200" b="1" i="0">
+              <a:rPr sz="1400" b="1" i="0">
                 <a:solidFill>
                   <a:srgbClr val="8B2E2E"/>
                 </a:solidFill>
@@ -10037,8 +9967,8 @@
         </p:nvSpPr>
         <p:spPr>
           <a:xfrm>
-            <a:off x="2560320" y="5486400"/>
-            <a:ext cx="9006840" cy="566928"/>
+            <a:off x="612648" y="10241280"/>
+            <a:ext cx="5632703" cy="640080"/>
           </a:xfrm>
           <a:prstGeom prst="rect">
             <a:avLst/>
@@ -10046,7 +9976,7 @@
           <a:noFill/>
         </p:spPr>
         <p:txBody>
-          <a:bodyPr wrap="square" anchor="ctr" lIns="25400" rIns="25400" tIns="12700" bIns="12700">
+          <a:bodyPr wrap="square" anchor="t" lIns="25400" rIns="25400" tIns="12700" bIns="12700">
             <a:spAutoFit/>
           </a:bodyPr>
           <a:lstStyle/>
@@ -10063,7 +9993,7 @@
               </a:spcAft>
             </a:pPr>
             <a:r>
-              <a:rPr sz="1300" b="0" i="0">
+              <a:rPr sz="1500" b="0" i="0">
                 <a:solidFill>
                   <a:srgbClr val="14241C"/>
                 </a:solidFill>
@@ -10082,12 +10012,12 @@
         </p:nvSpPr>
         <p:spPr>
           <a:xfrm>
-            <a:off x="365760" y="6510528"/>
-            <a:ext cx="11521440" cy="63500"/>
+            <a:off x="411480" y="11539728"/>
+            <a:ext cx="6035040" cy="64008"/>
           </a:xfrm>
           <a:prstGeom prst="roundRect">
             <a:avLst>
-              <a:gd name="adj" fmla="val 6000"/>
+              <a:gd name="adj" fmla="val 8000"/>
             </a:avLst>
           </a:prstGeom>
           <a:solidFill>
@@ -10128,12 +10058,12 @@
         </p:nvSpPr>
         <p:spPr>
           <a:xfrm>
-            <a:off x="365760" y="6510528"/>
-            <a:ext cx="9361170" cy="63500"/>
+            <a:off x="411480" y="11539728"/>
+            <a:ext cx="4903470" cy="64008"/>
           </a:xfrm>
           <a:prstGeom prst="roundRect">
             <a:avLst>
-              <a:gd name="adj" fmla="val 6000"/>
+              <a:gd name="adj" fmla="val 8000"/>
             </a:avLst>
           </a:prstGeom>
           <a:solidFill>
@@ -10174,8 +10104,8 @@
         </p:nvSpPr>
         <p:spPr>
           <a:xfrm>
-            <a:off x="365760" y="6163056"/>
-            <a:ext cx="11430000" cy="292608"/>
+            <a:off x="411480" y="11137392"/>
+            <a:ext cx="6035040" cy="310896"/>
           </a:xfrm>
           <a:prstGeom prst="rect">
             <a:avLst/>
@@ -10200,7 +10130,7 @@
               </a:spcAft>
             </a:pPr>
             <a:r>
-              <a:rPr sz="1100" b="1" i="0">
+              <a:rPr sz="1200" b="1" i="0">
                 <a:solidFill>
                   <a:srgbClr val="6B7068"/>
                 </a:solidFill>
@@ -10209,7 +10139,7 @@
               <a:t>NEXT  ›  </a:t>
             </a:r>
             <a:r>
-              <a:rPr sz="1100" b="0" i="1">
+              <a:rPr sz="1200" b="0" i="1">
                 <a:solidFill>
                   <a:srgbClr val="6B7068"/>
                 </a:solidFill>
@@ -10247,7 +10177,7 @@
         <p:spPr>
           <a:xfrm>
             <a:off x="0" y="0"/>
-            <a:ext cx="12191695" cy="6858000"/>
+            <a:ext cx="6858000" cy="12191695"/>
           </a:xfrm>
           <a:prstGeom prst="rect">
             <a:avLst/>
@@ -10291,7 +10221,7 @@
         <p:spPr>
           <a:xfrm>
             <a:off x="0" y="0"/>
-            <a:ext cx="12191695" cy="1078992"/>
+            <a:ext cx="6858000" cy="1783080"/>
           </a:xfrm>
           <a:prstGeom prst="rect">
             <a:avLst/>
@@ -10334,12 +10264,12 @@
         </p:nvSpPr>
         <p:spPr>
           <a:xfrm>
-            <a:off x="365760" y="201168"/>
-            <a:ext cx="1371600" cy="676656"/>
+            <a:off x="365760" y="292608"/>
+            <a:ext cx="1417320" cy="713232"/>
           </a:xfrm>
           <a:prstGeom prst="roundRect">
             <a:avLst>
-              <a:gd name="adj" fmla="val 6000"/>
+              <a:gd name="adj" fmla="val 8000"/>
             </a:avLst>
           </a:prstGeom>
           <a:solidFill>
@@ -10380,8 +10310,8 @@
         </p:nvSpPr>
         <p:spPr>
           <a:xfrm>
-            <a:off x="365760" y="219456"/>
-            <a:ext cx="1371600" cy="640080"/>
+            <a:off x="365760" y="310896"/>
+            <a:ext cx="1417320" cy="676656"/>
           </a:xfrm>
           <a:prstGeom prst="rect">
             <a:avLst/>
@@ -10425,8 +10355,53 @@
         </p:nvSpPr>
         <p:spPr>
           <a:xfrm>
-            <a:off x="1920240" y="146304"/>
-            <a:ext cx="8595360" cy="786384"/>
+            <a:off x="1920240" y="292608"/>
+            <a:ext cx="4572000" cy="713232"/>
+          </a:xfrm>
+          <a:prstGeom prst="rect">
+            <a:avLst/>
+          </a:prstGeom>
+          <a:noFill/>
+        </p:spPr>
+        <p:txBody>
+          <a:bodyPr wrap="square" anchor="ctr" lIns="25400" rIns="25400" tIns="12700" bIns="12700">
+            <a:spAutoFit/>
+          </a:bodyPr>
+          <a:lstStyle/>
+          <a:p>
+            <a:pPr algn="r">
+              <a:lnSpc>
+                <a:spcPct val="100000"/>
+              </a:lnSpc>
+              <a:spcBef>
+                <a:spcPts val="0"/>
+              </a:spcBef>
+              <a:spcAft>
+                <a:spcPts val="400"/>
+              </a:spcAft>
+            </a:pPr>
+            <a:r>
+              <a:rPr sz="1400" b="0" i="0">
+                <a:solidFill>
+                  <a:srgbClr val="ECF3EF"/>
+                </a:solidFill>
+                <a:latin typeface="Calibri"/>
+              </a:rPr>
+              <a:t>Step 14 of 16</a:t>
+            </a:r>
+          </a:p>
+        </p:txBody>
+      </p:sp>
+      <p:sp>
+        <p:nvSpPr>
+          <p:cNvPr id="7" name="TextBox 6"/>
+          <p:cNvSpPr txBox="1"/>
+          <p:nvPr/>
+        </p:nvSpPr>
+        <p:spPr>
+          <a:xfrm>
+            <a:off x="411480" y="1024128"/>
+            <a:ext cx="6035040" cy="713232"/>
           </a:xfrm>
           <a:prstGeom prst="rect">
             <a:avLst/>
@@ -10451,58 +10426,13 @@
               </a:spcAft>
             </a:pPr>
             <a:r>
-              <a:rPr sz="2700" b="1" i="0">
+              <a:rPr sz="2800" b="1" i="0">
                 <a:solidFill>
                   <a:srgbClr val="FFFFFF"/>
                 </a:solidFill>
                 <a:latin typeface="Calibri"/>
               </a:rPr>
               <a:t>How to get it + sign in</a:t>
-            </a:r>
-          </a:p>
-        </p:txBody>
-      </p:sp>
-      <p:sp>
-        <p:nvSpPr>
-          <p:cNvPr id="7" name="TextBox 6"/>
-          <p:cNvSpPr txBox="1"/>
-          <p:nvPr/>
-        </p:nvSpPr>
-        <p:spPr>
-          <a:xfrm>
-            <a:off x="9509760" y="146304"/>
-            <a:ext cx="2377440" cy="786384"/>
-          </a:xfrm>
-          <a:prstGeom prst="rect">
-            <a:avLst/>
-          </a:prstGeom>
-          <a:noFill/>
-        </p:spPr>
-        <p:txBody>
-          <a:bodyPr wrap="square" anchor="ctr" lIns="25400" rIns="25400" tIns="12700" bIns="12700">
-            <a:spAutoFit/>
-          </a:bodyPr>
-          <a:lstStyle/>
-          <a:p>
-            <a:pPr algn="r">
-              <a:lnSpc>
-                <a:spcPct val="100000"/>
-              </a:lnSpc>
-              <a:spcBef>
-                <a:spcPts val="0"/>
-              </a:spcBef>
-              <a:spcAft>
-                <a:spcPts val="400"/>
-              </a:spcAft>
-            </a:pPr>
-            <a:r>
-              <a:rPr sz="1300" b="0" i="0">
-                <a:solidFill>
-                  <a:srgbClr val="ECF3EF"/>
-                </a:solidFill>
-                <a:latin typeface="Calibri"/>
-              </a:rPr>
-              <a:t>Step 14 of 16</a:t>
             </a:r>
           </a:p>
         </p:txBody>
@@ -10515,12 +10445,12 @@
         </p:nvSpPr>
         <p:spPr>
           <a:xfrm>
-            <a:off x="502920" y="1298448"/>
-            <a:ext cx="11201400" cy="603504"/>
+            <a:off x="411480" y="1965960"/>
+            <a:ext cx="6035040" cy="960120"/>
           </a:xfrm>
           <a:prstGeom prst="roundRect">
             <a:avLst>
-              <a:gd name="adj" fmla="val 6000"/>
+              <a:gd name="adj" fmla="val 8000"/>
             </a:avLst>
           </a:prstGeom>
           <a:solidFill>
@@ -10563,8 +10493,8 @@
         </p:nvSpPr>
         <p:spPr>
           <a:xfrm>
-            <a:off x="667512" y="1298448"/>
-            <a:ext cx="1463040" cy="603504"/>
+            <a:off x="612648" y="2084831"/>
+            <a:ext cx="2743200" cy="310896"/>
           </a:xfrm>
           <a:prstGeom prst="rect">
             <a:avLst/>
@@ -10572,7 +10502,7 @@
           <a:noFill/>
         </p:spPr>
         <p:txBody>
-          <a:bodyPr wrap="square" anchor="ctr" lIns="25400" rIns="25400" tIns="12700" bIns="12700">
+          <a:bodyPr wrap="square" anchor="t" lIns="25400" rIns="25400" tIns="12700" bIns="12700">
             <a:spAutoFit/>
           </a:bodyPr>
           <a:lstStyle/>
@@ -10589,7 +10519,7 @@
               </a:spcAft>
             </a:pPr>
             <a:r>
-              <a:rPr sz="1300" b="1" i="0">
+              <a:rPr sz="1500" b="1" i="0">
                 <a:solidFill>
                   <a:srgbClr val="15503A"/>
                 </a:solidFill>
@@ -10608,8 +10538,8 @@
         </p:nvSpPr>
         <p:spPr>
           <a:xfrm>
-            <a:off x="2194560" y="1298448"/>
-            <a:ext cx="9372600" cy="603504"/>
+            <a:off x="612648" y="2423160"/>
+            <a:ext cx="5632703" cy="457200"/>
           </a:xfrm>
           <a:prstGeom prst="rect">
             <a:avLst/>
@@ -10617,7 +10547,7 @@
           <a:noFill/>
         </p:spPr>
         <p:txBody>
-          <a:bodyPr wrap="square" anchor="ctr" lIns="25400" rIns="25400" tIns="12700" bIns="12700">
+          <a:bodyPr wrap="square" anchor="t" lIns="25400" rIns="25400" tIns="12700" bIns="12700">
             <a:spAutoFit/>
           </a:bodyPr>
           <a:lstStyle/>
@@ -10634,7 +10564,7 @@
               </a:spcAft>
             </a:pPr>
             <a:r>
-              <a:rPr sz="1500" b="1" i="0">
+              <a:rPr sz="1800" b="1" i="0">
                 <a:solidFill>
                   <a:srgbClr val="14241C"/>
                 </a:solidFill>
@@ -10653,12 +10583,12 @@
         </p:nvSpPr>
         <p:spPr>
           <a:xfrm>
-            <a:off x="502920" y="2029968"/>
-            <a:ext cx="11201400" cy="786384"/>
+            <a:off x="411480" y="3108960"/>
+            <a:ext cx="6035040" cy="1874519"/>
           </a:xfrm>
           <a:prstGeom prst="roundRect">
             <a:avLst>
-              <a:gd name="adj" fmla="val 6000"/>
+              <a:gd name="adj" fmla="val 8000"/>
             </a:avLst>
           </a:prstGeom>
           <a:solidFill>
@@ -10701,8 +10631,8 @@
         </p:nvSpPr>
         <p:spPr>
           <a:xfrm>
-            <a:off x="502920" y="2029968"/>
-            <a:ext cx="91440" cy="786384"/>
+            <a:off x="411480" y="3108960"/>
+            <a:ext cx="109728" cy="1874519"/>
           </a:xfrm>
           <a:prstGeom prst="rect">
             <a:avLst/>
@@ -10745,8 +10675,8 @@
         </p:nvSpPr>
         <p:spPr>
           <a:xfrm>
-            <a:off x="813816" y="2029968"/>
-            <a:ext cx="10698480" cy="786384"/>
+            <a:off x="731520" y="3108960"/>
+            <a:ext cx="5532120" cy="1874519"/>
           </a:xfrm>
           <a:prstGeom prst="rect">
             <a:avLst/>
@@ -10771,7 +10701,7 @@
               </a:spcAft>
             </a:pPr>
             <a:r>
-              <a:rPr sz="1800" b="1" i="0">
+              <a:rPr sz="2100" b="1" i="0">
                 <a:solidFill>
                   <a:srgbClr val="14241C"/>
                 </a:solidFill>
@@ -10790,8 +10720,8 @@
         </p:nvSpPr>
         <p:spPr>
           <a:xfrm>
-            <a:off x="594360" y="3035808"/>
-            <a:ext cx="11018520" cy="2468880"/>
+            <a:off x="502920" y="5212079"/>
+            <a:ext cx="5852159" cy="4480560"/>
           </a:xfrm>
           <a:prstGeom prst="rect">
             <a:avLst/>
@@ -10812,11 +10742,11 @@
                 <a:spcPts val="0"/>
               </a:spcBef>
               <a:spcAft>
-                <a:spcPts val="1000"/>
+                <a:spcPts val="1300"/>
               </a:spcAft>
             </a:pPr>
             <a:r>
-              <a:rPr sz="1600" b="1" i="0">
+              <a:rPr sz="1900" b="1" i="0">
                 <a:solidFill>
                   <a:srgbClr val="15503A"/>
                 </a:solidFill>
@@ -10825,7 +10755,7 @@
               <a:t>•  </a:t>
             </a:r>
             <a:r>
-              <a:rPr sz="1600" b="1" i="0">
+              <a:rPr sz="1900" b="1" i="0">
                 <a:solidFill>
                   <a:srgbClr val="14241C"/>
                 </a:solidFill>
@@ -10834,7 +10764,7 @@
               <a:t>Open the link</a:t>
             </a:r>
             <a:r>
-              <a:rPr sz="1600" b="0" i="0">
+              <a:rPr sz="1900" b="0" i="0">
                 <a:solidFill>
                   <a:srgbClr val="14241C"/>
                 </a:solidFill>
@@ -10852,11 +10782,11 @@
                 <a:spcPts val="0"/>
               </a:spcBef>
               <a:spcAft>
-                <a:spcPts val="1000"/>
+                <a:spcPts val="1300"/>
               </a:spcAft>
             </a:pPr>
             <a:r>
-              <a:rPr sz="1600" b="1" i="0">
+              <a:rPr sz="1900" b="1" i="0">
                 <a:solidFill>
                   <a:srgbClr val="15503A"/>
                 </a:solidFill>
@@ -10865,7 +10795,7 @@
               <a:t>•  </a:t>
             </a:r>
             <a:r>
-              <a:rPr sz="1600" b="1" i="0">
+              <a:rPr sz="1900" b="1" i="0">
                 <a:solidFill>
                   <a:srgbClr val="14241C"/>
                 </a:solidFill>
@@ -10874,7 +10804,7 @@
               <a:t>Add to Home Screen</a:t>
             </a:r>
             <a:r>
-              <a:rPr sz="1600" b="0" i="0">
+              <a:rPr sz="1900" b="0" i="0">
                 <a:solidFill>
                   <a:srgbClr val="14241C"/>
                 </a:solidFill>
@@ -10892,11 +10822,11 @@
                 <a:spcPts val="0"/>
               </a:spcBef>
               <a:spcAft>
-                <a:spcPts val="1000"/>
+                <a:spcPts val="1300"/>
               </a:spcAft>
             </a:pPr>
             <a:r>
-              <a:rPr sz="1600" b="1" i="0">
+              <a:rPr sz="1900" b="1" i="0">
                 <a:solidFill>
                   <a:srgbClr val="15503A"/>
                 </a:solidFill>
@@ -10905,7 +10835,7 @@
               <a:t>•  </a:t>
             </a:r>
             <a:r>
-              <a:rPr sz="1600" b="1" i="0">
+              <a:rPr sz="1900" b="1" i="0">
                 <a:solidFill>
                   <a:srgbClr val="14241C"/>
                 </a:solidFill>
@@ -10914,7 +10844,7 @@
               <a:t>Enter name + email</a:t>
             </a:r>
             <a:r>
-              <a:rPr sz="1600" b="0" i="0">
+              <a:rPr sz="1900" b="0" i="0">
                 <a:solidFill>
                   <a:srgbClr val="14241C"/>
                 </a:solidFill>
@@ -10932,11 +10862,11 @@
                 <a:spcPts val="0"/>
               </a:spcBef>
               <a:spcAft>
-                <a:spcPts val="1000"/>
+                <a:spcPts val="1300"/>
               </a:spcAft>
             </a:pPr>
             <a:r>
-              <a:rPr sz="1600" b="1" i="0">
+              <a:rPr sz="1900" b="1" i="0">
                 <a:solidFill>
                   <a:srgbClr val="15503A"/>
                 </a:solidFill>
@@ -10945,7 +10875,7 @@
               <a:t>•  </a:t>
             </a:r>
             <a:r>
-              <a:rPr sz="1600" b="1" i="0">
+              <a:rPr sz="1900" b="1" i="0">
                 <a:solidFill>
                   <a:srgbClr val="14241C"/>
                 </a:solidFill>
@@ -10954,7 +10884,7 @@
               <a:t>Type the code back</a:t>
             </a:r>
             <a:r>
-              <a:rPr sz="1600" b="0" i="0">
+              <a:rPr sz="1900" b="0" i="0">
                 <a:solidFill>
                   <a:srgbClr val="14241C"/>
                 </a:solidFill>
@@ -10973,12 +10903,12 @@
         </p:nvSpPr>
         <p:spPr>
           <a:xfrm>
-            <a:off x="502920" y="5486400"/>
-            <a:ext cx="11201400" cy="566928"/>
+            <a:off x="411480" y="9784080"/>
+            <a:ext cx="6035040" cy="1143000"/>
           </a:xfrm>
           <a:prstGeom prst="roundRect">
             <a:avLst>
-              <a:gd name="adj" fmla="val 6000"/>
+              <a:gd name="adj" fmla="val 8000"/>
             </a:avLst>
           </a:prstGeom>
           <a:solidFill>
@@ -11021,8 +10951,8 @@
         </p:nvSpPr>
         <p:spPr>
           <a:xfrm>
-            <a:off x="667512" y="5486400"/>
-            <a:ext cx="1828800" cy="566928"/>
+            <a:off x="612648" y="9902952"/>
+            <a:ext cx="3657600" cy="310896"/>
           </a:xfrm>
           <a:prstGeom prst="rect">
             <a:avLst/>
@@ -11030,7 +10960,7 @@
           <a:noFill/>
         </p:spPr>
         <p:txBody>
-          <a:bodyPr wrap="square" anchor="ctr" lIns="25400" rIns="25400" tIns="12700" bIns="12700">
+          <a:bodyPr wrap="square" anchor="t" lIns="25400" rIns="25400" tIns="12700" bIns="12700">
             <a:spAutoFit/>
           </a:bodyPr>
           <a:lstStyle/>
@@ -11047,7 +10977,7 @@
               </a:spcAft>
             </a:pPr>
             <a:r>
-              <a:rPr sz="1200" b="1" i="0">
+              <a:rPr sz="1400" b="1" i="0">
                 <a:solidFill>
                   <a:srgbClr val="8B2E2E"/>
                 </a:solidFill>
@@ -11066,8 +10996,8 @@
         </p:nvSpPr>
         <p:spPr>
           <a:xfrm>
-            <a:off x="2560320" y="5486400"/>
-            <a:ext cx="9006840" cy="566928"/>
+            <a:off x="612648" y="10241280"/>
+            <a:ext cx="5632703" cy="640080"/>
           </a:xfrm>
           <a:prstGeom prst="rect">
             <a:avLst/>
@@ -11075,7 +11005,7 @@
           <a:noFill/>
         </p:spPr>
         <p:txBody>
-          <a:bodyPr wrap="square" anchor="ctr" lIns="25400" rIns="25400" tIns="12700" bIns="12700">
+          <a:bodyPr wrap="square" anchor="t" lIns="25400" rIns="25400" tIns="12700" bIns="12700">
             <a:spAutoFit/>
           </a:bodyPr>
           <a:lstStyle/>
@@ -11092,7 +11022,7 @@
               </a:spcAft>
             </a:pPr>
             <a:r>
-              <a:rPr sz="1300" b="0" i="0">
+              <a:rPr sz="1500" b="0" i="0">
                 <a:solidFill>
                   <a:srgbClr val="14241C"/>
                 </a:solidFill>
@@ -11111,12 +11041,12 @@
         </p:nvSpPr>
         <p:spPr>
           <a:xfrm>
-            <a:off x="365760" y="6510528"/>
-            <a:ext cx="11521440" cy="63500"/>
+            <a:off x="411480" y="11539728"/>
+            <a:ext cx="6035040" cy="64008"/>
           </a:xfrm>
           <a:prstGeom prst="roundRect">
             <a:avLst>
-              <a:gd name="adj" fmla="val 6000"/>
+              <a:gd name="adj" fmla="val 8000"/>
             </a:avLst>
           </a:prstGeom>
           <a:solidFill>
@@ -11157,12 +11087,12 @@
         </p:nvSpPr>
         <p:spPr>
           <a:xfrm>
-            <a:off x="365760" y="6510528"/>
-            <a:ext cx="10081260" cy="63500"/>
+            <a:off x="411480" y="11539728"/>
+            <a:ext cx="5280659" cy="64008"/>
           </a:xfrm>
           <a:prstGeom prst="roundRect">
             <a:avLst>
-              <a:gd name="adj" fmla="val 6000"/>
+              <a:gd name="adj" fmla="val 8000"/>
             </a:avLst>
           </a:prstGeom>
           <a:solidFill>
@@ -11203,8 +11133,8 @@
         </p:nvSpPr>
         <p:spPr>
           <a:xfrm>
-            <a:off x="365760" y="6163056"/>
-            <a:ext cx="11430000" cy="292608"/>
+            <a:off x="411480" y="11137392"/>
+            <a:ext cx="6035040" cy="310896"/>
           </a:xfrm>
           <a:prstGeom prst="rect">
             <a:avLst/>
@@ -11229,7 +11159,7 @@
               </a:spcAft>
             </a:pPr>
             <a:r>
-              <a:rPr sz="1100" b="1" i="0">
+              <a:rPr sz="1200" b="1" i="0">
                 <a:solidFill>
                   <a:srgbClr val="6B7068"/>
                 </a:solidFill>
@@ -11238,7 +11168,7 @@
               <a:t>NEXT  ›  </a:t>
             </a:r>
             <a:r>
-              <a:rPr sz="1100" b="0" i="1">
+              <a:rPr sz="1200" b="0" i="1">
                 <a:solidFill>
                   <a:srgbClr val="6B7068"/>
                 </a:solidFill>
@@ -11276,7 +11206,7 @@
         <p:spPr>
           <a:xfrm>
             <a:off x="0" y="0"/>
-            <a:ext cx="12191695" cy="6858000"/>
+            <a:ext cx="6858000" cy="12191695"/>
           </a:xfrm>
           <a:prstGeom prst="rect">
             <a:avLst/>
@@ -11319,8 +11249,8 @@
         </p:nvSpPr>
         <p:spPr>
           <a:xfrm>
-            <a:off x="640080" y="640080"/>
-            <a:ext cx="10908792" cy="822960"/>
+            <a:off x="457200" y="1280160"/>
+            <a:ext cx="5943600" cy="1280160"/>
           </a:xfrm>
           <a:prstGeom prst="rect">
             <a:avLst/>
@@ -11364,8 +11294,8 @@
         </p:nvSpPr>
         <p:spPr>
           <a:xfrm>
-            <a:off x="640080" y="1481328"/>
-            <a:ext cx="10908792" cy="457200"/>
+            <a:off x="548640" y="2651760"/>
+            <a:ext cx="5760720" cy="914400"/>
           </a:xfrm>
           <a:prstGeom prst="rect">
             <a:avLst/>
@@ -11390,7 +11320,7 @@
               </a:spcAft>
             </a:pPr>
             <a:r>
-              <a:rPr sz="1700" b="0" i="0">
+              <a:rPr sz="1800" b="0" i="0">
                 <a:solidFill>
                   <a:srgbClr val="E9E2C9"/>
                 </a:solidFill>
@@ -11409,12 +11339,12 @@
         </p:nvSpPr>
         <p:spPr>
           <a:xfrm>
-            <a:off x="4358487" y="2057400"/>
-            <a:ext cx="3474720" cy="3474720"/>
+            <a:off x="914400" y="4023360"/>
+            <a:ext cx="5029200" cy="5029200"/>
           </a:xfrm>
           <a:prstGeom prst="roundRect">
             <a:avLst>
-              <a:gd name="adj" fmla="val 6000"/>
+              <a:gd name="adj" fmla="val 8000"/>
             </a:avLst>
           </a:prstGeom>
           <a:solidFill>
@@ -11463,8 +11393,8 @@
         </p:blipFill>
         <p:spPr>
           <a:xfrm>
-            <a:off x="4587087" y="2286000"/>
-            <a:ext cx="3017520" cy="3017520"/>
+            <a:off x="1234440" y="4343400"/>
+            <a:ext cx="4389120" cy="4389120"/>
           </a:xfrm>
           <a:prstGeom prst="rect">
             <a:avLst/>
@@ -11479,12 +11409,12 @@
         </p:nvSpPr>
         <p:spPr>
           <a:xfrm>
-            <a:off x="3261207" y="5806440"/>
-            <a:ext cx="5669280" cy="566928"/>
+            <a:off x="685800" y="9784080"/>
+            <a:ext cx="5486400" cy="640080"/>
           </a:xfrm>
           <a:prstGeom prst="roundRect">
             <a:avLst>
-              <a:gd name="adj" fmla="val 6000"/>
+              <a:gd name="adj" fmla="val 8000"/>
             </a:avLst>
           </a:prstGeom>
           <a:solidFill>
@@ -11525,8 +11455,8 @@
         </p:nvSpPr>
         <p:spPr>
           <a:xfrm>
-            <a:off x="3261207" y="5824728"/>
-            <a:ext cx="5669280" cy="530352"/>
+            <a:off x="685800" y="9802368"/>
+            <a:ext cx="5486400" cy="603504"/>
           </a:xfrm>
           <a:prstGeom prst="rect">
             <a:avLst/>
@@ -11589,7 +11519,7 @@
         <p:spPr>
           <a:xfrm>
             <a:off x="0" y="0"/>
-            <a:ext cx="12191695" cy="6858000"/>
+            <a:ext cx="6858000" cy="12191695"/>
           </a:xfrm>
           <a:prstGeom prst="rect">
             <a:avLst/>
@@ -11633,7 +11563,7 @@
         <p:spPr>
           <a:xfrm>
             <a:off x="0" y="0"/>
-            <a:ext cx="12191695" cy="1078992"/>
+            <a:ext cx="6858000" cy="1783080"/>
           </a:xfrm>
           <a:prstGeom prst="rect">
             <a:avLst/>
@@ -11676,12 +11606,12 @@
         </p:nvSpPr>
         <p:spPr>
           <a:xfrm>
-            <a:off x="365760" y="201168"/>
-            <a:ext cx="1371600" cy="676656"/>
+            <a:off x="365760" y="292608"/>
+            <a:ext cx="1417320" cy="713232"/>
           </a:xfrm>
           <a:prstGeom prst="roundRect">
             <a:avLst>
-              <a:gd name="adj" fmla="val 6000"/>
+              <a:gd name="adj" fmla="val 8000"/>
             </a:avLst>
           </a:prstGeom>
           <a:solidFill>
@@ -11722,8 +11652,8 @@
         </p:nvSpPr>
         <p:spPr>
           <a:xfrm>
-            <a:off x="365760" y="219456"/>
-            <a:ext cx="1371600" cy="640080"/>
+            <a:off x="365760" y="310896"/>
+            <a:ext cx="1417320" cy="676656"/>
           </a:xfrm>
           <a:prstGeom prst="rect">
             <a:avLst/>
@@ -11767,8 +11697,53 @@
         </p:nvSpPr>
         <p:spPr>
           <a:xfrm>
-            <a:off x="1920240" y="146304"/>
-            <a:ext cx="8595360" cy="786384"/>
+            <a:off x="1920240" y="292608"/>
+            <a:ext cx="4572000" cy="713232"/>
+          </a:xfrm>
+          <a:prstGeom prst="rect">
+            <a:avLst/>
+          </a:prstGeom>
+          <a:noFill/>
+        </p:spPr>
+        <p:txBody>
+          <a:bodyPr wrap="square" anchor="ctr" lIns="25400" rIns="25400" tIns="12700" bIns="12700">
+            <a:spAutoFit/>
+          </a:bodyPr>
+          <a:lstStyle/>
+          <a:p>
+            <a:pPr algn="r">
+              <a:lnSpc>
+                <a:spcPct val="100000"/>
+              </a:lnSpc>
+              <a:spcBef>
+                <a:spcPts val="0"/>
+              </a:spcBef>
+              <a:spcAft>
+                <a:spcPts val="400"/>
+              </a:spcAft>
+            </a:pPr>
+            <a:r>
+              <a:rPr sz="1400" b="0" i="0">
+                <a:solidFill>
+                  <a:srgbClr val="ECF3EF"/>
+                </a:solidFill>
+                <a:latin typeface="Calibri"/>
+              </a:rPr>
+              <a:t>Step 15 of 16</a:t>
+            </a:r>
+          </a:p>
+        </p:txBody>
+      </p:sp>
+      <p:sp>
+        <p:nvSpPr>
+          <p:cNvPr id="7" name="TextBox 6"/>
+          <p:cNvSpPr txBox="1"/>
+          <p:nvPr/>
+        </p:nvSpPr>
+        <p:spPr>
+          <a:xfrm>
+            <a:off x="411480" y="1024128"/>
+            <a:ext cx="6035040" cy="713232"/>
           </a:xfrm>
           <a:prstGeom prst="rect">
             <a:avLst/>
@@ -11793,58 +11768,13 @@
               </a:spcAft>
             </a:pPr>
             <a:r>
-              <a:rPr sz="2700" b="1" i="0">
+              <a:rPr sz="2800" b="1" i="0">
                 <a:solidFill>
                   <a:srgbClr val="FFFFFF"/>
                 </a:solidFill>
                 <a:latin typeface="Calibri"/>
               </a:rPr>
               <a:t>Privacy, safety &amp; help</a:t>
-            </a:r>
-          </a:p>
-        </p:txBody>
-      </p:sp>
-      <p:sp>
-        <p:nvSpPr>
-          <p:cNvPr id="7" name="TextBox 6"/>
-          <p:cNvSpPr txBox="1"/>
-          <p:nvPr/>
-        </p:nvSpPr>
-        <p:spPr>
-          <a:xfrm>
-            <a:off x="9509760" y="146304"/>
-            <a:ext cx="2377440" cy="786384"/>
-          </a:xfrm>
-          <a:prstGeom prst="rect">
-            <a:avLst/>
-          </a:prstGeom>
-          <a:noFill/>
-        </p:spPr>
-        <p:txBody>
-          <a:bodyPr wrap="square" anchor="ctr" lIns="25400" rIns="25400" tIns="12700" bIns="12700">
-            <a:spAutoFit/>
-          </a:bodyPr>
-          <a:lstStyle/>
-          <a:p>
-            <a:pPr algn="r">
-              <a:lnSpc>
-                <a:spcPct val="100000"/>
-              </a:lnSpc>
-              <a:spcBef>
-                <a:spcPts val="0"/>
-              </a:spcBef>
-              <a:spcAft>
-                <a:spcPts val="400"/>
-              </a:spcAft>
-            </a:pPr>
-            <a:r>
-              <a:rPr sz="1300" b="0" i="0">
-                <a:solidFill>
-                  <a:srgbClr val="ECF3EF"/>
-                </a:solidFill>
-                <a:latin typeface="Calibri"/>
-              </a:rPr>
-              <a:t>Step 15 of 16</a:t>
             </a:r>
           </a:p>
         </p:txBody>
@@ -11857,12 +11787,12 @@
         </p:nvSpPr>
         <p:spPr>
           <a:xfrm>
-            <a:off x="502920" y="1298448"/>
-            <a:ext cx="11201400" cy="603504"/>
+            <a:off x="411480" y="1965960"/>
+            <a:ext cx="6035040" cy="960120"/>
           </a:xfrm>
           <a:prstGeom prst="roundRect">
             <a:avLst>
-              <a:gd name="adj" fmla="val 6000"/>
+              <a:gd name="adj" fmla="val 8000"/>
             </a:avLst>
           </a:prstGeom>
           <a:solidFill>
@@ -11905,8 +11835,8 @@
         </p:nvSpPr>
         <p:spPr>
           <a:xfrm>
-            <a:off x="667512" y="1298448"/>
-            <a:ext cx="1463040" cy="603504"/>
+            <a:off x="612648" y="2084831"/>
+            <a:ext cx="2743200" cy="310896"/>
           </a:xfrm>
           <a:prstGeom prst="rect">
             <a:avLst/>
@@ -11914,7 +11844,7 @@
           <a:noFill/>
         </p:spPr>
         <p:txBody>
-          <a:bodyPr wrap="square" anchor="ctr" lIns="25400" rIns="25400" tIns="12700" bIns="12700">
+          <a:bodyPr wrap="square" anchor="t" lIns="25400" rIns="25400" tIns="12700" bIns="12700">
             <a:spAutoFit/>
           </a:bodyPr>
           <a:lstStyle/>
@@ -11931,7 +11861,7 @@
               </a:spcAft>
             </a:pPr>
             <a:r>
-              <a:rPr sz="1300" b="1" i="0">
+              <a:rPr sz="1500" b="1" i="0">
                 <a:solidFill>
                   <a:srgbClr val="15503A"/>
                 </a:solidFill>
@@ -11950,8 +11880,8 @@
         </p:nvSpPr>
         <p:spPr>
           <a:xfrm>
-            <a:off x="2194560" y="1298448"/>
-            <a:ext cx="9372600" cy="603504"/>
+            <a:off x="612648" y="2423160"/>
+            <a:ext cx="5632703" cy="457200"/>
           </a:xfrm>
           <a:prstGeom prst="rect">
             <a:avLst/>
@@ -11959,7 +11889,7 @@
           <a:noFill/>
         </p:spPr>
         <p:txBody>
-          <a:bodyPr wrap="square" anchor="ctr" lIns="25400" rIns="25400" tIns="12700" bIns="12700">
+          <a:bodyPr wrap="square" anchor="t" lIns="25400" rIns="25400" tIns="12700" bIns="12700">
             <a:spAutoFit/>
           </a:bodyPr>
           <a:lstStyle/>
@@ -11976,7 +11906,7 @@
               </a:spcAft>
             </a:pPr>
             <a:r>
-              <a:rPr sz="1500" b="1" i="0">
+              <a:rPr sz="1800" b="1" i="0">
                 <a:solidFill>
                   <a:srgbClr val="14241C"/>
                 </a:solidFill>
@@ -11995,12 +11925,12 @@
         </p:nvSpPr>
         <p:spPr>
           <a:xfrm>
-            <a:off x="502920" y="2029968"/>
-            <a:ext cx="11201400" cy="786384"/>
+            <a:off x="411480" y="3108960"/>
+            <a:ext cx="6035040" cy="1874519"/>
           </a:xfrm>
           <a:prstGeom prst="roundRect">
             <a:avLst>
-              <a:gd name="adj" fmla="val 6000"/>
+              <a:gd name="adj" fmla="val 8000"/>
             </a:avLst>
           </a:prstGeom>
           <a:solidFill>
@@ -12043,8 +11973,8 @@
         </p:nvSpPr>
         <p:spPr>
           <a:xfrm>
-            <a:off x="502920" y="2029968"/>
-            <a:ext cx="91440" cy="786384"/>
+            <a:off x="411480" y="3108960"/>
+            <a:ext cx="109728" cy="1874519"/>
           </a:xfrm>
           <a:prstGeom prst="rect">
             <a:avLst/>
@@ -12087,8 +12017,8 @@
         </p:nvSpPr>
         <p:spPr>
           <a:xfrm>
-            <a:off x="813816" y="2029968"/>
-            <a:ext cx="10698480" cy="786384"/>
+            <a:off x="731520" y="3108960"/>
+            <a:ext cx="5532120" cy="1874519"/>
           </a:xfrm>
           <a:prstGeom prst="rect">
             <a:avLst/>
@@ -12113,7 +12043,7 @@
               </a:spcAft>
             </a:pPr>
             <a:r>
-              <a:rPr sz="1800" b="1" i="0">
+              <a:rPr sz="2100" b="1" i="0">
                 <a:solidFill>
                   <a:srgbClr val="14241C"/>
                 </a:solidFill>
@@ -12132,8 +12062,8 @@
         </p:nvSpPr>
         <p:spPr>
           <a:xfrm>
-            <a:off x="594360" y="3035808"/>
-            <a:ext cx="11018520" cy="2468880"/>
+            <a:off x="502920" y="5212079"/>
+            <a:ext cx="5852159" cy="4480560"/>
           </a:xfrm>
           <a:prstGeom prst="rect">
             <a:avLst/>
@@ -12154,11 +12084,11 @@
                 <a:spcPts val="0"/>
               </a:spcBef>
               <a:spcAft>
-                <a:spcPts val="1000"/>
+                <a:spcPts val="1300"/>
               </a:spcAft>
             </a:pPr>
             <a:r>
-              <a:rPr sz="1600" b="1" i="0">
+              <a:rPr sz="1900" b="1" i="0">
                 <a:solidFill>
                   <a:srgbClr val="15503A"/>
                 </a:solidFill>
@@ -12167,7 +12097,7 @@
               <a:t>•  </a:t>
             </a:r>
             <a:r>
-              <a:rPr sz="1600" b="1" i="0">
+              <a:rPr sz="1900" b="1" i="0">
                 <a:solidFill>
                   <a:srgbClr val="14241C"/>
                 </a:solidFill>
@@ -12176,7 +12106,7 @@
               <a:t>Family only</a:t>
             </a:r>
             <a:r>
-              <a:rPr sz="1600" b="0" i="0">
+              <a:rPr sz="1900" b="0" i="0">
                 <a:solidFill>
                   <a:srgbClr val="14241C"/>
                 </a:solidFill>
@@ -12194,11 +12124,11 @@
                 <a:spcPts val="0"/>
               </a:spcBef>
               <a:spcAft>
-                <a:spcPts val="1000"/>
+                <a:spcPts val="1300"/>
               </a:spcAft>
             </a:pPr>
             <a:r>
-              <a:rPr sz="1600" b="1" i="0">
+              <a:rPr sz="1900" b="1" i="0">
                 <a:solidFill>
                   <a:srgbClr val="15503A"/>
                 </a:solidFill>
@@ -12207,7 +12137,7 @@
               <a:t>•  </a:t>
             </a:r>
             <a:r>
-              <a:rPr sz="1600" b="1" i="0">
+              <a:rPr sz="1900" b="1" i="0">
                 <a:solidFill>
                   <a:srgbClr val="14241C"/>
                 </a:solidFill>
@@ -12216,7 +12146,7 @@
               <a:t>Bigger text</a:t>
             </a:r>
             <a:r>
-              <a:rPr sz="1600" b="0" i="0">
+              <a:rPr sz="1900" b="0" i="0">
                 <a:solidFill>
                   <a:srgbClr val="14241C"/>
                 </a:solidFill>
@@ -12234,11 +12164,11 @@
                 <a:spcPts val="0"/>
               </a:spcBef>
               <a:spcAft>
-                <a:spcPts val="1000"/>
+                <a:spcPts val="1300"/>
               </a:spcAft>
             </a:pPr>
             <a:r>
-              <a:rPr sz="1600" b="1" i="0">
+              <a:rPr sz="1900" b="1" i="0">
                 <a:solidFill>
                   <a:srgbClr val="15503A"/>
                 </a:solidFill>
@@ -12247,7 +12177,7 @@
               <a:t>•  </a:t>
             </a:r>
             <a:r>
-              <a:rPr sz="1600" b="1" i="0">
+              <a:rPr sz="1900" b="1" i="0">
                 <a:solidFill>
                   <a:srgbClr val="14241C"/>
                 </a:solidFill>
@@ -12256,7 +12186,7 @@
               <a:t>Help page</a:t>
             </a:r>
             <a:r>
-              <a:rPr sz="1600" b="0" i="0">
+              <a:rPr sz="1900" b="0" i="0">
                 <a:solidFill>
                   <a:srgbClr val="14241C"/>
                 </a:solidFill>
@@ -12274,11 +12204,11 @@
                 <a:spcPts val="0"/>
               </a:spcBef>
               <a:spcAft>
-                <a:spcPts val="1000"/>
+                <a:spcPts val="1300"/>
               </a:spcAft>
             </a:pPr>
             <a:r>
-              <a:rPr sz="1600" b="1" i="0">
+              <a:rPr sz="1900" b="1" i="0">
                 <a:solidFill>
                   <a:srgbClr val="15503A"/>
                 </a:solidFill>
@@ -12287,7 +12217,7 @@
               <a:t>•  </a:t>
             </a:r>
             <a:r>
-              <a:rPr sz="1600" b="1" i="0">
+              <a:rPr sz="1900" b="1" i="0">
                 <a:solidFill>
                   <a:srgbClr val="14241C"/>
                 </a:solidFill>
@@ -12296,7 +12226,7 @@
               <a:t>A real person</a:t>
             </a:r>
             <a:r>
-              <a:rPr sz="1600" b="0" i="0">
+              <a:rPr sz="1900" b="0" i="0">
                 <a:solidFill>
                   <a:srgbClr val="14241C"/>
                 </a:solidFill>
@@ -12315,12 +12245,12 @@
         </p:nvSpPr>
         <p:spPr>
           <a:xfrm>
-            <a:off x="502920" y="5486400"/>
-            <a:ext cx="11201400" cy="566928"/>
+            <a:off x="411480" y="9784080"/>
+            <a:ext cx="6035040" cy="1143000"/>
           </a:xfrm>
           <a:prstGeom prst="roundRect">
             <a:avLst>
-              <a:gd name="adj" fmla="val 6000"/>
+              <a:gd name="adj" fmla="val 8000"/>
             </a:avLst>
           </a:prstGeom>
           <a:solidFill>
@@ -12363,8 +12293,8 @@
         </p:nvSpPr>
         <p:spPr>
           <a:xfrm>
-            <a:off x="667512" y="5486400"/>
-            <a:ext cx="1828800" cy="566928"/>
+            <a:off x="612648" y="9902952"/>
+            <a:ext cx="3657600" cy="310896"/>
           </a:xfrm>
           <a:prstGeom prst="rect">
             <a:avLst/>
@@ -12372,7 +12302,7 @@
           <a:noFill/>
         </p:spPr>
         <p:txBody>
-          <a:bodyPr wrap="square" anchor="ctr" lIns="25400" rIns="25400" tIns="12700" bIns="12700">
+          <a:bodyPr wrap="square" anchor="t" lIns="25400" rIns="25400" tIns="12700" bIns="12700">
             <a:spAutoFit/>
           </a:bodyPr>
           <a:lstStyle/>
@@ -12389,7 +12319,7 @@
               </a:spcAft>
             </a:pPr>
             <a:r>
-              <a:rPr sz="1200" b="1" i="0">
+              <a:rPr sz="1400" b="1" i="0">
                 <a:solidFill>
                   <a:srgbClr val="8B2E2E"/>
                 </a:solidFill>
@@ -12408,8 +12338,8 @@
         </p:nvSpPr>
         <p:spPr>
           <a:xfrm>
-            <a:off x="2560320" y="5486400"/>
-            <a:ext cx="9006840" cy="566928"/>
+            <a:off x="612648" y="10241280"/>
+            <a:ext cx="5632703" cy="640080"/>
           </a:xfrm>
           <a:prstGeom prst="rect">
             <a:avLst/>
@@ -12417,7 +12347,7 @@
           <a:noFill/>
         </p:spPr>
         <p:txBody>
-          <a:bodyPr wrap="square" anchor="ctr" lIns="25400" rIns="25400" tIns="12700" bIns="12700">
+          <a:bodyPr wrap="square" anchor="t" lIns="25400" rIns="25400" tIns="12700" bIns="12700">
             <a:spAutoFit/>
           </a:bodyPr>
           <a:lstStyle/>
@@ -12434,7 +12364,7 @@
               </a:spcAft>
             </a:pPr>
             <a:r>
-              <a:rPr sz="1300" b="0" i="0">
+              <a:rPr sz="1500" b="0" i="0">
                 <a:solidFill>
                   <a:srgbClr val="14241C"/>
                 </a:solidFill>
@@ -12453,12 +12383,12 @@
         </p:nvSpPr>
         <p:spPr>
           <a:xfrm>
-            <a:off x="365760" y="6510528"/>
-            <a:ext cx="11521440" cy="63500"/>
+            <a:off x="411480" y="11539728"/>
+            <a:ext cx="6035040" cy="64008"/>
           </a:xfrm>
           <a:prstGeom prst="roundRect">
             <a:avLst>
-              <a:gd name="adj" fmla="val 6000"/>
+              <a:gd name="adj" fmla="val 8000"/>
             </a:avLst>
           </a:prstGeom>
           <a:solidFill>
@@ -12499,12 +12429,12 @@
         </p:nvSpPr>
         <p:spPr>
           <a:xfrm>
-            <a:off x="365760" y="6510528"/>
-            <a:ext cx="10801350" cy="63500"/>
+            <a:off x="411480" y="11539728"/>
+            <a:ext cx="5657850" cy="64008"/>
           </a:xfrm>
           <a:prstGeom prst="roundRect">
             <a:avLst>
-              <a:gd name="adj" fmla="val 6000"/>
+              <a:gd name="adj" fmla="val 8000"/>
             </a:avLst>
           </a:prstGeom>
           <a:solidFill>
@@ -12545,8 +12475,8 @@
         </p:nvSpPr>
         <p:spPr>
           <a:xfrm>
-            <a:off x="365760" y="6163056"/>
-            <a:ext cx="11430000" cy="292608"/>
+            <a:off x="411480" y="11137392"/>
+            <a:ext cx="6035040" cy="310896"/>
           </a:xfrm>
           <a:prstGeom prst="rect">
             <a:avLst/>
@@ -12571,7 +12501,7 @@
               </a:spcAft>
             </a:pPr>
             <a:r>
-              <a:rPr sz="1100" b="1" i="0">
+              <a:rPr sz="1200" b="1" i="0">
                 <a:solidFill>
                   <a:srgbClr val="6B7068"/>
                 </a:solidFill>
@@ -12580,7 +12510,7 @@
               <a:t>NEXT  ›  </a:t>
             </a:r>
             <a:r>
-              <a:rPr sz="1100" b="0" i="1">
+              <a:rPr sz="1200" b="0" i="1">
                 <a:solidFill>
                   <a:srgbClr val="6B7068"/>
                 </a:solidFill>
@@ -12618,7 +12548,7 @@
         <p:spPr>
           <a:xfrm>
             <a:off x="0" y="0"/>
-            <a:ext cx="12191695" cy="6858000"/>
+            <a:ext cx="6858000" cy="12191695"/>
           </a:xfrm>
           <a:prstGeom prst="rect">
             <a:avLst/>
@@ -12662,7 +12592,7 @@
         <p:spPr>
           <a:xfrm>
             <a:off x="0" y="0"/>
-            <a:ext cx="12191695" cy="1078992"/>
+            <a:ext cx="6858000" cy="1783080"/>
           </a:xfrm>
           <a:prstGeom prst="rect">
             <a:avLst/>
@@ -12705,12 +12635,12 @@
         </p:nvSpPr>
         <p:spPr>
           <a:xfrm>
-            <a:off x="365760" y="201168"/>
-            <a:ext cx="1371600" cy="676656"/>
+            <a:off x="365760" y="292608"/>
+            <a:ext cx="1417320" cy="713232"/>
           </a:xfrm>
           <a:prstGeom prst="roundRect">
             <a:avLst>
-              <a:gd name="adj" fmla="val 6000"/>
+              <a:gd name="adj" fmla="val 8000"/>
             </a:avLst>
           </a:prstGeom>
           <a:solidFill>
@@ -12751,8 +12681,8 @@
         </p:nvSpPr>
         <p:spPr>
           <a:xfrm>
-            <a:off x="365760" y="219456"/>
-            <a:ext cx="1371600" cy="640080"/>
+            <a:off x="365760" y="310896"/>
+            <a:ext cx="1417320" cy="676656"/>
           </a:xfrm>
           <a:prstGeom prst="rect">
             <a:avLst/>
@@ -12796,8 +12726,53 @@
         </p:nvSpPr>
         <p:spPr>
           <a:xfrm>
-            <a:off x="1920240" y="146304"/>
-            <a:ext cx="8595360" cy="786384"/>
+            <a:off x="1920240" y="292608"/>
+            <a:ext cx="4572000" cy="713232"/>
+          </a:xfrm>
+          <a:prstGeom prst="rect">
+            <a:avLst/>
+          </a:prstGeom>
+          <a:noFill/>
+        </p:spPr>
+        <p:txBody>
+          <a:bodyPr wrap="square" anchor="ctr" lIns="25400" rIns="25400" tIns="12700" bIns="12700">
+            <a:spAutoFit/>
+          </a:bodyPr>
+          <a:lstStyle/>
+          <a:p>
+            <a:pPr algn="r">
+              <a:lnSpc>
+                <a:spcPct val="100000"/>
+              </a:lnSpc>
+              <a:spcBef>
+                <a:spcPts val="0"/>
+              </a:spcBef>
+              <a:spcAft>
+                <a:spcPts val="400"/>
+              </a:spcAft>
+            </a:pPr>
+            <a:r>
+              <a:rPr sz="1400" b="0" i="0">
+                <a:solidFill>
+                  <a:srgbClr val="ECF3EF"/>
+                </a:solidFill>
+                <a:latin typeface="Calibri"/>
+              </a:rPr>
+              <a:t>Step 16 of 16</a:t>
+            </a:r>
+          </a:p>
+        </p:txBody>
+      </p:sp>
+      <p:sp>
+        <p:nvSpPr>
+          <p:cNvPr id="7" name="TextBox 6"/>
+          <p:cNvSpPr txBox="1"/>
+          <p:nvPr/>
+        </p:nvSpPr>
+        <p:spPr>
+          <a:xfrm>
+            <a:off x="411480" y="1024128"/>
+            <a:ext cx="6035040" cy="713232"/>
           </a:xfrm>
           <a:prstGeom prst="rect">
             <a:avLst/>
@@ -12822,58 +12797,13 @@
               </a:spcAft>
             </a:pPr>
             <a:r>
-              <a:rPr sz="2700" b="1" i="0">
+              <a:rPr sz="2800" b="1" i="0">
                 <a:solidFill>
                   <a:srgbClr val="FFFFFF"/>
                 </a:solidFill>
                 <a:latin typeface="Calibri"/>
               </a:rPr>
               <a:t>BEFORE YOU LEAVE</a:t>
-            </a:r>
-          </a:p>
-        </p:txBody>
-      </p:sp>
-      <p:sp>
-        <p:nvSpPr>
-          <p:cNvPr id="7" name="TextBox 6"/>
-          <p:cNvSpPr txBox="1"/>
-          <p:nvPr/>
-        </p:nvSpPr>
-        <p:spPr>
-          <a:xfrm>
-            <a:off x="9509760" y="146304"/>
-            <a:ext cx="2377440" cy="786384"/>
-          </a:xfrm>
-          <a:prstGeom prst="rect">
-            <a:avLst/>
-          </a:prstGeom>
-          <a:noFill/>
-        </p:spPr>
-        <p:txBody>
-          <a:bodyPr wrap="square" anchor="ctr" lIns="25400" rIns="25400" tIns="12700" bIns="12700">
-            <a:spAutoFit/>
-          </a:bodyPr>
-          <a:lstStyle/>
-          <a:p>
-            <a:pPr algn="r">
-              <a:lnSpc>
-                <a:spcPct val="100000"/>
-              </a:lnSpc>
-              <a:spcBef>
-                <a:spcPts val="0"/>
-              </a:spcBef>
-              <a:spcAft>
-                <a:spcPts val="400"/>
-              </a:spcAft>
-            </a:pPr>
-            <a:r>
-              <a:rPr sz="1300" b="0" i="0">
-                <a:solidFill>
-                  <a:srgbClr val="ECF3EF"/>
-                </a:solidFill>
-                <a:latin typeface="Calibri"/>
-              </a:rPr>
-              <a:t>Step 16 of 16</a:t>
             </a:r>
           </a:p>
         </p:txBody>
@@ -12886,8 +12816,8 @@
         </p:nvSpPr>
         <p:spPr>
           <a:xfrm>
-            <a:off x="640080" y="1371600"/>
-            <a:ext cx="10972800" cy="914400"/>
+            <a:off x="457200" y="2057400"/>
+            <a:ext cx="6035040" cy="1280160"/>
           </a:xfrm>
           <a:prstGeom prst="rect">
             <a:avLst/>
@@ -12912,7 +12842,7 @@
               </a:spcAft>
             </a:pPr>
             <a:r>
-              <a:rPr sz="3200" b="1" i="0">
+              <a:rPr sz="3400" b="1" i="0">
                 <a:solidFill>
                   <a:srgbClr val="14241C"/>
                 </a:solidFill>
@@ -12931,12 +12861,12 @@
         </p:nvSpPr>
         <p:spPr>
           <a:xfrm>
-            <a:off x="640080" y="2331720"/>
-            <a:ext cx="10908792" cy="3566160"/>
+            <a:off x="411480" y="3520440"/>
+            <a:ext cx="6035040" cy="7315200"/>
           </a:xfrm>
           <a:prstGeom prst="roundRect">
             <a:avLst>
-              <a:gd name="adj" fmla="val 6000"/>
+              <a:gd name="adj" fmla="val 8000"/>
             </a:avLst>
           </a:prstGeom>
           <a:solidFill>
@@ -12979,8 +12909,8 @@
         </p:nvSpPr>
         <p:spPr>
           <a:xfrm>
-            <a:off x="1005840" y="2606040"/>
-            <a:ext cx="10149840" cy="3108960"/>
+            <a:off x="777240" y="3840480"/>
+            <a:ext cx="5394960" cy="6675120"/>
           </a:xfrm>
           <a:prstGeom prst="rect">
             <a:avLst/>
@@ -12995,17 +12925,17 @@
           <a:p>
             <a:pPr algn="l">
               <a:lnSpc>
-                <a:spcPct val="105000"/>
+                <a:spcPct val="110000"/>
               </a:lnSpc>
               <a:spcBef>
                 <a:spcPts val="0"/>
               </a:spcBef>
               <a:spcAft>
-                <a:spcPts val="1000"/>
+                <a:spcPts val="1400"/>
               </a:spcAft>
             </a:pPr>
             <a:r>
-              <a:rPr sz="2000" b="1" i="0">
+              <a:rPr sz="2200" b="1" i="0">
                 <a:solidFill>
                   <a:srgbClr val="C2410C"/>
                 </a:solidFill>
@@ -13014,7 +12944,7 @@
               <a:t>1.  </a:t>
             </a:r>
             <a:r>
-              <a:rPr sz="2000" b="1" i="0">
+              <a:rPr sz="2200" b="1" i="0">
                 <a:solidFill>
                   <a:srgbClr val="14241C"/>
                 </a:solidFill>
@@ -13023,7 +12953,7 @@
               <a:t>Add it to your home screen</a:t>
             </a:r>
             <a:r>
-              <a:rPr sz="2000" b="0" i="0">
+              <a:rPr sz="2200" b="0" i="0">
                 <a:solidFill>
                   <a:srgbClr val="14241C"/>
                 </a:solidFill>
@@ -13035,17 +12965,17 @@
           <a:p>
             <a:pPr algn="l">
               <a:lnSpc>
-                <a:spcPct val="105000"/>
+                <a:spcPct val="110000"/>
               </a:lnSpc>
               <a:spcBef>
                 <a:spcPts val="0"/>
               </a:spcBef>
               <a:spcAft>
-                <a:spcPts val="1000"/>
+                <a:spcPts val="1400"/>
               </a:spcAft>
             </a:pPr>
             <a:r>
-              <a:rPr sz="2000" b="1" i="0">
+              <a:rPr sz="2200" b="1" i="0">
                 <a:solidFill>
                   <a:srgbClr val="C2410C"/>
                 </a:solidFill>
@@ -13054,7 +12984,7 @@
               <a:t>2.  </a:t>
             </a:r>
             <a:r>
-              <a:rPr sz="2000" b="1" i="0">
+              <a:rPr sz="2200" b="1" i="0">
                 <a:solidFill>
                   <a:srgbClr val="14241C"/>
                 </a:solidFill>
@@ -13063,7 +12993,7 @@
               <a:t>Sign in with your email</a:t>
             </a:r>
             <a:r>
-              <a:rPr sz="2000" b="0" i="0">
+              <a:rPr sz="2200" b="0" i="0">
                 <a:solidFill>
                   <a:srgbClr val="14241C"/>
                 </a:solidFill>
@@ -13075,17 +13005,17 @@
           <a:p>
             <a:pPr algn="l">
               <a:lnSpc>
-                <a:spcPct val="105000"/>
+                <a:spcPct val="110000"/>
               </a:lnSpc>
               <a:spcBef>
                 <a:spcPts val="0"/>
               </a:spcBef>
               <a:spcAft>
-                <a:spcPts val="1000"/>
+                <a:spcPts val="1400"/>
               </a:spcAft>
             </a:pPr>
             <a:r>
-              <a:rPr sz="2000" b="1" i="0">
+              <a:rPr sz="2200" b="1" i="0">
                 <a:solidFill>
                   <a:srgbClr val="C2410C"/>
                 </a:solidFill>
@@ -13094,7 +13024,7 @@
               <a:t>3.  </a:t>
             </a:r>
             <a:r>
-              <a:rPr sz="2000" b="1" i="0">
+              <a:rPr sz="2200" b="1" i="0">
                 <a:solidFill>
                   <a:srgbClr val="14241C"/>
                 </a:solidFill>
@@ -13103,7 +13033,7 @@
               <a:t>RSVP to Family Fest</a:t>
             </a:r>
             <a:r>
-              <a:rPr sz="2000" b="0" i="0">
+              <a:rPr sz="2200" b="0" i="0">
                 <a:solidFill>
                   <a:srgbClr val="14241C"/>
                 </a:solidFill>
@@ -13115,17 +13045,17 @@
           <a:p>
             <a:pPr algn="l">
               <a:lnSpc>
-                <a:spcPct val="105000"/>
+                <a:spcPct val="110000"/>
               </a:lnSpc>
               <a:spcBef>
                 <a:spcPts val="0"/>
               </a:spcBef>
               <a:spcAft>
-                <a:spcPts val="1000"/>
+                <a:spcPts val="1400"/>
               </a:spcAft>
             </a:pPr>
             <a:r>
-              <a:rPr sz="1800" b="1" i="0">
+              <a:rPr sz="2000" b="1" i="0">
                 <a:solidFill>
                   <a:srgbClr val="15503A"/>
                 </a:solidFill>
@@ -13137,17 +13067,17 @@
           <a:p>
             <a:pPr algn="l">
               <a:lnSpc>
-                <a:spcPct val="105000"/>
+                <a:spcPct val="110000"/>
               </a:lnSpc>
               <a:spcBef>
                 <a:spcPts val="0"/>
               </a:spcBef>
               <a:spcAft>
-                <a:spcPts val="1000"/>
+                <a:spcPts val="1400"/>
               </a:spcAft>
             </a:pPr>
             <a:r>
-              <a:rPr sz="1600" b="1" i="0">
+              <a:rPr sz="1800" b="1" i="0">
                 <a:solidFill>
                   <a:srgbClr val="6B7068"/>
                 </a:solidFill>
@@ -13156,7 +13086,7 @@
               <a:t>Get it at  </a:t>
             </a:r>
             <a:r>
-              <a:rPr sz="1600" b="1" i="0">
+              <a:rPr sz="1800" b="1" i="0">
                 <a:solidFill>
                   <a:srgbClr val="15503A"/>
                 </a:solidFill>
@@ -13175,12 +13105,12 @@
         </p:nvSpPr>
         <p:spPr>
           <a:xfrm>
-            <a:off x="365760" y="6510528"/>
-            <a:ext cx="11521440" cy="63500"/>
+            <a:off x="411480" y="11539728"/>
+            <a:ext cx="6035040" cy="64008"/>
           </a:xfrm>
           <a:prstGeom prst="roundRect">
             <a:avLst>
-              <a:gd name="adj" fmla="val 6000"/>
+              <a:gd name="adj" fmla="val 8000"/>
             </a:avLst>
           </a:prstGeom>
           <a:solidFill>
@@ -13221,12 +13151,12 @@
         </p:nvSpPr>
         <p:spPr>
           <a:xfrm>
-            <a:off x="365760" y="6510528"/>
-            <a:ext cx="11521440" cy="63500"/>
+            <a:off x="411480" y="11539728"/>
+            <a:ext cx="6035040" cy="64008"/>
           </a:xfrm>
           <a:prstGeom prst="roundRect">
             <a:avLst>
-              <a:gd name="adj" fmla="val 6000"/>
+              <a:gd name="adj" fmla="val 8000"/>
             </a:avLst>
           </a:prstGeom>
           <a:solidFill>
@@ -13267,8 +13197,8 @@
         </p:nvSpPr>
         <p:spPr>
           <a:xfrm>
-            <a:off x="365760" y="6163056"/>
-            <a:ext cx="11430000" cy="292608"/>
+            <a:off x="411480" y="11137392"/>
+            <a:ext cx="6035040" cy="310896"/>
           </a:xfrm>
           <a:prstGeom prst="rect">
             <a:avLst/>
@@ -13293,7 +13223,7 @@
               </a:spcAft>
             </a:pPr>
             <a:r>
-              <a:rPr sz="1100" b="1" i="0">
+              <a:rPr sz="1200" b="1" i="0">
                 <a:solidFill>
                   <a:srgbClr val="6B7068"/>
                 </a:solidFill>
@@ -13302,7 +13232,7 @@
               <a:t>NEXT  ›  </a:t>
             </a:r>
             <a:r>
-              <a:rPr sz="1100" b="0" i="1">
+              <a:rPr sz="1200" b="0" i="1">
                 <a:solidFill>
                   <a:srgbClr val="6B7068"/>
                 </a:solidFill>
@@ -13340,7 +13270,7 @@
         <p:spPr>
           <a:xfrm>
             <a:off x="0" y="0"/>
-            <a:ext cx="12191695" cy="6858000"/>
+            <a:ext cx="6858000" cy="12191695"/>
           </a:xfrm>
           <a:prstGeom prst="rect">
             <a:avLst/>
@@ -13384,7 +13314,7 @@
         <p:spPr>
           <a:xfrm>
             <a:off x="0" y="0"/>
-            <a:ext cx="12191695" cy="1078992"/>
+            <a:ext cx="6858000" cy="1371600"/>
           </a:xfrm>
           <a:prstGeom prst="rect">
             <a:avLst/>
@@ -13427,8 +13357,8 @@
         </p:nvSpPr>
         <p:spPr>
           <a:xfrm>
-            <a:off x="457200" y="146304"/>
-            <a:ext cx="10972800" cy="786384"/>
+            <a:off x="411480" y="182880"/>
+            <a:ext cx="6035040" cy="1005840"/>
           </a:xfrm>
           <a:prstGeom prst="rect">
             <a:avLst/>
@@ -13453,7 +13383,7 @@
               </a:spcAft>
             </a:pPr>
             <a:r>
-              <a:rPr sz="2700" b="1" i="0">
+              <a:rPr sz="2500" b="1" i="0">
                 <a:solidFill>
                   <a:srgbClr val="FFFFFF"/>
                 </a:solidFill>
@@ -13472,12 +13402,12 @@
         </p:nvSpPr>
         <p:spPr>
           <a:xfrm>
-            <a:off x="457200" y="1371600"/>
-            <a:ext cx="5486400" cy="1078992"/>
+            <a:off x="411480" y="1554480"/>
+            <a:ext cx="6035040" cy="1188720"/>
           </a:xfrm>
           <a:prstGeom prst="roundRect">
             <a:avLst>
-              <a:gd name="adj" fmla="val 6000"/>
+              <a:gd name="adj" fmla="val 8000"/>
             </a:avLst>
           </a:prstGeom>
           <a:solidFill>
@@ -13520,8 +13450,8 @@
         </p:nvSpPr>
         <p:spPr>
           <a:xfrm>
-            <a:off x="685800" y="1481328"/>
-            <a:ext cx="5029200" cy="365760"/>
+            <a:off x="640080" y="1673352"/>
+            <a:ext cx="5577840" cy="365760"/>
           </a:xfrm>
           <a:prstGeom prst="rect">
             <a:avLst/>
@@ -13565,8 +13495,8 @@
         </p:nvSpPr>
         <p:spPr>
           <a:xfrm>
-            <a:off x="685800" y="1874520"/>
-            <a:ext cx="5029200" cy="548640"/>
+            <a:off x="640080" y="2057400"/>
+            <a:ext cx="5577840" cy="640080"/>
           </a:xfrm>
           <a:prstGeom prst="rect">
             <a:avLst/>
@@ -13610,12 +13540,12 @@
         </p:nvSpPr>
         <p:spPr>
           <a:xfrm>
-            <a:off x="457200" y="2596896"/>
-            <a:ext cx="5486400" cy="1078992"/>
+            <a:off x="411480" y="2852928"/>
+            <a:ext cx="6035040" cy="1188720"/>
           </a:xfrm>
           <a:prstGeom prst="roundRect">
             <a:avLst>
-              <a:gd name="adj" fmla="val 6000"/>
+              <a:gd name="adj" fmla="val 8000"/>
             </a:avLst>
           </a:prstGeom>
           <a:solidFill>
@@ -13658,8 +13588,8 @@
         </p:nvSpPr>
         <p:spPr>
           <a:xfrm>
-            <a:off x="685800" y="2706624"/>
-            <a:ext cx="5029200" cy="365760"/>
+            <a:off x="640080" y="2971800"/>
+            <a:ext cx="5577840" cy="365760"/>
           </a:xfrm>
           <a:prstGeom prst="rect">
             <a:avLst/>
@@ -13703,8 +13633,8 @@
         </p:nvSpPr>
         <p:spPr>
           <a:xfrm>
-            <a:off x="685800" y="3099816"/>
-            <a:ext cx="5029200" cy="548640"/>
+            <a:off x="640080" y="3355848"/>
+            <a:ext cx="5577840" cy="640080"/>
           </a:xfrm>
           <a:prstGeom prst="rect">
             <a:avLst/>
@@ -13748,12 +13678,12 @@
         </p:nvSpPr>
         <p:spPr>
           <a:xfrm>
-            <a:off x="457200" y="3822192"/>
-            <a:ext cx="5486400" cy="1078992"/>
+            <a:off x="411480" y="4151376"/>
+            <a:ext cx="6035040" cy="1188720"/>
           </a:xfrm>
           <a:prstGeom prst="roundRect">
             <a:avLst>
-              <a:gd name="adj" fmla="val 6000"/>
+              <a:gd name="adj" fmla="val 8000"/>
             </a:avLst>
           </a:prstGeom>
           <a:solidFill>
@@ -13796,8 +13726,8 @@
         </p:nvSpPr>
         <p:spPr>
           <a:xfrm>
-            <a:off x="685800" y="3931920"/>
-            <a:ext cx="5029200" cy="365760"/>
+            <a:off x="640080" y="4270248"/>
+            <a:ext cx="5577840" cy="365760"/>
           </a:xfrm>
           <a:prstGeom prst="rect">
             <a:avLst/>
@@ -13841,8 +13771,8 @@
         </p:nvSpPr>
         <p:spPr>
           <a:xfrm>
-            <a:off x="685800" y="4325112"/>
-            <a:ext cx="5029200" cy="548640"/>
+            <a:off x="640080" y="4654296"/>
+            <a:ext cx="5577840" cy="640080"/>
           </a:xfrm>
           <a:prstGeom prst="rect">
             <a:avLst/>
@@ -13886,12 +13816,12 @@
         </p:nvSpPr>
         <p:spPr>
           <a:xfrm>
-            <a:off x="457200" y="5047488"/>
-            <a:ext cx="5486400" cy="1078992"/>
+            <a:off x="411480" y="5449824"/>
+            <a:ext cx="6035040" cy="1188720"/>
           </a:xfrm>
           <a:prstGeom prst="roundRect">
             <a:avLst>
-              <a:gd name="adj" fmla="val 6000"/>
+              <a:gd name="adj" fmla="val 8000"/>
             </a:avLst>
           </a:prstGeom>
           <a:solidFill>
@@ -13934,8 +13864,8 @@
         </p:nvSpPr>
         <p:spPr>
           <a:xfrm>
-            <a:off x="685800" y="5157216"/>
-            <a:ext cx="5029200" cy="365760"/>
+            <a:off x="640080" y="5568696"/>
+            <a:ext cx="5577840" cy="365760"/>
           </a:xfrm>
           <a:prstGeom prst="rect">
             <a:avLst/>
@@ -13979,8 +13909,8 @@
         </p:nvSpPr>
         <p:spPr>
           <a:xfrm>
-            <a:off x="685800" y="5550408"/>
-            <a:ext cx="5029200" cy="548640"/>
+            <a:off x="640080" y="5952744"/>
+            <a:ext cx="5577840" cy="640080"/>
           </a:xfrm>
           <a:prstGeom prst="rect">
             <a:avLst/>
@@ -14024,12 +13954,12 @@
         </p:nvSpPr>
         <p:spPr>
           <a:xfrm>
-            <a:off x="6245352" y="1371600"/>
-            <a:ext cx="5486400" cy="1078992"/>
+            <a:off x="411480" y="6748272"/>
+            <a:ext cx="6035040" cy="1188720"/>
           </a:xfrm>
           <a:prstGeom prst="roundRect">
             <a:avLst>
-              <a:gd name="adj" fmla="val 6000"/>
+              <a:gd name="adj" fmla="val 8000"/>
             </a:avLst>
           </a:prstGeom>
           <a:solidFill>
@@ -14072,8 +14002,8 @@
         </p:nvSpPr>
         <p:spPr>
           <a:xfrm>
-            <a:off x="6473952" y="1481328"/>
-            <a:ext cx="5029200" cy="365760"/>
+            <a:off x="640080" y="6867144"/>
+            <a:ext cx="5577840" cy="365760"/>
           </a:xfrm>
           <a:prstGeom prst="rect">
             <a:avLst/>
@@ -14117,8 +14047,8 @@
         </p:nvSpPr>
         <p:spPr>
           <a:xfrm>
-            <a:off x="6473952" y="1874520"/>
-            <a:ext cx="5029200" cy="548640"/>
+            <a:off x="640080" y="7251192"/>
+            <a:ext cx="5577840" cy="640080"/>
           </a:xfrm>
           <a:prstGeom prst="rect">
             <a:avLst/>
@@ -14162,12 +14092,12 @@
         </p:nvSpPr>
         <p:spPr>
           <a:xfrm>
-            <a:off x="6245352" y="2596896"/>
-            <a:ext cx="5486400" cy="1078992"/>
+            <a:off x="411480" y="8046720"/>
+            <a:ext cx="6035040" cy="1188720"/>
           </a:xfrm>
           <a:prstGeom prst="roundRect">
             <a:avLst>
-              <a:gd name="adj" fmla="val 6000"/>
+              <a:gd name="adj" fmla="val 8000"/>
             </a:avLst>
           </a:prstGeom>
           <a:solidFill>
@@ -14210,8 +14140,8 @@
         </p:nvSpPr>
         <p:spPr>
           <a:xfrm>
-            <a:off x="6473952" y="2706624"/>
-            <a:ext cx="5029200" cy="365760"/>
+            <a:off x="640080" y="8165592"/>
+            <a:ext cx="5577840" cy="365760"/>
           </a:xfrm>
           <a:prstGeom prst="rect">
             <a:avLst/>
@@ -14255,8 +14185,8 @@
         </p:nvSpPr>
         <p:spPr>
           <a:xfrm>
-            <a:off x="6473952" y="3099816"/>
-            <a:ext cx="5029200" cy="548640"/>
+            <a:off x="640080" y="8549640"/>
+            <a:ext cx="5577840" cy="640080"/>
           </a:xfrm>
           <a:prstGeom prst="rect">
             <a:avLst/>
@@ -14300,12 +14230,12 @@
         </p:nvSpPr>
         <p:spPr>
           <a:xfrm>
-            <a:off x="6245352" y="3822192"/>
-            <a:ext cx="5486400" cy="1078992"/>
+            <a:off x="411480" y="9345168"/>
+            <a:ext cx="6035040" cy="1188720"/>
           </a:xfrm>
           <a:prstGeom prst="roundRect">
             <a:avLst>
-              <a:gd name="adj" fmla="val 6000"/>
+              <a:gd name="adj" fmla="val 8000"/>
             </a:avLst>
           </a:prstGeom>
           <a:solidFill>
@@ -14348,8 +14278,8 @@
         </p:nvSpPr>
         <p:spPr>
           <a:xfrm>
-            <a:off x="6473952" y="3931920"/>
-            <a:ext cx="5029200" cy="365760"/>
+            <a:off x="640080" y="9464040"/>
+            <a:ext cx="5577840" cy="365760"/>
           </a:xfrm>
           <a:prstGeom prst="rect">
             <a:avLst/>
@@ -14393,8 +14323,8 @@
         </p:nvSpPr>
         <p:spPr>
           <a:xfrm>
-            <a:off x="6473952" y="4325112"/>
-            <a:ext cx="5029200" cy="548640"/>
+            <a:off x="640080" y="9848088"/>
+            <a:ext cx="5577840" cy="640080"/>
           </a:xfrm>
           <a:prstGeom prst="rect">
             <a:avLst/>
@@ -14438,12 +14368,12 @@
         </p:nvSpPr>
         <p:spPr>
           <a:xfrm>
-            <a:off x="6245352" y="5047488"/>
-            <a:ext cx="5486400" cy="1078992"/>
+            <a:off x="411480" y="10643616"/>
+            <a:ext cx="6035040" cy="1188720"/>
           </a:xfrm>
           <a:prstGeom prst="roundRect">
             <a:avLst>
-              <a:gd name="adj" fmla="val 6000"/>
+              <a:gd name="adj" fmla="val 8000"/>
             </a:avLst>
           </a:prstGeom>
           <a:solidFill>
@@ -14486,8 +14416,8 @@
         </p:nvSpPr>
         <p:spPr>
           <a:xfrm>
-            <a:off x="6473952" y="5157216"/>
-            <a:ext cx="5029200" cy="365760"/>
+            <a:off x="640080" y="10762488"/>
+            <a:ext cx="5577840" cy="365760"/>
           </a:xfrm>
           <a:prstGeom prst="rect">
             <a:avLst/>
@@ -14531,8 +14461,8 @@
         </p:nvSpPr>
         <p:spPr>
           <a:xfrm>
-            <a:off x="6473952" y="5550408"/>
-            <a:ext cx="5029200" cy="548640"/>
+            <a:off x="640080" y="11146536"/>
+            <a:ext cx="5577840" cy="640080"/>
           </a:xfrm>
           <a:prstGeom prst="rect">
             <a:avLst/>
@@ -14595,7 +14525,7 @@
         <p:spPr>
           <a:xfrm>
             <a:off x="0" y="0"/>
-            <a:ext cx="12191695" cy="6858000"/>
+            <a:ext cx="6858000" cy="12191695"/>
           </a:xfrm>
           <a:prstGeom prst="rect">
             <a:avLst/>
@@ -14639,7 +14569,7 @@
         <p:spPr>
           <a:xfrm>
             <a:off x="0" y="0"/>
-            <a:ext cx="12191695" cy="1078992"/>
+            <a:ext cx="6858000" cy="1783080"/>
           </a:xfrm>
           <a:prstGeom prst="rect">
             <a:avLst/>
@@ -14682,12 +14612,12 @@
         </p:nvSpPr>
         <p:spPr>
           <a:xfrm>
-            <a:off x="365760" y="201168"/>
-            <a:ext cx="1371600" cy="676656"/>
+            <a:off x="365760" y="292608"/>
+            <a:ext cx="1417320" cy="713232"/>
           </a:xfrm>
           <a:prstGeom prst="roundRect">
             <a:avLst>
-              <a:gd name="adj" fmla="val 6000"/>
+              <a:gd name="adj" fmla="val 8000"/>
             </a:avLst>
           </a:prstGeom>
           <a:solidFill>
@@ -14728,8 +14658,8 @@
         </p:nvSpPr>
         <p:spPr>
           <a:xfrm>
-            <a:off x="365760" y="219456"/>
-            <a:ext cx="1371600" cy="640080"/>
+            <a:off x="365760" y="310896"/>
+            <a:ext cx="1417320" cy="676656"/>
           </a:xfrm>
           <a:prstGeom prst="rect">
             <a:avLst/>
@@ -14773,8 +14703,53 @@
         </p:nvSpPr>
         <p:spPr>
           <a:xfrm>
-            <a:off x="1920240" y="146304"/>
-            <a:ext cx="8595360" cy="786384"/>
+            <a:off x="1920240" y="292608"/>
+            <a:ext cx="4572000" cy="713232"/>
+          </a:xfrm>
+          <a:prstGeom prst="rect">
+            <a:avLst/>
+          </a:prstGeom>
+          <a:noFill/>
+        </p:spPr>
+        <p:txBody>
+          <a:bodyPr wrap="square" anchor="ctr" lIns="25400" rIns="25400" tIns="12700" bIns="12700">
+            <a:spAutoFit/>
+          </a:bodyPr>
+          <a:lstStyle/>
+          <a:p>
+            <a:pPr algn="r">
+              <a:lnSpc>
+                <a:spcPct val="100000"/>
+              </a:lnSpc>
+              <a:spcBef>
+                <a:spcPts val="0"/>
+              </a:spcBef>
+              <a:spcAft>
+                <a:spcPts val="400"/>
+              </a:spcAft>
+            </a:pPr>
+            <a:r>
+              <a:rPr sz="1400" b="0" i="0">
+                <a:solidFill>
+                  <a:srgbClr val="ECF3EF"/>
+                </a:solidFill>
+                <a:latin typeface="Calibri"/>
+              </a:rPr>
+              <a:t>Step 1 of 16</a:t>
+            </a:r>
+          </a:p>
+        </p:txBody>
+      </p:sp>
+      <p:sp>
+        <p:nvSpPr>
+          <p:cNvPr id="7" name="TextBox 6"/>
+          <p:cNvSpPr txBox="1"/>
+          <p:nvPr/>
+        </p:nvSpPr>
+        <p:spPr>
+          <a:xfrm>
+            <a:off x="411480" y="1024128"/>
+            <a:ext cx="6035040" cy="713232"/>
           </a:xfrm>
           <a:prstGeom prst="rect">
             <a:avLst/>
@@ -14799,58 +14774,13 @@
               </a:spcAft>
             </a:pPr>
             <a:r>
-              <a:rPr sz="2700" b="1" i="0">
+              <a:rPr sz="2800" b="1" i="0">
                 <a:solidFill>
                   <a:srgbClr val="FFFFFF"/>
                 </a:solidFill>
                 <a:latin typeface="Calibri"/>
               </a:rPr>
               <a:t>WELCOME</a:t>
-            </a:r>
-          </a:p>
-        </p:txBody>
-      </p:sp>
-      <p:sp>
-        <p:nvSpPr>
-          <p:cNvPr id="7" name="TextBox 6"/>
-          <p:cNvSpPr txBox="1"/>
-          <p:nvPr/>
-        </p:nvSpPr>
-        <p:spPr>
-          <a:xfrm>
-            <a:off x="9509760" y="146304"/>
-            <a:ext cx="2377440" cy="786384"/>
-          </a:xfrm>
-          <a:prstGeom prst="rect">
-            <a:avLst/>
-          </a:prstGeom>
-          <a:noFill/>
-        </p:spPr>
-        <p:txBody>
-          <a:bodyPr wrap="square" anchor="ctr" lIns="25400" rIns="25400" tIns="12700" bIns="12700">
-            <a:spAutoFit/>
-          </a:bodyPr>
-          <a:lstStyle/>
-          <a:p>
-            <a:pPr algn="r">
-              <a:lnSpc>
-                <a:spcPct val="100000"/>
-              </a:lnSpc>
-              <a:spcBef>
-                <a:spcPts val="0"/>
-              </a:spcBef>
-              <a:spcAft>
-                <a:spcPts val="400"/>
-              </a:spcAft>
-            </a:pPr>
-            <a:r>
-              <a:rPr sz="1300" b="0" i="0">
-                <a:solidFill>
-                  <a:srgbClr val="ECF3EF"/>
-                </a:solidFill>
-                <a:latin typeface="Calibri"/>
-              </a:rPr>
-              <a:t>Step 1 of 16</a:t>
             </a:r>
           </a:p>
         </p:txBody>
@@ -14863,8 +14793,8 @@
         </p:nvSpPr>
         <p:spPr>
           <a:xfrm>
-            <a:off x="640080" y="1371600"/>
-            <a:ext cx="10972800" cy="914400"/>
+            <a:off x="457200" y="2057400"/>
+            <a:ext cx="6035040" cy="1280160"/>
           </a:xfrm>
           <a:prstGeom prst="rect">
             <a:avLst/>
@@ -14889,7 +14819,7 @@
               </a:spcAft>
             </a:pPr>
             <a:r>
-              <a:rPr sz="3200" b="1" i="0">
+              <a:rPr sz="3400" b="1" i="0">
                 <a:solidFill>
                   <a:srgbClr val="14241C"/>
                 </a:solidFill>
@@ -14908,12 +14838,12 @@
         </p:nvSpPr>
         <p:spPr>
           <a:xfrm>
-            <a:off x="640080" y="2331720"/>
-            <a:ext cx="10908792" cy="3566160"/>
+            <a:off x="411480" y="3520440"/>
+            <a:ext cx="6035040" cy="7315200"/>
           </a:xfrm>
           <a:prstGeom prst="roundRect">
             <a:avLst>
-              <a:gd name="adj" fmla="val 6000"/>
+              <a:gd name="adj" fmla="val 8000"/>
             </a:avLst>
           </a:prstGeom>
           <a:solidFill>
@@ -14956,8 +14886,8 @@
         </p:nvSpPr>
         <p:spPr>
           <a:xfrm>
-            <a:off x="1005840" y="2606040"/>
-            <a:ext cx="10149840" cy="3108960"/>
+            <a:off x="777240" y="3840480"/>
+            <a:ext cx="5394960" cy="6675120"/>
           </a:xfrm>
           <a:prstGeom prst="rect">
             <a:avLst/>
@@ -14972,17 +14902,17 @@
           <a:p>
             <a:pPr algn="l">
               <a:lnSpc>
-                <a:spcPct val="105000"/>
+                <a:spcPct val="110000"/>
               </a:lnSpc>
               <a:spcBef>
                 <a:spcPts val="0"/>
               </a:spcBef>
               <a:spcAft>
-                <a:spcPts val="1000"/>
+                <a:spcPts val="1400"/>
               </a:spcAft>
             </a:pPr>
             <a:r>
-              <a:rPr sz="1800" b="1" i="0">
+              <a:rPr sz="2000" b="1" i="0">
                 <a:solidFill>
                   <a:srgbClr val="14241C"/>
                 </a:solidFill>
@@ -14994,17 +14924,17 @@
           <a:p>
             <a:pPr algn="l">
               <a:lnSpc>
-                <a:spcPct val="105000"/>
+                <a:spcPct val="110000"/>
               </a:lnSpc>
               <a:spcBef>
                 <a:spcPts val="0"/>
               </a:spcBef>
               <a:spcAft>
-                <a:spcPts val="1000"/>
+                <a:spcPts val="1400"/>
               </a:spcAft>
             </a:pPr>
             <a:r>
-              <a:rPr sz="1600" b="1" i="0">
+              <a:rPr sz="1800" b="1" i="0">
                 <a:solidFill>
                   <a:srgbClr val="15503A"/>
                 </a:solidFill>
@@ -15013,7 +14943,7 @@
               <a:t>•  </a:t>
             </a:r>
             <a:r>
-              <a:rPr sz="1600" b="1" i="0">
+              <a:rPr sz="1800" b="1" i="0">
                 <a:solidFill>
                   <a:srgbClr val="14241C"/>
                 </a:solidFill>
@@ -15022,7 +14952,7 @@
               <a:t>Home &amp; the five tabs</a:t>
             </a:r>
             <a:r>
-              <a:rPr sz="1600" b="0" i="0">
+              <a:rPr sz="1800" b="0" i="0">
                 <a:solidFill>
                   <a:srgbClr val="14241C"/>
                 </a:solidFill>
@@ -15034,17 +14964,17 @@
           <a:p>
             <a:pPr algn="l">
               <a:lnSpc>
-                <a:spcPct val="105000"/>
+                <a:spcPct val="110000"/>
               </a:lnSpc>
               <a:spcBef>
                 <a:spcPts val="0"/>
               </a:spcBef>
               <a:spcAft>
-                <a:spcPts val="1000"/>
+                <a:spcPts val="1400"/>
               </a:spcAft>
             </a:pPr>
             <a:r>
-              <a:rPr sz="1600" b="1" i="0">
+              <a:rPr sz="1800" b="1" i="0">
                 <a:solidFill>
                   <a:srgbClr val="15503A"/>
                 </a:solidFill>
@@ -15053,7 +14983,7 @@
               <a:t>•  </a:t>
             </a:r>
             <a:r>
-              <a:rPr sz="1600" b="1" i="0">
+              <a:rPr sz="1800" b="1" i="0">
                 <a:solidFill>
                   <a:srgbClr val="14241C"/>
                 </a:solidFill>
@@ -15062,7 +14992,7 @@
               <a:t>Family Fest</a:t>
             </a:r>
             <a:r>
-              <a:rPr sz="1600" b="0" i="0">
+              <a:rPr sz="1800" b="0" i="0">
                 <a:solidFill>
                   <a:srgbClr val="14241C"/>
                 </a:solidFill>
@@ -15074,17 +15004,17 @@
           <a:p>
             <a:pPr algn="l">
               <a:lnSpc>
-                <a:spcPct val="105000"/>
+                <a:spcPct val="110000"/>
               </a:lnSpc>
               <a:spcBef>
                 <a:spcPts val="0"/>
               </a:spcBef>
               <a:spcAft>
-                <a:spcPts val="1000"/>
+                <a:spcPts val="1400"/>
               </a:spcAft>
             </a:pPr>
             <a:r>
-              <a:rPr sz="1600" b="1" i="0">
+              <a:rPr sz="1800" b="1" i="0">
                 <a:solidFill>
                   <a:srgbClr val="15503A"/>
                 </a:solidFill>
@@ -15093,7 +15023,7 @@
               <a:t>•  </a:t>
             </a:r>
             <a:r>
-              <a:rPr sz="1600" b="1" i="0">
+              <a:rPr sz="1800" b="1" i="0">
                 <a:solidFill>
                   <a:srgbClr val="14241C"/>
                 </a:solidFill>
@@ -15102,7 +15032,7 @@
               <a:t>Staying connected</a:t>
             </a:r>
             <a:r>
-              <a:rPr sz="1600" b="0" i="0">
+              <a:rPr sz="1800" b="0" i="0">
                 <a:solidFill>
                   <a:srgbClr val="14241C"/>
                 </a:solidFill>
@@ -15114,17 +15044,17 @@
           <a:p>
             <a:pPr algn="l">
               <a:lnSpc>
-                <a:spcPct val="105000"/>
+                <a:spcPct val="110000"/>
               </a:lnSpc>
               <a:spcBef>
                 <a:spcPts val="0"/>
               </a:spcBef>
               <a:spcAft>
-                <a:spcPts val="1000"/>
+                <a:spcPts val="1400"/>
               </a:spcAft>
             </a:pPr>
             <a:r>
-              <a:rPr sz="1600" b="1" i="0">
+              <a:rPr sz="1800" b="1" i="0">
                 <a:solidFill>
                   <a:srgbClr val="15503A"/>
                 </a:solidFill>
@@ -15133,7 +15063,7 @@
               <a:t>•  </a:t>
             </a:r>
             <a:r>
-              <a:rPr sz="1600" b="1" i="0">
+              <a:rPr sz="1800" b="1" i="0">
                 <a:solidFill>
                   <a:srgbClr val="14241C"/>
                 </a:solidFill>
@@ -15142,7 +15072,7 @@
               <a:t>How to get it on your phone</a:t>
             </a:r>
             <a:r>
-              <a:rPr sz="1600" b="0" i="0">
+              <a:rPr sz="1800" b="0" i="0">
                 <a:solidFill>
                   <a:srgbClr val="14241C"/>
                 </a:solidFill>
@@ -15154,17 +15084,17 @@
           <a:p>
             <a:pPr algn="l">
               <a:lnSpc>
-                <a:spcPct val="105000"/>
+                <a:spcPct val="110000"/>
               </a:lnSpc>
               <a:spcBef>
                 <a:spcPts val="0"/>
               </a:spcBef>
               <a:spcAft>
-                <a:spcPts val="1000"/>
+                <a:spcPts val="1400"/>
               </a:spcAft>
             </a:pPr>
             <a:r>
-              <a:rPr sz="1500" b="0" i="1">
+              <a:rPr sz="1700" b="0" i="1">
                 <a:solidFill>
                   <a:srgbClr val="6B7068"/>
                 </a:solidFill>
@@ -15183,12 +15113,12 @@
         </p:nvSpPr>
         <p:spPr>
           <a:xfrm>
-            <a:off x="365760" y="6510528"/>
-            <a:ext cx="11521440" cy="63500"/>
+            <a:off x="411480" y="11539728"/>
+            <a:ext cx="6035040" cy="64008"/>
           </a:xfrm>
           <a:prstGeom prst="roundRect">
             <a:avLst>
-              <a:gd name="adj" fmla="val 6000"/>
+              <a:gd name="adj" fmla="val 8000"/>
             </a:avLst>
           </a:prstGeom>
           <a:solidFill>
@@ -15229,12 +15159,12 @@
         </p:nvSpPr>
         <p:spPr>
           <a:xfrm>
-            <a:off x="365760" y="6510528"/>
-            <a:ext cx="720090" cy="63500"/>
+            <a:off x="411480" y="11539728"/>
+            <a:ext cx="377190" cy="64008"/>
           </a:xfrm>
           <a:prstGeom prst="roundRect">
             <a:avLst>
-              <a:gd name="adj" fmla="val 6000"/>
+              <a:gd name="adj" fmla="val 8000"/>
             </a:avLst>
           </a:prstGeom>
           <a:solidFill>
@@ -15275,8 +15205,8 @@
         </p:nvSpPr>
         <p:spPr>
           <a:xfrm>
-            <a:off x="365760" y="6163056"/>
-            <a:ext cx="11430000" cy="292608"/>
+            <a:off x="411480" y="11137392"/>
+            <a:ext cx="6035040" cy="310896"/>
           </a:xfrm>
           <a:prstGeom prst="rect">
             <a:avLst/>
@@ -15301,7 +15231,7 @@
               </a:spcAft>
             </a:pPr>
             <a:r>
-              <a:rPr sz="1100" b="1" i="0">
+              <a:rPr sz="1200" b="1" i="0">
                 <a:solidFill>
                   <a:srgbClr val="6B7068"/>
                 </a:solidFill>
@@ -15310,7 +15240,7 @@
               <a:t>NEXT  ›  </a:t>
             </a:r>
             <a:r>
-              <a:rPr sz="1100" b="0" i="1">
+              <a:rPr sz="1200" b="0" i="1">
                 <a:solidFill>
                   <a:srgbClr val="6B7068"/>
                 </a:solidFill>
@@ -15348,7 +15278,7 @@
         <p:spPr>
           <a:xfrm>
             <a:off x="0" y="0"/>
-            <a:ext cx="12191695" cy="6858000"/>
+            <a:ext cx="6858000" cy="12191695"/>
           </a:xfrm>
           <a:prstGeom prst="rect">
             <a:avLst/>
@@ -15392,7 +15322,7 @@
         <p:spPr>
           <a:xfrm>
             <a:off x="0" y="0"/>
-            <a:ext cx="12191695" cy="1078992"/>
+            <a:ext cx="6858000" cy="1783080"/>
           </a:xfrm>
           <a:prstGeom prst="rect">
             <a:avLst/>
@@ -15435,12 +15365,12 @@
         </p:nvSpPr>
         <p:spPr>
           <a:xfrm>
-            <a:off x="365760" y="201168"/>
-            <a:ext cx="1371600" cy="676656"/>
+            <a:off x="365760" y="292608"/>
+            <a:ext cx="1417320" cy="713232"/>
           </a:xfrm>
           <a:prstGeom prst="roundRect">
             <a:avLst>
-              <a:gd name="adj" fmla="val 6000"/>
+              <a:gd name="adj" fmla="val 8000"/>
             </a:avLst>
           </a:prstGeom>
           <a:solidFill>
@@ -15481,8 +15411,8 @@
         </p:nvSpPr>
         <p:spPr>
           <a:xfrm>
-            <a:off x="365760" y="219456"/>
-            <a:ext cx="1371600" cy="640080"/>
+            <a:off x="365760" y="310896"/>
+            <a:ext cx="1417320" cy="676656"/>
           </a:xfrm>
           <a:prstGeom prst="rect">
             <a:avLst/>
@@ -15526,8 +15456,53 @@
         </p:nvSpPr>
         <p:spPr>
           <a:xfrm>
-            <a:off x="1920240" y="146304"/>
-            <a:ext cx="8595360" cy="786384"/>
+            <a:off x="1920240" y="292608"/>
+            <a:ext cx="4572000" cy="713232"/>
+          </a:xfrm>
+          <a:prstGeom prst="rect">
+            <a:avLst/>
+          </a:prstGeom>
+          <a:noFill/>
+        </p:spPr>
+        <p:txBody>
+          <a:bodyPr wrap="square" anchor="ctr" lIns="25400" rIns="25400" tIns="12700" bIns="12700">
+            <a:spAutoFit/>
+          </a:bodyPr>
+          <a:lstStyle/>
+          <a:p>
+            <a:pPr algn="r">
+              <a:lnSpc>
+                <a:spcPct val="100000"/>
+              </a:lnSpc>
+              <a:spcBef>
+                <a:spcPts val="0"/>
+              </a:spcBef>
+              <a:spcAft>
+                <a:spcPts val="400"/>
+              </a:spcAft>
+            </a:pPr>
+            <a:r>
+              <a:rPr sz="1400" b="0" i="0">
+                <a:solidFill>
+                  <a:srgbClr val="ECF3EF"/>
+                </a:solidFill>
+                <a:latin typeface="Calibri"/>
+              </a:rPr>
+              <a:t>Step 2 of 16</a:t>
+            </a:r>
+          </a:p>
+        </p:txBody>
+      </p:sp>
+      <p:sp>
+        <p:nvSpPr>
+          <p:cNvPr id="7" name="TextBox 6"/>
+          <p:cNvSpPr txBox="1"/>
+          <p:nvPr/>
+        </p:nvSpPr>
+        <p:spPr>
+          <a:xfrm>
+            <a:off x="411480" y="1024128"/>
+            <a:ext cx="6035040" cy="713232"/>
           </a:xfrm>
           <a:prstGeom prst="rect">
             <a:avLst/>
@@ -15552,58 +15527,13 @@
               </a:spcAft>
             </a:pPr>
             <a:r>
-              <a:rPr sz="2700" b="1" i="0">
+              <a:rPr sz="2800" b="1" i="0">
                 <a:solidFill>
                   <a:srgbClr val="FFFFFF"/>
                 </a:solidFill>
                 <a:latin typeface="Calibri"/>
               </a:rPr>
               <a:t>WHAT IT IS &amp; WHY</a:t>
-            </a:r>
-          </a:p>
-        </p:txBody>
-      </p:sp>
-      <p:sp>
-        <p:nvSpPr>
-          <p:cNvPr id="7" name="TextBox 6"/>
-          <p:cNvSpPr txBox="1"/>
-          <p:nvPr/>
-        </p:nvSpPr>
-        <p:spPr>
-          <a:xfrm>
-            <a:off x="9509760" y="146304"/>
-            <a:ext cx="2377440" cy="786384"/>
-          </a:xfrm>
-          <a:prstGeom prst="rect">
-            <a:avLst/>
-          </a:prstGeom>
-          <a:noFill/>
-        </p:spPr>
-        <p:txBody>
-          <a:bodyPr wrap="square" anchor="ctr" lIns="25400" rIns="25400" tIns="12700" bIns="12700">
-            <a:spAutoFit/>
-          </a:bodyPr>
-          <a:lstStyle/>
-          <a:p>
-            <a:pPr algn="r">
-              <a:lnSpc>
-                <a:spcPct val="100000"/>
-              </a:lnSpc>
-              <a:spcBef>
-                <a:spcPts val="0"/>
-              </a:spcBef>
-              <a:spcAft>
-                <a:spcPts val="400"/>
-              </a:spcAft>
-            </a:pPr>
-            <a:r>
-              <a:rPr sz="1300" b="0" i="0">
-                <a:solidFill>
-                  <a:srgbClr val="ECF3EF"/>
-                </a:solidFill>
-                <a:latin typeface="Calibri"/>
-              </a:rPr>
-              <a:t>Step 2 of 16</a:t>
             </a:r>
           </a:p>
         </p:txBody>
@@ -15616,8 +15546,8 @@
         </p:nvSpPr>
         <p:spPr>
           <a:xfrm>
-            <a:off x="640080" y="1371600"/>
-            <a:ext cx="10972800" cy="914400"/>
+            <a:off x="457200" y="2057400"/>
+            <a:ext cx="6035040" cy="1280160"/>
           </a:xfrm>
           <a:prstGeom prst="rect">
             <a:avLst/>
@@ -15642,7 +15572,7 @@
               </a:spcAft>
             </a:pPr>
             <a:r>
-              <a:rPr sz="3200" b="1" i="0">
+              <a:rPr sz="3400" b="1" i="0">
                 <a:solidFill>
                   <a:srgbClr val="14241C"/>
                 </a:solidFill>
@@ -15661,12 +15591,12 @@
         </p:nvSpPr>
         <p:spPr>
           <a:xfrm>
-            <a:off x="640080" y="2331720"/>
-            <a:ext cx="10908792" cy="3566160"/>
+            <a:off x="411480" y="3520440"/>
+            <a:ext cx="6035040" cy="7315200"/>
           </a:xfrm>
           <a:prstGeom prst="roundRect">
             <a:avLst>
-              <a:gd name="adj" fmla="val 6000"/>
+              <a:gd name="adj" fmla="val 8000"/>
             </a:avLst>
           </a:prstGeom>
           <a:solidFill>
@@ -15709,8 +15639,8 @@
         </p:nvSpPr>
         <p:spPr>
           <a:xfrm>
-            <a:off x="1005840" y="2606040"/>
-            <a:ext cx="10149840" cy="3108960"/>
+            <a:off x="777240" y="3840480"/>
+            <a:ext cx="5394960" cy="6675120"/>
           </a:xfrm>
           <a:prstGeom prst="rect">
             <a:avLst/>
@@ -15725,17 +15655,17 @@
           <a:p>
             <a:pPr algn="l">
               <a:lnSpc>
-                <a:spcPct val="105000"/>
+                <a:spcPct val="110000"/>
               </a:lnSpc>
               <a:spcBef>
                 <a:spcPts val="0"/>
               </a:spcBef>
               <a:spcAft>
-                <a:spcPts val="1000"/>
+                <a:spcPts val="1400"/>
               </a:spcAft>
             </a:pPr>
             <a:r>
-              <a:rPr sz="1700" b="1" i="0">
+              <a:rPr sz="1900" b="1" i="0">
                 <a:solidFill>
                   <a:srgbClr val="15503A"/>
                 </a:solidFill>
@@ -15744,7 +15674,7 @@
               <a:t>The problem:  </a:t>
             </a:r>
             <a:r>
-              <a:rPr sz="1700" b="0" i="0">
+              <a:rPr sz="1900" b="0" i="0">
                 <a:solidFill>
                   <a:srgbClr val="14241C"/>
                 </a:solidFill>
@@ -15756,17 +15686,17 @@
           <a:p>
             <a:pPr algn="l">
               <a:lnSpc>
-                <a:spcPct val="105000"/>
+                <a:spcPct val="110000"/>
               </a:lnSpc>
               <a:spcBef>
                 <a:spcPts val="0"/>
               </a:spcBef>
               <a:spcAft>
-                <a:spcPts val="1000"/>
+                <a:spcPts val="1400"/>
               </a:spcAft>
             </a:pPr>
             <a:r>
-              <a:rPr sz="1700" b="1" i="0">
+              <a:rPr sz="1900" b="1" i="0">
                 <a:solidFill>
                   <a:srgbClr val="15503A"/>
                 </a:solidFill>
@@ -15775,7 +15705,7 @@
               <a:t>The fix:  </a:t>
             </a:r>
             <a:r>
-              <a:rPr sz="1700" b="0" i="0">
+              <a:rPr sz="1900" b="0" i="0">
                 <a:solidFill>
                   <a:srgbClr val="14241C"/>
                 </a:solidFill>
@@ -15787,17 +15717,17 @@
           <a:p>
             <a:pPr algn="l">
               <a:lnSpc>
-                <a:spcPct val="105000"/>
+                <a:spcPct val="110000"/>
               </a:lnSpc>
               <a:spcBef>
                 <a:spcPts val="0"/>
               </a:spcBef>
               <a:spcAft>
-                <a:spcPts val="1000"/>
+                <a:spcPts val="1400"/>
               </a:spcAft>
             </a:pPr>
             <a:r>
-              <a:rPr sz="1700" b="1" i="0">
+              <a:rPr sz="1900" b="1" i="0">
                 <a:solidFill>
                   <a:srgbClr val="15503A"/>
                 </a:solidFill>
@@ -15806,7 +15736,7 @@
               <a:t>Two jobs:  </a:t>
             </a:r>
             <a:r>
-              <a:rPr sz="1700" b="0" i="0">
+              <a:rPr sz="1900" b="0" i="0">
                 <a:solidFill>
                   <a:srgbClr val="14241C"/>
                 </a:solidFill>
@@ -15818,17 +15748,17 @@
           <a:p>
             <a:pPr algn="l">
               <a:lnSpc>
-                <a:spcPct val="105000"/>
+                <a:spcPct val="110000"/>
               </a:lnSpc>
               <a:spcBef>
                 <a:spcPts val="0"/>
               </a:spcBef>
               <a:spcAft>
-                <a:spcPts val="1000"/>
+                <a:spcPts val="1400"/>
               </a:spcAft>
             </a:pPr>
             <a:r>
-              <a:rPr sz="1500" b="0" i="1">
+              <a:rPr sz="1700" b="0" i="1">
                 <a:solidFill>
                   <a:srgbClr val="6B7068"/>
                 </a:solidFill>
@@ -15847,12 +15777,12 @@
         </p:nvSpPr>
         <p:spPr>
           <a:xfrm>
-            <a:off x="365760" y="6510528"/>
-            <a:ext cx="11521440" cy="63500"/>
+            <a:off x="411480" y="11539728"/>
+            <a:ext cx="6035040" cy="64008"/>
           </a:xfrm>
           <a:prstGeom prst="roundRect">
             <a:avLst>
-              <a:gd name="adj" fmla="val 6000"/>
+              <a:gd name="adj" fmla="val 8000"/>
             </a:avLst>
           </a:prstGeom>
           <a:solidFill>
@@ -15893,12 +15823,12 @@
         </p:nvSpPr>
         <p:spPr>
           <a:xfrm>
-            <a:off x="365760" y="6510528"/>
-            <a:ext cx="1440180" cy="63500"/>
+            <a:off x="411480" y="11539728"/>
+            <a:ext cx="754380" cy="64008"/>
           </a:xfrm>
           <a:prstGeom prst="roundRect">
             <a:avLst>
-              <a:gd name="adj" fmla="val 6000"/>
+              <a:gd name="adj" fmla="val 8000"/>
             </a:avLst>
           </a:prstGeom>
           <a:solidFill>
@@ -15939,8 +15869,8 @@
         </p:nvSpPr>
         <p:spPr>
           <a:xfrm>
-            <a:off x="365760" y="6163056"/>
-            <a:ext cx="11430000" cy="292608"/>
+            <a:off x="411480" y="11137392"/>
+            <a:ext cx="6035040" cy="310896"/>
           </a:xfrm>
           <a:prstGeom prst="rect">
             <a:avLst/>
@@ -15965,7 +15895,7 @@
               </a:spcAft>
             </a:pPr>
             <a:r>
-              <a:rPr sz="1100" b="1" i="0">
+              <a:rPr sz="1200" b="1" i="0">
                 <a:solidFill>
                   <a:srgbClr val="6B7068"/>
                 </a:solidFill>
@@ -15974,7 +15904,7 @@
               <a:t>NEXT  ›  </a:t>
             </a:r>
             <a:r>
-              <a:rPr sz="1100" b="0" i="1">
+              <a:rPr sz="1200" b="0" i="1">
                 <a:solidFill>
                   <a:srgbClr val="6B7068"/>
                 </a:solidFill>
@@ -16012,7 +15942,7 @@
         <p:spPr>
           <a:xfrm>
             <a:off x="0" y="0"/>
-            <a:ext cx="12191695" cy="6858000"/>
+            <a:ext cx="6858000" cy="12191695"/>
           </a:xfrm>
           <a:prstGeom prst="rect">
             <a:avLst/>
@@ -16056,7 +15986,7 @@
         <p:spPr>
           <a:xfrm>
             <a:off x="0" y="0"/>
-            <a:ext cx="12191695" cy="1078992"/>
+            <a:ext cx="6858000" cy="1783080"/>
           </a:xfrm>
           <a:prstGeom prst="rect">
             <a:avLst/>
@@ -16099,12 +16029,12 @@
         </p:nvSpPr>
         <p:spPr>
           <a:xfrm>
-            <a:off x="365760" y="201168"/>
-            <a:ext cx="1371600" cy="676656"/>
+            <a:off x="365760" y="292608"/>
+            <a:ext cx="1417320" cy="713232"/>
           </a:xfrm>
           <a:prstGeom prst="roundRect">
             <a:avLst>
-              <a:gd name="adj" fmla="val 6000"/>
+              <a:gd name="adj" fmla="val 8000"/>
             </a:avLst>
           </a:prstGeom>
           <a:solidFill>
@@ -16145,8 +16075,8 @@
         </p:nvSpPr>
         <p:spPr>
           <a:xfrm>
-            <a:off x="365760" y="219456"/>
-            <a:ext cx="1371600" cy="640080"/>
+            <a:off x="365760" y="310896"/>
+            <a:ext cx="1417320" cy="676656"/>
           </a:xfrm>
           <a:prstGeom prst="rect">
             <a:avLst/>
@@ -16190,8 +16120,53 @@
         </p:nvSpPr>
         <p:spPr>
           <a:xfrm>
-            <a:off x="1920240" y="146304"/>
-            <a:ext cx="8595360" cy="786384"/>
+            <a:off x="1920240" y="292608"/>
+            <a:ext cx="4572000" cy="713232"/>
+          </a:xfrm>
+          <a:prstGeom prst="rect">
+            <a:avLst/>
+          </a:prstGeom>
+          <a:noFill/>
+        </p:spPr>
+        <p:txBody>
+          <a:bodyPr wrap="square" anchor="ctr" lIns="25400" rIns="25400" tIns="12700" bIns="12700">
+            <a:spAutoFit/>
+          </a:bodyPr>
+          <a:lstStyle/>
+          <a:p>
+            <a:pPr algn="r">
+              <a:lnSpc>
+                <a:spcPct val="100000"/>
+              </a:lnSpc>
+              <a:spcBef>
+                <a:spcPts val="0"/>
+              </a:spcBef>
+              <a:spcAft>
+                <a:spcPts val="400"/>
+              </a:spcAft>
+            </a:pPr>
+            <a:r>
+              <a:rPr sz="1400" b="0" i="0">
+                <a:solidFill>
+                  <a:srgbClr val="ECF3EF"/>
+                </a:solidFill>
+                <a:latin typeface="Calibri"/>
+              </a:rPr>
+              <a:t>Step 3 of 16</a:t>
+            </a:r>
+          </a:p>
+        </p:txBody>
+      </p:sp>
+      <p:sp>
+        <p:nvSpPr>
+          <p:cNvPr id="7" name="TextBox 6"/>
+          <p:cNvSpPr txBox="1"/>
+          <p:nvPr/>
+        </p:nvSpPr>
+        <p:spPr>
+          <a:xfrm>
+            <a:off x="411480" y="1024128"/>
+            <a:ext cx="6035040" cy="713232"/>
           </a:xfrm>
           <a:prstGeom prst="rect">
             <a:avLst/>
@@ -16216,58 +16191,13 @@
               </a:spcAft>
             </a:pPr>
             <a:r>
-              <a:rPr sz="2700" b="1" i="0">
+              <a:rPr sz="2800" b="1" i="0">
                 <a:solidFill>
                   <a:srgbClr val="FFFFFF"/>
                 </a:solidFill>
                 <a:latin typeface="Calibri"/>
               </a:rPr>
               <a:t>HOW TO FOLLOW ALONG</a:t>
-            </a:r>
-          </a:p>
-        </p:txBody>
-      </p:sp>
-      <p:sp>
-        <p:nvSpPr>
-          <p:cNvPr id="7" name="TextBox 6"/>
-          <p:cNvSpPr txBox="1"/>
-          <p:nvPr/>
-        </p:nvSpPr>
-        <p:spPr>
-          <a:xfrm>
-            <a:off x="9509760" y="146304"/>
-            <a:ext cx="2377440" cy="786384"/>
-          </a:xfrm>
-          <a:prstGeom prst="rect">
-            <a:avLst/>
-          </a:prstGeom>
-          <a:noFill/>
-        </p:spPr>
-        <p:txBody>
-          <a:bodyPr wrap="square" anchor="ctr" lIns="25400" rIns="25400" tIns="12700" bIns="12700">
-            <a:spAutoFit/>
-          </a:bodyPr>
-          <a:lstStyle/>
-          <a:p>
-            <a:pPr algn="r">
-              <a:lnSpc>
-                <a:spcPct val="100000"/>
-              </a:lnSpc>
-              <a:spcBef>
-                <a:spcPts val="0"/>
-              </a:spcBef>
-              <a:spcAft>
-                <a:spcPts val="400"/>
-              </a:spcAft>
-            </a:pPr>
-            <a:r>
-              <a:rPr sz="1300" b="0" i="0">
-                <a:solidFill>
-                  <a:srgbClr val="ECF3EF"/>
-                </a:solidFill>
-                <a:latin typeface="Calibri"/>
-              </a:rPr>
-              <a:t>Step 3 of 16</a:t>
             </a:r>
           </a:p>
         </p:txBody>
@@ -16280,8 +16210,8 @@
         </p:nvSpPr>
         <p:spPr>
           <a:xfrm>
-            <a:off x="640080" y="1371600"/>
-            <a:ext cx="10972800" cy="914400"/>
+            <a:off x="457200" y="2057400"/>
+            <a:ext cx="6035040" cy="1280160"/>
           </a:xfrm>
           <a:prstGeom prst="rect">
             <a:avLst/>
@@ -16306,7 +16236,7 @@
               </a:spcAft>
             </a:pPr>
             <a:r>
-              <a:rPr sz="3200" b="1" i="0">
+              <a:rPr sz="3400" b="1" i="0">
                 <a:solidFill>
                   <a:srgbClr val="14241C"/>
                 </a:solidFill>
@@ -16325,12 +16255,12 @@
         </p:nvSpPr>
         <p:spPr>
           <a:xfrm>
-            <a:off x="640080" y="2331720"/>
-            <a:ext cx="10908792" cy="3566160"/>
+            <a:off x="411480" y="3520440"/>
+            <a:ext cx="6035040" cy="7315200"/>
           </a:xfrm>
           <a:prstGeom prst="roundRect">
             <a:avLst>
-              <a:gd name="adj" fmla="val 6000"/>
+              <a:gd name="adj" fmla="val 8000"/>
             </a:avLst>
           </a:prstGeom>
           <a:solidFill>
@@ -16373,8 +16303,8 @@
         </p:nvSpPr>
         <p:spPr>
           <a:xfrm>
-            <a:off x="1005840" y="2606040"/>
-            <a:ext cx="10149840" cy="3108960"/>
+            <a:off x="777240" y="3840480"/>
+            <a:ext cx="5394960" cy="6675120"/>
           </a:xfrm>
           <a:prstGeom prst="rect">
             <a:avLst/>
@@ -16389,17 +16319,17 @@
           <a:p>
             <a:pPr algn="l">
               <a:lnSpc>
-                <a:spcPct val="105000"/>
+                <a:spcPct val="110000"/>
               </a:lnSpc>
               <a:spcBef>
                 <a:spcPts val="0"/>
               </a:spcBef>
               <a:spcAft>
-                <a:spcPts val="1000"/>
+                <a:spcPts val="1400"/>
               </a:spcAft>
             </a:pPr>
             <a:r>
-              <a:rPr sz="1900" b="1" i="0">
+              <a:rPr sz="2100" b="1" i="0">
                 <a:solidFill>
                   <a:srgbClr val="C2410C"/>
                 </a:solidFill>
@@ -16408,7 +16338,7 @@
               <a:t>Good news:  </a:t>
             </a:r>
             <a:r>
-              <a:rPr sz="1900" b="0" i="0">
+              <a:rPr sz="2100" b="0" i="0">
                 <a:solidFill>
                   <a:srgbClr val="14241C"/>
                 </a:solidFill>
@@ -16420,17 +16350,17 @@
           <a:p>
             <a:pPr algn="l">
               <a:lnSpc>
-                <a:spcPct val="105000"/>
+                <a:spcPct val="110000"/>
               </a:lnSpc>
               <a:spcBef>
                 <a:spcPts val="0"/>
               </a:spcBef>
               <a:spcAft>
-                <a:spcPts val="1000"/>
+                <a:spcPts val="1400"/>
               </a:spcAft>
             </a:pPr>
             <a:r>
-              <a:rPr sz="1900" b="1" i="0">
+              <a:rPr sz="2100" b="1" i="0">
                 <a:solidFill>
                   <a:srgbClr val="14241C"/>
                 </a:solidFill>
@@ -16439,7 +16369,7 @@
               <a:t>So just watch for now</a:t>
             </a:r>
             <a:r>
-              <a:rPr sz="1900" b="0" i="0">
+              <a:rPr sz="2100" b="0" i="0">
                 <a:solidFill>
                   <a:srgbClr val="14241C"/>
                 </a:solidFill>
@@ -16451,17 +16381,17 @@
           <a:p>
             <a:pPr algn="l">
               <a:lnSpc>
-                <a:spcPct val="105000"/>
+                <a:spcPct val="110000"/>
               </a:lnSpc>
               <a:spcBef>
                 <a:spcPts val="0"/>
               </a:spcBef>
               <a:spcAft>
-                <a:spcPts val="1000"/>
+                <a:spcPts val="1400"/>
               </a:spcAft>
             </a:pPr>
             <a:r>
-              <a:rPr sz="1600" b="0" i="1">
+              <a:rPr sz="1800" b="0" i="1">
                 <a:solidFill>
                   <a:srgbClr val="6B7068"/>
                 </a:solidFill>
@@ -16480,12 +16410,12 @@
         </p:nvSpPr>
         <p:spPr>
           <a:xfrm>
-            <a:off x="365760" y="6510528"/>
-            <a:ext cx="11521440" cy="63500"/>
+            <a:off x="411480" y="11539728"/>
+            <a:ext cx="6035040" cy="64008"/>
           </a:xfrm>
           <a:prstGeom prst="roundRect">
             <a:avLst>
-              <a:gd name="adj" fmla="val 6000"/>
+              <a:gd name="adj" fmla="val 8000"/>
             </a:avLst>
           </a:prstGeom>
           <a:solidFill>
@@ -16526,12 +16456,12 @@
         </p:nvSpPr>
         <p:spPr>
           <a:xfrm>
-            <a:off x="365760" y="6510528"/>
-            <a:ext cx="2160270" cy="63500"/>
+            <a:off x="411480" y="11539728"/>
+            <a:ext cx="1131569" cy="64008"/>
           </a:xfrm>
           <a:prstGeom prst="roundRect">
             <a:avLst>
-              <a:gd name="adj" fmla="val 6000"/>
+              <a:gd name="adj" fmla="val 8000"/>
             </a:avLst>
           </a:prstGeom>
           <a:solidFill>
@@ -16572,8 +16502,8 @@
         </p:nvSpPr>
         <p:spPr>
           <a:xfrm>
-            <a:off x="365760" y="6163056"/>
-            <a:ext cx="11430000" cy="292608"/>
+            <a:off x="411480" y="11137392"/>
+            <a:ext cx="6035040" cy="310896"/>
           </a:xfrm>
           <a:prstGeom prst="rect">
             <a:avLst/>
@@ -16598,7 +16528,7 @@
               </a:spcAft>
             </a:pPr>
             <a:r>
-              <a:rPr sz="1100" b="1" i="0">
+              <a:rPr sz="1200" b="1" i="0">
                 <a:solidFill>
                   <a:srgbClr val="6B7068"/>
                 </a:solidFill>
@@ -16607,7 +16537,7 @@
               <a:t>NEXT  ›  </a:t>
             </a:r>
             <a:r>
-              <a:rPr sz="1100" b="0" i="1">
+              <a:rPr sz="1200" b="0" i="1">
                 <a:solidFill>
                   <a:srgbClr val="6B7068"/>
                 </a:solidFill>
@@ -16645,7 +16575,7 @@
         <p:spPr>
           <a:xfrm>
             <a:off x="0" y="0"/>
-            <a:ext cx="12191695" cy="6858000"/>
+            <a:ext cx="6858000" cy="12191695"/>
           </a:xfrm>
           <a:prstGeom prst="rect">
             <a:avLst/>
@@ -16689,7 +16619,7 @@
         <p:spPr>
           <a:xfrm>
             <a:off x="0" y="0"/>
-            <a:ext cx="12191695" cy="1078992"/>
+            <a:ext cx="6858000" cy="1783080"/>
           </a:xfrm>
           <a:prstGeom prst="rect">
             <a:avLst/>
@@ -16732,12 +16662,12 @@
         </p:nvSpPr>
         <p:spPr>
           <a:xfrm>
-            <a:off x="365760" y="201168"/>
-            <a:ext cx="1371600" cy="676656"/>
+            <a:off x="365760" y="292608"/>
+            <a:ext cx="1417320" cy="713232"/>
           </a:xfrm>
           <a:prstGeom prst="roundRect">
             <a:avLst>
-              <a:gd name="adj" fmla="val 6000"/>
+              <a:gd name="adj" fmla="val 8000"/>
             </a:avLst>
           </a:prstGeom>
           <a:solidFill>
@@ -16778,8 +16708,8 @@
         </p:nvSpPr>
         <p:spPr>
           <a:xfrm>
-            <a:off x="365760" y="219456"/>
-            <a:ext cx="1371600" cy="640080"/>
+            <a:off x="365760" y="310896"/>
+            <a:ext cx="1417320" cy="676656"/>
           </a:xfrm>
           <a:prstGeom prst="rect">
             <a:avLst/>
@@ -16823,8 +16753,53 @@
         </p:nvSpPr>
         <p:spPr>
           <a:xfrm>
-            <a:off x="1920240" y="146304"/>
-            <a:ext cx="8595360" cy="786384"/>
+            <a:off x="1920240" y="292608"/>
+            <a:ext cx="4572000" cy="713232"/>
+          </a:xfrm>
+          <a:prstGeom prst="rect">
+            <a:avLst/>
+          </a:prstGeom>
+          <a:noFill/>
+        </p:spPr>
+        <p:txBody>
+          <a:bodyPr wrap="square" anchor="ctr" lIns="25400" rIns="25400" tIns="12700" bIns="12700">
+            <a:spAutoFit/>
+          </a:bodyPr>
+          <a:lstStyle/>
+          <a:p>
+            <a:pPr algn="r">
+              <a:lnSpc>
+                <a:spcPct val="100000"/>
+              </a:lnSpc>
+              <a:spcBef>
+                <a:spcPts val="0"/>
+              </a:spcBef>
+              <a:spcAft>
+                <a:spcPts val="400"/>
+              </a:spcAft>
+            </a:pPr>
+            <a:r>
+              <a:rPr sz="1400" b="0" i="0">
+                <a:solidFill>
+                  <a:srgbClr val="ECF3EF"/>
+                </a:solidFill>
+                <a:latin typeface="Calibri"/>
+              </a:rPr>
+              <a:t>Step 4 of 16</a:t>
+            </a:r>
+          </a:p>
+        </p:txBody>
+      </p:sp>
+      <p:sp>
+        <p:nvSpPr>
+          <p:cNvPr id="7" name="TextBox 6"/>
+          <p:cNvSpPr txBox="1"/>
+          <p:nvPr/>
+        </p:nvSpPr>
+        <p:spPr>
+          <a:xfrm>
+            <a:off x="411480" y="1024128"/>
+            <a:ext cx="6035040" cy="713232"/>
           </a:xfrm>
           <a:prstGeom prst="rect">
             <a:avLst/>
@@ -16849,58 +16824,13 @@
               </a:spcAft>
             </a:pPr>
             <a:r>
-              <a:rPr sz="2700" b="1" i="0">
+              <a:rPr sz="2800" b="1" i="0">
                 <a:solidFill>
                   <a:srgbClr val="FFFFFF"/>
                 </a:solidFill>
                 <a:latin typeface="Calibri"/>
               </a:rPr>
               <a:t>The 5 tabs at the bottom</a:t>
-            </a:r>
-          </a:p>
-        </p:txBody>
-      </p:sp>
-      <p:sp>
-        <p:nvSpPr>
-          <p:cNvPr id="7" name="TextBox 6"/>
-          <p:cNvSpPr txBox="1"/>
-          <p:nvPr/>
-        </p:nvSpPr>
-        <p:spPr>
-          <a:xfrm>
-            <a:off x="9509760" y="146304"/>
-            <a:ext cx="2377440" cy="786384"/>
-          </a:xfrm>
-          <a:prstGeom prst="rect">
-            <a:avLst/>
-          </a:prstGeom>
-          <a:noFill/>
-        </p:spPr>
-        <p:txBody>
-          <a:bodyPr wrap="square" anchor="ctr" lIns="25400" rIns="25400" tIns="12700" bIns="12700">
-            <a:spAutoFit/>
-          </a:bodyPr>
-          <a:lstStyle/>
-          <a:p>
-            <a:pPr algn="r">
-              <a:lnSpc>
-                <a:spcPct val="100000"/>
-              </a:lnSpc>
-              <a:spcBef>
-                <a:spcPts val="0"/>
-              </a:spcBef>
-              <a:spcAft>
-                <a:spcPts val="400"/>
-              </a:spcAft>
-            </a:pPr>
-            <a:r>
-              <a:rPr sz="1300" b="0" i="0">
-                <a:solidFill>
-                  <a:srgbClr val="ECF3EF"/>
-                </a:solidFill>
-                <a:latin typeface="Calibri"/>
-              </a:rPr>
-              <a:t>Step 4 of 16</a:t>
             </a:r>
           </a:p>
         </p:txBody>
@@ -16913,12 +16843,12 @@
         </p:nvSpPr>
         <p:spPr>
           <a:xfrm>
-            <a:off x="502920" y="1298448"/>
-            <a:ext cx="11201400" cy="603504"/>
+            <a:off x="411480" y="1965960"/>
+            <a:ext cx="6035040" cy="960120"/>
           </a:xfrm>
           <a:prstGeom prst="roundRect">
             <a:avLst>
-              <a:gd name="adj" fmla="val 6000"/>
+              <a:gd name="adj" fmla="val 8000"/>
             </a:avLst>
           </a:prstGeom>
           <a:solidFill>
@@ -16961,8 +16891,8 @@
         </p:nvSpPr>
         <p:spPr>
           <a:xfrm>
-            <a:off x="667512" y="1298448"/>
-            <a:ext cx="1463040" cy="603504"/>
+            <a:off x="612648" y="2084831"/>
+            <a:ext cx="2743200" cy="310896"/>
           </a:xfrm>
           <a:prstGeom prst="rect">
             <a:avLst/>
@@ -16970,7 +16900,7 @@
           <a:noFill/>
         </p:spPr>
         <p:txBody>
-          <a:bodyPr wrap="square" anchor="ctr" lIns="25400" rIns="25400" tIns="12700" bIns="12700">
+          <a:bodyPr wrap="square" anchor="t" lIns="25400" rIns="25400" tIns="12700" bIns="12700">
             <a:spAutoFit/>
           </a:bodyPr>
           <a:lstStyle/>
@@ -16987,7 +16917,7 @@
               </a:spcAft>
             </a:pPr>
             <a:r>
-              <a:rPr sz="1300" b="1" i="0">
+              <a:rPr sz="1500" b="1" i="0">
                 <a:solidFill>
                   <a:srgbClr val="15503A"/>
                 </a:solidFill>
@@ -17006,8 +16936,8 @@
         </p:nvSpPr>
         <p:spPr>
           <a:xfrm>
-            <a:off x="2194560" y="1298448"/>
-            <a:ext cx="9372600" cy="603504"/>
+            <a:off x="612648" y="2423160"/>
+            <a:ext cx="5632703" cy="457200"/>
           </a:xfrm>
           <a:prstGeom prst="rect">
             <a:avLst/>
@@ -17015,7 +16945,7 @@
           <a:noFill/>
         </p:spPr>
         <p:txBody>
-          <a:bodyPr wrap="square" anchor="ctr" lIns="25400" rIns="25400" tIns="12700" bIns="12700">
+          <a:bodyPr wrap="square" anchor="t" lIns="25400" rIns="25400" tIns="12700" bIns="12700">
             <a:spAutoFit/>
           </a:bodyPr>
           <a:lstStyle/>
@@ -17032,7 +16962,7 @@
               </a:spcAft>
             </a:pPr>
             <a:r>
-              <a:rPr sz="1500" b="1" i="0">
+              <a:rPr sz="1800" b="1" i="0">
                 <a:solidFill>
                   <a:srgbClr val="14241C"/>
                 </a:solidFill>
@@ -17051,12 +16981,12 @@
         </p:nvSpPr>
         <p:spPr>
           <a:xfrm>
-            <a:off x="502920" y="2029968"/>
-            <a:ext cx="11201400" cy="786384"/>
+            <a:off x="411480" y="3108960"/>
+            <a:ext cx="6035040" cy="1874519"/>
           </a:xfrm>
           <a:prstGeom prst="roundRect">
             <a:avLst>
-              <a:gd name="adj" fmla="val 6000"/>
+              <a:gd name="adj" fmla="val 8000"/>
             </a:avLst>
           </a:prstGeom>
           <a:solidFill>
@@ -17099,8 +17029,8 @@
         </p:nvSpPr>
         <p:spPr>
           <a:xfrm>
-            <a:off x="502920" y="2029968"/>
-            <a:ext cx="91440" cy="786384"/>
+            <a:off x="411480" y="3108960"/>
+            <a:ext cx="109728" cy="1874519"/>
           </a:xfrm>
           <a:prstGeom prst="rect">
             <a:avLst/>
@@ -17143,8 +17073,8 @@
         </p:nvSpPr>
         <p:spPr>
           <a:xfrm>
-            <a:off x="813816" y="2029968"/>
-            <a:ext cx="10698480" cy="786384"/>
+            <a:off x="731520" y="3108960"/>
+            <a:ext cx="5532120" cy="1874519"/>
           </a:xfrm>
           <a:prstGeom prst="rect">
             <a:avLst/>
@@ -17169,7 +17099,7 @@
               </a:spcAft>
             </a:pPr>
             <a:r>
-              <a:rPr sz="1800" b="1" i="0">
+              <a:rPr sz="2100" b="1" i="0">
                 <a:solidFill>
                   <a:srgbClr val="14241C"/>
                 </a:solidFill>
@@ -17188,8 +17118,8 @@
         </p:nvSpPr>
         <p:spPr>
           <a:xfrm>
-            <a:off x="594360" y="3035808"/>
-            <a:ext cx="11018520" cy="2468880"/>
+            <a:off x="502920" y="5212079"/>
+            <a:ext cx="5852159" cy="4480560"/>
           </a:xfrm>
           <a:prstGeom prst="rect">
             <a:avLst/>
@@ -17210,11 +17140,11 @@
                 <a:spcPts val="0"/>
               </a:spcBef>
               <a:spcAft>
-                <a:spcPts val="1000"/>
+                <a:spcPts val="1300"/>
               </a:spcAft>
             </a:pPr>
             <a:r>
-              <a:rPr sz="1600" b="1" i="0">
+              <a:rPr sz="1900" b="1" i="0">
                 <a:solidFill>
                   <a:srgbClr val="15503A"/>
                 </a:solidFill>
@@ -17223,7 +17153,7 @@
               <a:t>•  </a:t>
             </a:r>
             <a:r>
-              <a:rPr sz="1600" b="1" i="0">
+              <a:rPr sz="1900" b="1" i="0">
                 <a:solidFill>
                   <a:srgbClr val="14241C"/>
                 </a:solidFill>
@@ -17232,7 +17162,7 @@
               <a:t>🏠 Home</a:t>
             </a:r>
             <a:r>
-              <a:rPr sz="1600" b="0" i="0">
+              <a:rPr sz="1900" b="0" i="0">
                 <a:solidFill>
                   <a:srgbClr val="14241C"/>
                 </a:solidFill>
@@ -17250,11 +17180,11 @@
                 <a:spcPts val="0"/>
               </a:spcBef>
               <a:spcAft>
-                <a:spcPts val="1000"/>
+                <a:spcPts val="1300"/>
               </a:spcAft>
             </a:pPr>
             <a:r>
-              <a:rPr sz="1600" b="1" i="0">
+              <a:rPr sz="1900" b="1" i="0">
                 <a:solidFill>
                   <a:srgbClr val="15503A"/>
                 </a:solidFill>
@@ -17263,7 +17193,7 @@
               <a:t>•  </a:t>
             </a:r>
             <a:r>
-              <a:rPr sz="1600" b="1" i="0">
+              <a:rPr sz="1900" b="1" i="0">
                 <a:solidFill>
                   <a:srgbClr val="14241C"/>
                 </a:solidFill>
@@ -17272,7 +17202,7 @@
               <a:t>📣 Feed</a:t>
             </a:r>
             <a:r>
-              <a:rPr sz="1600" b="0" i="0">
+              <a:rPr sz="1900" b="0" i="0">
                 <a:solidFill>
                   <a:srgbClr val="14241C"/>
                 </a:solidFill>
@@ -17290,11 +17220,11 @@
                 <a:spcPts val="0"/>
               </a:spcBef>
               <a:spcAft>
-                <a:spcPts val="1000"/>
+                <a:spcPts val="1300"/>
               </a:spcAft>
             </a:pPr>
             <a:r>
-              <a:rPr sz="1600" b="1" i="0">
+              <a:rPr sz="1900" b="1" i="0">
                 <a:solidFill>
                   <a:srgbClr val="15503A"/>
                 </a:solidFill>
@@ -17303,7 +17233,7 @@
               <a:t>•  </a:t>
             </a:r>
             <a:r>
-              <a:rPr sz="1600" b="1" i="0">
+              <a:rPr sz="1900" b="1" i="0">
                 <a:solidFill>
                   <a:srgbClr val="14241C"/>
                 </a:solidFill>
@@ -17312,7 +17242,7 @@
               <a:t>🎉 Family Fest</a:t>
             </a:r>
             <a:r>
-              <a:rPr sz="1600" b="0" i="0">
+              <a:rPr sz="1900" b="0" i="0">
                 <a:solidFill>
                   <a:srgbClr val="14241C"/>
                 </a:solidFill>
@@ -17330,11 +17260,11 @@
                 <a:spcPts val="0"/>
               </a:spcBef>
               <a:spcAft>
-                <a:spcPts val="1000"/>
+                <a:spcPts val="1300"/>
               </a:spcAft>
             </a:pPr>
             <a:r>
-              <a:rPr sz="1600" b="1" i="0">
+              <a:rPr sz="1900" b="1" i="0">
                 <a:solidFill>
                   <a:srgbClr val="15503A"/>
                 </a:solidFill>
@@ -17343,7 +17273,7 @@
               <a:t>•  </a:t>
             </a:r>
             <a:r>
-              <a:rPr sz="1600" b="1" i="0">
+              <a:rPr sz="1900" b="1" i="0">
                 <a:solidFill>
                   <a:srgbClr val="14241C"/>
                 </a:solidFill>
@@ -17352,7 +17282,7 @@
               <a:t>🔔 Activity</a:t>
             </a:r>
             <a:r>
-              <a:rPr sz="1600" b="0" i="0">
+              <a:rPr sz="1900" b="0" i="0">
                 <a:solidFill>
                   <a:srgbClr val="14241C"/>
                 </a:solidFill>
@@ -17370,11 +17300,11 @@
                 <a:spcPts val="0"/>
               </a:spcBef>
               <a:spcAft>
-                <a:spcPts val="1000"/>
+                <a:spcPts val="1300"/>
               </a:spcAft>
             </a:pPr>
             <a:r>
-              <a:rPr sz="1600" b="1" i="0">
+              <a:rPr sz="1900" b="1" i="0">
                 <a:solidFill>
                   <a:srgbClr val="15503A"/>
                 </a:solidFill>
@@ -17383,7 +17313,7 @@
               <a:t>•  </a:t>
             </a:r>
             <a:r>
-              <a:rPr sz="1600" b="1" i="0">
+              <a:rPr sz="1900" b="1" i="0">
                 <a:solidFill>
                   <a:srgbClr val="14241C"/>
                 </a:solidFill>
@@ -17392,7 +17322,7 @@
               <a:t>👤 Profile</a:t>
             </a:r>
             <a:r>
-              <a:rPr sz="1600" b="0" i="0">
+              <a:rPr sz="1900" b="0" i="0">
                 <a:solidFill>
                   <a:srgbClr val="14241C"/>
                 </a:solidFill>
@@ -17411,12 +17341,12 @@
         </p:nvSpPr>
         <p:spPr>
           <a:xfrm>
-            <a:off x="502920" y="5486400"/>
-            <a:ext cx="11201400" cy="566928"/>
+            <a:off x="411480" y="9784080"/>
+            <a:ext cx="6035040" cy="1143000"/>
           </a:xfrm>
           <a:prstGeom prst="roundRect">
             <a:avLst>
-              <a:gd name="adj" fmla="val 6000"/>
+              <a:gd name="adj" fmla="val 8000"/>
             </a:avLst>
           </a:prstGeom>
           <a:solidFill>
@@ -17459,8 +17389,8 @@
         </p:nvSpPr>
         <p:spPr>
           <a:xfrm>
-            <a:off x="667512" y="5486400"/>
-            <a:ext cx="1828800" cy="566928"/>
+            <a:off x="612648" y="9902952"/>
+            <a:ext cx="3657600" cy="310896"/>
           </a:xfrm>
           <a:prstGeom prst="rect">
             <a:avLst/>
@@ -17468,7 +17398,7 @@
           <a:noFill/>
         </p:spPr>
         <p:txBody>
-          <a:bodyPr wrap="square" anchor="ctr" lIns="25400" rIns="25400" tIns="12700" bIns="12700">
+          <a:bodyPr wrap="square" anchor="t" lIns="25400" rIns="25400" tIns="12700" bIns="12700">
             <a:spAutoFit/>
           </a:bodyPr>
           <a:lstStyle/>
@@ -17485,7 +17415,7 @@
               </a:spcAft>
             </a:pPr>
             <a:r>
-              <a:rPr sz="1200" b="1" i="0">
+              <a:rPr sz="1400" b="1" i="0">
                 <a:solidFill>
                   <a:srgbClr val="8B2E2E"/>
                 </a:solidFill>
@@ -17504,8 +17434,8 @@
         </p:nvSpPr>
         <p:spPr>
           <a:xfrm>
-            <a:off x="2560320" y="5486400"/>
-            <a:ext cx="9006840" cy="566928"/>
+            <a:off x="612648" y="10241280"/>
+            <a:ext cx="5632703" cy="640080"/>
           </a:xfrm>
           <a:prstGeom prst="rect">
             <a:avLst/>
@@ -17513,7 +17443,7 @@
           <a:noFill/>
         </p:spPr>
         <p:txBody>
-          <a:bodyPr wrap="square" anchor="ctr" lIns="25400" rIns="25400" tIns="12700" bIns="12700">
+          <a:bodyPr wrap="square" anchor="t" lIns="25400" rIns="25400" tIns="12700" bIns="12700">
             <a:spAutoFit/>
           </a:bodyPr>
           <a:lstStyle/>
@@ -17530,7 +17460,7 @@
               </a:spcAft>
             </a:pPr>
             <a:r>
-              <a:rPr sz="1300" b="0" i="0">
+              <a:rPr sz="1500" b="0" i="0">
                 <a:solidFill>
                   <a:srgbClr val="14241C"/>
                 </a:solidFill>
@@ -17549,12 +17479,12 @@
         </p:nvSpPr>
         <p:spPr>
           <a:xfrm>
-            <a:off x="365760" y="6510528"/>
-            <a:ext cx="11521440" cy="63500"/>
+            <a:off x="411480" y="11539728"/>
+            <a:ext cx="6035040" cy="64008"/>
           </a:xfrm>
           <a:prstGeom prst="roundRect">
             <a:avLst>
-              <a:gd name="adj" fmla="val 6000"/>
+              <a:gd name="adj" fmla="val 8000"/>
             </a:avLst>
           </a:prstGeom>
           <a:solidFill>
@@ -17595,12 +17525,12 @@
         </p:nvSpPr>
         <p:spPr>
           <a:xfrm>
-            <a:off x="365760" y="6510528"/>
-            <a:ext cx="2880360" cy="63500"/>
+            <a:off x="411480" y="11539728"/>
+            <a:ext cx="1508760" cy="64008"/>
           </a:xfrm>
           <a:prstGeom prst="roundRect">
             <a:avLst>
-              <a:gd name="adj" fmla="val 6000"/>
+              <a:gd name="adj" fmla="val 8000"/>
             </a:avLst>
           </a:prstGeom>
           <a:solidFill>
@@ -17641,8 +17571,8 @@
         </p:nvSpPr>
         <p:spPr>
           <a:xfrm>
-            <a:off x="365760" y="6163056"/>
-            <a:ext cx="11430000" cy="292608"/>
+            <a:off x="411480" y="11137392"/>
+            <a:ext cx="6035040" cy="310896"/>
           </a:xfrm>
           <a:prstGeom prst="rect">
             <a:avLst/>
@@ -17667,7 +17597,7 @@
               </a:spcAft>
             </a:pPr>
             <a:r>
-              <a:rPr sz="1100" b="1" i="0">
+              <a:rPr sz="1200" b="1" i="0">
                 <a:solidFill>
                   <a:srgbClr val="6B7068"/>
                 </a:solidFill>
@@ -17676,7 +17606,7 @@
               <a:t>NEXT  ›  </a:t>
             </a:r>
             <a:r>
-              <a:rPr sz="1100" b="0" i="1">
+              <a:rPr sz="1200" b="0" i="1">
                 <a:solidFill>
                   <a:srgbClr val="6B7068"/>
                 </a:solidFill>
@@ -17714,7 +17644,7 @@
         <p:spPr>
           <a:xfrm>
             <a:off x="0" y="0"/>
-            <a:ext cx="12191695" cy="6858000"/>
+            <a:ext cx="6858000" cy="12191695"/>
           </a:xfrm>
           <a:prstGeom prst="rect">
             <a:avLst/>
@@ -17758,7 +17688,7 @@
         <p:spPr>
           <a:xfrm>
             <a:off x="0" y="0"/>
-            <a:ext cx="12191695" cy="1078992"/>
+            <a:ext cx="6858000" cy="1783080"/>
           </a:xfrm>
           <a:prstGeom prst="rect">
             <a:avLst/>
@@ -17801,12 +17731,12 @@
         </p:nvSpPr>
         <p:spPr>
           <a:xfrm>
-            <a:off x="365760" y="201168"/>
-            <a:ext cx="1371600" cy="676656"/>
+            <a:off x="365760" y="292608"/>
+            <a:ext cx="1417320" cy="713232"/>
           </a:xfrm>
           <a:prstGeom prst="roundRect">
             <a:avLst>
-              <a:gd name="adj" fmla="val 6000"/>
+              <a:gd name="adj" fmla="val 8000"/>
             </a:avLst>
           </a:prstGeom>
           <a:solidFill>
@@ -17847,8 +17777,8 @@
         </p:nvSpPr>
         <p:spPr>
           <a:xfrm>
-            <a:off x="365760" y="219456"/>
-            <a:ext cx="1371600" cy="640080"/>
+            <a:off x="365760" y="310896"/>
+            <a:ext cx="1417320" cy="676656"/>
           </a:xfrm>
           <a:prstGeom prst="rect">
             <a:avLst/>
@@ -17892,8 +17822,53 @@
         </p:nvSpPr>
         <p:spPr>
           <a:xfrm>
-            <a:off x="1920240" y="146304"/>
-            <a:ext cx="8595360" cy="786384"/>
+            <a:off x="1920240" y="292608"/>
+            <a:ext cx="4572000" cy="713232"/>
+          </a:xfrm>
+          <a:prstGeom prst="rect">
+            <a:avLst/>
+          </a:prstGeom>
+          <a:noFill/>
+        </p:spPr>
+        <p:txBody>
+          <a:bodyPr wrap="square" anchor="ctr" lIns="25400" rIns="25400" tIns="12700" bIns="12700">
+            <a:spAutoFit/>
+          </a:bodyPr>
+          <a:lstStyle/>
+          <a:p>
+            <a:pPr algn="r">
+              <a:lnSpc>
+                <a:spcPct val="100000"/>
+              </a:lnSpc>
+              <a:spcBef>
+                <a:spcPts val="0"/>
+              </a:spcBef>
+              <a:spcAft>
+                <a:spcPts val="400"/>
+              </a:spcAft>
+            </a:pPr>
+            <a:r>
+              <a:rPr sz="1400" b="0" i="0">
+                <a:solidFill>
+                  <a:srgbClr val="ECF3EF"/>
+                </a:solidFill>
+                <a:latin typeface="Calibri"/>
+              </a:rPr>
+              <a:t>Step 5 of 16</a:t>
+            </a:r>
+          </a:p>
+        </p:txBody>
+      </p:sp>
+      <p:sp>
+        <p:nvSpPr>
+          <p:cNvPr id="7" name="TextBox 6"/>
+          <p:cNvSpPr txBox="1"/>
+          <p:nvPr/>
+        </p:nvSpPr>
+        <p:spPr>
+          <a:xfrm>
+            <a:off x="411480" y="1024128"/>
+            <a:ext cx="6035040" cy="713232"/>
           </a:xfrm>
           <a:prstGeom prst="rect">
             <a:avLst/>
@@ -17918,58 +17893,13 @@
               </a:spcAft>
             </a:pPr>
             <a:r>
-              <a:rPr sz="2700" b="1" i="0">
+              <a:rPr sz="2800" b="1" i="0">
                 <a:solidFill>
                   <a:srgbClr val="FFFFFF"/>
                 </a:solidFill>
                 <a:latin typeface="Calibri"/>
               </a:rPr>
               <a:t>The Home screen</a:t>
-            </a:r>
-          </a:p>
-        </p:txBody>
-      </p:sp>
-      <p:sp>
-        <p:nvSpPr>
-          <p:cNvPr id="7" name="TextBox 6"/>
-          <p:cNvSpPr txBox="1"/>
-          <p:nvPr/>
-        </p:nvSpPr>
-        <p:spPr>
-          <a:xfrm>
-            <a:off x="9509760" y="146304"/>
-            <a:ext cx="2377440" cy="786384"/>
-          </a:xfrm>
-          <a:prstGeom prst="rect">
-            <a:avLst/>
-          </a:prstGeom>
-          <a:noFill/>
-        </p:spPr>
-        <p:txBody>
-          <a:bodyPr wrap="square" anchor="ctr" lIns="25400" rIns="25400" tIns="12700" bIns="12700">
-            <a:spAutoFit/>
-          </a:bodyPr>
-          <a:lstStyle/>
-          <a:p>
-            <a:pPr algn="r">
-              <a:lnSpc>
-                <a:spcPct val="100000"/>
-              </a:lnSpc>
-              <a:spcBef>
-                <a:spcPts val="0"/>
-              </a:spcBef>
-              <a:spcAft>
-                <a:spcPts val="400"/>
-              </a:spcAft>
-            </a:pPr>
-            <a:r>
-              <a:rPr sz="1300" b="0" i="0">
-                <a:solidFill>
-                  <a:srgbClr val="ECF3EF"/>
-                </a:solidFill>
-                <a:latin typeface="Calibri"/>
-              </a:rPr>
-              <a:t>Step 5 of 16</a:t>
             </a:r>
           </a:p>
         </p:txBody>
@@ -17982,12 +17912,12 @@
         </p:nvSpPr>
         <p:spPr>
           <a:xfrm>
-            <a:off x="502920" y="1298448"/>
-            <a:ext cx="11201400" cy="603504"/>
+            <a:off x="411480" y="1965960"/>
+            <a:ext cx="6035040" cy="960120"/>
           </a:xfrm>
           <a:prstGeom prst="roundRect">
             <a:avLst>
-              <a:gd name="adj" fmla="val 6000"/>
+              <a:gd name="adj" fmla="val 8000"/>
             </a:avLst>
           </a:prstGeom>
           <a:solidFill>
@@ -18030,8 +17960,8 @@
         </p:nvSpPr>
         <p:spPr>
           <a:xfrm>
-            <a:off x="667512" y="1298448"/>
-            <a:ext cx="1463040" cy="603504"/>
+            <a:off x="612648" y="2084831"/>
+            <a:ext cx="2743200" cy="310896"/>
           </a:xfrm>
           <a:prstGeom prst="rect">
             <a:avLst/>
@@ -18039,7 +17969,7 @@
           <a:noFill/>
         </p:spPr>
         <p:txBody>
-          <a:bodyPr wrap="square" anchor="ctr" lIns="25400" rIns="25400" tIns="12700" bIns="12700">
+          <a:bodyPr wrap="square" anchor="t" lIns="25400" rIns="25400" tIns="12700" bIns="12700">
             <a:spAutoFit/>
           </a:bodyPr>
           <a:lstStyle/>
@@ -18056,7 +17986,7 @@
               </a:spcAft>
             </a:pPr>
             <a:r>
-              <a:rPr sz="1300" b="1" i="0">
+              <a:rPr sz="1500" b="1" i="0">
                 <a:solidFill>
                   <a:srgbClr val="15503A"/>
                 </a:solidFill>
@@ -18075,8 +18005,8 @@
         </p:nvSpPr>
         <p:spPr>
           <a:xfrm>
-            <a:off x="2194560" y="1298448"/>
-            <a:ext cx="9372600" cy="603504"/>
+            <a:off x="612648" y="2423160"/>
+            <a:ext cx="5632703" cy="457200"/>
           </a:xfrm>
           <a:prstGeom prst="rect">
             <a:avLst/>
@@ -18084,7 +18014,7 @@
           <a:noFill/>
         </p:spPr>
         <p:txBody>
-          <a:bodyPr wrap="square" anchor="ctr" lIns="25400" rIns="25400" tIns="12700" bIns="12700">
+          <a:bodyPr wrap="square" anchor="t" lIns="25400" rIns="25400" tIns="12700" bIns="12700">
             <a:spAutoFit/>
           </a:bodyPr>
           <a:lstStyle/>
@@ -18101,7 +18031,7 @@
               </a:spcAft>
             </a:pPr>
             <a:r>
-              <a:rPr sz="1500" b="1" i="0">
+              <a:rPr sz="1800" b="1" i="0">
                 <a:solidFill>
                   <a:srgbClr val="14241C"/>
                 </a:solidFill>
@@ -18120,12 +18050,12 @@
         </p:nvSpPr>
         <p:spPr>
           <a:xfrm>
-            <a:off x="502920" y="2029968"/>
-            <a:ext cx="11201400" cy="786384"/>
+            <a:off x="411480" y="3108960"/>
+            <a:ext cx="6035040" cy="1874519"/>
           </a:xfrm>
           <a:prstGeom prst="roundRect">
             <a:avLst>
-              <a:gd name="adj" fmla="val 6000"/>
+              <a:gd name="adj" fmla="val 8000"/>
             </a:avLst>
           </a:prstGeom>
           <a:solidFill>
@@ -18168,8 +18098,8 @@
         </p:nvSpPr>
         <p:spPr>
           <a:xfrm>
-            <a:off x="502920" y="2029968"/>
-            <a:ext cx="91440" cy="786384"/>
+            <a:off x="411480" y="3108960"/>
+            <a:ext cx="109728" cy="1874519"/>
           </a:xfrm>
           <a:prstGeom prst="rect">
             <a:avLst/>
@@ -18212,8 +18142,8 @@
         </p:nvSpPr>
         <p:spPr>
           <a:xfrm>
-            <a:off x="813816" y="2029968"/>
-            <a:ext cx="10698480" cy="786384"/>
+            <a:off x="731520" y="3108960"/>
+            <a:ext cx="5532120" cy="1874519"/>
           </a:xfrm>
           <a:prstGeom prst="rect">
             <a:avLst/>
@@ -18238,7 +18168,7 @@
               </a:spcAft>
             </a:pPr>
             <a:r>
-              <a:rPr sz="1800" b="1" i="0">
+              <a:rPr sz="2100" b="1" i="0">
                 <a:solidFill>
                   <a:srgbClr val="14241C"/>
                 </a:solidFill>
@@ -18257,8 +18187,8 @@
         </p:nvSpPr>
         <p:spPr>
           <a:xfrm>
-            <a:off x="594360" y="3035808"/>
-            <a:ext cx="11018520" cy="2468880"/>
+            <a:off x="502920" y="5212079"/>
+            <a:ext cx="5852159" cy="4480560"/>
           </a:xfrm>
           <a:prstGeom prst="rect">
             <a:avLst/>
@@ -18279,11 +18209,11 @@
                 <a:spcPts val="0"/>
               </a:spcBef>
               <a:spcAft>
-                <a:spcPts val="1000"/>
+                <a:spcPts val="1300"/>
               </a:spcAft>
             </a:pPr>
             <a:r>
-              <a:rPr sz="1600" b="1" i="0">
+              <a:rPr sz="1900" b="1" i="0">
                 <a:solidFill>
                   <a:srgbClr val="15503A"/>
                 </a:solidFill>
@@ -18292,7 +18222,7 @@
               <a:t>•  </a:t>
             </a:r>
             <a:r>
-              <a:rPr sz="1600" b="1" i="0">
+              <a:rPr sz="1900" b="1" i="0">
                 <a:solidFill>
                   <a:srgbClr val="14241C"/>
                 </a:solidFill>
@@ -18301,7 +18231,7 @@
               <a:t>The logo up top</a:t>
             </a:r>
             <a:r>
-              <a:rPr sz="1600" b="0" i="0">
+              <a:rPr sz="1900" b="0" i="0">
                 <a:solidFill>
                   <a:srgbClr val="14241C"/>
                 </a:solidFill>
@@ -18319,11 +18249,11 @@
                 <a:spcPts val="0"/>
               </a:spcBef>
               <a:spcAft>
-                <a:spcPts val="1000"/>
+                <a:spcPts val="1300"/>
               </a:spcAft>
             </a:pPr>
             <a:r>
-              <a:rPr sz="1600" b="1" i="0">
+              <a:rPr sz="1900" b="1" i="0">
                 <a:solidFill>
                   <a:srgbClr val="15503A"/>
                 </a:solidFill>
@@ -18332,7 +18262,7 @@
               <a:t>•  </a:t>
             </a:r>
             <a:r>
-              <a:rPr sz="1600" b="1" i="0">
+              <a:rPr sz="1900" b="1" i="0">
                 <a:solidFill>
                   <a:srgbClr val="14241C"/>
                 </a:solidFill>
@@ -18341,7 +18271,7 @@
               <a:t>Family Fest spotlight</a:t>
             </a:r>
             <a:r>
-              <a:rPr sz="1600" b="0" i="0">
+              <a:rPr sz="1900" b="0" i="0">
                 <a:solidFill>
                   <a:srgbClr val="14241C"/>
                 </a:solidFill>
@@ -18359,11 +18289,11 @@
                 <a:spcPts val="0"/>
               </a:spcBef>
               <a:spcAft>
-                <a:spcPts val="1000"/>
+                <a:spcPts val="1300"/>
               </a:spcAft>
             </a:pPr>
             <a:r>
-              <a:rPr sz="1600" b="1" i="0">
+              <a:rPr sz="1900" b="1" i="0">
                 <a:solidFill>
                   <a:srgbClr val="15503A"/>
                 </a:solidFill>
@@ -18372,7 +18302,7 @@
               <a:t>•  </a:t>
             </a:r>
             <a:r>
-              <a:rPr sz="1600" b="1" i="0">
+              <a:rPr sz="1900" b="1" i="0">
                 <a:solidFill>
                   <a:srgbClr val="14241C"/>
                 </a:solidFill>
@@ -18381,7 +18311,7 @@
               <a:t>What's happening cards</a:t>
             </a:r>
             <a:r>
-              <a:rPr sz="1600" b="0" i="0">
+              <a:rPr sz="1900" b="0" i="0">
                 <a:solidFill>
                   <a:srgbClr val="14241C"/>
                 </a:solidFill>
@@ -18399,11 +18329,11 @@
                 <a:spcPts val="0"/>
               </a:spcBef>
               <a:spcAft>
-                <a:spcPts val="1000"/>
+                <a:spcPts val="1300"/>
               </a:spcAft>
             </a:pPr>
             <a:r>
-              <a:rPr sz="1600" b="1" i="0">
+              <a:rPr sz="1900" b="1" i="0">
                 <a:solidFill>
                   <a:srgbClr val="15503A"/>
                 </a:solidFill>
@@ -18412,7 +18342,7 @@
               <a:t>•  </a:t>
             </a:r>
             <a:r>
-              <a:rPr sz="1600" b="1" i="0">
+              <a:rPr sz="1900" b="1" i="0">
                 <a:solidFill>
                   <a:srgbClr val="14241C"/>
                 </a:solidFill>
@@ -18421,7 +18351,7 @@
               <a:t>Next event + RSVP</a:t>
             </a:r>
             <a:r>
-              <a:rPr sz="1600" b="0" i="0">
+              <a:rPr sz="1900" b="0" i="0">
                 <a:solidFill>
                   <a:srgbClr val="14241C"/>
                 </a:solidFill>
@@ -18439,11 +18369,11 @@
                 <a:spcPts val="0"/>
               </a:spcBef>
               <a:spcAft>
-                <a:spcPts val="1000"/>
+                <a:spcPts val="1300"/>
               </a:spcAft>
             </a:pPr>
             <a:r>
-              <a:rPr sz="1600" b="1" i="0">
+              <a:rPr sz="1900" b="1" i="0">
                 <a:solidFill>
                   <a:srgbClr val="15503A"/>
                 </a:solidFill>
@@ -18452,7 +18382,7 @@
               <a:t>•  </a:t>
             </a:r>
             <a:r>
-              <a:rPr sz="1600" b="1" i="0">
+              <a:rPr sz="1900" b="1" i="0">
                 <a:solidFill>
                   <a:srgbClr val="14241C"/>
                 </a:solidFill>
@@ -18461,7 +18391,7 @@
               <a:t>Tiles</a:t>
             </a:r>
             <a:r>
-              <a:rPr sz="1600" b="0" i="0">
+              <a:rPr sz="1900" b="0" i="0">
                 <a:solidFill>
                   <a:srgbClr val="14241C"/>
                 </a:solidFill>
@@ -18480,12 +18410,12 @@
         </p:nvSpPr>
         <p:spPr>
           <a:xfrm>
-            <a:off x="502920" y="5486400"/>
-            <a:ext cx="11201400" cy="566928"/>
+            <a:off x="411480" y="9784080"/>
+            <a:ext cx="6035040" cy="1143000"/>
           </a:xfrm>
           <a:prstGeom prst="roundRect">
             <a:avLst>
-              <a:gd name="adj" fmla="val 6000"/>
+              <a:gd name="adj" fmla="val 8000"/>
             </a:avLst>
           </a:prstGeom>
           <a:solidFill>
@@ -18528,8 +18458,8 @@
         </p:nvSpPr>
         <p:spPr>
           <a:xfrm>
-            <a:off x="667512" y="5486400"/>
-            <a:ext cx="1828800" cy="566928"/>
+            <a:off x="612648" y="9902952"/>
+            <a:ext cx="3657600" cy="310896"/>
           </a:xfrm>
           <a:prstGeom prst="rect">
             <a:avLst/>
@@ -18537,7 +18467,7 @@
           <a:noFill/>
         </p:spPr>
         <p:txBody>
-          <a:bodyPr wrap="square" anchor="ctr" lIns="25400" rIns="25400" tIns="12700" bIns="12700">
+          <a:bodyPr wrap="square" anchor="t" lIns="25400" rIns="25400" tIns="12700" bIns="12700">
             <a:spAutoFit/>
           </a:bodyPr>
           <a:lstStyle/>
@@ -18554,7 +18484,7 @@
               </a:spcAft>
             </a:pPr>
             <a:r>
-              <a:rPr sz="1200" b="1" i="0">
+              <a:rPr sz="1400" b="1" i="0">
                 <a:solidFill>
                   <a:srgbClr val="8B2E2E"/>
                 </a:solidFill>
@@ -18573,8 +18503,8 @@
         </p:nvSpPr>
         <p:spPr>
           <a:xfrm>
-            <a:off x="2560320" y="5486400"/>
-            <a:ext cx="9006840" cy="566928"/>
+            <a:off x="612648" y="10241280"/>
+            <a:ext cx="5632703" cy="640080"/>
           </a:xfrm>
           <a:prstGeom prst="rect">
             <a:avLst/>
@@ -18582,7 +18512,7 @@
           <a:noFill/>
         </p:spPr>
         <p:txBody>
-          <a:bodyPr wrap="square" anchor="ctr" lIns="25400" rIns="25400" tIns="12700" bIns="12700">
+          <a:bodyPr wrap="square" anchor="t" lIns="25400" rIns="25400" tIns="12700" bIns="12700">
             <a:spAutoFit/>
           </a:bodyPr>
           <a:lstStyle/>
@@ -18599,7 +18529,7 @@
               </a:spcAft>
             </a:pPr>
             <a:r>
-              <a:rPr sz="1300" b="0" i="0">
+              <a:rPr sz="1500" b="0" i="0">
                 <a:solidFill>
                   <a:srgbClr val="14241C"/>
                 </a:solidFill>
@@ -18618,12 +18548,12 @@
         </p:nvSpPr>
         <p:spPr>
           <a:xfrm>
-            <a:off x="365760" y="6510528"/>
-            <a:ext cx="11521440" cy="63500"/>
+            <a:off x="411480" y="11539728"/>
+            <a:ext cx="6035040" cy="64008"/>
           </a:xfrm>
           <a:prstGeom prst="roundRect">
             <a:avLst>
-              <a:gd name="adj" fmla="val 6000"/>
+              <a:gd name="adj" fmla="val 8000"/>
             </a:avLst>
           </a:prstGeom>
           <a:solidFill>
@@ -18664,12 +18594,12 @@
         </p:nvSpPr>
         <p:spPr>
           <a:xfrm>
-            <a:off x="365760" y="6510528"/>
-            <a:ext cx="3600450" cy="63500"/>
+            <a:off x="411480" y="11539728"/>
+            <a:ext cx="1885950" cy="64008"/>
           </a:xfrm>
           <a:prstGeom prst="roundRect">
             <a:avLst>
-              <a:gd name="adj" fmla="val 6000"/>
+              <a:gd name="adj" fmla="val 8000"/>
             </a:avLst>
           </a:prstGeom>
           <a:solidFill>
@@ -18710,8 +18640,8 @@
         </p:nvSpPr>
         <p:spPr>
           <a:xfrm>
-            <a:off x="365760" y="6163056"/>
-            <a:ext cx="11430000" cy="292608"/>
+            <a:off x="411480" y="11137392"/>
+            <a:ext cx="6035040" cy="310896"/>
           </a:xfrm>
           <a:prstGeom prst="rect">
             <a:avLst/>
@@ -18736,7 +18666,7 @@
               </a:spcAft>
             </a:pPr>
             <a:r>
-              <a:rPr sz="1100" b="1" i="0">
+              <a:rPr sz="1200" b="1" i="0">
                 <a:solidFill>
                   <a:srgbClr val="6B7068"/>
                 </a:solidFill>
@@ -18745,7 +18675,7 @@
               <a:t>NEXT  ›  </a:t>
             </a:r>
             <a:r>
-              <a:rPr sz="1100" b="0" i="1">
+              <a:rPr sz="1200" b="0" i="1">
                 <a:solidFill>
                   <a:srgbClr val="6B7068"/>
                 </a:solidFill>
@@ -18783,7 +18713,7 @@
         <p:spPr>
           <a:xfrm>
             <a:off x="0" y="0"/>
-            <a:ext cx="12191695" cy="6858000"/>
+            <a:ext cx="6858000" cy="12191695"/>
           </a:xfrm>
           <a:prstGeom prst="rect">
             <a:avLst/>
@@ -18827,7 +18757,7 @@
         <p:spPr>
           <a:xfrm>
             <a:off x="0" y="0"/>
-            <a:ext cx="12191695" cy="1078992"/>
+            <a:ext cx="6858000" cy="1783080"/>
           </a:xfrm>
           <a:prstGeom prst="rect">
             <a:avLst/>
@@ -18870,12 +18800,12 @@
         </p:nvSpPr>
         <p:spPr>
           <a:xfrm>
-            <a:off x="365760" y="201168"/>
-            <a:ext cx="1371600" cy="676656"/>
+            <a:off x="365760" y="292608"/>
+            <a:ext cx="1417320" cy="713232"/>
           </a:xfrm>
           <a:prstGeom prst="roundRect">
             <a:avLst>
-              <a:gd name="adj" fmla="val 6000"/>
+              <a:gd name="adj" fmla="val 8000"/>
             </a:avLst>
           </a:prstGeom>
           <a:solidFill>
@@ -18916,8 +18846,8 @@
         </p:nvSpPr>
         <p:spPr>
           <a:xfrm>
-            <a:off x="365760" y="219456"/>
-            <a:ext cx="1371600" cy="640080"/>
+            <a:off x="365760" y="310896"/>
+            <a:ext cx="1417320" cy="676656"/>
           </a:xfrm>
           <a:prstGeom prst="rect">
             <a:avLst/>
@@ -18961,8 +18891,53 @@
         </p:nvSpPr>
         <p:spPr>
           <a:xfrm>
-            <a:off x="1920240" y="146304"/>
-            <a:ext cx="8595360" cy="786384"/>
+            <a:off x="1920240" y="292608"/>
+            <a:ext cx="4572000" cy="713232"/>
+          </a:xfrm>
+          <a:prstGeom prst="rect">
+            <a:avLst/>
+          </a:prstGeom>
+          <a:noFill/>
+        </p:spPr>
+        <p:txBody>
+          <a:bodyPr wrap="square" anchor="ctr" lIns="25400" rIns="25400" tIns="12700" bIns="12700">
+            <a:spAutoFit/>
+          </a:bodyPr>
+          <a:lstStyle/>
+          <a:p>
+            <a:pPr algn="r">
+              <a:lnSpc>
+                <a:spcPct val="100000"/>
+              </a:lnSpc>
+              <a:spcBef>
+                <a:spcPts val="0"/>
+              </a:spcBef>
+              <a:spcAft>
+                <a:spcPts val="400"/>
+              </a:spcAft>
+            </a:pPr>
+            <a:r>
+              <a:rPr sz="1400" b="0" i="0">
+                <a:solidFill>
+                  <a:srgbClr val="ECF3EF"/>
+                </a:solidFill>
+                <a:latin typeface="Calibri"/>
+              </a:rPr>
+              <a:t>Step 6 of 16</a:t>
+            </a:r>
+          </a:p>
+        </p:txBody>
+      </p:sp>
+      <p:sp>
+        <p:nvSpPr>
+          <p:cNvPr id="7" name="TextBox 6"/>
+          <p:cNvSpPr txBox="1"/>
+          <p:nvPr/>
+        </p:nvSpPr>
+        <p:spPr>
+          <a:xfrm>
+            <a:off x="411480" y="1024128"/>
+            <a:ext cx="6035040" cy="713232"/>
           </a:xfrm>
           <a:prstGeom prst="rect">
             <a:avLst/>
@@ -18987,58 +18962,13 @@
               </a:spcAft>
             </a:pPr>
             <a:r>
-              <a:rPr sz="2700" b="1" i="0">
+              <a:rPr sz="2800" b="1" i="0">
                 <a:solidFill>
                   <a:srgbClr val="FFFFFF"/>
                 </a:solidFill>
                 <a:latin typeface="Calibri"/>
               </a:rPr>
               <a:t>Family Fest — the centerpiece</a:t>
-            </a:r>
-          </a:p>
-        </p:txBody>
-      </p:sp>
-      <p:sp>
-        <p:nvSpPr>
-          <p:cNvPr id="7" name="TextBox 6"/>
-          <p:cNvSpPr txBox="1"/>
-          <p:nvPr/>
-        </p:nvSpPr>
-        <p:spPr>
-          <a:xfrm>
-            <a:off x="9509760" y="146304"/>
-            <a:ext cx="2377440" cy="786384"/>
-          </a:xfrm>
-          <a:prstGeom prst="rect">
-            <a:avLst/>
-          </a:prstGeom>
-          <a:noFill/>
-        </p:spPr>
-        <p:txBody>
-          <a:bodyPr wrap="square" anchor="ctr" lIns="25400" rIns="25400" tIns="12700" bIns="12700">
-            <a:spAutoFit/>
-          </a:bodyPr>
-          <a:lstStyle/>
-          <a:p>
-            <a:pPr algn="r">
-              <a:lnSpc>
-                <a:spcPct val="100000"/>
-              </a:lnSpc>
-              <a:spcBef>
-                <a:spcPts val="0"/>
-              </a:spcBef>
-              <a:spcAft>
-                <a:spcPts val="400"/>
-              </a:spcAft>
-            </a:pPr>
-            <a:r>
-              <a:rPr sz="1300" b="0" i="0">
-                <a:solidFill>
-                  <a:srgbClr val="ECF3EF"/>
-                </a:solidFill>
-                <a:latin typeface="Calibri"/>
-              </a:rPr>
-              <a:t>Step 6 of 16</a:t>
             </a:r>
           </a:p>
         </p:txBody>
@@ -19051,12 +18981,12 @@
         </p:nvSpPr>
         <p:spPr>
           <a:xfrm>
-            <a:off x="502920" y="1298448"/>
-            <a:ext cx="11201400" cy="603504"/>
+            <a:off x="411480" y="1965960"/>
+            <a:ext cx="6035040" cy="960120"/>
           </a:xfrm>
           <a:prstGeom prst="roundRect">
             <a:avLst>
-              <a:gd name="adj" fmla="val 6000"/>
+              <a:gd name="adj" fmla="val 8000"/>
             </a:avLst>
           </a:prstGeom>
           <a:solidFill>
@@ -19099,8 +19029,8 @@
         </p:nvSpPr>
         <p:spPr>
           <a:xfrm>
-            <a:off x="667512" y="1298448"/>
-            <a:ext cx="1463040" cy="603504"/>
+            <a:off x="612648" y="2084831"/>
+            <a:ext cx="2743200" cy="310896"/>
           </a:xfrm>
           <a:prstGeom prst="rect">
             <a:avLst/>
@@ -19108,7 +19038,7 @@
           <a:noFill/>
         </p:spPr>
         <p:txBody>
-          <a:bodyPr wrap="square" anchor="ctr" lIns="25400" rIns="25400" tIns="12700" bIns="12700">
+          <a:bodyPr wrap="square" anchor="t" lIns="25400" rIns="25400" tIns="12700" bIns="12700">
             <a:spAutoFit/>
           </a:bodyPr>
           <a:lstStyle/>
@@ -19125,7 +19055,7 @@
               </a:spcAft>
             </a:pPr>
             <a:r>
-              <a:rPr sz="1300" b="1" i="0">
+              <a:rPr sz="1500" b="1" i="0">
                 <a:solidFill>
                   <a:srgbClr val="15503A"/>
                 </a:solidFill>
@@ -19144,8 +19074,8 @@
         </p:nvSpPr>
         <p:spPr>
           <a:xfrm>
-            <a:off x="2194560" y="1298448"/>
-            <a:ext cx="9372600" cy="603504"/>
+            <a:off x="612648" y="2423160"/>
+            <a:ext cx="5632703" cy="457200"/>
           </a:xfrm>
           <a:prstGeom prst="rect">
             <a:avLst/>
@@ -19153,7 +19083,7 @@
           <a:noFill/>
         </p:spPr>
         <p:txBody>
-          <a:bodyPr wrap="square" anchor="ctr" lIns="25400" rIns="25400" tIns="12700" bIns="12700">
+          <a:bodyPr wrap="square" anchor="t" lIns="25400" rIns="25400" tIns="12700" bIns="12700">
             <a:spAutoFit/>
           </a:bodyPr>
           <a:lstStyle/>
@@ -19170,7 +19100,7 @@
               </a:spcAft>
             </a:pPr>
             <a:r>
-              <a:rPr sz="1500" b="1" i="0">
+              <a:rPr sz="1800" b="1" i="0">
                 <a:solidFill>
                   <a:srgbClr val="14241C"/>
                 </a:solidFill>
@@ -19189,12 +19119,12 @@
         </p:nvSpPr>
         <p:spPr>
           <a:xfrm>
-            <a:off x="502920" y="2029968"/>
-            <a:ext cx="11201400" cy="786384"/>
+            <a:off x="411480" y="3108960"/>
+            <a:ext cx="6035040" cy="1874519"/>
           </a:xfrm>
           <a:prstGeom prst="roundRect">
             <a:avLst>
-              <a:gd name="adj" fmla="val 6000"/>
+              <a:gd name="adj" fmla="val 8000"/>
             </a:avLst>
           </a:prstGeom>
           <a:solidFill>
@@ -19237,8 +19167,8 @@
         </p:nvSpPr>
         <p:spPr>
           <a:xfrm>
-            <a:off x="502920" y="2029968"/>
-            <a:ext cx="91440" cy="786384"/>
+            <a:off x="411480" y="3108960"/>
+            <a:ext cx="109728" cy="1874519"/>
           </a:xfrm>
           <a:prstGeom prst="rect">
             <a:avLst/>
@@ -19281,8 +19211,8 @@
         </p:nvSpPr>
         <p:spPr>
           <a:xfrm>
-            <a:off x="813816" y="2029968"/>
-            <a:ext cx="10698480" cy="786384"/>
+            <a:off x="731520" y="3108960"/>
+            <a:ext cx="5532120" cy="1874519"/>
           </a:xfrm>
           <a:prstGeom prst="rect">
             <a:avLst/>
@@ -19307,7 +19237,7 @@
               </a:spcAft>
             </a:pPr>
             <a:r>
-              <a:rPr sz="1800" b="1" i="0">
+              <a:rPr sz="2100" b="1" i="0">
                 <a:solidFill>
                   <a:srgbClr val="14241C"/>
                 </a:solidFill>
@@ -19326,8 +19256,8 @@
         </p:nvSpPr>
         <p:spPr>
           <a:xfrm>
-            <a:off x="594360" y="3035808"/>
-            <a:ext cx="11018520" cy="2468880"/>
+            <a:off x="502920" y="5212079"/>
+            <a:ext cx="5852159" cy="4480560"/>
           </a:xfrm>
           <a:prstGeom prst="rect">
             <a:avLst/>
@@ -19348,11 +19278,11 @@
                 <a:spcPts val="0"/>
               </a:spcBef>
               <a:spcAft>
-                <a:spcPts val="1000"/>
+                <a:spcPts val="1300"/>
               </a:spcAft>
             </a:pPr>
             <a:r>
-              <a:rPr sz="1600" b="1" i="0">
+              <a:rPr sz="1900" b="1" i="0">
                 <a:solidFill>
                   <a:srgbClr val="15503A"/>
                 </a:solidFill>
@@ -19361,7 +19291,7 @@
               <a:t>•  </a:t>
             </a:r>
             <a:r>
-              <a:rPr sz="1600" b="1" i="0">
+              <a:rPr sz="1900" b="1" i="0">
                 <a:solidFill>
                   <a:srgbClr val="14241C"/>
                 </a:solidFill>
@@ -19370,7 +19300,7 @@
               <a:t>July 27–31, 2026</a:t>
             </a:r>
             <a:r>
-              <a:rPr sz="1600" b="0" i="0">
+              <a:rPr sz="1900" b="0" i="0">
                 <a:solidFill>
                   <a:srgbClr val="14241C"/>
                 </a:solidFill>
@@ -19388,11 +19318,11 @@
                 <a:spcPts val="0"/>
               </a:spcBef>
               <a:spcAft>
-                <a:spcPts val="1000"/>
+                <a:spcPts val="1300"/>
               </a:spcAft>
             </a:pPr>
             <a:r>
-              <a:rPr sz="1600" b="1" i="0">
+              <a:rPr sz="1900" b="1" i="0">
                 <a:solidFill>
                   <a:srgbClr val="15503A"/>
                 </a:solidFill>
@@ -19401,7 +19331,7 @@
               <a:t>•  </a:t>
             </a:r>
             <a:r>
-              <a:rPr sz="1600" b="1" i="0">
+              <a:rPr sz="1900" b="1" i="0">
                 <a:solidFill>
                   <a:srgbClr val="14241C"/>
                 </a:solidFill>
@@ -19410,7 +19340,7 @@
               <a:t>Signature nights</a:t>
             </a:r>
             <a:r>
-              <a:rPr sz="1600" b="0" i="0">
+              <a:rPr sz="1900" b="0" i="0">
                 <a:solidFill>
                   <a:srgbClr val="14241C"/>
                 </a:solidFill>
@@ -19428,11 +19358,11 @@
                 <a:spcPts val="0"/>
               </a:spcBef>
               <a:spcAft>
-                <a:spcPts val="1000"/>
+                <a:spcPts val="1300"/>
               </a:spcAft>
             </a:pPr>
             <a:r>
-              <a:rPr sz="1600" b="1" i="0">
+              <a:rPr sz="1900" b="1" i="0">
                 <a:solidFill>
                   <a:srgbClr val="15503A"/>
                 </a:solidFill>
@@ -19441,7 +19371,7 @@
               <a:t>•  </a:t>
             </a:r>
             <a:r>
-              <a:rPr sz="1600" b="1" i="0">
+              <a:rPr sz="1900" b="1" i="0">
                 <a:solidFill>
                   <a:srgbClr val="14241C"/>
                 </a:solidFill>
@@ -19450,7 +19380,7 @@
               <a:t>Dinners each night</a:t>
             </a:r>
             <a:r>
-              <a:rPr sz="1600" b="0" i="0">
+              <a:rPr sz="1900" b="0" i="0">
                 <a:solidFill>
                   <a:srgbClr val="14241C"/>
                 </a:solidFill>
@@ -19468,11 +19398,11 @@
                 <a:spcPts val="0"/>
               </a:spcBef>
               <a:spcAft>
-                <a:spcPts val="1000"/>
+                <a:spcPts val="1300"/>
               </a:spcAft>
             </a:pPr>
             <a:r>
-              <a:rPr sz="1600" b="1" i="0">
+              <a:rPr sz="1900" b="1" i="0">
                 <a:solidFill>
                   <a:srgbClr val="15503A"/>
                 </a:solidFill>
@@ -19481,7 +19411,7 @@
               <a:t>•  </a:t>
             </a:r>
             <a:r>
-              <a:rPr sz="1600" b="1" i="0">
+              <a:rPr sz="1900" b="1" i="0">
                 <a:solidFill>
                   <a:srgbClr val="14241C"/>
                 </a:solidFill>
@@ -19490,7 +19420,7 @@
               <a:t>All-week fun</a:t>
             </a:r>
             <a:r>
-              <a:rPr sz="1600" b="0" i="0">
+              <a:rPr sz="1900" b="0" i="0">
                 <a:solidFill>
                   <a:srgbClr val="14241C"/>
                 </a:solidFill>
@@ -19508,11 +19438,11 @@
                 <a:spcPts val="0"/>
               </a:spcBef>
               <a:spcAft>
-                <a:spcPts val="1000"/>
+                <a:spcPts val="1300"/>
               </a:spcAft>
             </a:pPr>
             <a:r>
-              <a:rPr sz="1600" b="1" i="0">
+              <a:rPr sz="1900" b="1" i="0">
                 <a:solidFill>
                   <a:srgbClr val="15503A"/>
                 </a:solidFill>
@@ -19521,7 +19451,7 @@
               <a:t>•  </a:t>
             </a:r>
             <a:r>
-              <a:rPr sz="1600" b="1" i="0">
+              <a:rPr sz="1900" b="1" i="0">
                 <a:solidFill>
                   <a:srgbClr val="14241C"/>
                 </a:solidFill>
@@ -19530,7 +19460,7 @@
               <a:t>Sub-nav up top</a:t>
             </a:r>
             <a:r>
-              <a:rPr sz="1600" b="0" i="0">
+              <a:rPr sz="1900" b="0" i="0">
                 <a:solidFill>
                   <a:srgbClr val="14241C"/>
                 </a:solidFill>
@@ -19549,12 +19479,12 @@
         </p:nvSpPr>
         <p:spPr>
           <a:xfrm>
-            <a:off x="502920" y="5486400"/>
-            <a:ext cx="11201400" cy="566928"/>
+            <a:off x="411480" y="9784080"/>
+            <a:ext cx="6035040" cy="1143000"/>
           </a:xfrm>
           <a:prstGeom prst="roundRect">
             <a:avLst>
-              <a:gd name="adj" fmla="val 6000"/>
+              <a:gd name="adj" fmla="val 8000"/>
             </a:avLst>
           </a:prstGeom>
           <a:solidFill>
@@ -19597,8 +19527,8 @@
         </p:nvSpPr>
         <p:spPr>
           <a:xfrm>
-            <a:off x="667512" y="5486400"/>
-            <a:ext cx="1828800" cy="566928"/>
+            <a:off x="612648" y="9902952"/>
+            <a:ext cx="3657600" cy="310896"/>
           </a:xfrm>
           <a:prstGeom prst="rect">
             <a:avLst/>
@@ -19606,7 +19536,7 @@
           <a:noFill/>
         </p:spPr>
         <p:txBody>
-          <a:bodyPr wrap="square" anchor="ctr" lIns="25400" rIns="25400" tIns="12700" bIns="12700">
+          <a:bodyPr wrap="square" anchor="t" lIns="25400" rIns="25400" tIns="12700" bIns="12700">
             <a:spAutoFit/>
           </a:bodyPr>
           <a:lstStyle/>
@@ -19623,7 +19553,7 @@
               </a:spcAft>
             </a:pPr>
             <a:r>
-              <a:rPr sz="1200" b="1" i="0">
+              <a:rPr sz="1400" b="1" i="0">
                 <a:solidFill>
                   <a:srgbClr val="8B2E2E"/>
                 </a:solidFill>
@@ -19642,8 +19572,8 @@
         </p:nvSpPr>
         <p:spPr>
           <a:xfrm>
-            <a:off x="2560320" y="5486400"/>
-            <a:ext cx="9006840" cy="566928"/>
+            <a:off x="612648" y="10241280"/>
+            <a:ext cx="5632703" cy="640080"/>
           </a:xfrm>
           <a:prstGeom prst="rect">
             <a:avLst/>
@@ -19651,7 +19581,7 @@
           <a:noFill/>
         </p:spPr>
         <p:txBody>
-          <a:bodyPr wrap="square" anchor="ctr" lIns="25400" rIns="25400" tIns="12700" bIns="12700">
+          <a:bodyPr wrap="square" anchor="t" lIns="25400" rIns="25400" tIns="12700" bIns="12700">
             <a:spAutoFit/>
           </a:bodyPr>
           <a:lstStyle/>
@@ -19668,7 +19598,7 @@
               </a:spcAft>
             </a:pPr>
             <a:r>
-              <a:rPr sz="1300" b="0" i="0">
+              <a:rPr sz="1500" b="0" i="0">
                 <a:solidFill>
                   <a:srgbClr val="14241C"/>
                 </a:solidFill>
@@ -19687,12 +19617,12 @@
         </p:nvSpPr>
         <p:spPr>
           <a:xfrm>
-            <a:off x="365760" y="6510528"/>
-            <a:ext cx="11521440" cy="63500"/>
+            <a:off x="411480" y="11539728"/>
+            <a:ext cx="6035040" cy="64008"/>
           </a:xfrm>
           <a:prstGeom prst="roundRect">
             <a:avLst>
-              <a:gd name="adj" fmla="val 6000"/>
+              <a:gd name="adj" fmla="val 8000"/>
             </a:avLst>
           </a:prstGeom>
           <a:solidFill>
@@ -19733,12 +19663,12 @@
         </p:nvSpPr>
         <p:spPr>
           <a:xfrm>
-            <a:off x="365760" y="6510528"/>
-            <a:ext cx="4320540" cy="63500"/>
+            <a:off x="411480" y="11539728"/>
+            <a:ext cx="2263139" cy="64008"/>
           </a:xfrm>
           <a:prstGeom prst="roundRect">
             <a:avLst>
-              <a:gd name="adj" fmla="val 6000"/>
+              <a:gd name="adj" fmla="val 8000"/>
             </a:avLst>
           </a:prstGeom>
           <a:solidFill>
@@ -19779,8 +19709,8 @@
         </p:nvSpPr>
         <p:spPr>
           <a:xfrm>
-            <a:off x="365760" y="6163056"/>
-            <a:ext cx="11430000" cy="292608"/>
+            <a:off x="411480" y="11137392"/>
+            <a:ext cx="6035040" cy="310896"/>
           </a:xfrm>
           <a:prstGeom prst="rect">
             <a:avLst/>
@@ -19805,7 +19735,7 @@
               </a:spcAft>
             </a:pPr>
             <a:r>
-              <a:rPr sz="1100" b="1" i="0">
+              <a:rPr sz="1200" b="1" i="0">
                 <a:solidFill>
                   <a:srgbClr val="6B7068"/>
                 </a:solidFill>
@@ -19814,7 +19744,7 @@
               <a:t>NEXT  ›  </a:t>
             </a:r>
             <a:r>
-              <a:rPr sz="1100" b="0" i="1">
+              <a:rPr sz="1200" b="0" i="1">
                 <a:solidFill>
                   <a:srgbClr val="6B7068"/>
                 </a:solidFill>
@@ -19852,7 +19782,7 @@
         <p:spPr>
           <a:xfrm>
             <a:off x="0" y="0"/>
-            <a:ext cx="12191695" cy="6858000"/>
+            <a:ext cx="6858000" cy="12191695"/>
           </a:xfrm>
           <a:prstGeom prst="rect">
             <a:avLst/>
@@ -19896,7 +19826,7 @@
         <p:spPr>
           <a:xfrm>
             <a:off x="0" y="0"/>
-            <a:ext cx="12191695" cy="1078992"/>
+            <a:ext cx="6858000" cy="1783080"/>
           </a:xfrm>
           <a:prstGeom prst="rect">
             <a:avLst/>
@@ -19939,12 +19869,12 @@
         </p:nvSpPr>
         <p:spPr>
           <a:xfrm>
-            <a:off x="365760" y="201168"/>
-            <a:ext cx="1371600" cy="676656"/>
+            <a:off x="365760" y="292608"/>
+            <a:ext cx="1417320" cy="713232"/>
           </a:xfrm>
           <a:prstGeom prst="roundRect">
             <a:avLst>
-              <a:gd name="adj" fmla="val 6000"/>
+              <a:gd name="adj" fmla="val 8000"/>
             </a:avLst>
           </a:prstGeom>
           <a:solidFill>
@@ -19985,8 +19915,8 @@
         </p:nvSpPr>
         <p:spPr>
           <a:xfrm>
-            <a:off x="365760" y="219456"/>
-            <a:ext cx="1371600" cy="640080"/>
+            <a:off x="365760" y="310896"/>
+            <a:ext cx="1417320" cy="676656"/>
           </a:xfrm>
           <a:prstGeom prst="rect">
             <a:avLst/>
@@ -20030,8 +19960,53 @@
         </p:nvSpPr>
         <p:spPr>
           <a:xfrm>
-            <a:off x="1920240" y="146304"/>
-            <a:ext cx="8595360" cy="786384"/>
+            <a:off x="1920240" y="292608"/>
+            <a:ext cx="4572000" cy="713232"/>
+          </a:xfrm>
+          <a:prstGeom prst="rect">
+            <a:avLst/>
+          </a:prstGeom>
+          <a:noFill/>
+        </p:spPr>
+        <p:txBody>
+          <a:bodyPr wrap="square" anchor="ctr" lIns="25400" rIns="25400" tIns="12700" bIns="12700">
+            <a:spAutoFit/>
+          </a:bodyPr>
+          <a:lstStyle/>
+          <a:p>
+            <a:pPr algn="r">
+              <a:lnSpc>
+                <a:spcPct val="100000"/>
+              </a:lnSpc>
+              <a:spcBef>
+                <a:spcPts val="0"/>
+              </a:spcBef>
+              <a:spcAft>
+                <a:spcPts val="400"/>
+              </a:spcAft>
+            </a:pPr>
+            <a:r>
+              <a:rPr sz="1400" b="0" i="0">
+                <a:solidFill>
+                  <a:srgbClr val="ECF3EF"/>
+                </a:solidFill>
+                <a:latin typeface="Calibri"/>
+              </a:rPr>
+              <a:t>Step 7 of 16</a:t>
+            </a:r>
+          </a:p>
+        </p:txBody>
+      </p:sp>
+      <p:sp>
+        <p:nvSpPr>
+          <p:cNvPr id="7" name="TextBox 6"/>
+          <p:cNvSpPr txBox="1"/>
+          <p:nvPr/>
+        </p:nvSpPr>
+        <p:spPr>
+          <a:xfrm>
+            <a:off x="411480" y="1024128"/>
+            <a:ext cx="6035040" cy="713232"/>
           </a:xfrm>
           <a:prstGeom prst="rect">
             <a:avLst/>
@@ -20056,58 +20031,13 @@
               </a:spcAft>
             </a:pPr>
             <a:r>
-              <a:rPr sz="2700" b="1" i="0">
+              <a:rPr sz="2800" b="1" i="0">
                 <a:solidFill>
                   <a:srgbClr val="FFFFFF"/>
                 </a:solidFill>
                 <a:latin typeface="Calibri"/>
               </a:rPr>
               <a:t>Events &amp; RSVP</a:t>
-            </a:r>
-          </a:p>
-        </p:txBody>
-      </p:sp>
-      <p:sp>
-        <p:nvSpPr>
-          <p:cNvPr id="7" name="TextBox 6"/>
-          <p:cNvSpPr txBox="1"/>
-          <p:nvPr/>
-        </p:nvSpPr>
-        <p:spPr>
-          <a:xfrm>
-            <a:off x="9509760" y="146304"/>
-            <a:ext cx="2377440" cy="786384"/>
-          </a:xfrm>
-          <a:prstGeom prst="rect">
-            <a:avLst/>
-          </a:prstGeom>
-          <a:noFill/>
-        </p:spPr>
-        <p:txBody>
-          <a:bodyPr wrap="square" anchor="ctr" lIns="25400" rIns="25400" tIns="12700" bIns="12700">
-            <a:spAutoFit/>
-          </a:bodyPr>
-          <a:lstStyle/>
-          <a:p>
-            <a:pPr algn="r">
-              <a:lnSpc>
-                <a:spcPct val="100000"/>
-              </a:lnSpc>
-              <a:spcBef>
-                <a:spcPts val="0"/>
-              </a:spcBef>
-              <a:spcAft>
-                <a:spcPts val="400"/>
-              </a:spcAft>
-            </a:pPr>
-            <a:r>
-              <a:rPr sz="1300" b="0" i="0">
-                <a:solidFill>
-                  <a:srgbClr val="ECF3EF"/>
-                </a:solidFill>
-                <a:latin typeface="Calibri"/>
-              </a:rPr>
-              <a:t>Step 7 of 16</a:t>
             </a:r>
           </a:p>
         </p:txBody>
@@ -20120,12 +20050,12 @@
         </p:nvSpPr>
         <p:spPr>
           <a:xfrm>
-            <a:off x="502920" y="1298448"/>
-            <a:ext cx="11201400" cy="603504"/>
+            <a:off x="411480" y="1965960"/>
+            <a:ext cx="6035040" cy="960120"/>
           </a:xfrm>
           <a:prstGeom prst="roundRect">
             <a:avLst>
-              <a:gd name="adj" fmla="val 6000"/>
+              <a:gd name="adj" fmla="val 8000"/>
             </a:avLst>
           </a:prstGeom>
           <a:solidFill>
@@ -20168,8 +20098,8 @@
         </p:nvSpPr>
         <p:spPr>
           <a:xfrm>
-            <a:off x="667512" y="1298448"/>
-            <a:ext cx="1463040" cy="603504"/>
+            <a:off x="612648" y="2084831"/>
+            <a:ext cx="2743200" cy="310896"/>
           </a:xfrm>
           <a:prstGeom prst="rect">
             <a:avLst/>
@@ -20177,7 +20107,7 @@
           <a:noFill/>
         </p:spPr>
         <p:txBody>
-          <a:bodyPr wrap="square" anchor="ctr" lIns="25400" rIns="25400" tIns="12700" bIns="12700">
+          <a:bodyPr wrap="square" anchor="t" lIns="25400" rIns="25400" tIns="12700" bIns="12700">
             <a:spAutoFit/>
           </a:bodyPr>
           <a:lstStyle/>
@@ -20194,7 +20124,7 @@
               </a:spcAft>
             </a:pPr>
             <a:r>
-              <a:rPr sz="1300" b="1" i="0">
+              <a:rPr sz="1500" b="1" i="0">
                 <a:solidFill>
                   <a:srgbClr val="15503A"/>
                 </a:solidFill>
@@ -20213,8 +20143,8 @@
         </p:nvSpPr>
         <p:spPr>
           <a:xfrm>
-            <a:off x="2194560" y="1298448"/>
-            <a:ext cx="9372600" cy="603504"/>
+            <a:off x="612648" y="2423160"/>
+            <a:ext cx="5632703" cy="457200"/>
           </a:xfrm>
           <a:prstGeom prst="rect">
             <a:avLst/>
@@ -20222,7 +20152,7 @@
           <a:noFill/>
         </p:spPr>
         <p:txBody>
-          <a:bodyPr wrap="square" anchor="ctr" lIns="25400" rIns="25400" tIns="12700" bIns="12700">
+          <a:bodyPr wrap="square" anchor="t" lIns="25400" rIns="25400" tIns="12700" bIns="12700">
             <a:spAutoFit/>
           </a:bodyPr>
           <a:lstStyle/>
@@ -20239,7 +20169,7 @@
               </a:spcAft>
             </a:pPr>
             <a:r>
-              <a:rPr sz="1500" b="1" i="0">
+              <a:rPr sz="1800" b="1" i="0">
                 <a:solidFill>
                   <a:srgbClr val="14241C"/>
                 </a:solidFill>
@@ -20258,12 +20188,12 @@
         </p:nvSpPr>
         <p:spPr>
           <a:xfrm>
-            <a:off x="502920" y="2029968"/>
-            <a:ext cx="11201400" cy="786384"/>
+            <a:off x="411480" y="3108960"/>
+            <a:ext cx="6035040" cy="1874519"/>
           </a:xfrm>
           <a:prstGeom prst="roundRect">
             <a:avLst>
-              <a:gd name="adj" fmla="val 6000"/>
+              <a:gd name="adj" fmla="val 8000"/>
             </a:avLst>
           </a:prstGeom>
           <a:solidFill>
@@ -20306,8 +20236,8 @@
         </p:nvSpPr>
         <p:spPr>
           <a:xfrm>
-            <a:off x="502920" y="2029968"/>
-            <a:ext cx="91440" cy="786384"/>
+            <a:off x="411480" y="3108960"/>
+            <a:ext cx="109728" cy="1874519"/>
           </a:xfrm>
           <a:prstGeom prst="rect">
             <a:avLst/>
@@ -20350,8 +20280,8 @@
         </p:nvSpPr>
         <p:spPr>
           <a:xfrm>
-            <a:off x="813816" y="2029968"/>
-            <a:ext cx="10698480" cy="786384"/>
+            <a:off x="731520" y="3108960"/>
+            <a:ext cx="5532120" cy="1874519"/>
           </a:xfrm>
           <a:prstGeom prst="rect">
             <a:avLst/>
@@ -20376,7 +20306,7 @@
               </a:spcAft>
             </a:pPr>
             <a:r>
-              <a:rPr sz="1800" b="1" i="0">
+              <a:rPr sz="2100" b="1" i="0">
                 <a:solidFill>
                   <a:srgbClr val="14241C"/>
                 </a:solidFill>
@@ -20395,8 +20325,8 @@
         </p:nvSpPr>
         <p:spPr>
           <a:xfrm>
-            <a:off x="594360" y="3035808"/>
-            <a:ext cx="11018520" cy="2468880"/>
+            <a:off x="502920" y="5212079"/>
+            <a:ext cx="5852159" cy="4480560"/>
           </a:xfrm>
           <a:prstGeom prst="rect">
             <a:avLst/>
@@ -20417,11 +20347,11 @@
                 <a:spcPts val="0"/>
               </a:spcBef>
               <a:spcAft>
-                <a:spcPts val="1000"/>
+                <a:spcPts val="1300"/>
               </a:spcAft>
             </a:pPr>
             <a:r>
-              <a:rPr sz="1600" b="1" i="0">
+              <a:rPr sz="1900" b="1" i="0">
                 <a:solidFill>
                   <a:srgbClr val="15503A"/>
                 </a:solidFill>
@@ -20430,7 +20360,7 @@
               <a:t>•  </a:t>
             </a:r>
             <a:r>
-              <a:rPr sz="1600" b="1" i="0">
+              <a:rPr sz="1900" b="1" i="0">
                 <a:solidFill>
                   <a:srgbClr val="14241C"/>
                 </a:solidFill>
@@ -20439,7 +20369,7 @@
               <a:t>Three taps</a:t>
             </a:r>
             <a:r>
-              <a:rPr sz="1600" b="0" i="0">
+              <a:rPr sz="1900" b="0" i="0">
                 <a:solidFill>
                   <a:srgbClr val="14241C"/>
                 </a:solidFill>
@@ -20457,11 +20387,11 @@
                 <a:spcPts val="0"/>
               </a:spcBef>
               <a:spcAft>
-                <a:spcPts val="1000"/>
+                <a:spcPts val="1300"/>
               </a:spcAft>
             </a:pPr>
             <a:r>
-              <a:rPr sz="1600" b="1" i="0">
+              <a:rPr sz="1900" b="1" i="0">
                 <a:solidFill>
                   <a:srgbClr val="15503A"/>
                 </a:solidFill>
@@ -20470,7 +20400,7 @@
               <a:t>•  </a:t>
             </a:r>
             <a:r>
-              <a:rPr sz="1600" b="1" i="0">
+              <a:rPr sz="1900" b="1" i="0">
                 <a:solidFill>
                   <a:srgbClr val="14241C"/>
                 </a:solidFill>
@@ -20479,7 +20409,7 @@
               <a:t>See who's coming</a:t>
             </a:r>
             <a:r>
-              <a:rPr sz="1600" b="0" i="0">
+              <a:rPr sz="1900" b="0" i="0">
                 <a:solidFill>
                   <a:srgbClr val="14241C"/>
                 </a:solidFill>
@@ -20497,11 +20427,11 @@
                 <a:spcPts val="0"/>
               </a:spcBef>
               <a:spcAft>
-                <a:spcPts val="1000"/>
+                <a:spcPts val="1300"/>
               </a:spcAft>
             </a:pPr>
             <a:r>
-              <a:rPr sz="1600" b="1" i="0">
+              <a:rPr sz="1900" b="1" i="0">
                 <a:solidFill>
                   <a:srgbClr val="15503A"/>
                 </a:solidFill>
@@ -20510,7 +20440,7 @@
               <a:t>•  </a:t>
             </a:r>
             <a:r>
-              <a:rPr sz="1600" b="1" i="0">
+              <a:rPr sz="1900" b="1" i="0">
                 <a:solidFill>
                   <a:srgbClr val="14241C"/>
                 </a:solidFill>
@@ -20519,7 +20449,7 @@
               <a:t>Family Fest is per-day</a:t>
             </a:r>
             <a:r>
-              <a:rPr sz="1600" b="0" i="0">
+              <a:rPr sz="1900" b="0" i="0">
                 <a:solidFill>
                   <a:srgbClr val="14241C"/>
                 </a:solidFill>
@@ -20537,11 +20467,11 @@
                 <a:spcPts val="0"/>
               </a:spcBef>
               <a:spcAft>
-                <a:spcPts val="1000"/>
+                <a:spcPts val="1300"/>
               </a:spcAft>
             </a:pPr>
             <a:r>
-              <a:rPr sz="1600" b="1" i="0">
+              <a:rPr sz="1900" b="1" i="0">
                 <a:solidFill>
                   <a:srgbClr val="15503A"/>
                 </a:solidFill>
@@ -20550,7 +20480,7 @@
               <a:t>•  </a:t>
             </a:r>
             <a:r>
-              <a:rPr sz="1600" b="1" i="0">
+              <a:rPr sz="1900" b="1" i="0">
                 <a:solidFill>
                   <a:srgbClr val="14241C"/>
                 </a:solidFill>
@@ -20559,7 +20489,7 @@
               <a:t>Other events too</a:t>
             </a:r>
             <a:r>
-              <a:rPr sz="1600" b="0" i="0">
+              <a:rPr sz="1900" b="0" i="0">
                 <a:solidFill>
                   <a:srgbClr val="14241C"/>
                 </a:solidFill>
@@ -20578,12 +20508,12 @@
         </p:nvSpPr>
         <p:spPr>
           <a:xfrm>
-            <a:off x="502920" y="5486400"/>
-            <a:ext cx="11201400" cy="566928"/>
+            <a:off x="411480" y="9784080"/>
+            <a:ext cx="6035040" cy="1143000"/>
           </a:xfrm>
           <a:prstGeom prst="roundRect">
             <a:avLst>
-              <a:gd name="adj" fmla="val 6000"/>
+              <a:gd name="adj" fmla="val 8000"/>
             </a:avLst>
           </a:prstGeom>
           <a:solidFill>
@@ -20626,8 +20556,8 @@
         </p:nvSpPr>
         <p:spPr>
           <a:xfrm>
-            <a:off x="667512" y="5486400"/>
-            <a:ext cx="1828800" cy="566928"/>
+            <a:off x="612648" y="9902952"/>
+            <a:ext cx="3657600" cy="310896"/>
           </a:xfrm>
           <a:prstGeom prst="rect">
             <a:avLst/>
@@ -20635,7 +20565,7 @@
           <a:noFill/>
         </p:spPr>
         <p:txBody>
-          <a:bodyPr wrap="square" anchor="ctr" lIns="25400" rIns="25400" tIns="12700" bIns="12700">
+          <a:bodyPr wrap="square" anchor="t" lIns="25400" rIns="25400" tIns="12700" bIns="12700">
             <a:spAutoFit/>
           </a:bodyPr>
           <a:lstStyle/>
@@ -20652,7 +20582,7 @@
               </a:spcAft>
             </a:pPr>
             <a:r>
-              <a:rPr sz="1200" b="1" i="0">
+              <a:rPr sz="1400" b="1" i="0">
                 <a:solidFill>
                   <a:srgbClr val="8B2E2E"/>
                 </a:solidFill>
@@ -20671,8 +20601,8 @@
         </p:nvSpPr>
         <p:spPr>
           <a:xfrm>
-            <a:off x="2560320" y="5486400"/>
-            <a:ext cx="9006840" cy="566928"/>
+            <a:off x="612648" y="10241280"/>
+            <a:ext cx="5632703" cy="640080"/>
           </a:xfrm>
           <a:prstGeom prst="rect">
             <a:avLst/>
@@ -20680,7 +20610,7 @@
           <a:noFill/>
         </p:spPr>
         <p:txBody>
-          <a:bodyPr wrap="square" anchor="ctr" lIns="25400" rIns="25400" tIns="12700" bIns="12700">
+          <a:bodyPr wrap="square" anchor="t" lIns="25400" rIns="25400" tIns="12700" bIns="12700">
             <a:spAutoFit/>
           </a:bodyPr>
           <a:lstStyle/>
@@ -20697,7 +20627,7 @@
               </a:spcAft>
             </a:pPr>
             <a:r>
-              <a:rPr sz="1300" b="0" i="0">
+              <a:rPr sz="1500" b="0" i="0">
                 <a:solidFill>
                   <a:srgbClr val="14241C"/>
                 </a:solidFill>
@@ -20716,12 +20646,12 @@
         </p:nvSpPr>
         <p:spPr>
           <a:xfrm>
-            <a:off x="365760" y="6510528"/>
-            <a:ext cx="11521440" cy="63500"/>
+            <a:off x="411480" y="11539728"/>
+            <a:ext cx="6035040" cy="64008"/>
           </a:xfrm>
           <a:prstGeom prst="roundRect">
             <a:avLst>
-              <a:gd name="adj" fmla="val 6000"/>
+              <a:gd name="adj" fmla="val 8000"/>
             </a:avLst>
           </a:prstGeom>
           <a:solidFill>
@@ -20762,12 +20692,12 @@
         </p:nvSpPr>
         <p:spPr>
           <a:xfrm>
-            <a:off x="365760" y="6510528"/>
-            <a:ext cx="5040630" cy="63500"/>
+            <a:off x="411480" y="11539728"/>
+            <a:ext cx="2640329" cy="64008"/>
           </a:xfrm>
           <a:prstGeom prst="roundRect">
             <a:avLst>
-              <a:gd name="adj" fmla="val 6000"/>
+              <a:gd name="adj" fmla="val 8000"/>
             </a:avLst>
           </a:prstGeom>
           <a:solidFill>
@@ -20808,8 +20738,8 @@
         </p:nvSpPr>
         <p:spPr>
           <a:xfrm>
-            <a:off x="365760" y="6163056"/>
-            <a:ext cx="11430000" cy="292608"/>
+            <a:off x="411480" y="11137392"/>
+            <a:ext cx="6035040" cy="310896"/>
           </a:xfrm>
           <a:prstGeom prst="rect">
             <a:avLst/>
@@ -20834,7 +20764,7 @@
               </a:spcAft>
             </a:pPr>
             <a:r>
-              <a:rPr sz="1100" b="1" i="0">
+              <a:rPr sz="1200" b="1" i="0">
                 <a:solidFill>
                   <a:srgbClr val="6B7068"/>
                 </a:solidFill>
@@ -20843,7 +20773,7 @@
               <a:t>NEXT  ›  </a:t>
             </a:r>
             <a:r>
-              <a:rPr sz="1100" b="0" i="1">
+              <a:rPr sz="1200" b="0" i="1">
                 <a:solidFill>
                   <a:srgbClr val="6B7068"/>
                 </a:solidFill>
@@ -20881,7 +20811,7 @@
         <p:spPr>
           <a:xfrm>
             <a:off x="0" y="0"/>
-            <a:ext cx="12191695" cy="6858000"/>
+            <a:ext cx="6858000" cy="12191695"/>
           </a:xfrm>
           <a:prstGeom prst="rect">
             <a:avLst/>
@@ -20925,7 +20855,7 @@
         <p:spPr>
           <a:xfrm>
             <a:off x="0" y="0"/>
-            <a:ext cx="12191695" cy="1078992"/>
+            <a:ext cx="6858000" cy="1783080"/>
           </a:xfrm>
           <a:prstGeom prst="rect">
             <a:avLst/>
@@ -20968,12 +20898,12 @@
         </p:nvSpPr>
         <p:spPr>
           <a:xfrm>
-            <a:off x="365760" y="201168"/>
-            <a:ext cx="1371600" cy="676656"/>
+            <a:off x="365760" y="292608"/>
+            <a:ext cx="1417320" cy="713232"/>
           </a:xfrm>
           <a:prstGeom prst="roundRect">
             <a:avLst>
-              <a:gd name="adj" fmla="val 6000"/>
+              <a:gd name="adj" fmla="val 8000"/>
             </a:avLst>
           </a:prstGeom>
           <a:solidFill>
@@ -21014,8 +20944,8 @@
         </p:nvSpPr>
         <p:spPr>
           <a:xfrm>
-            <a:off x="365760" y="219456"/>
-            <a:ext cx="1371600" cy="640080"/>
+            <a:off x="365760" y="310896"/>
+            <a:ext cx="1417320" cy="676656"/>
           </a:xfrm>
           <a:prstGeom prst="rect">
             <a:avLst/>
@@ -21059,8 +20989,53 @@
         </p:nvSpPr>
         <p:spPr>
           <a:xfrm>
-            <a:off x="1920240" y="146304"/>
-            <a:ext cx="8595360" cy="786384"/>
+            <a:off x="1920240" y="292608"/>
+            <a:ext cx="4572000" cy="713232"/>
+          </a:xfrm>
+          <a:prstGeom prst="rect">
+            <a:avLst/>
+          </a:prstGeom>
+          <a:noFill/>
+        </p:spPr>
+        <p:txBody>
+          <a:bodyPr wrap="square" anchor="ctr" lIns="25400" rIns="25400" tIns="12700" bIns="12700">
+            <a:spAutoFit/>
+          </a:bodyPr>
+          <a:lstStyle/>
+          <a:p>
+            <a:pPr algn="r">
+              <a:lnSpc>
+                <a:spcPct val="100000"/>
+              </a:lnSpc>
+              <a:spcBef>
+                <a:spcPts val="0"/>
+              </a:spcBef>
+              <a:spcAft>
+                <a:spcPts val="400"/>
+              </a:spcAft>
+            </a:pPr>
+            <a:r>
+              <a:rPr sz="1400" b="0" i="0">
+                <a:solidFill>
+                  <a:srgbClr val="ECF3EF"/>
+                </a:solidFill>
+                <a:latin typeface="Calibri"/>
+              </a:rPr>
+              <a:t>Step 8 of 16</a:t>
+            </a:r>
+          </a:p>
+        </p:txBody>
+      </p:sp>
+      <p:sp>
+        <p:nvSpPr>
+          <p:cNvPr id="7" name="TextBox 6"/>
+          <p:cNvSpPr txBox="1"/>
+          <p:nvPr/>
+        </p:nvSpPr>
+        <p:spPr>
+          <a:xfrm>
+            <a:off x="411480" y="1024128"/>
+            <a:ext cx="6035040" cy="713232"/>
           </a:xfrm>
           <a:prstGeom prst="rect">
             <a:avLst/>
@@ -21085,58 +21060,13 @@
               </a:spcAft>
             </a:pPr>
             <a:r>
-              <a:rPr sz="2700" b="1" i="0">
+              <a:rPr sz="2800" b="1" i="0">
                 <a:solidFill>
                   <a:srgbClr val="FFFFFF"/>
                 </a:solidFill>
                 <a:latin typeface="Calibri"/>
               </a:rPr>
               <a:t>The Feed — photos &amp; updates</a:t>
-            </a:r>
-          </a:p>
-        </p:txBody>
-      </p:sp>
-      <p:sp>
-        <p:nvSpPr>
-          <p:cNvPr id="7" name="TextBox 6"/>
-          <p:cNvSpPr txBox="1"/>
-          <p:nvPr/>
-        </p:nvSpPr>
-        <p:spPr>
-          <a:xfrm>
-            <a:off x="9509760" y="146304"/>
-            <a:ext cx="2377440" cy="786384"/>
-          </a:xfrm>
-          <a:prstGeom prst="rect">
-            <a:avLst/>
-          </a:prstGeom>
-          <a:noFill/>
-        </p:spPr>
-        <p:txBody>
-          <a:bodyPr wrap="square" anchor="ctr" lIns="25400" rIns="25400" tIns="12700" bIns="12700">
-            <a:spAutoFit/>
-          </a:bodyPr>
-          <a:lstStyle/>
-          <a:p>
-            <a:pPr algn="r">
-              <a:lnSpc>
-                <a:spcPct val="100000"/>
-              </a:lnSpc>
-              <a:spcBef>
-                <a:spcPts val="0"/>
-              </a:spcBef>
-              <a:spcAft>
-                <a:spcPts val="400"/>
-              </a:spcAft>
-            </a:pPr>
-            <a:r>
-              <a:rPr sz="1300" b="0" i="0">
-                <a:solidFill>
-                  <a:srgbClr val="ECF3EF"/>
-                </a:solidFill>
-                <a:latin typeface="Calibri"/>
-              </a:rPr>
-              <a:t>Step 8 of 16</a:t>
             </a:r>
           </a:p>
         </p:txBody>
@@ -21149,12 +21079,12 @@
         </p:nvSpPr>
         <p:spPr>
           <a:xfrm>
-            <a:off x="502920" y="1298448"/>
-            <a:ext cx="11201400" cy="603504"/>
+            <a:off x="411480" y="1965960"/>
+            <a:ext cx="6035040" cy="960120"/>
           </a:xfrm>
           <a:prstGeom prst="roundRect">
             <a:avLst>
-              <a:gd name="adj" fmla="val 6000"/>
+              <a:gd name="adj" fmla="val 8000"/>
             </a:avLst>
           </a:prstGeom>
           <a:solidFill>
@@ -21197,8 +21127,8 @@
         </p:nvSpPr>
         <p:spPr>
           <a:xfrm>
-            <a:off x="667512" y="1298448"/>
-            <a:ext cx="1463040" cy="603504"/>
+            <a:off x="612648" y="2084831"/>
+            <a:ext cx="2743200" cy="310896"/>
           </a:xfrm>
           <a:prstGeom prst="rect">
             <a:avLst/>
@@ -21206,7 +21136,7 @@
           <a:noFill/>
         </p:spPr>
         <p:txBody>
-          <a:bodyPr wrap="square" anchor="ctr" lIns="25400" rIns="25400" tIns="12700" bIns="12700">
+          <a:bodyPr wrap="square" anchor="t" lIns="25400" rIns="25400" tIns="12700" bIns="12700">
             <a:spAutoFit/>
           </a:bodyPr>
           <a:lstStyle/>
@@ -21223,7 +21153,7 @@
               </a:spcAft>
             </a:pPr>
             <a:r>
-              <a:rPr sz="1300" b="1" i="0">
+              <a:rPr sz="1500" b="1" i="0">
                 <a:solidFill>
                   <a:srgbClr val="15503A"/>
                 </a:solidFill>
@@ -21242,8 +21172,8 @@
         </p:nvSpPr>
         <p:spPr>
           <a:xfrm>
-            <a:off x="2194560" y="1298448"/>
-            <a:ext cx="9372600" cy="603504"/>
+            <a:off x="612648" y="2423160"/>
+            <a:ext cx="5632703" cy="457200"/>
           </a:xfrm>
           <a:prstGeom prst="rect">
             <a:avLst/>
@@ -21251,7 +21181,7 @@
           <a:noFill/>
         </p:spPr>
         <p:txBody>
-          <a:bodyPr wrap="square" anchor="ctr" lIns="25400" rIns="25400" tIns="12700" bIns="12700">
+          <a:bodyPr wrap="square" anchor="t" lIns="25400" rIns="25400" tIns="12700" bIns="12700">
             <a:spAutoFit/>
           </a:bodyPr>
           <a:lstStyle/>
@@ -21268,7 +21198,7 @@
               </a:spcAft>
             </a:pPr>
             <a:r>
-              <a:rPr sz="1500" b="1" i="0">
+              <a:rPr sz="1800" b="1" i="0">
                 <a:solidFill>
                   <a:srgbClr val="14241C"/>
                 </a:solidFill>
@@ -21287,12 +21217,12 @@
         </p:nvSpPr>
         <p:spPr>
           <a:xfrm>
-            <a:off x="502920" y="2029968"/>
-            <a:ext cx="11201400" cy="786384"/>
+            <a:off x="411480" y="3108960"/>
+            <a:ext cx="6035040" cy="1874519"/>
           </a:xfrm>
           <a:prstGeom prst="roundRect">
             <a:avLst>
-              <a:gd name="adj" fmla="val 6000"/>
+              <a:gd name="adj" fmla="val 8000"/>
             </a:avLst>
           </a:prstGeom>
           <a:solidFill>
@@ -21335,8 +21265,8 @@
         </p:nvSpPr>
         <p:spPr>
           <a:xfrm>
-            <a:off x="502920" y="2029968"/>
-            <a:ext cx="91440" cy="786384"/>
+            <a:off x="411480" y="3108960"/>
+            <a:ext cx="109728" cy="1874519"/>
           </a:xfrm>
           <a:prstGeom prst="rect">
             <a:avLst/>
@@ -21379,8 +21309,8 @@
         </p:nvSpPr>
         <p:spPr>
           <a:xfrm>
-            <a:off x="813816" y="2029968"/>
-            <a:ext cx="10698480" cy="786384"/>
+            <a:off x="731520" y="3108960"/>
+            <a:ext cx="5532120" cy="1874519"/>
           </a:xfrm>
           <a:prstGeom prst="rect">
             <a:avLst/>
@@ -21405,7 +21335,7 @@
               </a:spcAft>
             </a:pPr>
             <a:r>
-              <a:rPr sz="1800" b="1" i="0">
+              <a:rPr sz="2100" b="1" i="0">
                 <a:solidFill>
                   <a:srgbClr val="14241C"/>
                 </a:solidFill>
@@ -21424,8 +21354,8 @@
         </p:nvSpPr>
         <p:spPr>
           <a:xfrm>
-            <a:off x="594360" y="3035808"/>
-            <a:ext cx="11018520" cy="2468880"/>
+            <a:off x="502920" y="5212079"/>
+            <a:ext cx="5852159" cy="4480560"/>
           </a:xfrm>
           <a:prstGeom prst="rect">
             <a:avLst/>
@@ -21446,11 +21376,11 @@
                 <a:spcPts val="0"/>
               </a:spcBef>
               <a:spcAft>
-                <a:spcPts val="1000"/>
+                <a:spcPts val="1300"/>
               </a:spcAft>
             </a:pPr>
             <a:r>
-              <a:rPr sz="1600" b="1" i="0">
+              <a:rPr sz="1900" b="1" i="0">
                 <a:solidFill>
                   <a:srgbClr val="15503A"/>
                 </a:solidFill>
@@ -21459,7 +21389,7 @@
               <a:t>•  </a:t>
             </a:r>
             <a:r>
-              <a:rPr sz="1600" b="1" i="0">
+              <a:rPr sz="1900" b="1" i="0">
                 <a:solidFill>
                   <a:srgbClr val="14241C"/>
                 </a:solidFill>
@@ -21468,7 +21398,7 @@
               <a:t>Post anything</a:t>
             </a:r>
             <a:r>
-              <a:rPr sz="1600" b="0" i="0">
+              <a:rPr sz="1900" b="0" i="0">
                 <a:solidFill>
                   <a:srgbClr val="14241C"/>
                 </a:solidFill>
@@ -21486,11 +21416,11 @@
                 <a:spcPts val="0"/>
               </a:spcBef>
               <a:spcAft>
-                <a:spcPts val="1000"/>
+                <a:spcPts val="1300"/>
               </a:spcAft>
             </a:pPr>
             <a:r>
-              <a:rPr sz="1600" b="1" i="0">
+              <a:rPr sz="1900" b="1" i="0">
                 <a:solidFill>
                   <a:srgbClr val="15503A"/>
                 </a:solidFill>
@@ -21499,7 +21429,7 @@
               <a:t>•  </a:t>
             </a:r>
             <a:r>
-              <a:rPr sz="1600" b="1" i="0">
+              <a:rPr sz="1900" b="1" i="0">
                 <a:solidFill>
                   <a:srgbClr val="14241C"/>
                 </a:solidFill>
@@ -21508,7 +21438,7 @@
               <a:t>Like &amp; comment</a:t>
             </a:r>
             <a:r>
-              <a:rPr sz="1600" b="0" i="0">
+              <a:rPr sz="1900" b="0" i="0">
                 <a:solidFill>
                   <a:srgbClr val="14241C"/>
                 </a:solidFill>
@@ -21526,11 +21456,11 @@
                 <a:spcPts val="0"/>
               </a:spcBef>
               <a:spcAft>
-                <a:spcPts val="1000"/>
+                <a:spcPts val="1300"/>
               </a:spcAft>
             </a:pPr>
             <a:r>
-              <a:rPr sz="1600" b="1" i="0">
+              <a:rPr sz="1900" b="1" i="0">
                 <a:solidFill>
                   <a:srgbClr val="15503A"/>
                 </a:solidFill>
@@ -21539,7 +21469,7 @@
               <a:t>•  </a:t>
             </a:r>
             <a:r>
-              <a:rPr sz="1600" b="1" i="0">
+              <a:rPr sz="1900" b="1" i="0">
                 <a:solidFill>
                   <a:srgbClr val="14241C"/>
                 </a:solidFill>
@@ -21548,7 +21478,7 @@
               <a:t>Private to family</a:t>
             </a:r>
             <a:r>
-              <a:rPr sz="1600" b="0" i="0">
+              <a:rPr sz="1900" b="0" i="0">
                 <a:solidFill>
                   <a:srgbClr val="14241C"/>
                 </a:solidFill>
@@ -21566,11 +21496,11 @@
                 <a:spcPts val="0"/>
               </a:spcBef>
               <a:spcAft>
-                <a:spcPts val="1000"/>
+                <a:spcPts val="1300"/>
               </a:spcAft>
             </a:pPr>
             <a:r>
-              <a:rPr sz="1600" b="1" i="0">
+              <a:rPr sz="1900" b="1" i="0">
                 <a:solidFill>
                   <a:srgbClr val="15503A"/>
                 </a:solidFill>
@@ -21579,7 +21509,7 @@
               <a:t>•  </a:t>
             </a:r>
             <a:r>
-              <a:rPr sz="1600" b="1" i="0">
+              <a:rPr sz="1900" b="1" i="0">
                 <a:solidFill>
                   <a:srgbClr val="14241C"/>
                 </a:solidFill>
@@ -21588,7 +21518,7 @@
               <a:t>Real examples</a:t>
             </a:r>
             <a:r>
-              <a:rPr sz="1600" b="0" i="0">
+              <a:rPr sz="1900" b="0" i="0">
                 <a:solidFill>
                   <a:srgbClr val="14241C"/>
                 </a:solidFill>
@@ -21607,12 +21537,12 @@
         </p:nvSpPr>
         <p:spPr>
           <a:xfrm>
-            <a:off x="502920" y="5486400"/>
-            <a:ext cx="11201400" cy="566928"/>
+            <a:off x="411480" y="9784080"/>
+            <a:ext cx="6035040" cy="1143000"/>
           </a:xfrm>
           <a:prstGeom prst="roundRect">
             <a:avLst>
-              <a:gd name="adj" fmla="val 6000"/>
+              <a:gd name="adj" fmla="val 8000"/>
             </a:avLst>
           </a:prstGeom>
           <a:solidFill>
@@ -21655,8 +21585,8 @@
         </p:nvSpPr>
         <p:spPr>
           <a:xfrm>
-            <a:off x="667512" y="5486400"/>
-            <a:ext cx="1828800" cy="566928"/>
+            <a:off x="612648" y="9902952"/>
+            <a:ext cx="3657600" cy="310896"/>
           </a:xfrm>
           <a:prstGeom prst="rect">
             <a:avLst/>
@@ -21664,7 +21594,7 @@
           <a:noFill/>
         </p:spPr>
         <p:txBody>
-          <a:bodyPr wrap="square" anchor="ctr" lIns="25400" rIns="25400" tIns="12700" bIns="12700">
+          <a:bodyPr wrap="square" anchor="t" lIns="25400" rIns="25400" tIns="12700" bIns="12700">
             <a:spAutoFit/>
           </a:bodyPr>
           <a:lstStyle/>
@@ -21681,7 +21611,7 @@
               </a:spcAft>
             </a:pPr>
             <a:r>
-              <a:rPr sz="1200" b="1" i="0">
+              <a:rPr sz="1400" b="1" i="0">
                 <a:solidFill>
                   <a:srgbClr val="8B2E2E"/>
                 </a:solidFill>
@@ -21700,8 +21630,8 @@
         </p:nvSpPr>
         <p:spPr>
           <a:xfrm>
-            <a:off x="2560320" y="5486400"/>
-            <a:ext cx="9006840" cy="566928"/>
+            <a:off x="612648" y="10241280"/>
+            <a:ext cx="5632703" cy="640080"/>
           </a:xfrm>
           <a:prstGeom prst="rect">
             <a:avLst/>
@@ -21709,7 +21639,7 @@
           <a:noFill/>
         </p:spPr>
         <p:txBody>
-          <a:bodyPr wrap="square" anchor="ctr" lIns="25400" rIns="25400" tIns="12700" bIns="12700">
+          <a:bodyPr wrap="square" anchor="t" lIns="25400" rIns="25400" tIns="12700" bIns="12700">
             <a:spAutoFit/>
           </a:bodyPr>
           <a:lstStyle/>
@@ -21726,7 +21656,7 @@
               </a:spcAft>
             </a:pPr>
             <a:r>
-              <a:rPr sz="1300" b="0" i="0">
+              <a:rPr sz="1500" b="0" i="0">
                 <a:solidFill>
                   <a:srgbClr val="14241C"/>
                 </a:solidFill>
@@ -21745,12 +21675,12 @@
         </p:nvSpPr>
         <p:spPr>
           <a:xfrm>
-            <a:off x="365760" y="6510528"/>
-            <a:ext cx="11521440" cy="63500"/>
+            <a:off x="411480" y="11539728"/>
+            <a:ext cx="6035040" cy="64008"/>
           </a:xfrm>
           <a:prstGeom prst="roundRect">
             <a:avLst>
-              <a:gd name="adj" fmla="val 6000"/>
+              <a:gd name="adj" fmla="val 8000"/>
             </a:avLst>
           </a:prstGeom>
           <a:solidFill>
@@ -21791,12 +21721,12 @@
         </p:nvSpPr>
         <p:spPr>
           <a:xfrm>
-            <a:off x="365760" y="6510528"/>
-            <a:ext cx="5760720" cy="63500"/>
+            <a:off x="411480" y="11539728"/>
+            <a:ext cx="3017520" cy="64008"/>
           </a:xfrm>
           <a:prstGeom prst="roundRect">
             <a:avLst>
-              <a:gd name="adj" fmla="val 6000"/>
+              <a:gd name="adj" fmla="val 8000"/>
             </a:avLst>
           </a:prstGeom>
           <a:solidFill>
@@ -21837,8 +21767,8 @@
         </p:nvSpPr>
         <p:spPr>
           <a:xfrm>
-            <a:off x="365760" y="6163056"/>
-            <a:ext cx="11430000" cy="292608"/>
+            <a:off x="411480" y="11137392"/>
+            <a:ext cx="6035040" cy="310896"/>
           </a:xfrm>
           <a:prstGeom prst="rect">
             <a:avLst/>
@@ -21863,7 +21793,7 @@
               </a:spcAft>
             </a:pPr>
             <a:r>
-              <a:rPr sz="1100" b="1" i="0">
+              <a:rPr sz="1200" b="1" i="0">
                 <a:solidFill>
                   <a:srgbClr val="6B7068"/>
                 </a:solidFill>
@@ -21872,7 +21802,7 @@
               <a:t>NEXT  ›  </a:t>
             </a:r>
             <a:r>
-              <a:rPr sz="1100" b="0" i="1">
+              <a:rPr sz="1200" b="0" i="1">
                 <a:solidFill>
                   <a:srgbClr val="6B7068"/>
                 </a:solidFill>

--- a/presentation/MLR-App-Presentation.pptx
+++ b/presentation/MLR-App-Presentation.pptx
@@ -1290,7 +1290,7 @@
           <a:lstStyle/>
           <a:p>
             <a:r>
-              <a:t>Keep this short — it's the 'why should I care.' Land the 'one place instead of ten' idea and move on.</a:t>
+              <a:t>The real 'why': communication is scattered and everyone assumes someone else is handling it, so nobody's sure what's happening. The app is the one place that makes the plan — and the gaps — visible. Land that, then move on.</a:t>
             </a:r>
           </a:p>
         </p:txBody>
@@ -1570,7 +1570,7 @@
           <a:lstStyle/>
           <a:p>
             <a:r>
-              <a:t>This is the emotional core — spend the most time here. Tap into Schedule and Dinners so they see real names and times. Family Fest is wine-colored, a different look — that's on purpose.</a:t>
+              <a:t>Emotional core — spend the most time here. Be honest that a lot is still TBD; that's the point — this is where it gets decided and shared instead of lost in texts. The chefs are set; menus/times aren't yet. Family Fest is wine-colored on purpose.</a:t>
             </a:r>
           </a:p>
         </p:txBody>
@@ -1710,7 +1710,7 @@
           <a:lstStyle/>
           <a:p>
             <a:r>
-              <a:t>Point at a real sample post and read it aloud — makes it feel alive. This is the 'why you'll open it even when it's not Fest week' feature.</a:t>
+              <a:t>Whatever real posts are on the feed, scroll and point at one — makes it feel alive. This is the 'why you'll open it even when it's not Fest week' feature.</a:t>
             </a:r>
           </a:p>
         </p:txBody>
@@ -13527,7 +13527,7 @@
                 </a:solidFill>
                 <a:latin typeface="Calibri"/>
               </a:rPr>
-              <a:t>July 27–31 (Mon–Fri) · “Ye Olde Family Feste” · $100/adult</a:t>
+              <a:t>July 27–31 (Mon–Fri) · “Ye Olde Family Feste” · $100/adult, kids TBD</a:t>
             </a:r>
           </a:p>
         </p:txBody>
@@ -13665,7 +13665,7 @@
                 </a:solidFill>
                 <a:latin typeface="Calibri"/>
               </a:rPr>
-              <a:t>Muskellunge Lake Resort, Tomahawk WI · Hwy 8, in the family since 1959</a:t>
+              <a:t>Muskellunge Lake · 5 mi from Tomahawk on Hwy 8, WI · in the family since 1959</a:t>
             </a:r>
           </a:p>
         </p:txBody>
@@ -13941,7 +13941,7 @@
                 </a:solidFill>
                 <a:latin typeface="Calibri"/>
               </a:rPr>
-              <a:t>Venmo (preferred) or Zelle · Cathy Hofer collects · app stores nothing</a:t>
+              <a:t>Venmo (preferred) or Zelle · Cathy Hofer collects dues · app stores nothing</a:t>
             </a:r>
           </a:p>
         </p:txBody>
@@ -14034,7 +14034,7 @@
                 </a:solidFill>
                 <a:latin typeface="Calibri"/>
               </a:rPr>
-              <a:t>Signature nights</a:t>
+              <a:t>What's set vs still TBD</a:t>
             </a:r>
           </a:p>
         </p:txBody>
@@ -14079,7 +14079,7 @@
                 </a:solidFill>
                 <a:latin typeface="Calibri"/>
               </a:rPr>
-              <a:t>Mon bonfire · Wed musky tourney · Thu talent show · Fri fireworks</a:t>
+              <a:t>Set: the dates + each night's chef. Still TBD: daily times, spots, menus — they fill in on the app</a:t>
             </a:r>
           </a:p>
         </p:txBody>
@@ -14172,7 +14172,7 @@
                 </a:solidFill>
                 <a:latin typeface="Calibri"/>
               </a:rPr>
-              <a:t>Resort WiFi</a:t>
+              <a:t>Dinners</a:t>
             </a:r>
           </a:p>
         </p:txBody>
@@ -14217,7 +14217,7 @@
                 </a:solidFill>
                 <a:latin typeface="Calibri"/>
               </a:rPr>
-              <a:t>Network: MLR-Guest   ·   Password: musky2026</a:t>
+              <a:t>A chef each night — Mon Jessica · Tue Natalie &amp; Karen · Wed Lauren · Thu Rob &amp; Joe · Fri TBD</a:t>
             </a:r>
           </a:p>
         </p:txBody>
@@ -14310,7 +14310,7 @@
                 </a:solidFill>
                 <a:latin typeface="Calibri"/>
               </a:rPr>
-              <a:t>Front desk / check-in</a:t>
+              <a:t>Committees</a:t>
             </a:r>
           </a:p>
         </p:txBody>
@@ -14355,7 +14355,7 @@
                 </a:solidFill>
                 <a:latin typeface="Calibri"/>
               </a:rPr>
-              <a:t>Phone 715-555-0100 · check-in 4pm, out 11am</a:t>
+              <a:t>Meals (Lauren) · Entertainment (Keith) · Art (Jenny) · Merch (Rick) · Logistics &amp; dues (Cathy)</a:t>
             </a:r>
           </a:p>
         </p:txBody>
@@ -14448,7 +14448,7 @@
                 </a:solidFill>
                 <a:latin typeface="Calibri"/>
               </a:rPr>
-              <a:t>Need help (you)</a:t>
+              <a:t>All week</a:t>
             </a:r>
           </a:p>
         </p:txBody>
@@ -14493,7 +14493,7 @@
                 </a:solidFill>
                 <a:latin typeface="Calibri"/>
               </a:rPr>
-              <a:t>Brian Theis · 224-800-5389 · brian.theis15@gmail.com</a:t>
+              <a:t>Scavenger hunt — grab a card at the Main Lodge, finish any day</a:t>
             </a:r>
           </a:p>
         </p:txBody>
@@ -15680,7 +15680,7 @@
                 </a:solidFill>
                 <a:latin typeface="Calibri"/>
               </a:rPr>
-              <a:t>plans live in texts, group chats, emails, and a dozen Google forms. Things get lost. New people don't know where to look.</a:t>
+              <a:t>plans get passed around in scattered texts and calls — and a lot of “I figured someone else had it.” Things slip, and most of us aren't sure what's actually happening or who's in charge of what.</a:t>
             </a:r>
           </a:p>
           <a:p>
@@ -15711,7 +15711,7 @@
                 </a:solidFill>
                 <a:latin typeface="Calibri"/>
               </a:rPr>
-              <a:t>one place — schedule, who's coming, photos, who to pay, how to reach anyone, and everything Family Fest, all in your pocket.</a:t>
+              <a:t>one place everyone can open — what's planned, who's leading each part, who's coming, and what still needs hands.</a:t>
             </a:r>
           </a:p>
           <a:p>
@@ -15742,7 +15742,7 @@
                 </a:solidFill>
                 <a:latin typeface="Calibri"/>
               </a:rPr>
-              <a:t>(1) the resort, year-round — fishing, cabins, local spots.  (2) Family Fest — the one week the whole clan shows up.</a:t>
+              <a:t>(1) the resort, year-round.  (2) Family Fest — the one week the whole clan shows up.</a:t>
             </a:r>
           </a:p>
           <a:p>
@@ -15764,7 +15764,7 @@
                 </a:solidFill>
                 <a:latin typeface="Calibri"/>
               </a:rPr>
-              <a:t>It's a web app — no app store, works on any phone, tablet, or computer, and you can add it to your home screen like a real app.</a:t>
+              <a:t>It's a web app — no app store, works on any phone, and you add it to your home screen like a real app.</a:t>
             </a:r>
           </a:p>
         </p:txBody>
@@ -18317,7 +18317,7 @@
                 </a:solidFill>
                 <a:latin typeface="Calibri"/>
               </a:rPr>
-              <a:t> — swipe-away call-outs like the t-shirt vote</a:t>
+              <a:t> — swipe-away updates — news, reminders, things that need you</a:t>
             </a:r>
           </a:p>
           <a:p>
@@ -19337,7 +19337,7 @@
                 </a:solidFill>
                 <a:latin typeface="Calibri"/>
               </a:rPr>
-              <a:t>Signature nights</a:t>
+              <a:t>A dinner &amp; a chef each night</a:t>
             </a:r>
             <a:r>
               <a:rPr sz="1900" b="0" i="0">
@@ -19346,7 +19346,7 @@
                 </a:solidFill>
                 <a:latin typeface="Calibri"/>
               </a:rPr>
-              <a:t> — Mon bonfire, Wed musky tournament, Thu talent show, Fri fireworks</a:t>
+              <a:t> — Mon Jessica · Tue Natalie &amp; Karen · Wed Lauren · Thu Rob &amp; Joe · Fri TBD</a:t>
             </a:r>
           </a:p>
           <a:p>
@@ -19377,7 +19377,7 @@
                 </a:solidFill>
                 <a:latin typeface="Calibri"/>
               </a:rPr>
-              <a:t>Dinners each night</a:t>
+              <a:t>The week, day by day</a:t>
             </a:r>
             <a:r>
               <a:rPr sz="1900" b="0" i="0">
@@ -19386,7 +19386,7 @@
                 </a:solidFill>
                 <a:latin typeface="Calibri"/>
               </a:rPr>
-              <a:t> — chefs: Jessica, Natalie &amp; Karen, Lauren, Rob &amp; Joe</a:t>
+              <a:t> — a few things planned — scavenger hunt, lake day, golf — most times &amp; spots still TBD</a:t>
             </a:r>
           </a:p>
           <a:p>
@@ -19417,7 +19417,7 @@
                 </a:solidFill>
                 <a:latin typeface="Calibri"/>
               </a:rPr>
-              <a:t>All-week fun</a:t>
+              <a:t>This is where it firms up</a:t>
             </a:r>
             <a:r>
               <a:rPr sz="1900" b="0" i="0">
@@ -19426,7 +19426,7 @@
                 </a:solidFill>
                 <a:latin typeface="Calibri"/>
               </a:rPr>
-              <a:t> — scavenger hunt, lake day, golf outing, games up top</a:t>
+              <a:t> — as plans get decided, they show up here for everyone</a:t>
             </a:r>
           </a:p>
           <a:p>
@@ -21404,7 +21404,7 @@
                 </a:solidFill>
                 <a:latin typeface="Calibri"/>
               </a:rPr>
-              <a:t> — “First musky of the season,” sunset off the dock</a:t>
+              <a:t> — a photo, a catch, a sunset, a quick heads-up</a:t>
             </a:r>
           </a:p>
           <a:p>
@@ -21515,7 +21515,7 @@
                 </a:solidFill>
                 <a:latin typeface="Calibri"/>
               </a:rPr>
-              <a:t>Real examples</a:t>
+              <a:t>Everyone's in the loop</a:t>
             </a:r>
             <a:r>
               <a:rPr sz="1900" b="0" i="0">
@@ -21524,7 +21524,7 @@
                 </a:solidFill>
                 <a:latin typeface="Calibri"/>
               </a:rPr>
-              <a:t> — Grandpa's musky, Aunt Linda's countdown post</a:t>
+              <a:t> — you see what's going on — not just whoever was on the text thread</a:t>
             </a:r>
           </a:p>
         </p:txBody>
